--- a/docs/Geocaching-Map-Custom-Tile-Layers-Presentasjon.pptx
+++ b/docs/Geocaching-Map-Custom-Tile-Layers-Presentasjon.pptx
@@ -121,13 +121,13 @@
   <p:extLst>
     <p:ext uri="{521415D9-36F7-43E2-AB2F-B90AF26B5E84}">
       <p14:sectionLst xmlns:p14="http://schemas.microsoft.com/office/powerpoint/2010/main">
-        <p14:section name="Innledning" id="{6fb64ea4-20b9-842c-7f36-76cdd2fc4c96}">
+        <p14:section name="Innledning" id="{9bc17edf-14e2-69c1-2f53-6ee35f03784d}">
           <p14:sldIdLst>
             <p14:sldId id="256"/>
             <p14:sldId id="257"/>
           </p14:sldIdLst>
         </p14:section>
-        <p14:section name="Funksjoner" id="{c50737f9-fc27-cd34-7e2a-aacb248611a4}">
+        <p14:section name="Funksjoner" id="{5a92d590-3116-469e-bfe2-5c8662a08819}">
           <p14:sldIdLst>
             <p14:sldId id="258"/>
             <p14:sldId id="259"/>
@@ -140,14 +140,14 @@
             <p14:sldId id="266"/>
           </p14:sldIdLst>
         </p14:section>
-        <p14:section name="Teknikk" id="{81c8d716-38ca-b94c-4505-9a1bc9862d72}">
+        <p14:section name="Teknikk" id="{1c957b44-160e-92e8-6dbb-49974bc45f3c}">
           <p14:sldIdLst>
             <p14:sldId id="267"/>
             <p14:sldId id="268"/>
             <p14:sldId id="269"/>
           </p14:sldIdLst>
         </p14:section>
-        <p14:section name="Avslutning" id="{b0c4dfdd-3a32-f194-0ce6-f796975d8ed7}">
+        <p14:section name="Avslutning" id="{ac584423-94d4-9304-9caf-4d7e692b6326}">
           <p14:sldIdLst>
             <p14:sldId id="270"/>
           </p14:sldIdLst>
@@ -2063,7 +2063,7 @@
                   <a:schemeClr val="accent4"/>
                 </a:solidFill>
               </a:rPr>
-              <a:t>Geocaching Map – Custom Tile Layers · v1.40.0</a:t>
+              <a:t>Geocaching Map – Custom Tile Layers · v1.41.9</a:t>
             </a:r>
             <a:endParaRPr lang="en-US" sz="1000" dirty="0"/>
           </a:p>
@@ -2583,7 +2583,7 @@
                   <a:schemeClr val="accent5"/>
                 </a:solidFill>
               </a:rPr>
-              <a:t>Brukerskript · versjon 1.40.0 · norsk og engelsk</a:t>
+              <a:t>Brukerskript · versjon 1.41.9 · norsk og engelsk</a:t>
             </a:r>
             <a:endParaRPr lang="en-US" sz="1400" dirty="0"/>
           </a:p>

--- a/docs/Geocaching-Map-Custom-Tile-Layers-Presentasjon.pptx
+++ b/docs/Geocaching-Map-Custom-Tile-Layers-Presentasjon.pptx
@@ -121,13 +121,13 @@
   <p:extLst>
     <p:ext uri="{521415D9-36F7-43E2-AB2F-B90AF26B5E84}">
       <p14:sectionLst xmlns:p14="http://schemas.microsoft.com/office/powerpoint/2010/main">
-        <p14:section name="Innledning" id="{9bc17edf-14e2-69c1-2f53-6ee35f03784d}">
+        <p14:section name="Innledning" id="{8a699bff-e02a-219f-1bb2-d0929e28021a}">
           <p14:sldIdLst>
             <p14:sldId id="256"/>
             <p14:sldId id="257"/>
           </p14:sldIdLst>
         </p14:section>
-        <p14:section name="Funksjoner" id="{5a92d590-3116-469e-bfe2-5c8662a08819}">
+        <p14:section name="Funksjoner" id="{cbef5b9a-ad0b-c82f-4a40-645a2893c4f9}">
           <p14:sldIdLst>
             <p14:sldId id="258"/>
             <p14:sldId id="259"/>
@@ -140,14 +140,14 @@
             <p14:sldId id="266"/>
           </p14:sldIdLst>
         </p14:section>
-        <p14:section name="Teknikk" id="{1c957b44-160e-92e8-6dbb-49974bc45f3c}">
+        <p14:section name="Teknikk" id="{1677caf1-c50f-6121-4915-d32a830833f8}">
           <p14:sldIdLst>
             <p14:sldId id="267"/>
             <p14:sldId id="268"/>
             <p14:sldId id="269"/>
           </p14:sldIdLst>
         </p14:section>
-        <p14:section name="Avslutning" id="{ac584423-94d4-9304-9caf-4d7e692b6326}">
+        <p14:section name="Avslutning" id="{6b80d537-c68b-7710-6ffa-de399115a460}">
           <p14:sldIdLst>
             <p14:sldId id="270"/>
           </p14:sldIdLst>
@@ -2063,7 +2063,7 @@
                   <a:schemeClr val="accent4"/>
                 </a:solidFill>
               </a:rPr>
-              <a:t>Geocaching Map – Custom Tile Layers · v1.41.9</a:t>
+              <a:t>Geocaching Map – Custom Tile Layers · v1.42.1</a:t>
             </a:r>
             <a:endParaRPr lang="en-US" sz="1000" dirty="0"/>
           </a:p>
@@ -2583,7 +2583,7 @@
                   <a:schemeClr val="accent5"/>
                 </a:solidFill>
               </a:rPr>
-              <a:t>Brukerskript · versjon 1.41.9 · norsk og engelsk</a:t>
+              <a:t>Brukerskript · versjon 1.42.1 · norsk og engelsk</a:t>
             </a:r>
             <a:endParaRPr lang="en-US" sz="1400" dirty="0"/>
           </a:p>
@@ -2605,8 +2605,8 @@
         </p:blipFill>
         <p:spPr>
           <a:xfrm>
-            <a:off x="8577163" y="548640"/>
-            <a:ext cx="2700133" cy="5760720"/>
+            <a:off x="8643092" y="548640"/>
+            <a:ext cx="2634203" cy="5760720"/>
           </a:xfrm>
           <a:prstGeom prst="rect">
             <a:avLst/>
@@ -7693,8 +7693,8 @@
         </p:blipFill>
         <p:spPr>
           <a:xfrm>
-            <a:off x="1083103" y="1572768"/>
-            <a:ext cx="394115" cy="4443984"/>
+            <a:off x="1095260" y="1572768"/>
+            <a:ext cx="369801" cy="4443984"/>
           </a:xfrm>
           <a:prstGeom prst="rect">
             <a:avLst/>
@@ -7754,7 +7754,7 @@
         <p:spPr>
           <a:xfrm>
             <a:off x="3227832" y="1380744"/>
-            <a:ext cx="3493008" cy="777240"/>
+            <a:ext cx="3493008" cy="667512"/>
           </a:xfrm>
           <a:prstGeom prst="rect">
             <a:avLst/>
@@ -7809,7 +7809,7 @@
         </p:nvSpPr>
         <p:spPr>
           <a:xfrm>
-            <a:off x="2514600" y="2276856"/>
+            <a:off x="2514600" y="2167128"/>
             <a:ext cx="512064" cy="512064"/>
           </a:xfrm>
           <a:prstGeom prst="ellipse">
@@ -7837,7 +7837,7 @@
         </p:blipFill>
         <p:spPr>
           <a:xfrm>
-            <a:off x="2627254" y="2389510"/>
+            <a:off x="2627254" y="2279782"/>
             <a:ext cx="286756" cy="286756"/>
           </a:xfrm>
           <a:prstGeom prst="rect">
@@ -7853,8 +7853,8 @@
         </p:nvSpPr>
         <p:spPr>
           <a:xfrm>
-            <a:off x="3227832" y="2203704"/>
-            <a:ext cx="3493008" cy="777240"/>
+            <a:off x="3227832" y="2093976"/>
+            <a:ext cx="3493008" cy="667512"/>
           </a:xfrm>
           <a:prstGeom prst="rect">
             <a:avLst/>
@@ -7909,7 +7909,7 @@
         </p:nvSpPr>
         <p:spPr>
           <a:xfrm>
-            <a:off x="2514600" y="3099816"/>
+            <a:off x="2514600" y="2880360"/>
             <a:ext cx="512064" cy="512064"/>
           </a:xfrm>
           <a:prstGeom prst="ellipse">
@@ -7937,7 +7937,7 @@
         </p:blipFill>
         <p:spPr>
           <a:xfrm>
-            <a:off x="2627254" y="3212470"/>
+            <a:off x="2627254" y="2993014"/>
             <a:ext cx="286756" cy="286756"/>
           </a:xfrm>
           <a:prstGeom prst="rect">
@@ -7953,8 +7953,8 @@
         </p:nvSpPr>
         <p:spPr>
           <a:xfrm>
-            <a:off x="3227832" y="3026664"/>
-            <a:ext cx="3493008" cy="777240"/>
+            <a:off x="3227832" y="2807208"/>
+            <a:ext cx="3493008" cy="667512"/>
           </a:xfrm>
           <a:prstGeom prst="rect">
             <a:avLst/>
@@ -8009,7 +8009,7 @@
         </p:nvSpPr>
         <p:spPr>
           <a:xfrm>
-            <a:off x="2514600" y="3922776"/>
+            <a:off x="2514600" y="3593592"/>
             <a:ext cx="512064" cy="512064"/>
           </a:xfrm>
           <a:prstGeom prst="ellipse">
@@ -8037,7 +8037,7 @@
         </p:blipFill>
         <p:spPr>
           <a:xfrm>
-            <a:off x="2627254" y="4035430"/>
+            <a:off x="2627254" y="3706246"/>
             <a:ext cx="286756" cy="286756"/>
           </a:xfrm>
           <a:prstGeom prst="rect">
@@ -8053,8 +8053,8 @@
         </p:nvSpPr>
         <p:spPr>
           <a:xfrm>
-            <a:off x="3227832" y="3849624"/>
-            <a:ext cx="3493008" cy="777240"/>
+            <a:off x="3227832" y="3520440"/>
+            <a:ext cx="3493008" cy="667512"/>
           </a:xfrm>
           <a:prstGeom prst="rect">
             <a:avLst/>
@@ -8109,7 +8109,7 @@
         </p:nvSpPr>
         <p:spPr>
           <a:xfrm>
-            <a:off x="2514600" y="4745736"/>
+            <a:off x="2514600" y="4306824"/>
             <a:ext cx="512064" cy="512064"/>
           </a:xfrm>
           <a:prstGeom prst="ellipse">
@@ -8137,7 +8137,7 @@
         </p:blipFill>
         <p:spPr>
           <a:xfrm>
-            <a:off x="2627254" y="4858390"/>
+            <a:off x="2627254" y="4419478"/>
             <a:ext cx="286756" cy="286756"/>
           </a:xfrm>
           <a:prstGeom prst="rect">
@@ -8153,8 +8153,8 @@
         </p:nvSpPr>
         <p:spPr>
           <a:xfrm>
-            <a:off x="3227832" y="4672584"/>
-            <a:ext cx="3493008" cy="777240"/>
+            <a:off x="3227832" y="4233672"/>
+            <a:ext cx="3493008" cy="667512"/>
           </a:xfrm>
           <a:prstGeom prst="rect">
             <a:avLst/>
@@ -8203,13 +8203,13 @@
       </p:sp>
       <p:sp>
         <p:nvSpPr>
-          <p:cNvPr id="13020" name="Ikon locate sirkel"/>
+          <p:cNvPr id="13020" name="Ikon dt sirkel"/>
           <p:cNvSpPr/>
           <p:nvPr/>
         </p:nvSpPr>
         <p:spPr>
           <a:xfrm>
-            <a:off x="2514600" y="5568696"/>
+            <a:off x="2514600" y="5020056"/>
             <a:ext cx="512064" cy="512064"/>
           </a:xfrm>
           <a:prstGeom prst="ellipse">
@@ -8223,7 +8223,7 @@
       </p:sp>
       <p:pic>
         <p:nvPicPr>
-          <p:cNvPr id="13021" name="Ikon locate" descr="locate">    </p:cNvPr>
+          <p:cNvPr id="13021" name="Ikon dt" descr="dt">    </p:cNvPr>
           <p:cNvPicPr>
             <a:picLocks noChangeAspect="1"/>
           </p:cNvPicPr>
@@ -8237,7 +8237,7 @@
         </p:blipFill>
         <p:spPr>
           <a:xfrm>
-            <a:off x="2627254" y="5681350"/>
+            <a:off x="2627254" y="5132710"/>
             <a:ext cx="286756" cy="286756"/>
           </a:xfrm>
           <a:prstGeom prst="rect">
@@ -8253,8 +8253,8 @@
         </p:nvSpPr>
         <p:spPr>
           <a:xfrm>
-            <a:off x="3227832" y="5495544"/>
-            <a:ext cx="3493008" cy="777240"/>
+            <a:off x="3227832" y="4946904"/>
+            <a:ext cx="3493008" cy="667512"/>
           </a:xfrm>
           <a:prstGeom prst="rect">
             <a:avLst/>
@@ -8278,7 +8278,7 @@
                   <a:schemeClr val="tx1"/>
                 </a:solidFill>
               </a:rPr>
-              <a:t>Min posisjon</a:t>
+              <a:t>D/T</a:t>
             </a:r>
             <a:endParaRPr lang="en-US" sz="1700" dirty="0"/>
           </a:p>
@@ -8295,7 +8295,7 @@
                   <a:schemeClr val="accent4"/>
                 </a:solidFill>
               </a:rPr>
-              <a:t>Med sirkel for nøyaktighet</a:t>
+              <a:t>Vanskelighet/terreng under cachene – av/på</a:t>
             </a:r>
             <a:endParaRPr lang="en-US" sz="1700" dirty="0"/>
           </a:p>
@@ -8303,13 +8303,13 @@
       </p:sp>
       <p:sp>
         <p:nvSpPr>
-          <p:cNvPr id="13023" name="Ikon home sirkel"/>
+          <p:cNvPr id="13023" name="Ikon locate sirkel"/>
           <p:cNvSpPr/>
           <p:nvPr/>
         </p:nvSpPr>
         <p:spPr>
           <a:xfrm>
-            <a:off x="7086600" y="1453896"/>
+            <a:off x="2514600" y="5733288"/>
             <a:ext cx="512064" cy="512064"/>
           </a:xfrm>
           <a:prstGeom prst="ellipse">
@@ -8323,7 +8323,7 @@
       </p:sp>
       <p:pic>
         <p:nvPicPr>
-          <p:cNvPr id="13024" name="Ikon home" descr="home">    </p:cNvPr>
+          <p:cNvPr id="13024" name="Ikon locate" descr="locate">    </p:cNvPr>
           <p:cNvPicPr>
             <a:picLocks noChangeAspect="1"/>
           </p:cNvPicPr>
@@ -8337,7 +8337,7 @@
         </p:blipFill>
         <p:spPr>
           <a:xfrm>
-            <a:off x="7199254" y="1566550"/>
+            <a:off x="2627254" y="5845942"/>
             <a:ext cx="286756" cy="286756"/>
           </a:xfrm>
           <a:prstGeom prst="rect">
@@ -8353,8 +8353,8 @@
         </p:nvSpPr>
         <p:spPr>
           <a:xfrm>
-            <a:off x="7799832" y="1380744"/>
-            <a:ext cx="3767328" cy="777240"/>
+            <a:off x="3227832" y="5660136"/>
+            <a:ext cx="3493008" cy="667512"/>
           </a:xfrm>
           <a:prstGeom prst="rect">
             <a:avLst/>
@@ -8378,7 +8378,7 @@
                   <a:schemeClr val="tx1"/>
                 </a:solidFill>
               </a:rPr>
-              <a:t>Hjem</a:t>
+              <a:t>Min posisjon</a:t>
             </a:r>
             <a:endParaRPr lang="en-US" sz="1700" dirty="0"/>
           </a:p>
@@ -8395,7 +8395,7 @@
                   <a:schemeClr val="accent4"/>
                 </a:solidFill>
               </a:rPr>
-              <a:t>Høyreklikk for å endre adressen</a:t>
+              <a:t>Med sirkel for nøyaktighet</a:t>
             </a:r>
             <a:endParaRPr lang="en-US" sz="1700" dirty="0"/>
           </a:p>
@@ -8403,13 +8403,13 @@
       </p:sp>
       <p:sp>
         <p:nvSpPr>
-          <p:cNvPr id="13026" name="Ikon expand sirkel"/>
+          <p:cNvPr id="13026" name="Ikon home sirkel"/>
           <p:cNvSpPr/>
           <p:nvPr/>
         </p:nvSpPr>
         <p:spPr>
           <a:xfrm>
-            <a:off x="7086600" y="2276856"/>
+            <a:off x="7086600" y="1453896"/>
             <a:ext cx="512064" cy="512064"/>
           </a:xfrm>
           <a:prstGeom prst="ellipse">
@@ -8423,7 +8423,7 @@
       </p:sp>
       <p:pic>
         <p:nvPicPr>
-          <p:cNvPr id="13027" name="Ikon expand" descr="expand">    </p:cNvPr>
+          <p:cNvPr id="13027" name="Ikon home" descr="home">    </p:cNvPr>
           <p:cNvPicPr>
             <a:picLocks noChangeAspect="1"/>
           </p:cNvPicPr>
@@ -8437,7 +8437,7 @@
         </p:blipFill>
         <p:spPr>
           <a:xfrm>
-            <a:off x="7199254" y="2389510"/>
+            <a:off x="7199254" y="1566550"/>
             <a:ext cx="286756" cy="286756"/>
           </a:xfrm>
           <a:prstGeom prst="rect">
@@ -8453,8 +8453,8 @@
         </p:nvSpPr>
         <p:spPr>
           <a:xfrm>
-            <a:off x="7799832" y="2203704"/>
-            <a:ext cx="3767328" cy="777240"/>
+            <a:off x="7799832" y="1380744"/>
+            <a:ext cx="3767328" cy="667512"/>
           </a:xfrm>
           <a:prstGeom prst="rect">
             <a:avLst/>
@@ -8478,7 +8478,7 @@
                   <a:schemeClr val="tx1"/>
                 </a:solidFill>
               </a:rPr>
-              <a:t>Fullskjerm</a:t>
+              <a:t>Hjem</a:t>
             </a:r>
             <a:endParaRPr lang="en-US" sz="1700" dirty="0"/>
           </a:p>
@@ -8495,7 +8495,7 @@
                   <a:schemeClr val="accent4"/>
                 </a:solidFill>
               </a:rPr>
-              <a:t>Kartet fyller hele skjermen</a:t>
+              <a:t>Høyreklikk for å endre adressen</a:t>
             </a:r>
             <a:endParaRPr lang="en-US" sz="1700" dirty="0"/>
           </a:p>
@@ -8503,13 +8503,13 @@
       </p:sp>
       <p:sp>
         <p:nvSpPr>
-          <p:cNvPr id="13029" name="Ikon eraser sirkel"/>
+          <p:cNvPr id="13029" name="Ikon expand sirkel"/>
           <p:cNvSpPr/>
           <p:nvPr/>
         </p:nvSpPr>
         <p:spPr>
           <a:xfrm>
-            <a:off x="7086600" y="3099816"/>
+            <a:off x="7086600" y="2167128"/>
             <a:ext cx="512064" cy="512064"/>
           </a:xfrm>
           <a:prstGeom prst="ellipse">
@@ -8523,7 +8523,7 @@
       </p:sp>
       <p:pic>
         <p:nvPicPr>
-          <p:cNvPr id="13030" name="Ikon eraser" descr="eraser">    </p:cNvPr>
+          <p:cNvPr id="13030" name="Ikon expand" descr="expand">    </p:cNvPr>
           <p:cNvPicPr>
             <a:picLocks noChangeAspect="1"/>
           </p:cNvPicPr>
@@ -8537,7 +8537,7 @@
         </p:blipFill>
         <p:spPr>
           <a:xfrm>
-            <a:off x="7199254" y="3212470"/>
+            <a:off x="7199254" y="2279782"/>
             <a:ext cx="286756" cy="286756"/>
           </a:xfrm>
           <a:prstGeom prst="rect">
@@ -8553,8 +8553,8 @@
         </p:nvSpPr>
         <p:spPr>
           <a:xfrm>
-            <a:off x="7799832" y="3026664"/>
-            <a:ext cx="3767328" cy="777240"/>
+            <a:off x="7799832" y="2093976"/>
+            <a:ext cx="3767328" cy="667512"/>
           </a:xfrm>
           <a:prstGeom prst="rect">
             <a:avLst/>
@@ -8578,7 +8578,7 @@
                   <a:schemeClr val="tx1"/>
                 </a:solidFill>
               </a:rPr>
-              <a:t>Fjern tegninger</a:t>
+              <a:t>Fullskjerm</a:t>
             </a:r>
             <a:endParaRPr lang="en-US" sz="1700" dirty="0"/>
           </a:p>
@@ -8595,7 +8595,7 @@
                   <a:schemeClr val="accent4"/>
                 </a:solidFill>
               </a:rPr>
-              <a:t>Merker, målinger og sirkler</a:t>
+              <a:t>Kartet fyller hele skjermen</a:t>
             </a:r>
             <a:endParaRPr lang="en-US" sz="1700" dirty="0"/>
           </a:p>
@@ -8603,13 +8603,13 @@
       </p:sp>
       <p:sp>
         <p:nvSpPr>
-          <p:cNvPr id="13032" name="Ikon eyeoff sirkel"/>
+          <p:cNvPr id="13032" name="Ikon eraser sirkel"/>
           <p:cNvSpPr/>
           <p:nvPr/>
         </p:nvSpPr>
         <p:spPr>
           <a:xfrm>
-            <a:off x="7086600" y="3922776"/>
+            <a:off x="7086600" y="2880360"/>
             <a:ext cx="512064" cy="512064"/>
           </a:xfrm>
           <a:prstGeom prst="ellipse">
@@ -8623,7 +8623,7 @@
       </p:sp>
       <p:pic>
         <p:nvPicPr>
-          <p:cNvPr id="13033" name="Ikon eyeoff" descr="eyeoff">    </p:cNvPr>
+          <p:cNvPr id="13033" name="Ikon eraser" descr="eraser">    </p:cNvPr>
           <p:cNvPicPr>
             <a:picLocks noChangeAspect="1"/>
           </p:cNvPicPr>
@@ -8637,7 +8637,7 @@
         </p:blipFill>
         <p:spPr>
           <a:xfrm>
-            <a:off x="7199254" y="4035430"/>
+            <a:off x="7199254" y="2993014"/>
             <a:ext cx="286756" cy="286756"/>
           </a:xfrm>
           <a:prstGeom prst="rect">
@@ -8653,8 +8653,8 @@
         </p:nvSpPr>
         <p:spPr>
           <a:xfrm>
-            <a:off x="7799832" y="3849624"/>
-            <a:ext cx="3767328" cy="777240"/>
+            <a:off x="7799832" y="2807208"/>
+            <a:ext cx="3767328" cy="667512"/>
           </a:xfrm>
           <a:prstGeom prst="rect">
             <a:avLst/>
@@ -8678,7 +8678,7 @@
                   <a:schemeClr val="tx1"/>
                 </a:solidFill>
               </a:rPr>
-              <a:t>Skjul geocacher</a:t>
+              <a:t>Fjern tegninger</a:t>
             </a:r>
             <a:endParaRPr lang="en-US" sz="1700" dirty="0"/>
           </a:p>
@@ -8695,7 +8695,7 @@
                   <a:schemeClr val="accent4"/>
                 </a:solidFill>
               </a:rPr>
-              <a:t>Rent kart – klikk igjen for å vise dem</a:t>
+              <a:t>Merker, målinger og sirkler</a:t>
             </a:r>
             <a:endParaRPr lang="en-US" sz="1700" dirty="0"/>
           </a:p>
@@ -8703,13 +8703,13 @@
       </p:sp>
       <p:sp>
         <p:nvSpPr>
-          <p:cNvPr id="13035" name="Ikon heart sirkel"/>
+          <p:cNvPr id="13035" name="Ikon eyeoff sirkel"/>
           <p:cNvSpPr/>
           <p:nvPr/>
         </p:nvSpPr>
         <p:spPr>
           <a:xfrm>
-            <a:off x="7086600" y="4745736"/>
+            <a:off x="7086600" y="3593592"/>
             <a:ext cx="512064" cy="512064"/>
           </a:xfrm>
           <a:prstGeom prst="ellipse">
@@ -8723,7 +8723,7 @@
       </p:sp>
       <p:pic>
         <p:nvPicPr>
-          <p:cNvPr id="13036" name="Ikon heart" descr="heart">    </p:cNvPr>
+          <p:cNvPr id="13036" name="Ikon eyeoff" descr="eyeoff">    </p:cNvPr>
           <p:cNvPicPr>
             <a:picLocks noChangeAspect="1"/>
           </p:cNvPicPr>
@@ -8737,7 +8737,7 @@
         </p:blipFill>
         <p:spPr>
           <a:xfrm>
-            <a:off x="7199254" y="4858390"/>
+            <a:off x="7199254" y="3706246"/>
             <a:ext cx="286756" cy="286756"/>
           </a:xfrm>
           <a:prstGeom prst="rect">
@@ -8753,8 +8753,8 @@
         </p:nvSpPr>
         <p:spPr>
           <a:xfrm>
-            <a:off x="7799832" y="4672584"/>
-            <a:ext cx="3767328" cy="777240"/>
+            <a:off x="7799832" y="3520440"/>
+            <a:ext cx="3767328" cy="667512"/>
           </a:xfrm>
           <a:prstGeom prst="rect">
             <a:avLst/>
@@ -8778,7 +8778,7 @@
                   <a:schemeClr val="tx1"/>
                 </a:solidFill>
               </a:rPr>
-              <a:t>Favorittpoeng</a:t>
+              <a:t>Skjul geocacher</a:t>
             </a:r>
             <a:endParaRPr lang="en-US" sz="1700" dirty="0"/>
           </a:p>
@@ -8795,7 +8795,7 @@
                   <a:schemeClr val="accent4"/>
                 </a:solidFill>
               </a:rPr>
-              <a:t>♥ og antallet over cachene – av/på</a:t>
+              <a:t>Rent kart – klikk igjen for å vise dem</a:t>
             </a:r>
             <a:endParaRPr lang="en-US" sz="1700" dirty="0"/>
           </a:p>
@@ -8803,13 +8803,13 @@
       </p:sp>
       <p:sp>
         <p:nvSpPr>
-          <p:cNvPr id="13038" name="Ikon gear sirkel"/>
+          <p:cNvPr id="13038" name="Ikon heart sirkel"/>
           <p:cNvSpPr/>
           <p:nvPr/>
         </p:nvSpPr>
         <p:spPr>
           <a:xfrm>
-            <a:off x="7086600" y="5568696"/>
+            <a:off x="7086600" y="4306824"/>
             <a:ext cx="512064" cy="512064"/>
           </a:xfrm>
           <a:prstGeom prst="ellipse">
@@ -8823,7 +8823,7 @@
       </p:sp>
       <p:pic>
         <p:nvPicPr>
-          <p:cNvPr id="13039" name="Ikon gear" descr="gear">    </p:cNvPr>
+          <p:cNvPr id="13039" name="Ikon heart" descr="heart">    </p:cNvPr>
           <p:cNvPicPr>
             <a:picLocks noChangeAspect="1"/>
           </p:cNvPicPr>
@@ -8837,7 +8837,7 @@
         </p:blipFill>
         <p:spPr>
           <a:xfrm>
-            <a:off x="7199254" y="5681350"/>
+            <a:off x="7199254" y="4419478"/>
             <a:ext cx="286756" cy="286756"/>
           </a:xfrm>
           <a:prstGeom prst="rect">
@@ -8853,8 +8853,8 @@
         </p:nvSpPr>
         <p:spPr>
           <a:xfrm>
-            <a:off x="7799832" y="5495544"/>
-            <a:ext cx="3767328" cy="777240"/>
+            <a:off x="7799832" y="4233672"/>
+            <a:ext cx="3767328" cy="667512"/>
           </a:xfrm>
           <a:prstGeom prst="rect">
             <a:avLst/>
@@ -8878,7 +8878,7 @@
                   <a:schemeClr val="tx1"/>
                 </a:solidFill>
               </a:rPr>
-              <a:t>Innstillinger</a:t>
+              <a:t>Favorittpoeng</a:t>
             </a:r>
             <a:endParaRPr lang="en-US" sz="1700" dirty="0"/>
           </a:p>
@@ -8895,6 +8895,106 @@
                   <a:schemeClr val="accent4"/>
                 </a:solidFill>
               </a:rPr>
+              <a:t>♥ og antallet over cachene – av/på</a:t>
+            </a:r>
+            <a:endParaRPr lang="en-US" sz="1700" dirty="0"/>
+          </a:p>
+        </p:txBody>
+      </p:sp>
+      <p:sp>
+        <p:nvSpPr>
+          <p:cNvPr id="13041" name="Ikon gear sirkel"/>
+          <p:cNvSpPr/>
+          <p:nvPr/>
+        </p:nvSpPr>
+        <p:spPr>
+          <a:xfrm>
+            <a:off x="7086600" y="5020056"/>
+            <a:ext cx="512064" cy="512064"/>
+          </a:xfrm>
+          <a:prstGeom prst="ellipse">
+            <a:avLst/>
+          </a:prstGeom>
+          <a:solidFill>
+            <a:schemeClr val="accent1"/>
+          </a:solidFill>
+          <a:ln/>
+        </p:spPr>
+      </p:sp>
+      <p:pic>
+        <p:nvPicPr>
+          <p:cNvPr id="13042" name="Ikon gear" descr="gear">    </p:cNvPr>
+          <p:cNvPicPr>
+            <a:picLocks noChangeAspect="1"/>
+          </p:cNvPicPr>
+          <p:nvPr/>
+        </p:nvPicPr>
+        <p:blipFill>
+          <a:blip r:embed="rId14"/>
+          <a:stretch>
+            <a:fillRect/>
+          </a:stretch>
+        </p:blipFill>
+        <p:spPr>
+          <a:xfrm>
+            <a:off x="7199254" y="5132710"/>
+            <a:ext cx="286756" cy="286756"/>
+          </a:xfrm>
+          <a:prstGeom prst="rect">
+            <a:avLst/>
+          </a:prstGeom>
+        </p:spPr>
+      </p:pic>
+      <p:sp>
+        <p:nvSpPr>
+          <p:cNvPr id="13043" name="Text 27"/>
+          <p:cNvSpPr txBox="1"/>
+          <p:nvPr/>
+        </p:nvSpPr>
+        <p:spPr>
+          <a:xfrm>
+            <a:off x="7799832" y="4946904"/>
+            <a:ext cx="3767328" cy="667512"/>
+          </a:xfrm>
+          <a:prstGeom prst="rect">
+            <a:avLst/>
+          </a:prstGeom>
+          <a:noFill/>
+          <a:ln/>
+        </p:spPr>
+        <p:txBody>
+          <a:bodyPr wrap="square" lIns="0" tIns="0" rIns="0" bIns="0" rtlCol="0" anchor="t"/>
+          <a:lstStyle/>
+          <a:p>
+            <a:pPr indent="0" marL="0">
+              <a:spcAft>
+                <a:spcPts val="200"/>
+              </a:spcAft>
+              <a:buNone/>
+            </a:pPr>
+            <a:r>
+              <a:rPr lang="en-US" sz="1700" b="1" dirty="0">
+                <a:solidFill>
+                  <a:schemeClr val="tx1"/>
+                </a:solidFill>
+              </a:rPr>
+              <a:t>Innstillinger</a:t>
+            </a:r>
+            <a:endParaRPr lang="en-US" sz="1700" dirty="0"/>
+          </a:p>
+          <a:p>
+            <a:pPr indent="0" marL="0">
+              <a:spcAft>
+                <a:spcPts val="200"/>
+              </a:spcAft>
+              <a:buNone/>
+            </a:pPr>
+            <a:r>
+              <a:rPr lang="en-US" sz="1400" dirty="0">
+                <a:solidFill>
+                  <a:schemeClr val="accent4"/>
+                </a:solidFill>
+              </a:rPr>
               <a:t>Plassering, språk og nettstedets knapper</a:t>
             </a:r>
             <a:endParaRPr lang="en-US" sz="1700" dirty="0"/>
@@ -8903,7 +9003,7 @@
       </p:sp>
       <p:sp>
         <p:nvSpPr>
-          <p:cNvPr id="13041" name="Slide Number Placeholder 0"/>
+          <p:cNvPr id="13044" name="Slide Number Placeholder 0"/>
           <p:cNvSpPr>
             <a:spLocks noGrp="1"/>
           </p:cNvSpPr>
@@ -9047,8 +9147,8 @@
         </p:blipFill>
         <p:spPr>
           <a:xfrm>
-            <a:off x="8557751" y="1527048"/>
-            <a:ext cx="2147248" cy="4581144"/>
+            <a:off x="8583966" y="1527048"/>
+            <a:ext cx="2094818" cy="4581144"/>
           </a:xfrm>
           <a:prstGeom prst="rect">
             <a:avLst/>

--- a/docs/Geocaching-Map-Custom-Tile-Layers-Presentasjon.pptx
+++ b/docs/Geocaching-Map-Custom-Tile-Layers-Presentasjon.pptx
@@ -121,13 +121,13 @@
   <p:extLst>
     <p:ext uri="{521415D9-36F7-43E2-AB2F-B90AF26B5E84}">
       <p14:sectionLst xmlns:p14="http://schemas.microsoft.com/office/powerpoint/2010/main">
-        <p14:section name="Innledning" id="{8a699bff-e02a-219f-1bb2-d0929e28021a}">
+        <p14:section name="Innledning" id="{716c2bfb-6674-b90b-9ca2-594d79c18eee}">
           <p14:sldIdLst>
             <p14:sldId id="256"/>
             <p14:sldId id="257"/>
           </p14:sldIdLst>
         </p14:section>
-        <p14:section name="Funksjoner" id="{cbef5b9a-ad0b-c82f-4a40-645a2893c4f9}">
+        <p14:section name="Funksjoner" id="{e00297f4-95ab-8d89-b8ff-11cbea55be1f}">
           <p14:sldIdLst>
             <p14:sldId id="258"/>
             <p14:sldId id="259"/>
@@ -140,14 +140,14 @@
             <p14:sldId id="266"/>
           </p14:sldIdLst>
         </p14:section>
-        <p14:section name="Teknikk" id="{1677caf1-c50f-6121-4915-d32a830833f8}">
+        <p14:section name="Teknikk" id="{be1b69d7-ae20-d96d-5384-2c7434d8e6f8}">
           <p14:sldIdLst>
             <p14:sldId id="267"/>
             <p14:sldId id="268"/>
             <p14:sldId id="269"/>
           </p14:sldIdLst>
         </p14:section>
-        <p14:section name="Avslutning" id="{6b80d537-c68b-7710-6ffa-de399115a460}">
+        <p14:section name="Avslutning" id="{0500e12b-b775-41d0-c32d-a6ebe51797b8}">
           <p14:sldIdLst>
             <p14:sldId id="270"/>
           </p14:sldIdLst>
@@ -2063,7 +2063,7 @@
                   <a:schemeClr val="accent4"/>
                 </a:solidFill>
               </a:rPr>
-              <a:t>Geocaching Map – Custom Tile Layers · v1.42.1</a:t>
+              <a:t>Geocaching Map – Custom Tile Layers · v1.43.4</a:t>
             </a:r>
             <a:endParaRPr lang="en-US" sz="1000" dirty="0"/>
           </a:p>
@@ -2583,7 +2583,7 @@
                   <a:schemeClr val="accent5"/>
                 </a:solidFill>
               </a:rPr>
-              <a:t>Brukerskript · versjon 1.42.1 · norsk og engelsk</a:t>
+              <a:t>Brukerskript · versjon 1.43.4 · norsk og engelsk</a:t>
             </a:r>
             <a:endParaRPr lang="en-US" sz="1400" dirty="0"/>
           </a:p>

--- a/docs/Geocaching-Map-Custom-Tile-Layers-Presentasjon.pptx
+++ b/docs/Geocaching-Map-Custom-Tile-Layers-Presentasjon.pptx
@@ -121,13 +121,13 @@
   <p:extLst>
     <p:ext uri="{521415D9-36F7-43E2-AB2F-B90AF26B5E84}">
       <p14:sectionLst xmlns:p14="http://schemas.microsoft.com/office/powerpoint/2010/main">
-        <p14:section name="Innledning" id="{716c2bfb-6674-b90b-9ca2-594d79c18eee}">
+        <p14:section name="Innledning" id="{61806474-cef9-6fb0-0218-d6708a54d628}">
           <p14:sldIdLst>
             <p14:sldId id="256"/>
             <p14:sldId id="257"/>
           </p14:sldIdLst>
         </p14:section>
-        <p14:section name="Funksjoner" id="{e00297f4-95ab-8d89-b8ff-11cbea55be1f}">
+        <p14:section name="Funksjoner" id="{2b8f6f16-d3b6-8041-75ea-590a6e1224ee}">
           <p14:sldIdLst>
             <p14:sldId id="258"/>
             <p14:sldId id="259"/>
@@ -140,14 +140,14 @@
             <p14:sldId id="266"/>
           </p14:sldIdLst>
         </p14:section>
-        <p14:section name="Teknikk" id="{be1b69d7-ae20-d96d-5384-2c7434d8e6f8}">
+        <p14:section name="Teknikk" id="{01c875bd-ba8f-b4e8-fd29-fbe1ab8a90fc}">
           <p14:sldIdLst>
             <p14:sldId id="267"/>
             <p14:sldId id="268"/>
             <p14:sldId id="269"/>
           </p14:sldIdLst>
         </p14:section>
-        <p14:section name="Avslutning" id="{0500e12b-b775-41d0-c32d-a6ebe51797b8}">
+        <p14:section name="Avslutning" id="{d4aa99d0-3db2-5924-0d0e-9c32cb03cf4f}">
           <p14:sldIdLst>
             <p14:sldId id="270"/>
           </p14:sldIdLst>
@@ -2063,7 +2063,7 @@
                   <a:schemeClr val="accent4"/>
                 </a:solidFill>
               </a:rPr>
-              <a:t>Geocaching Map – Custom Tile Layers · v1.43.4</a:t>
+              <a:t>Geocaching Map – Custom Tile Layers · v1.44.0</a:t>
             </a:r>
             <a:endParaRPr lang="en-US" sz="1000" dirty="0"/>
           </a:p>
@@ -2583,7 +2583,7 @@
                   <a:schemeClr val="accent5"/>
                 </a:solidFill>
               </a:rPr>
-              <a:t>Brukerskript · versjon 1.43.4 · norsk og engelsk</a:t>
+              <a:t>Brukerskript · versjon 1.44.0 · norsk og engelsk</a:t>
             </a:r>
             <a:endParaRPr lang="en-US" sz="1400" dirty="0"/>
           </a:p>

--- a/docs/Geocaching-Map-Custom-Tile-Layers-Presentasjon.pptx
+++ b/docs/Geocaching-Map-Custom-Tile-Layers-Presentasjon.pptx
@@ -121,13 +121,13 @@
   <p:extLst>
     <p:ext uri="{521415D9-36F7-43E2-AB2F-B90AF26B5E84}">
       <p14:sectionLst xmlns:p14="http://schemas.microsoft.com/office/powerpoint/2010/main">
-        <p14:section name="Innledning" id="{61806474-cef9-6fb0-0218-d6708a54d628}">
+        <p14:section name="Innledning" id="{e2a1229a-a990-2527-4836-3676fec1fbe7}">
           <p14:sldIdLst>
             <p14:sldId id="256"/>
             <p14:sldId id="257"/>
           </p14:sldIdLst>
         </p14:section>
-        <p14:section name="Funksjoner" id="{2b8f6f16-d3b6-8041-75ea-590a6e1224ee}">
+        <p14:section name="Funksjoner" id="{7315a261-52ba-f65a-8a50-3de361b61491}">
           <p14:sldIdLst>
             <p14:sldId id="258"/>
             <p14:sldId id="259"/>
@@ -140,14 +140,14 @@
             <p14:sldId id="266"/>
           </p14:sldIdLst>
         </p14:section>
-        <p14:section name="Teknikk" id="{01c875bd-ba8f-b4e8-fd29-fbe1ab8a90fc}">
+        <p14:section name="Teknikk" id="{014fde8c-c9f3-9abd-b0f4-8f3e615bf6fa}">
           <p14:sldIdLst>
             <p14:sldId id="267"/>
             <p14:sldId id="268"/>
             <p14:sldId id="269"/>
           </p14:sldIdLst>
         </p14:section>
-        <p14:section name="Avslutning" id="{d4aa99d0-3db2-5924-0d0e-9c32cb03cf4f}">
+        <p14:section name="Avslutning" id="{b5edb349-189a-357d-7eb0-ae0842411ce7}">
           <p14:sldIdLst>
             <p14:sldId id="270"/>
           </p14:sldIdLst>
@@ -2063,7 +2063,7 @@
                   <a:schemeClr val="accent4"/>
                 </a:solidFill>
               </a:rPr>
-              <a:t>Geocaching Map – Custom Tile Layers · v1.44.0</a:t>
+              <a:t>Geocaching Map – Custom Tile Layers · v1.45.3</a:t>
             </a:r>
             <a:endParaRPr lang="en-US" sz="1000" dirty="0"/>
           </a:p>
@@ -2583,7 +2583,7 @@
                   <a:schemeClr val="accent5"/>
                 </a:solidFill>
               </a:rPr>
-              <a:t>Brukerskript · versjon 1.44.0 · norsk og engelsk</a:t>
+              <a:t>Brukerskript · versjon 1.45.3 · norsk og engelsk</a:t>
             </a:r>
             <a:endParaRPr lang="en-US" sz="1400" dirty="0"/>
           </a:p>

--- a/docs/Geocaching-Map-Custom-Tile-Layers-Presentasjon.pptx
+++ b/docs/Geocaching-Map-Custom-Tile-Layers-Presentasjon.pptx
@@ -121,13 +121,13 @@
   <p:extLst>
     <p:ext uri="{521415D9-36F7-43E2-AB2F-B90AF26B5E84}">
       <p14:sectionLst xmlns:p14="http://schemas.microsoft.com/office/powerpoint/2010/main">
-        <p14:section name="Innledning" id="{e2a1229a-a990-2527-4836-3676fec1fbe7}">
+        <p14:section name="Innledning" id="{b98ea0f0-c26a-d69e-c1e9-b3733e6e821a}">
           <p14:sldIdLst>
             <p14:sldId id="256"/>
             <p14:sldId id="257"/>
           </p14:sldIdLst>
         </p14:section>
-        <p14:section name="Funksjoner" id="{7315a261-52ba-f65a-8a50-3de361b61491}">
+        <p14:section name="Funksjoner" id="{ad012490-bcee-3bc5-4436-11d5a87f1214}">
           <p14:sldIdLst>
             <p14:sldId id="258"/>
             <p14:sldId id="259"/>
@@ -140,14 +140,14 @@
             <p14:sldId id="266"/>
           </p14:sldIdLst>
         </p14:section>
-        <p14:section name="Teknikk" id="{014fde8c-c9f3-9abd-b0f4-8f3e615bf6fa}">
+        <p14:section name="Teknikk" id="{c5376966-28ab-20e6-6035-eb47444e1c1f}">
           <p14:sldIdLst>
             <p14:sldId id="267"/>
             <p14:sldId id="268"/>
             <p14:sldId id="269"/>
           </p14:sldIdLst>
         </p14:section>
-        <p14:section name="Avslutning" id="{b5edb349-189a-357d-7eb0-ae0842411ce7}">
+        <p14:section name="Avslutning" id="{5097f304-1d8f-b8d5-c31d-462a0286bb32}">
           <p14:sldIdLst>
             <p14:sldId id="270"/>
           </p14:sldIdLst>
@@ -2063,7 +2063,7 @@
                   <a:schemeClr val="accent4"/>
                 </a:solidFill>
               </a:rPr>
-              <a:t>Geocaching Map – Custom Tile Layers · v1.45.3</a:t>
+              <a:t>Geocaching Map – Custom Tile Layers · v1.47.0</a:t>
             </a:r>
             <a:endParaRPr lang="en-US" sz="1000" dirty="0"/>
           </a:p>
@@ -2583,7 +2583,7 @@
                   <a:schemeClr val="accent5"/>
                 </a:solidFill>
               </a:rPr>
-              <a:t>Brukerskript · versjon 1.45.3 · norsk og engelsk</a:t>
+              <a:t>Brukerskript · versjon 1.47.0 · norsk og engelsk</a:t>
             </a:r>
             <a:endParaRPr lang="en-US" sz="1400" dirty="0"/>
           </a:p>

--- a/docs/Geocaching-Map-Custom-Tile-Layers-Presentasjon.pptx
+++ b/docs/Geocaching-Map-Custom-Tile-Layers-Presentasjon.pptx
@@ -20,9 +20,10 @@
     <p:sldId id="268" r:id="rId14"/>
     <p:sldId id="269" r:id="rId15"/>
     <p:sldId id="270" r:id="rId16"/>
+    <p:sldId id="271" r:id="rId17"/>
   </p:sldIdLst>
   <p:notesMasterIdLst>
-    <p:notesMasterId r:id="rId17"/>
+    <p:notesMasterId r:id="rId18"/>
   </p:notesMasterIdLst>
   <p:sldSz cx="12192000" cy="6858000"/>
   <p:notesSz cx="6858000" cy="12192000"/>
@@ -121,13 +122,13 @@
   <p:extLst>
     <p:ext uri="{521415D9-36F7-43E2-AB2F-B90AF26B5E84}">
       <p14:sectionLst xmlns:p14="http://schemas.microsoft.com/office/powerpoint/2010/main">
-        <p14:section name="Innledning" id="{b98ea0f0-c26a-d69e-c1e9-b3733e6e821a}">
+        <p14:section name="Innledning" id="{a5924676-3a88-0d70-55ff-b93cc8efc77a}">
           <p14:sldIdLst>
             <p14:sldId id="256"/>
             <p14:sldId id="257"/>
           </p14:sldIdLst>
         </p14:section>
-        <p14:section name="Funksjoner" id="{ad012490-bcee-3bc5-4436-11d5a87f1214}">
+        <p14:section name="Funksjoner" id="{a09d9748-e601-ec2d-3570-349268443044}">
           <p14:sldIdLst>
             <p14:sldId id="258"/>
             <p14:sldId id="259"/>
@@ -138,18 +139,19 @@
             <p14:sldId id="264"/>
             <p14:sldId id="265"/>
             <p14:sldId id="266"/>
+            <p14:sldId id="267"/>
           </p14:sldIdLst>
         </p14:section>
-        <p14:section name="Teknikk" id="{c5376966-28ab-20e6-6035-eb47444e1c1f}">
+        <p14:section name="Teknikk" id="{982a2cdd-a62d-36fb-cc1c-4f8def81119f}">
           <p14:sldIdLst>
-            <p14:sldId id="267"/>
             <p14:sldId id="268"/>
             <p14:sldId id="269"/>
+            <p14:sldId id="270"/>
           </p14:sldIdLst>
         </p14:section>
-        <p14:section name="Avslutning" id="{5097f304-1d8f-b8d5-c31d-462a0286bb32}">
+        <p14:section name="Avslutning" id="{0e19c752-6e78-fad7-b1ef-50a56f81216a}">
           <p14:sldIdLst>
-            <p14:sldId id="270"/>
+            <p14:sldId id="271"/>
           </p14:sldIdLst>
         </p14:section>
       </p14:sectionLst>
@@ -644,7 +646,7 @@
           <a:p>
             <a:r>
               <a:rPr lang="en-US" dirty="0"/>
-              <a:t>Sirklene vises fra zoomnivå 15. Cachetypene, de nøyaktige koordinatene og dine løste koordinater kommer fra geocaching.coms eget cachesøk. Fysiske steg leses fra listen over tilleggsveipunkter på cachesiden – bare de eieren har gjort synlige. Blått merke med spørsmålstegn og grønn hake: en løst cache du har funnet. Liten blå prikk: fysisk steg. Liten grønn prikk: endelig plassering. Dine egne cacher, som cachesøket utelater, leses fra cachesidene; der beholdes nettstedets ikon og boble, men teksten ved musepekeren blir «Endelig plassering».</a:t>
+              <a:t>Rutevinduet åpnes med rute-knappen i verktøylinjen. Forhåndsvisningen viser nøyaktig hva GPX-filen inneholder: navn i GPS-en, beskrivelse, koordinater og etapper. Cacher får Garmins Geocache-symbol (Geocache Found når de er funnet), merkenåler den blå nålen.</a:t>
             </a:r>
             <a:endParaRPr lang="en-US" dirty="0"/>
           </a:p>
@@ -732,7 +734,7 @@
           <a:p>
             <a:r>
               <a:rPr lang="en-US" dirty="0"/>
-              <a:t>161 m er minsteavstanden mellom cacher i retningslinjene. På det gamle kartet finner skriptet posisjonene fra et skjult rutenett nettstedet laster; på de nye kartene brukes de nøyaktige posisjonene.</a:t>
+              <a:t>Sirklene vises fra zoomnivå 15. Cachetypene, de nøyaktige koordinatene og dine løste koordinater kommer fra geocaching.coms eget cachesøk. Fysiske steg leses fra listen over tilleggsveipunkter på cachesiden – bare de eieren har gjort synlige. Blått merke med spørsmålstegn og grønn hake: en løst cache du har funnet. Liten blå prikk: fysisk steg. Liten grønn prikk: endelig plassering. Dine egne cacher, som cachesøket utelater, leses fra cachesidene; der beholdes nettstedets ikon og boble, men teksten ved musepekeren blir «Endelig plassering».</a:t>
             </a:r>
             <a:endParaRPr lang="en-US" dirty="0"/>
           </a:p>
@@ -820,7 +822,7 @@
           <a:p>
             <a:r>
               <a:rPr lang="en-US" dirty="0"/>
-              <a:t>Nettleseren tegner Leaflets kontroller øverst, deretter boblene, markørene og tegningene, og nederst kartflisene. Blant flisene sorterer skriptet etter z-indeks: nettstedets bakgrunn nederst, så ditt bakgrunnskart, overleggene og forhåndsvisningen, og øverst nettstedets øvrige fliser – på det gamle kartet er det cacheikonene. Nettstedets bakgrunn finnes fra nettstedets lagvelger, ellers som det laveste fliselaget. Dialogene ligger utenfor kartet, festet til siden, så sidepanelet ikke dekker dem.</a:t>
+              <a:t>161 m er minsteavstanden mellom cacher i retningslinjene. På det gamle kartet finner skriptet posisjonene fra et skjult rutenett nettstedet laster; på de nye kartene brukes de nøyaktige posisjonene.</a:t>
             </a:r>
             <a:endParaRPr lang="en-US" dirty="0"/>
           </a:p>
@@ -908,7 +910,7 @@
           <a:p>
             <a:r>
               <a:rPr lang="en-US" dirty="0"/>
-              <a:t>Skriptet starter før siden og fanger opp Leaflet i det øyeblikket siden definerer det. Egne feil når aldri nettstedets kode.</a:t>
+              <a:t>Nettleseren tegner Leaflets kontroller øverst, deretter boblene, markørene og tegningene, og nederst kartflisene. Blant flisene sorterer skriptet etter z-indeks: nettstedets bakgrunn nederst, så ditt bakgrunnskart, overleggene og forhåndsvisningen, og øverst nettstedets øvrige fliser – på det gamle kartet er det cacheikonene. Nettstedets bakgrunn finnes fra nettstedets lagvelger, ellers som det laveste fliselaget. Dialogene ligger utenfor kartet, festet til siden, så sidepanelet ikke dekker dem.</a:t>
             </a:r>
             <a:endParaRPr lang="en-US" dirty="0"/>
           </a:p>
@@ -996,7 +998,7 @@
           <a:p>
             <a:r>
               <a:rPr lang="en-US" dirty="0"/>
-              <a:t>Skriptet trenger ingen spesielle tillatelser (@grant none). Innstillingene deles mellom kartsidene og cachesidene.</a:t>
+              <a:t>Skriptet starter før siden og fanger opp Leaflet i det øyeblikket siden definerer det. Egne feil når aldri nettstedets kode.</a:t>
             </a:r>
             <a:endParaRPr lang="en-US" dirty="0"/>
           </a:p>
@@ -1084,7 +1086,7 @@
           <a:p>
             <a:r>
               <a:rPr lang="en-US" dirty="0"/>
-              <a:t>Takk for oppmerksomheten. Spørsmål?</a:t>
+              <a:t>Skriptet trenger ingen spesielle tillatelser (@grant none). Innstillingene deles mellom kartsidene og cachesidene.</a:t>
             </a:r>
             <a:endParaRPr lang="en-US" dirty="0"/>
           </a:p>
@@ -1108,6 +1110,94 @@
             <a:fld id="{F7021451-1387-4CA6-816F-3879F97B5CBC}" type="slidenum">
               <a:rPr lang="en-US"/>
               <a:t>15</a:t>
+            </a:fld>
+            <a:endParaRPr lang="en-US"/>
+          </a:p>
+        </p:txBody>
+      </p:sp>
+    </p:spTree>
+    <p:extLst>
+      <p:ext uri="{BB962C8B-B14F-4D97-AF65-F5344CB8AC3E}">
+        <p14:creationId xmlns:p14="http://schemas.microsoft.com/office/powerpoint/2010/main" val="1024086991"/>
+      </p:ext>
+    </p:extLst>
+  </p:cSld>
+  <p:clrMapOvr>
+    <a:masterClrMapping/>
+  </p:clrMapOvr>
+</p:notes>
+</file>
+
+<file path=ppt/notesSlides/notesSlide16.xml><?xml version="1.0" encoding="utf-8"?>
+<p:notes xmlns:a="http://schemas.openxmlformats.org/drawingml/2006/main" xmlns:r="http://schemas.openxmlformats.org/officeDocument/2006/relationships" xmlns:p="http://schemas.openxmlformats.org/presentationml/2006/main">
+  <p:cSld>
+    <p:spTree>
+      <p:nvGrpSpPr>
+        <p:cNvPr id="416001" name=""/>
+        <p:cNvGrpSpPr/>
+        <p:nvPr/>
+      </p:nvGrpSpPr>
+      <p:grpSpPr>
+        <a:xfrm>
+          <a:off x="0" y="0"/>
+          <a:ext cx="0" cy="0"/>
+          <a:chOff x="0" y="0"/>
+          <a:chExt cx="0" cy="0"/>
+        </a:xfrm>
+      </p:grpSpPr>
+      <p:sp>
+        <p:nvSpPr>
+          <p:cNvPr id="416002" name="Slide Image Placeholder 1"/>
+          <p:cNvSpPr>
+            <a:spLocks noGrp="1" noRot="1" noChangeAspect="1"/>
+          </p:cNvSpPr>
+          <p:nvPr>
+            <p:ph type="sldImg"/>
+          </p:nvPr>
+        </p:nvSpPr>
+        <p:spPr/>
+      </p:sp>
+      <p:sp>
+        <p:nvSpPr>
+          <p:cNvPr id="416003" name="Notes Placeholder 2"/>
+          <p:cNvSpPr>
+            <a:spLocks noGrp="1"/>
+          </p:cNvSpPr>
+          <p:nvPr>
+            <p:ph type="body" idx="1"/>
+          </p:nvPr>
+        </p:nvSpPr>
+        <p:spPr/>
+        <p:txBody>
+          <a:bodyPr/>
+          <a:lstStyle/>
+          <a:p>
+            <a:r>
+              <a:rPr lang="en-US" dirty="0"/>
+              <a:t>Takk for oppmerksomheten. Spørsmål?</a:t>
+            </a:r>
+            <a:endParaRPr lang="en-US" dirty="0"/>
+          </a:p>
+        </p:txBody>
+      </p:sp>
+      <p:sp>
+        <p:nvSpPr>
+          <p:cNvPr id="416004" name="Slide Number Placeholder 3"/>
+          <p:cNvSpPr>
+            <a:spLocks noGrp="1"/>
+          </p:cNvSpPr>
+          <p:nvPr>
+            <p:ph type="sldNum" sz="quarter" idx="10"/>
+          </p:nvPr>
+        </p:nvSpPr>
+        <p:spPr/>
+        <p:txBody>
+          <a:bodyPr/>
+          <a:lstStyle/>
+          <a:p>
+            <a:fld id="{F7021451-1387-4CA6-816F-3879F97B5CBC}" type="slidenum">
+              <a:rPr lang="en-US"/>
+              <a:t>16</a:t>
             </a:fld>
             <a:endParaRPr lang="en-US"/>
           </a:p>
@@ -2063,7 +2153,7 @@
                   <a:schemeClr val="accent4"/>
                 </a:solidFill>
               </a:rPr>
-              <a:t>Geocaching Map – Custom Tile Layers · v1.47.0</a:t>
+              <a:t>Geocaching Map – Custom Tile Layers · v1.50.0</a:t>
             </a:r>
             <a:endParaRPr lang="en-US" sz="1000" dirty="0"/>
           </a:p>
@@ -2583,7 +2673,7 @@
                   <a:schemeClr val="accent5"/>
                 </a:solidFill>
               </a:rPr>
-              <a:t>Brukerskript · versjon 1.47.0 · norsk og engelsk</a:t>
+              <a:t>Brukerskript · versjon 1.50.0 · norsk og engelsk</a:t>
             </a:r>
             <a:endParaRPr lang="en-US" sz="1400" dirty="0"/>
           </a:p>
@@ -2605,8 +2695,8 @@
         </p:blipFill>
         <p:spPr>
           <a:xfrm>
-            <a:off x="8643092" y="548640"/>
-            <a:ext cx="2634203" cy="5760720"/>
+            <a:off x="8682150" y="548640"/>
+            <a:ext cx="2595145" cy="5760720"/>
           </a:xfrm>
           <a:prstGeom prst="rect">
             <a:avLst/>
@@ -2677,7 +2767,7 @@
                   <a:schemeClr val="tx2"/>
                 </a:solidFill>
               </a:rPr>
-              <a:t>161 m-sirkler der noe er utplassert</a:t>
+              <a:t>Nyhet: sett sammen en rute og ta den med på GPS-en</a:t>
             </a:r>
             <a:endParaRPr lang="en-US" sz="3600" dirty="0"/>
           </a:p>
@@ -2685,27 +2775,29 @@
       </p:sp>
       <p:sp>
         <p:nvSpPr>
-          <p:cNvPr id="20003" name="Ikon circles sirkel"/>
+          <p:cNvPr id="20003" name="Rutevinduet bakgrunn"/>
           <p:cNvSpPr/>
           <p:nvPr/>
         </p:nvSpPr>
         <p:spPr>
           <a:xfrm>
-            <a:off x="548640" y="1499616"/>
-            <a:ext cx="512064" cy="512064"/>
-          </a:xfrm>
-          <a:prstGeom prst="ellipse">
-            <a:avLst/>
+            <a:off x="7071055" y="1325880"/>
+            <a:ext cx="4572000" cy="4983480"/>
+          </a:xfrm>
+          <a:prstGeom prst="roundRect">
+            <a:avLst>
+              <a:gd name="adj" fmla="val 2400"/>
+            </a:avLst>
           </a:prstGeom>
           <a:solidFill>
-            <a:schemeClr val="accent1"/>
+            <a:schemeClr val="bg2"/>
           </a:solidFill>
           <a:ln/>
         </p:spPr>
       </p:sp>
       <p:pic>
         <p:nvPicPr>
-          <p:cNvPr id="20004" name="Ikon circles" descr="circles">    </p:cNvPr>
+          <p:cNvPr id="20004" name="Rutevinduet" descr="Rutevinduet">    </p:cNvPr>
           <p:cNvPicPr>
             <a:picLocks noChangeAspect="1"/>
           </p:cNvPicPr>
@@ -2719,8 +2811,8 @@
         </p:blipFill>
         <p:spPr>
           <a:xfrm>
-            <a:off x="661294" y="1612270"/>
-            <a:ext cx="286756" cy="286756"/>
+            <a:off x="7448245" y="1527048"/>
+            <a:ext cx="3817620" cy="4581144"/>
           </a:xfrm>
           <a:prstGeom prst="rect">
             <a:avLst/>
@@ -2729,69 +2821,13 @@
       </p:pic>
       <p:sp>
         <p:nvSpPr>
-          <p:cNvPr id="20005" name="Text 2"/>
-          <p:cNvSpPr txBox="1"/>
-          <p:nvPr/>
-        </p:nvSpPr>
-        <p:spPr>
-          <a:xfrm>
-            <a:off x="1261872" y="1426464"/>
-            <a:ext cx="6053328" cy="1097280"/>
-          </a:xfrm>
-          <a:prstGeom prst="rect">
-            <a:avLst/>
-          </a:prstGeom>
-          <a:noFill/>
-          <a:ln/>
-        </p:spPr>
-        <p:txBody>
-          <a:bodyPr wrap="square" lIns="0" tIns="0" rIns="0" bIns="0" rtlCol="0" anchor="t"/>
-          <a:lstStyle/>
-          <a:p>
-            <a:pPr indent="0" marL="0">
-              <a:spcAft>
-                <a:spcPts val="200"/>
-              </a:spcAft>
-              <a:buNone/>
-            </a:pPr>
-            <a:r>
-              <a:rPr lang="en-US" sz="1700" b="1" dirty="0">
-                <a:solidFill>
-                  <a:schemeClr val="tx1"/>
-                </a:solidFill>
-              </a:rPr>
-              <a:t>Tradisjonelle cacher</a:t>
-            </a:r>
-            <a:endParaRPr lang="en-US" sz="1700" dirty="0"/>
-          </a:p>
-          <a:p>
-            <a:pPr indent="0" marL="0">
-              <a:spcAft>
-                <a:spcPts val="200"/>
-              </a:spcAft>
-              <a:buNone/>
-            </a:pPr>
-            <a:r>
-              <a:rPr lang="en-US" sz="1400" dirty="0">
-                <a:solidFill>
-                  <a:schemeClr val="accent4"/>
-                </a:solidFill>
-              </a:rPr>
-              <a:t>På de nøyaktige publiserte koordinatene</a:t>
-            </a:r>
-            <a:endParaRPr lang="en-US" sz="1700" dirty="0"/>
-          </a:p>
-        </p:txBody>
-      </p:sp>
-      <p:sp>
-        <p:nvSpPr>
-          <p:cNvPr id="20006" name="Ikon check sirkel"/>
+          <p:cNvPr id="20005" name="Ikon search sirkel"/>
           <p:cNvSpPr/>
           <p:nvPr/>
         </p:nvSpPr>
         <p:spPr>
           <a:xfrm>
-            <a:off x="548640" y="2642616"/>
+            <a:off x="548640" y="1499616"/>
             <a:ext cx="512064" cy="512064"/>
           </a:xfrm>
           <a:prstGeom prst="ellipse">
@@ -2805,7 +2841,7 @@
       </p:sp>
       <p:pic>
         <p:nvPicPr>
-          <p:cNvPr id="20007" name="Ikon check" descr="check">    </p:cNvPr>
+          <p:cNvPr id="20006" name="Ikon search" descr="search">    </p:cNvPr>
           <p:cNvPicPr>
             <a:picLocks noChangeAspect="1"/>
           </p:cNvPicPr>
@@ -2819,7 +2855,7 @@
         </p:blipFill>
         <p:spPr>
           <a:xfrm>
-            <a:off x="661294" y="2755270"/>
+            <a:off x="661294" y="1612270"/>
             <a:ext cx="286756" cy="286756"/>
           </a:xfrm>
           <a:prstGeom prst="rect">
@@ -2829,14 +2865,14 @@
       </p:pic>
       <p:sp>
         <p:nvSpPr>
-          <p:cNvPr id="20008" name="Text 4"/>
+          <p:cNvPr id="20007" name="Text 3"/>
           <p:cNvSpPr txBox="1"/>
           <p:nvPr/>
         </p:nvSpPr>
         <p:spPr>
           <a:xfrm>
-            <a:off x="1261872" y="2569464"/>
-            <a:ext cx="6053328" cy="1097280"/>
+            <a:off x="1261872" y="1426464"/>
+            <a:ext cx="5596128" cy="1143000"/>
           </a:xfrm>
           <a:prstGeom prst="rect">
             <a:avLst/>
@@ -2860,7 +2896,7 @@
                   <a:schemeClr val="tx1"/>
                 </a:solidFill>
               </a:rPr>
-              <a:t>Løste cacher</a:t>
+              <a:t>Søkbar liste</a:t>
             </a:r>
             <a:endParaRPr lang="en-US" sz="1700" dirty="0"/>
           </a:p>
@@ -2877,7 +2913,7 @@
                   <a:schemeClr val="accent4"/>
                 </a:solidFill>
               </a:rPr>
-              <a:t>På dine korrigerte koordinater – også når ikonet er flyttet tilbake etter funn</a:t>
+              <a:t>Geocacher og merkenåler i nærheten – og hvilken som helst GC-kode i verden</a:t>
             </a:r>
             <a:endParaRPr lang="en-US" sz="1700" dirty="0"/>
           </a:p>
@@ -2885,13 +2921,13 @@
       </p:sp>
       <p:sp>
         <p:nvSpPr>
-          <p:cNvPr id="20009" name="Ikon pin sirkel"/>
+          <p:cNvPr id="20008" name="Ikon pin sirkel"/>
           <p:cNvSpPr/>
           <p:nvPr/>
         </p:nvSpPr>
         <p:spPr>
           <a:xfrm>
-            <a:off x="548640" y="3785616"/>
+            <a:off x="548640" y="2688336"/>
             <a:ext cx="512064" cy="512064"/>
           </a:xfrm>
           <a:prstGeom prst="ellipse">
@@ -2905,7 +2941,7 @@
       </p:sp>
       <p:pic>
         <p:nvPicPr>
-          <p:cNvPr id="20010" name="Ikon pin" descr="pin">    </p:cNvPr>
+          <p:cNvPr id="20009" name="Ikon pin" descr="pin">    </p:cNvPr>
           <p:cNvPicPr>
             <a:picLocks noChangeAspect="1"/>
           </p:cNvPicPr>
@@ -2919,7 +2955,7 @@
         </p:blipFill>
         <p:spPr>
           <a:xfrm>
-            <a:off x="661294" y="3898270"/>
+            <a:off x="661294" y="2800990"/>
             <a:ext cx="286756" cy="286756"/>
           </a:xfrm>
           <a:prstGeom prst="rect">
@@ -2929,14 +2965,14 @@
       </p:pic>
       <p:sp>
         <p:nvSpPr>
-          <p:cNvPr id="20011" name="Text 6"/>
+          <p:cNvPr id="20010" name="Text 5"/>
           <p:cNvSpPr txBox="1"/>
           <p:nvPr/>
         </p:nvSpPr>
         <p:spPr>
           <a:xfrm>
-            <a:off x="1261872" y="3712464"/>
-            <a:ext cx="6053328" cy="1097280"/>
+            <a:off x="1261872" y="2615184"/>
+            <a:ext cx="5596128" cy="1143000"/>
           </a:xfrm>
           <a:prstGeom prst="rect">
             <a:avLst/>
@@ -2960,7 +2996,7 @@
                   <a:schemeClr val="tx1"/>
                 </a:solidFill>
               </a:rPr>
-              <a:t>Fysiske steg og final</a:t>
+              <a:t>Velg på kartet</a:t>
             </a:r>
             <a:endParaRPr lang="en-US" sz="1700" dirty="0"/>
           </a:p>
@@ -2977,7 +3013,7 @@
                   <a:schemeClr val="accent4"/>
                 </a:solidFill>
               </a:rPr>
-              <a:t>Synlige steg i multier, mysterier, Wherigoer og letterboxer, lest fra cachesiden</a:t>
+              <a:t>Klikk på cacher og nåler mens rutevinduet er åpent, eller bruk høyreklikkboblen</a:t>
             </a:r>
             <a:endParaRPr lang="en-US" sz="1700" dirty="0"/>
           </a:p>
@@ -2985,13 +3021,13 @@
       </p:sp>
       <p:sp>
         <p:nvSpPr>
-          <p:cNvPr id="20012" name="Ikon ring sirkel"/>
+          <p:cNvPr id="20011" name="Ikon route sirkel"/>
           <p:cNvSpPr/>
           <p:nvPr/>
         </p:nvSpPr>
         <p:spPr>
           <a:xfrm>
-            <a:off x="548640" y="4928616"/>
+            <a:off x="548640" y="3877056"/>
             <a:ext cx="512064" cy="512064"/>
           </a:xfrm>
           <a:prstGeom prst="ellipse">
@@ -3005,7 +3041,7 @@
       </p:sp>
       <p:pic>
         <p:nvPicPr>
-          <p:cNvPr id="20013" name="Ikon ring" descr="ring">    </p:cNvPr>
+          <p:cNvPr id="20012" name="Ikon route" descr="route">    </p:cNvPr>
           <p:cNvPicPr>
             <a:picLocks noChangeAspect="1"/>
           </p:cNvPicPr>
@@ -3019,7 +3055,7 @@
         </p:blipFill>
         <p:spPr>
           <a:xfrm>
-            <a:off x="661294" y="5041270"/>
+            <a:off x="661294" y="3989710"/>
             <a:ext cx="286756" cy="286756"/>
           </a:xfrm>
           <a:prstGeom prst="rect">
@@ -3029,14 +3065,14 @@
       </p:pic>
       <p:sp>
         <p:nvSpPr>
-          <p:cNvPr id="20014" name="Text 8"/>
+          <p:cNvPr id="20013" name="Text 7"/>
           <p:cNvSpPr txBox="1"/>
           <p:nvPr/>
         </p:nvSpPr>
         <p:spPr>
           <a:xfrm>
-            <a:off x="1261872" y="4855464"/>
-            <a:ext cx="6053328" cy="1097280"/>
+            <a:off x="1261872" y="3803904"/>
+            <a:ext cx="5596128" cy="1143000"/>
           </a:xfrm>
           <a:prstGeom prst="rect">
             <a:avLst/>
@@ -3060,7 +3096,7 @@
                   <a:schemeClr val="tx1"/>
                 </a:solidFill>
               </a:rPr>
-              <a:t>Enkeltsirkel</a:t>
+              <a:t>Rekkefølge og etapper</a:t>
             </a:r>
             <a:endParaRPr lang="en-US" sz="1700" dirty="0"/>
           </a:p>
@@ -3077,7 +3113,7 @@
                   <a:schemeClr val="accent4"/>
                 </a:solidFill>
               </a:rPr>
-              <a:t>Høyreklikk hvor som helst og velg 161 m-sirkel</a:t>
+              <a:t>Flytt stopp, sorter etter nærmeste og se avstand og retning for hver etappe</a:t>
             </a:r>
             <a:endParaRPr lang="en-US" sz="1700" dirty="0"/>
           </a:p>
@@ -3085,29 +3121,27 @@
       </p:sp>
       <p:sp>
         <p:nvSpPr>
-          <p:cNvPr id="20015" name="Merke ved en løst cache bakgrunn"/>
+          <p:cNvPr id="20014" name="Ikon download sirkel"/>
           <p:cNvSpPr/>
           <p:nvPr/>
         </p:nvSpPr>
         <p:spPr>
           <a:xfrm>
-            <a:off x="7802575" y="1463040"/>
-            <a:ext cx="3840480" cy="2834640"/>
-          </a:xfrm>
-          <a:prstGeom prst="roundRect">
-            <a:avLst>
-              <a:gd name="adj" fmla="val 3871"/>
-            </a:avLst>
+            <a:off x="548640" y="5065776"/>
+            <a:ext cx="512064" cy="512064"/>
+          </a:xfrm>
+          <a:prstGeom prst="ellipse">
+            <a:avLst/>
           </a:prstGeom>
           <a:solidFill>
-            <a:schemeClr val="bg2"/>
+            <a:schemeClr val="accent1"/>
           </a:solidFill>
           <a:ln/>
         </p:spPr>
       </p:sp>
       <p:pic>
         <p:nvPicPr>
-          <p:cNvPr id="20016" name="Merke ved en løst cache" descr="Merke ved en løst cache">    </p:cNvPr>
+          <p:cNvPr id="20015" name="Ikon download" descr="download">    </p:cNvPr>
           <p:cNvPicPr>
             <a:picLocks noChangeAspect="1"/>
           </p:cNvPicPr>
@@ -3121,8 +3155,8 @@
         </p:blipFill>
         <p:spPr>
           <a:xfrm>
-            <a:off x="8058607" y="1664208"/>
-            <a:ext cx="3328416" cy="2432304"/>
+            <a:off x="661294" y="5178430"/>
+            <a:ext cx="286756" cy="286756"/>
           </a:xfrm>
           <a:prstGeom prst="rect">
             <a:avLst/>
@@ -3131,14 +3165,14 @@
       </p:pic>
       <p:sp>
         <p:nvSpPr>
-          <p:cNvPr id="20017" name="Text 10"/>
+          <p:cNvPr id="20016" name="Text 9"/>
           <p:cNvSpPr txBox="1"/>
           <p:nvPr/>
         </p:nvSpPr>
         <p:spPr>
           <a:xfrm>
-            <a:off x="7802575" y="4526280"/>
-            <a:ext cx="3840480" cy="1280160"/>
+            <a:off x="1261872" y="4992624"/>
+            <a:ext cx="5596128" cy="1143000"/>
           </a:xfrm>
           <a:prstGeom prst="rect">
             <a:avLst/>
@@ -3151,23 +3185,43 @@
           <a:lstStyle/>
           <a:p>
             <a:pPr indent="0" marL="0">
-              <a:buNone/>
-            </a:pPr>
-            <a:r>
-              <a:rPr lang="en-US" sz="1500" dirty="0">
+              <a:spcAft>
+                <a:spcPts val="200"/>
+              </a:spcAft>
+              <a:buNone/>
+            </a:pPr>
+            <a:r>
+              <a:rPr lang="en-US" sz="1700" b="1" dirty="0">
+                <a:solidFill>
+                  <a:schemeClr val="tx1"/>
+                </a:solidFill>
+              </a:rPr>
+              <a:t>Forhåndsvis og last ned</a:t>
+            </a:r>
+            <a:endParaRPr lang="en-US" sz="1700" dirty="0"/>
+          </a:p>
+          <a:p>
+            <a:pPr indent="0" marL="0">
+              <a:spcAft>
+                <a:spcPts val="200"/>
+              </a:spcAft>
+              <a:buNone/>
+            </a:pPr>
+            <a:r>
+              <a:rPr lang="en-US" sz="1400" dirty="0">
                 <a:solidFill>
                   <a:schemeClr val="accent4"/>
                 </a:solidFill>
               </a:rPr>
-              <a:t>Der ikke noe cacheikon viser stedet, står et klikkbart merke midt i sirkelen. Musepekeren over en løst cache viser «Endelig plassering»; høyreklikk gir nøyaktige koordinater.</a:t>
-            </a:r>
-            <a:endParaRPr lang="en-US" sz="1500" dirty="0"/>
-          </a:p>
-        </p:txBody>
-      </p:sp>
-      <p:sp>
-        <p:nvSpPr>
-          <p:cNvPr id="20018" name="Slide Number Placeholder 0"/>
+              <a:t>Se hele ruten på kartet og i en tabell – last ned som GPX med Garmin-symboler</a:t>
+            </a:r>
+            <a:endParaRPr lang="en-US" sz="1700" dirty="0"/>
+          </a:p>
+        </p:txBody>
+      </p:sp>
+      <p:sp>
+        <p:nvSpPr>
+          <p:cNvPr id="20017" name="Slide Number Placeholder 0"/>
           <p:cNvSpPr>
             <a:spLocks noGrp="1"/>
           </p:cNvSpPr>
@@ -3267,7 +3321,7 @@
                   <a:schemeClr val="tx2"/>
                 </a:solidFill>
               </a:rPr>
-              <a:t>161 m-sirkler, cachesider og hjem</a:t>
+              <a:t>161 m-sirkler der noe er utplassert</a:t>
             </a:r>
             <a:endParaRPr lang="en-US" sz="3600" dirty="0"/>
           </a:p>
@@ -3275,36 +3329,14 @@
       </p:sp>
       <p:sp>
         <p:nvSpPr>
-          <p:cNvPr id="21003" name="Kort 161 m-sirkler"/>
+          <p:cNvPr id="21003" name="Ikon circles sirkel"/>
           <p:cNvSpPr/>
           <p:nvPr/>
         </p:nvSpPr>
         <p:spPr>
           <a:xfrm>
-            <a:off x="548640" y="1508760"/>
-            <a:ext cx="3484778" cy="4206240"/>
-          </a:xfrm>
-          <a:prstGeom prst="roundRect">
-            <a:avLst>
-              <a:gd name="adj" fmla="val 3149"/>
-            </a:avLst>
-          </a:prstGeom>
-          <a:solidFill>
-            <a:schemeClr val="bg2"/>
-          </a:solidFill>
-          <a:ln/>
-        </p:spPr>
-      </p:sp>
-      <p:sp>
-        <p:nvSpPr>
-          <p:cNvPr id="21004" name="Ikon circles sirkel"/>
-          <p:cNvSpPr/>
-          <p:nvPr/>
-        </p:nvSpPr>
-        <p:spPr>
-          <a:xfrm>
-            <a:off x="914400" y="1920240"/>
-            <a:ext cx="822960" cy="822960"/>
+            <a:off x="548640" y="1499616"/>
+            <a:ext cx="512064" cy="512064"/>
           </a:xfrm>
           <a:prstGeom prst="ellipse">
             <a:avLst/>
@@ -3317,7 +3349,7 @@
       </p:sp>
       <p:pic>
         <p:nvPicPr>
-          <p:cNvPr id="21005" name="Ikon circles" descr="circles">    </p:cNvPr>
+          <p:cNvPr id="21004" name="Ikon circles" descr="circles">    </p:cNvPr>
           <p:cNvPicPr>
             <a:picLocks noChangeAspect="1"/>
           </p:cNvPicPr>
@@ -3331,8 +3363,8 @@
         </p:blipFill>
         <p:spPr>
           <a:xfrm>
-            <a:off x="1095451" y="2101291"/>
-            <a:ext cx="460858" cy="460858"/>
+            <a:off x="661294" y="1612270"/>
+            <a:ext cx="286756" cy="286756"/>
           </a:xfrm>
           <a:prstGeom prst="rect">
             <a:avLst/>
@@ -3341,14 +3373,14 @@
       </p:pic>
       <p:sp>
         <p:nvSpPr>
-          <p:cNvPr id="21006" name="Text 3"/>
+          <p:cNvPr id="21005" name="Text 2"/>
           <p:cNvSpPr txBox="1"/>
           <p:nvPr/>
         </p:nvSpPr>
         <p:spPr>
           <a:xfrm>
-            <a:off x="914400" y="2971800"/>
-            <a:ext cx="2753258" cy="502920"/>
+            <a:off x="1261872" y="1426464"/>
+            <a:ext cx="6053328" cy="1097280"/>
           </a:xfrm>
           <a:prstGeom prst="rect">
             <a:avLst/>
@@ -3357,150 +3389,54 @@
           <a:ln/>
         </p:spPr>
         <p:txBody>
-          <a:bodyPr wrap="square" lIns="0" tIns="0" rIns="0" bIns="0" rtlCol="0" anchor="ctr"/>
-          <a:lstStyle/>
-          <a:p>
-            <a:pPr indent="0" marL="0">
-              <a:buNone/>
-            </a:pPr>
-            <a:r>
-              <a:rPr lang="en-US" sz="2200" b="1" dirty="0">
+          <a:bodyPr wrap="square" lIns="0" tIns="0" rIns="0" bIns="0" rtlCol="0" anchor="t"/>
+          <a:lstStyle/>
+          <a:p>
+            <a:pPr indent="0" marL="0">
+              <a:spcAft>
+                <a:spcPts val="200"/>
+              </a:spcAft>
+              <a:buNone/>
+            </a:pPr>
+            <a:r>
+              <a:rPr lang="en-US" sz="1700" b="1" dirty="0">
                 <a:solidFill>
                   <a:schemeClr val="tx1"/>
                 </a:solidFill>
               </a:rPr>
-              <a:t>161 m-sirkler</a:t>
-            </a:r>
-            <a:endParaRPr lang="en-US" sz="2200" dirty="0"/>
-          </a:p>
-        </p:txBody>
-      </p:sp>
-      <p:sp>
-        <p:nvSpPr>
-          <p:cNvPr id="21007" name="Text 4"/>
-          <p:cNvSpPr txBox="1"/>
-          <p:nvPr/>
-        </p:nvSpPr>
-        <p:spPr>
-          <a:xfrm>
-            <a:off x="914400" y="3611880"/>
-            <a:ext cx="2753258" cy="1828800"/>
-          </a:xfrm>
-          <a:prstGeom prst="rect">
-            <a:avLst/>
-          </a:prstGeom>
-          <a:noFill/>
-          <a:ln/>
-        </p:spPr>
-        <p:txBody>
-          <a:bodyPr wrap="square" lIns="0" tIns="0" rIns="0" bIns="0" rtlCol="0" anchor="t"/>
-          <a:lstStyle/>
-          <a:p>
-            <a:pPr marL="228600" indent="-228600">
+              <a:t>Tradisjonelle cacher</a:t>
+            </a:r>
+            <a:endParaRPr lang="en-US" sz="1700" dirty="0"/>
+          </a:p>
+          <a:p>
+            <a:pPr indent="0" marL="0">
               <a:spcAft>
-                <a:spcPts val="800"/>
+                <a:spcPts val="200"/>
               </a:spcAft>
-              <a:buSzPct val="100000"/>
-              <a:buChar char="•"/>
-            </a:pPr>
-            <a:r>
-              <a:rPr lang="en-US" sz="1700" dirty="0">
-                <a:solidFill>
-                  <a:schemeClr val="tx1"/>
-                </a:solidFill>
-              </a:rPr>
-              <a:t>Der noe er utplassert – se forrige lysbilde</a:t>
+              <a:buNone/>
+            </a:pPr>
+            <a:r>
+              <a:rPr lang="en-US" sz="1400" dirty="0">
+                <a:solidFill>
+                  <a:schemeClr val="accent4"/>
+                </a:solidFill>
+              </a:rPr>
+              <a:t>På de nøyaktige publiserte koordinatene</a:t>
             </a:r>
             <a:endParaRPr lang="en-US" sz="1700" dirty="0"/>
           </a:p>
-          <a:p>
-            <a:pPr marL="228600" indent="-228600">
-              <a:spcAft>
-                <a:spcPts val="800"/>
-              </a:spcAft>
-              <a:buSzPct val="100000"/>
-              <a:buChar char="•"/>
-            </a:pPr>
-            <a:r>
-              <a:rPr lang="en-US" sz="1700" dirty="0">
-                <a:solidFill>
-                  <a:schemeClr val="tx1"/>
-                </a:solidFill>
-              </a:rPr>
-              <a:t>Vises fra zoomnivå 15</a:t>
-            </a:r>
-            <a:endParaRPr lang="en-US" sz="1700" dirty="0"/>
-          </a:p>
-          <a:p>
-            <a:pPr marL="228600" indent="-228600">
-              <a:spcAft>
-                <a:spcPts val="800"/>
-              </a:spcAft>
-              <a:buSzPct val="100000"/>
-              <a:buChar char="•"/>
-            </a:pPr>
-            <a:r>
-              <a:rPr lang="en-US" sz="1700" dirty="0">
-                <a:solidFill>
-                  <a:schemeClr val="tx1"/>
-                </a:solidFill>
-              </a:rPr>
-              <a:t>Følger kartet og hindrer aldri klikk</a:t>
-            </a:r>
-            <a:endParaRPr lang="en-US" sz="1700" dirty="0"/>
-          </a:p>
-          <a:p>
-            <a:pPr marL="228600" indent="-228600">
-              <a:spcAft>
-                <a:spcPts val="800"/>
-              </a:spcAft>
-              <a:buSzPct val="100000"/>
-              <a:buChar char="•"/>
-            </a:pPr>
-            <a:r>
-              <a:rPr lang="en-US" sz="1700" dirty="0">
-                <a:solidFill>
-                  <a:schemeClr val="tx1"/>
-                </a:solidFill>
-              </a:rPr>
-              <a:t>Enkeltsirkel: høyreklikk</a:t>
-            </a:r>
-            <a:endParaRPr lang="en-US" sz="1700" dirty="0"/>
-          </a:p>
-        </p:txBody>
-      </p:sp>
-      <p:sp>
-        <p:nvSpPr>
-          <p:cNvPr id="21008" name="Kort Cachesider"/>
+        </p:txBody>
+      </p:sp>
+      <p:sp>
+        <p:nvSpPr>
+          <p:cNvPr id="21006" name="Ikon check sirkel"/>
           <p:cNvSpPr/>
           <p:nvPr/>
         </p:nvSpPr>
         <p:spPr>
           <a:xfrm>
-            <a:off x="4353458" y="1508760"/>
-            <a:ext cx="3484778" cy="4206240"/>
-          </a:xfrm>
-          <a:prstGeom prst="roundRect">
-            <a:avLst>
-              <a:gd name="adj" fmla="val 3149"/>
-            </a:avLst>
-          </a:prstGeom>
-          <a:solidFill>
-            <a:schemeClr val="bg2"/>
-          </a:solidFill>
-          <a:ln/>
-        </p:spPr>
-      </p:sp>
-      <p:sp>
-        <p:nvSpPr>
-          <p:cNvPr id="21009" name="Ikon layers sirkel"/>
-          <p:cNvSpPr/>
-          <p:nvPr/>
-        </p:nvSpPr>
-        <p:spPr>
-          <a:xfrm>
-            <a:off x="4719218" y="1920240"/>
-            <a:ext cx="822960" cy="822960"/>
+            <a:off x="548640" y="2642616"/>
+            <a:ext cx="512064" cy="512064"/>
           </a:xfrm>
           <a:prstGeom prst="ellipse">
             <a:avLst/>
@@ -3513,7 +3449,7 @@
       </p:sp>
       <p:pic>
         <p:nvPicPr>
-          <p:cNvPr id="21010" name="Ikon layers" descr="layers">    </p:cNvPr>
+          <p:cNvPr id="21007" name="Ikon check" descr="check">    </p:cNvPr>
           <p:cNvPicPr>
             <a:picLocks noChangeAspect="1"/>
           </p:cNvPicPr>
@@ -3527,8 +3463,8 @@
         </p:blipFill>
         <p:spPr>
           <a:xfrm>
-            <a:off x="4900270" y="2101291"/>
-            <a:ext cx="460858" cy="460858"/>
+            <a:off x="661294" y="2755270"/>
+            <a:ext cx="286756" cy="286756"/>
           </a:xfrm>
           <a:prstGeom prst="rect">
             <a:avLst/>
@@ -3537,14 +3473,14 @@
       </p:pic>
       <p:sp>
         <p:nvSpPr>
-          <p:cNvPr id="21011" name="Text 7"/>
+          <p:cNvPr id="21008" name="Text 4"/>
           <p:cNvSpPr txBox="1"/>
           <p:nvPr/>
         </p:nvSpPr>
         <p:spPr>
           <a:xfrm>
-            <a:off x="4719218" y="2971800"/>
-            <a:ext cx="2753258" cy="502920"/>
+            <a:off x="1261872" y="2569464"/>
+            <a:ext cx="6053328" cy="1097280"/>
           </a:xfrm>
           <a:prstGeom prst="rect">
             <a:avLst/>
@@ -3553,150 +3489,54 @@
           <a:ln/>
         </p:spPr>
         <p:txBody>
-          <a:bodyPr wrap="square" lIns="0" tIns="0" rIns="0" bIns="0" rtlCol="0" anchor="ctr"/>
-          <a:lstStyle/>
-          <a:p>
-            <a:pPr indent="0" marL="0">
-              <a:buNone/>
-            </a:pPr>
-            <a:r>
-              <a:rPr lang="en-US" sz="2200" b="1" dirty="0">
+          <a:bodyPr wrap="square" lIns="0" tIns="0" rIns="0" bIns="0" rtlCol="0" anchor="t"/>
+          <a:lstStyle/>
+          <a:p>
+            <a:pPr indent="0" marL="0">
+              <a:spcAft>
+                <a:spcPts val="200"/>
+              </a:spcAft>
+              <a:buNone/>
+            </a:pPr>
+            <a:r>
+              <a:rPr lang="en-US" sz="1700" b="1" dirty="0">
                 <a:solidFill>
                   <a:schemeClr val="tx1"/>
                 </a:solidFill>
               </a:rPr>
-              <a:t>Cachesider</a:t>
-            </a:r>
-            <a:endParaRPr lang="en-US" sz="2200" dirty="0"/>
-          </a:p>
-        </p:txBody>
-      </p:sp>
-      <p:sp>
-        <p:nvSpPr>
-          <p:cNvPr id="21012" name="Text 8"/>
-          <p:cNvSpPr txBox="1"/>
-          <p:nvPr/>
-        </p:nvSpPr>
-        <p:spPr>
-          <a:xfrm>
-            <a:off x="4719218" y="3611880"/>
-            <a:ext cx="2753258" cy="1828800"/>
-          </a:xfrm>
-          <a:prstGeom prst="rect">
-            <a:avLst/>
-          </a:prstGeom>
-          <a:noFill/>
-          <a:ln/>
-        </p:spPr>
-        <p:txBody>
-          <a:bodyPr wrap="square" lIns="0" tIns="0" rIns="0" bIns="0" rtlCol="0" anchor="t"/>
-          <a:lstStyle/>
-          <a:p>
-            <a:pPr marL="228600" indent="-228600">
+              <a:t>Løste cacher</a:t>
+            </a:r>
+            <a:endParaRPr lang="en-US" sz="1700" dirty="0"/>
+          </a:p>
+          <a:p>
+            <a:pPr indent="0" marL="0">
               <a:spcAft>
-                <a:spcPts val="800"/>
+                <a:spcPts val="200"/>
               </a:spcAft>
-              <a:buSzPct val="100000"/>
-              <a:buChar char="•"/>
-            </a:pPr>
-            <a:r>
-              <a:rPr lang="en-US" sz="1700" dirty="0">
-                <a:solidFill>
-                  <a:schemeClr val="tx1"/>
-                </a:solidFill>
-              </a:rPr>
-              <a:t>Det lille kartet viser ditt valgte kart</a:t>
+              <a:buNone/>
+            </a:pPr>
+            <a:r>
+              <a:rPr lang="en-US" sz="1400" dirty="0">
+                <a:solidFill>
+                  <a:schemeClr val="accent4"/>
+                </a:solidFill>
+              </a:rPr>
+              <a:t>På dine korrigerte koordinater – også når ikonet er flyttet tilbake etter funn</a:t>
             </a:r>
             <a:endParaRPr lang="en-US" sz="1700" dirty="0"/>
           </a:p>
-          <a:p>
-            <a:pPr marL="228600" indent="-228600">
-              <a:spcAft>
-                <a:spcPts val="800"/>
-              </a:spcAft>
-              <a:buSzPct val="100000"/>
-              <a:buChar char="•"/>
-            </a:pPr>
-            <a:r>
-              <a:rPr lang="en-US" sz="1700" dirty="0">
-                <a:solidFill>
-                  <a:schemeClr val="tx1"/>
-                </a:solidFill>
-              </a:rPr>
-              <a:t>Samme demping og overlegg</a:t>
-            </a:r>
-            <a:endParaRPr lang="en-US" sz="1700" dirty="0"/>
-          </a:p>
-          <a:p>
-            <a:pPr marL="228600" indent="-228600">
-              <a:spcAft>
-                <a:spcPts val="800"/>
-              </a:spcAft>
-              <a:buSzPct val="100000"/>
-              <a:buChar char="•"/>
-            </a:pPr>
-            <a:r>
-              <a:rPr lang="en-US" sz="1700" dirty="0">
-                <a:solidFill>
-                  <a:schemeClr val="tx1"/>
-                </a:solidFill>
-              </a:rPr>
-              <a:t>Beholder nettstedets utsnitt</a:t>
-            </a:r>
-            <a:endParaRPr lang="en-US" sz="1700" dirty="0"/>
-          </a:p>
-          <a:p>
-            <a:pPr marL="228600" indent="-228600">
-              <a:spcAft>
-                <a:spcPts val="800"/>
-              </a:spcAft>
-              <a:buSzPct val="100000"/>
-              <a:buChar char="•"/>
-            </a:pPr>
-            <a:r>
-              <a:rPr lang="en-US" sz="1700" dirty="0">
-                <a:solidFill>
-                  <a:schemeClr val="tx1"/>
-                </a:solidFill>
-              </a:rPr>
-              <a:t>Endrer aldri valget ditt</a:t>
-            </a:r>
-            <a:endParaRPr lang="en-US" sz="1700" dirty="0"/>
-          </a:p>
-        </p:txBody>
-      </p:sp>
-      <p:sp>
-        <p:nvSpPr>
-          <p:cNvPr id="21013" name="Kort Hjem"/>
+        </p:txBody>
+      </p:sp>
+      <p:sp>
+        <p:nvSpPr>
+          <p:cNvPr id="21009" name="Ikon pin sirkel"/>
           <p:cNvSpPr/>
           <p:nvPr/>
         </p:nvSpPr>
         <p:spPr>
           <a:xfrm>
-            <a:off x="8158277" y="1508760"/>
-            <a:ext cx="3484778" cy="4206240"/>
-          </a:xfrm>
-          <a:prstGeom prst="roundRect">
-            <a:avLst>
-              <a:gd name="adj" fmla="val 3149"/>
-            </a:avLst>
-          </a:prstGeom>
-          <a:solidFill>
-            <a:schemeClr val="bg2"/>
-          </a:solidFill>
-          <a:ln/>
-        </p:spPr>
-      </p:sp>
-      <p:sp>
-        <p:nvSpPr>
-          <p:cNvPr id="21014" name="Ikon home sirkel"/>
-          <p:cNvSpPr/>
-          <p:nvPr/>
-        </p:nvSpPr>
-        <p:spPr>
-          <a:xfrm>
-            <a:off x="8524037" y="1920240"/>
-            <a:ext cx="822960" cy="822960"/>
+            <a:off x="548640" y="3785616"/>
+            <a:ext cx="512064" cy="512064"/>
           </a:xfrm>
           <a:prstGeom prst="ellipse">
             <a:avLst/>
@@ -3709,7 +3549,7 @@
       </p:sp>
       <p:pic>
         <p:nvPicPr>
-          <p:cNvPr id="21015" name="Ikon home" descr="home">    </p:cNvPr>
+          <p:cNvPr id="21010" name="Ikon pin" descr="pin">    </p:cNvPr>
           <p:cNvPicPr>
             <a:picLocks noChangeAspect="1"/>
           </p:cNvPicPr>
@@ -3723,8 +3563,8 @@
         </p:blipFill>
         <p:spPr>
           <a:xfrm>
-            <a:off x="8705088" y="2101291"/>
-            <a:ext cx="460858" cy="460858"/>
+            <a:off x="661294" y="3898270"/>
+            <a:ext cx="286756" cy="286756"/>
           </a:xfrm>
           <a:prstGeom prst="rect">
             <a:avLst/>
@@ -3733,14 +3573,14 @@
       </p:pic>
       <p:sp>
         <p:nvSpPr>
-          <p:cNvPr id="21016" name="Text 11"/>
+          <p:cNvPr id="21011" name="Text 6"/>
           <p:cNvSpPr txBox="1"/>
           <p:nvPr/>
         </p:nvSpPr>
         <p:spPr>
           <a:xfrm>
-            <a:off x="8524037" y="2971800"/>
-            <a:ext cx="2753258" cy="502920"/>
+            <a:off x="1261872" y="3712464"/>
+            <a:ext cx="6053328" cy="1097280"/>
           </a:xfrm>
           <a:prstGeom prst="rect">
             <a:avLst/>
@@ -3749,34 +3589,98 @@
           <a:ln/>
         </p:spPr>
         <p:txBody>
-          <a:bodyPr wrap="square" lIns="0" tIns="0" rIns="0" bIns="0" rtlCol="0" anchor="ctr"/>
-          <a:lstStyle/>
-          <a:p>
-            <a:pPr indent="0" marL="0">
-              <a:buNone/>
-            </a:pPr>
-            <a:r>
-              <a:rPr lang="en-US" sz="2200" b="1" dirty="0">
+          <a:bodyPr wrap="square" lIns="0" tIns="0" rIns="0" bIns="0" rtlCol="0" anchor="t"/>
+          <a:lstStyle/>
+          <a:p>
+            <a:pPr indent="0" marL="0">
+              <a:spcAft>
+                <a:spcPts val="200"/>
+              </a:spcAft>
+              <a:buNone/>
+            </a:pPr>
+            <a:r>
+              <a:rPr lang="en-US" sz="1700" b="1" dirty="0">
                 <a:solidFill>
                   <a:schemeClr val="tx1"/>
                 </a:solidFill>
               </a:rPr>
-              <a:t>Hjem</a:t>
-            </a:r>
-            <a:endParaRPr lang="en-US" sz="2200" dirty="0"/>
-          </a:p>
-        </p:txBody>
-      </p:sp>
-      <p:sp>
-        <p:nvSpPr>
-          <p:cNvPr id="21017" name="Text 12"/>
+              <a:t>Fysiske steg og final</a:t>
+            </a:r>
+            <a:endParaRPr lang="en-US" sz="1700" dirty="0"/>
+          </a:p>
+          <a:p>
+            <a:pPr indent="0" marL="0">
+              <a:spcAft>
+                <a:spcPts val="200"/>
+              </a:spcAft>
+              <a:buNone/>
+            </a:pPr>
+            <a:r>
+              <a:rPr lang="en-US" sz="1400" dirty="0">
+                <a:solidFill>
+                  <a:schemeClr val="accent4"/>
+                </a:solidFill>
+              </a:rPr>
+              <a:t>Synlige steg i multier, mysterier, Wherigoer og letterboxer, lest fra cachesiden</a:t>
+            </a:r>
+            <a:endParaRPr lang="en-US" sz="1700" dirty="0"/>
+          </a:p>
+        </p:txBody>
+      </p:sp>
+      <p:sp>
+        <p:nvSpPr>
+          <p:cNvPr id="21012" name="Ikon ring sirkel"/>
+          <p:cNvSpPr/>
+          <p:nvPr/>
+        </p:nvSpPr>
+        <p:spPr>
+          <a:xfrm>
+            <a:off x="548640" y="4928616"/>
+            <a:ext cx="512064" cy="512064"/>
+          </a:xfrm>
+          <a:prstGeom prst="ellipse">
+            <a:avLst/>
+          </a:prstGeom>
+          <a:solidFill>
+            <a:schemeClr val="accent1"/>
+          </a:solidFill>
+          <a:ln/>
+        </p:spPr>
+      </p:sp>
+      <p:pic>
+        <p:nvPicPr>
+          <p:cNvPr id="21013" name="Ikon ring" descr="ring">    </p:cNvPr>
+          <p:cNvPicPr>
+            <a:picLocks noChangeAspect="1"/>
+          </p:cNvPicPr>
+          <p:nvPr/>
+        </p:nvPicPr>
+        <p:blipFill>
+          <a:blip r:embed="rId4"/>
+          <a:stretch>
+            <a:fillRect/>
+          </a:stretch>
+        </p:blipFill>
+        <p:spPr>
+          <a:xfrm>
+            <a:off x="661294" y="5041270"/>
+            <a:ext cx="286756" cy="286756"/>
+          </a:xfrm>
+          <a:prstGeom prst="rect">
+            <a:avLst/>
+          </a:prstGeom>
+        </p:spPr>
+      </p:pic>
+      <p:sp>
+        <p:nvSpPr>
+          <p:cNvPr id="21014" name="Text 8"/>
           <p:cNvSpPr txBox="1"/>
           <p:nvPr/>
         </p:nvSpPr>
         <p:spPr>
           <a:xfrm>
-            <a:off x="8524037" y="3611880"/>
-            <a:ext cx="2753258" cy="1828800"/>
+            <a:off x="1261872" y="4855464"/>
+            <a:ext cx="6053328" cy="1097280"/>
           </a:xfrm>
           <a:prstGeom prst="rect">
             <a:avLst/>
@@ -3788,58 +3692,120 @@
           <a:bodyPr wrap="square" lIns="0" tIns="0" rIns="0" bIns="0" rtlCol="0" anchor="t"/>
           <a:lstStyle/>
           <a:p>
-            <a:pPr marL="228600" indent="-228600">
+            <a:pPr indent="0" marL="0">
               <a:spcAft>
-                <a:spcPts val="800"/>
+                <a:spcPts val="200"/>
               </a:spcAft>
-              <a:buSzPct val="100000"/>
-              <a:buChar char="•"/>
-            </a:pPr>
-            <a:r>
-              <a:rPr lang="en-US" sz="1700" dirty="0">
+              <a:buNone/>
+            </a:pPr>
+            <a:r>
+              <a:rPr lang="en-US" sz="1700" b="1" dirty="0">
                 <a:solidFill>
                   <a:schemeClr val="tx1"/>
                 </a:solidFill>
               </a:rPr>
-              <a:t>Ett klikk tar deg hjem</a:t>
+              <a:t>Enkeltsirkel</a:t>
             </a:r>
             <a:endParaRPr lang="en-US" sz="1700" dirty="0"/>
           </a:p>
           <a:p>
-            <a:pPr marL="228600" indent="-228600">
+            <a:pPr indent="0" marL="0">
               <a:spcAft>
-                <a:spcPts val="800"/>
+                <a:spcPts val="200"/>
               </a:spcAft>
-              <a:buSzPct val="100000"/>
-              <a:buChar char="•"/>
-            </a:pPr>
-            <a:r>
-              <a:rPr lang="en-US" sz="1700" dirty="0">
-                <a:solidFill>
-                  <a:schemeClr val="tx1"/>
-                </a:solidFill>
-              </a:rPr>
-              <a:t>Første gang søker du opp adressen</a:t>
+              <a:buNone/>
+            </a:pPr>
+            <a:r>
+              <a:rPr lang="en-US" sz="1400" dirty="0">
+                <a:solidFill>
+                  <a:schemeClr val="accent4"/>
+                </a:solidFill>
+              </a:rPr>
+              <a:t>Høyreklikk hvor som helst og velg 161 m-sirkel</a:t>
             </a:r>
             <a:endParaRPr lang="en-US" sz="1700" dirty="0"/>
           </a:p>
-          <a:p>
-            <a:pPr marL="228600" indent="-228600">
-              <a:spcAft>
-                <a:spcPts val="800"/>
-              </a:spcAft>
-              <a:buSzPct val="100000"/>
-              <a:buChar char="•"/>
-            </a:pPr>
-            <a:r>
-              <a:rPr lang="en-US" sz="1700" dirty="0">
-                <a:solidFill>
-                  <a:schemeClr val="tx1"/>
-                </a:solidFill>
-              </a:rPr>
-              <a:t>Lagres bare i nettleseren din</a:t>
-            </a:r>
-            <a:endParaRPr lang="en-US" sz="1700" dirty="0"/>
+        </p:txBody>
+      </p:sp>
+      <p:sp>
+        <p:nvSpPr>
+          <p:cNvPr id="21015" name="Merke ved en løst cache bakgrunn"/>
+          <p:cNvSpPr/>
+          <p:nvPr/>
+        </p:nvSpPr>
+        <p:spPr>
+          <a:xfrm>
+            <a:off x="7802575" y="1463040"/>
+            <a:ext cx="3840480" cy="2834640"/>
+          </a:xfrm>
+          <a:prstGeom prst="roundRect">
+            <a:avLst>
+              <a:gd name="adj" fmla="val 3871"/>
+            </a:avLst>
+          </a:prstGeom>
+          <a:solidFill>
+            <a:schemeClr val="bg2"/>
+          </a:solidFill>
+          <a:ln/>
+        </p:spPr>
+      </p:sp>
+      <p:pic>
+        <p:nvPicPr>
+          <p:cNvPr id="21016" name="Merke ved en løst cache" descr="Merke ved en løst cache">    </p:cNvPr>
+          <p:cNvPicPr>
+            <a:picLocks noChangeAspect="1"/>
+          </p:cNvPicPr>
+          <p:nvPr/>
+        </p:nvPicPr>
+        <p:blipFill>
+          <a:blip r:embed="rId5"/>
+          <a:stretch>
+            <a:fillRect/>
+          </a:stretch>
+        </p:blipFill>
+        <p:spPr>
+          <a:xfrm>
+            <a:off x="8058607" y="1664208"/>
+            <a:ext cx="3328416" cy="2432304"/>
+          </a:xfrm>
+          <a:prstGeom prst="rect">
+            <a:avLst/>
+          </a:prstGeom>
+        </p:spPr>
+      </p:pic>
+      <p:sp>
+        <p:nvSpPr>
+          <p:cNvPr id="21017" name="Text 10"/>
+          <p:cNvSpPr txBox="1"/>
+          <p:nvPr/>
+        </p:nvSpPr>
+        <p:spPr>
+          <a:xfrm>
+            <a:off x="7802575" y="4526280"/>
+            <a:ext cx="3840480" cy="1280160"/>
+          </a:xfrm>
+          <a:prstGeom prst="rect">
+            <a:avLst/>
+          </a:prstGeom>
+          <a:noFill/>
+          <a:ln/>
+        </p:spPr>
+        <p:txBody>
+          <a:bodyPr wrap="square" lIns="0" tIns="0" rIns="0" bIns="0" rtlCol="0" anchor="t"/>
+          <a:lstStyle/>
+          <a:p>
+            <a:pPr indent="0" marL="0">
+              <a:buNone/>
+            </a:pPr>
+            <a:r>
+              <a:rPr lang="en-US" sz="1500" dirty="0">
+                <a:solidFill>
+                  <a:schemeClr val="accent4"/>
+                </a:solidFill>
+              </a:rPr>
+              <a:t>Der ikke noe cacheikon viser stedet, står et klikkbart merke midt i sirkelen. Musepekeren over en løst cache viser «Endelig plassering»; høyreklikk gir nøyaktige koordinater.</a:t>
+            </a:r>
+            <a:endParaRPr lang="en-US" sz="1500" dirty="0"/>
           </a:p>
         </p:txBody>
       </p:sp>
@@ -3945,7 +3911,7 @@
                   <a:schemeClr val="tx2"/>
                 </a:solidFill>
               </a:rPr>
-              <a:t>Slik ligger kartlagene</a:t>
+              <a:t>161 m-sirkler, cachesider og hjem</a:t>
             </a:r>
             <a:endParaRPr lang="en-US" sz="3600" dirty="0"/>
           </a:p>
@@ -3953,54 +3919,18 @@
       </p:sp>
       <p:sp>
         <p:nvSpPr>
-          <p:cNvPr id="22003" name="Text 1"/>
-          <p:cNvSpPr txBox="1"/>
-          <p:nvPr/>
-        </p:nvSpPr>
-        <p:spPr>
-          <a:xfrm>
-            <a:off x="548640" y="1207008"/>
-            <a:ext cx="11094415" cy="274320"/>
-          </a:xfrm>
-          <a:prstGeom prst="rect">
-            <a:avLst/>
-          </a:prstGeom>
-          <a:noFill/>
-          <a:ln/>
-        </p:spPr>
-        <p:txBody>
-          <a:bodyPr wrap="square" lIns="0" tIns="0" rIns="0" bIns="0" rtlCol="0" anchor="ctr"/>
-          <a:lstStyle/>
-          <a:p>
-            <a:pPr indent="0" marL="0">
-              <a:buNone/>
-            </a:pPr>
-            <a:r>
-              <a:rPr lang="en-US" sz="1100" b="1" spc="100" kern="0" dirty="0">
-                <a:solidFill>
-                  <a:schemeClr val="accent4"/>
-                </a:solidFill>
-              </a:rPr>
-              <a:t>OVER KARTFLISENE</a:t>
-            </a:r>
-            <a:endParaRPr lang="en-US" sz="1100" dirty="0"/>
-          </a:p>
-        </p:txBody>
-      </p:sp>
-      <p:sp>
-        <p:nvSpPr>
-          <p:cNvPr id="22004" name="Lag Kontroller"/>
+          <p:cNvPr id="22003" name="Kort 161 m-sirkler"/>
           <p:cNvSpPr/>
           <p:nvPr/>
         </p:nvSpPr>
         <p:spPr>
           <a:xfrm>
-            <a:off x="548640" y="1517904"/>
-            <a:ext cx="11094415" cy="384048"/>
+            <a:off x="548640" y="1508760"/>
+            <a:ext cx="3484778" cy="4206240"/>
           </a:xfrm>
           <a:prstGeom prst="roundRect">
             <a:avLst>
-              <a:gd name="adj" fmla="val 16667"/>
+              <a:gd name="adj" fmla="val 3149"/>
             </a:avLst>
           </a:prstGeom>
           <a:solidFill>
@@ -4011,14 +3941,58 @@
       </p:sp>
       <p:sp>
         <p:nvSpPr>
-          <p:cNvPr id="22005" name="Text 3"/>
+          <p:cNvPr id="22004" name="Ikon circles sirkel"/>
+          <p:cNvSpPr/>
+          <p:nvPr/>
+        </p:nvSpPr>
+        <p:spPr>
+          <a:xfrm>
+            <a:off x="914400" y="1920240"/>
+            <a:ext cx="822960" cy="822960"/>
+          </a:xfrm>
+          <a:prstGeom prst="ellipse">
+            <a:avLst/>
+          </a:prstGeom>
+          <a:solidFill>
+            <a:schemeClr val="accent1"/>
+          </a:solidFill>
+          <a:ln/>
+        </p:spPr>
+      </p:sp>
+      <p:pic>
+        <p:nvPicPr>
+          <p:cNvPr id="22005" name="Ikon circles" descr="circles">    </p:cNvPr>
+          <p:cNvPicPr>
+            <a:picLocks noChangeAspect="1"/>
+          </p:cNvPicPr>
+          <p:nvPr/>
+        </p:nvPicPr>
+        <p:blipFill>
+          <a:blip r:embed="rId1"/>
+          <a:stretch>
+            <a:fillRect/>
+          </a:stretch>
+        </p:blipFill>
+        <p:spPr>
+          <a:xfrm>
+            <a:off x="1095451" y="2101291"/>
+            <a:ext cx="460858" cy="460858"/>
+          </a:xfrm>
+          <a:prstGeom prst="rect">
+            <a:avLst/>
+          </a:prstGeom>
+        </p:spPr>
+      </p:pic>
+      <p:sp>
+        <p:nvSpPr>
+          <p:cNvPr id="22006" name="Text 3"/>
           <p:cNvSpPr txBox="1"/>
           <p:nvPr/>
         </p:nvSpPr>
         <p:spPr>
           <a:xfrm>
-            <a:off x="749808" y="1517904"/>
-            <a:ext cx="2240280" cy="384048"/>
+            <a:off x="914400" y="2971800"/>
+            <a:ext cx="2753258" cy="502920"/>
           </a:xfrm>
           <a:prstGeom prst="rect">
             <a:avLst/>
@@ -4034,27 +4008,27 @@
               <a:buNone/>
             </a:pPr>
             <a:r>
-              <a:rPr lang="en-US" sz="1400" b="1" dirty="0">
+              <a:rPr lang="en-US" sz="2200" b="1" dirty="0">
                 <a:solidFill>
                   <a:schemeClr val="tx1"/>
                 </a:solidFill>
               </a:rPr>
-              <a:t>Kontroller</a:t>
-            </a:r>
-            <a:endParaRPr lang="en-US" sz="1400" dirty="0"/>
-          </a:p>
-        </p:txBody>
-      </p:sp>
-      <p:sp>
-        <p:nvSpPr>
-          <p:cNvPr id="22006" name="Text 4"/>
+              <a:t>161 m-sirkler</a:t>
+            </a:r>
+            <a:endParaRPr lang="en-US" sz="2200" dirty="0"/>
+          </a:p>
+        </p:txBody>
+      </p:sp>
+      <p:sp>
+        <p:nvSpPr>
+          <p:cNvPr id="22007" name="Text 4"/>
           <p:cNvSpPr txBox="1"/>
           <p:nvPr/>
         </p:nvSpPr>
         <p:spPr>
           <a:xfrm>
-            <a:off x="3264408" y="1517904"/>
-            <a:ext cx="1783080" cy="384048"/>
+            <a:off x="914400" y="3611880"/>
+            <a:ext cx="2753258" cy="1828800"/>
           </a:xfrm>
           <a:prstGeom prst="rect">
             <a:avLst/>
@@ -4063,77 +4037,96 @@
           <a:ln/>
         </p:spPr>
         <p:txBody>
-          <a:bodyPr wrap="square" lIns="0" tIns="0" rIns="0" bIns="0" rtlCol="0" anchor="ctr"/>
-          <a:lstStyle/>
-          <a:p>
-            <a:pPr indent="0" marL="0">
-              <a:buNone/>
-            </a:pPr>
-            <a:r>
-              <a:rPr lang="en-US" sz="1200" dirty="0">
+          <a:bodyPr wrap="square" lIns="0" tIns="0" rIns="0" bIns="0" rtlCol="0" anchor="t"/>
+          <a:lstStyle/>
+          <a:p>
+            <a:pPr marL="228600" indent="-228600">
+              <a:spcAft>
+                <a:spcPts val="800"/>
+              </a:spcAft>
+              <a:buSzPct val="100000"/>
+              <a:buChar char="•"/>
+            </a:pPr>
+            <a:r>
+              <a:rPr lang="en-US" sz="1700" dirty="0">
                 <a:solidFill>
                   <a:schemeClr val="tx1"/>
                 </a:solidFill>
-                <a:latin typeface="Courier New" pitchFamily="34" charset="0"/>
-                <a:ea typeface="Courier New" pitchFamily="34" charset="-122"/>
-                <a:cs typeface="Courier New" pitchFamily="34" charset="-120"/>
-              </a:rPr>
-              <a:t>kontroller · 1000</a:t>
-            </a:r>
-            <a:endParaRPr lang="en-US" sz="1200" dirty="0"/>
-          </a:p>
-        </p:txBody>
-      </p:sp>
-      <p:sp>
-        <p:nvSpPr>
-          <p:cNvPr id="22007" name="Text 5"/>
-          <p:cNvSpPr txBox="1"/>
-          <p:nvPr/>
-        </p:nvSpPr>
-        <p:spPr>
-          <a:xfrm>
-            <a:off x="5138928" y="1517904"/>
-            <a:ext cx="6302959" cy="384048"/>
-          </a:xfrm>
-          <a:prstGeom prst="rect">
-            <a:avLst/>
-          </a:prstGeom>
-          <a:noFill/>
-          <a:ln/>
-        </p:spPr>
-        <p:txBody>
-          <a:bodyPr wrap="square" lIns="0" tIns="0" rIns="0" bIns="0" rtlCol="0" anchor="ctr"/>
-          <a:lstStyle/>
-          <a:p>
-            <a:pPr indent="0" marL="0">
-              <a:buNone/>
-            </a:pPr>
-            <a:r>
-              <a:rPr lang="en-US" sz="1300" dirty="0">
+              </a:rPr>
+              <a:t>Der noe er utplassert – se forrige lysbilde</a:t>
+            </a:r>
+            <a:endParaRPr lang="en-US" sz="1700" dirty="0"/>
+          </a:p>
+          <a:p>
+            <a:pPr marL="228600" indent="-228600">
+              <a:spcAft>
+                <a:spcPts val="800"/>
+              </a:spcAft>
+              <a:buSzPct val="100000"/>
+              <a:buChar char="•"/>
+            </a:pPr>
+            <a:r>
+              <a:rPr lang="en-US" sz="1700" dirty="0">
                 <a:solidFill>
                   <a:schemeClr val="tx1"/>
                 </a:solidFill>
               </a:rPr>
-              <a:t>verktøylinjen, kartlagpanelet, koordinatvisningen og kreditteringen</a:t>
-            </a:r>
-            <a:endParaRPr lang="en-US" sz="1300" dirty="0"/>
-          </a:p>
-        </p:txBody>
-      </p:sp>
-      <p:sp>
-        <p:nvSpPr>
-          <p:cNvPr id="22008" name="Lag Bobler"/>
+              <a:t>Vises fra zoomnivå 15</a:t>
+            </a:r>
+            <a:endParaRPr lang="en-US" sz="1700" dirty="0"/>
+          </a:p>
+          <a:p>
+            <a:pPr marL="228600" indent="-228600">
+              <a:spcAft>
+                <a:spcPts val="800"/>
+              </a:spcAft>
+              <a:buSzPct val="100000"/>
+              <a:buChar char="•"/>
+            </a:pPr>
+            <a:r>
+              <a:rPr lang="en-US" sz="1700" dirty="0">
+                <a:solidFill>
+                  <a:schemeClr val="tx1"/>
+                </a:solidFill>
+              </a:rPr>
+              <a:t>Følger kartet og hindrer aldri klikk</a:t>
+            </a:r>
+            <a:endParaRPr lang="en-US" sz="1700" dirty="0"/>
+          </a:p>
+          <a:p>
+            <a:pPr marL="228600" indent="-228600">
+              <a:spcAft>
+                <a:spcPts val="800"/>
+              </a:spcAft>
+              <a:buSzPct val="100000"/>
+              <a:buChar char="•"/>
+            </a:pPr>
+            <a:r>
+              <a:rPr lang="en-US" sz="1700" dirty="0">
+                <a:solidFill>
+                  <a:schemeClr val="tx1"/>
+                </a:solidFill>
+              </a:rPr>
+              <a:t>Enkeltsirkel: høyreklikk</a:t>
+            </a:r>
+            <a:endParaRPr lang="en-US" sz="1700" dirty="0"/>
+          </a:p>
+        </p:txBody>
+      </p:sp>
+      <p:sp>
+        <p:nvSpPr>
+          <p:cNvPr id="22008" name="Kort Cachesider"/>
           <p:cNvSpPr/>
           <p:nvPr/>
         </p:nvSpPr>
         <p:spPr>
           <a:xfrm>
-            <a:off x="548640" y="1947672"/>
-            <a:ext cx="11094415" cy="384048"/>
+            <a:off x="4353458" y="1508760"/>
+            <a:ext cx="3484778" cy="4206240"/>
           </a:xfrm>
           <a:prstGeom prst="roundRect">
             <a:avLst>
-              <a:gd name="adj" fmla="val 16667"/>
+              <a:gd name="adj" fmla="val 3149"/>
             </a:avLst>
           </a:prstGeom>
           <a:solidFill>
@@ -4144,14 +4137,58 @@
       </p:sp>
       <p:sp>
         <p:nvSpPr>
-          <p:cNvPr id="22009" name="Text 7"/>
+          <p:cNvPr id="22009" name="Ikon layers sirkel"/>
+          <p:cNvSpPr/>
+          <p:nvPr/>
+        </p:nvSpPr>
+        <p:spPr>
+          <a:xfrm>
+            <a:off x="4719218" y="1920240"/>
+            <a:ext cx="822960" cy="822960"/>
+          </a:xfrm>
+          <a:prstGeom prst="ellipse">
+            <a:avLst/>
+          </a:prstGeom>
+          <a:solidFill>
+            <a:schemeClr val="accent1"/>
+          </a:solidFill>
+          <a:ln/>
+        </p:spPr>
+      </p:sp>
+      <p:pic>
+        <p:nvPicPr>
+          <p:cNvPr id="22010" name="Ikon layers" descr="layers">    </p:cNvPr>
+          <p:cNvPicPr>
+            <a:picLocks noChangeAspect="1"/>
+          </p:cNvPicPr>
+          <p:nvPr/>
+        </p:nvPicPr>
+        <p:blipFill>
+          <a:blip r:embed="rId2"/>
+          <a:stretch>
+            <a:fillRect/>
+          </a:stretch>
+        </p:blipFill>
+        <p:spPr>
+          <a:xfrm>
+            <a:off x="4900270" y="2101291"/>
+            <a:ext cx="460858" cy="460858"/>
+          </a:xfrm>
+          <a:prstGeom prst="rect">
+            <a:avLst/>
+          </a:prstGeom>
+        </p:spPr>
+      </p:pic>
+      <p:sp>
+        <p:nvSpPr>
+          <p:cNvPr id="22011" name="Text 7"/>
           <p:cNvSpPr txBox="1"/>
           <p:nvPr/>
         </p:nvSpPr>
         <p:spPr>
           <a:xfrm>
-            <a:off x="749808" y="1947672"/>
-            <a:ext cx="2240280" cy="384048"/>
+            <a:off x="4719218" y="2971800"/>
+            <a:ext cx="2753258" cy="502920"/>
           </a:xfrm>
           <a:prstGeom prst="rect">
             <a:avLst/>
@@ -4167,27 +4204,27 @@
               <a:buNone/>
             </a:pPr>
             <a:r>
-              <a:rPr lang="en-US" sz="1400" b="1" dirty="0">
+              <a:rPr lang="en-US" sz="2200" b="1" dirty="0">
                 <a:solidFill>
                   <a:schemeClr val="tx1"/>
                 </a:solidFill>
               </a:rPr>
-              <a:t>Bobler</a:t>
-            </a:r>
-            <a:endParaRPr lang="en-US" sz="1400" dirty="0"/>
-          </a:p>
-        </p:txBody>
-      </p:sp>
-      <p:sp>
-        <p:nvSpPr>
-          <p:cNvPr id="22010" name="Text 8"/>
+              <a:t>Cachesider</a:t>
+            </a:r>
+            <a:endParaRPr lang="en-US" sz="2200" dirty="0"/>
+          </a:p>
+        </p:txBody>
+      </p:sp>
+      <p:sp>
+        <p:nvSpPr>
+          <p:cNvPr id="22012" name="Text 8"/>
           <p:cNvSpPr txBox="1"/>
           <p:nvPr/>
         </p:nvSpPr>
         <p:spPr>
           <a:xfrm>
-            <a:off x="3264408" y="1947672"/>
-            <a:ext cx="1783080" cy="384048"/>
+            <a:off x="4719218" y="3611880"/>
+            <a:ext cx="2753258" cy="1828800"/>
           </a:xfrm>
           <a:prstGeom prst="rect">
             <a:avLst/>
@@ -4196,77 +4233,96 @@
           <a:ln/>
         </p:spPr>
         <p:txBody>
-          <a:bodyPr wrap="square" lIns="0" tIns="0" rIns="0" bIns="0" rtlCol="0" anchor="ctr"/>
-          <a:lstStyle/>
-          <a:p>
-            <a:pPr indent="0" marL="0">
-              <a:buNone/>
-            </a:pPr>
-            <a:r>
-              <a:rPr lang="en-US" sz="1200" dirty="0">
+          <a:bodyPr wrap="square" lIns="0" tIns="0" rIns="0" bIns="0" rtlCol="0" anchor="t"/>
+          <a:lstStyle/>
+          <a:p>
+            <a:pPr marL="228600" indent="-228600">
+              <a:spcAft>
+                <a:spcPts val="800"/>
+              </a:spcAft>
+              <a:buSzPct val="100000"/>
+              <a:buChar char="•"/>
+            </a:pPr>
+            <a:r>
+              <a:rPr lang="en-US" sz="1700" dirty="0">
                 <a:solidFill>
                   <a:schemeClr val="tx1"/>
                 </a:solidFill>
-                <a:latin typeface="Courier New" pitchFamily="34" charset="0"/>
-                <a:ea typeface="Courier New" pitchFamily="34" charset="-122"/>
-                <a:cs typeface="Courier New" pitchFamily="34" charset="-120"/>
-              </a:rPr>
-              <a:t>popupPane · 700</a:t>
-            </a:r>
-            <a:endParaRPr lang="en-US" sz="1200" dirty="0"/>
-          </a:p>
-        </p:txBody>
-      </p:sp>
-      <p:sp>
-        <p:nvSpPr>
-          <p:cNvPr id="22011" name="Text 9"/>
-          <p:cNvSpPr txBox="1"/>
-          <p:nvPr/>
-        </p:nvSpPr>
-        <p:spPr>
-          <a:xfrm>
-            <a:off x="5138928" y="1947672"/>
-            <a:ext cx="6302959" cy="384048"/>
-          </a:xfrm>
-          <a:prstGeom prst="rect">
-            <a:avLst/>
-          </a:prstGeom>
-          <a:noFill/>
-          <a:ln/>
-        </p:spPr>
-        <p:txBody>
-          <a:bodyPr wrap="square" lIns="0" tIns="0" rIns="0" bIns="0" rtlCol="0" anchor="ctr"/>
-          <a:lstStyle/>
-          <a:p>
-            <a:pPr indent="0" marL="0">
-              <a:buNone/>
-            </a:pPr>
-            <a:r>
-              <a:rPr lang="en-US" sz="1300" dirty="0">
+              </a:rPr>
+              <a:t>Det lille kartet viser ditt valgte kart</a:t>
+            </a:r>
+            <a:endParaRPr lang="en-US" sz="1700" dirty="0"/>
+          </a:p>
+          <a:p>
+            <a:pPr marL="228600" indent="-228600">
+              <a:spcAft>
+                <a:spcPts val="800"/>
+              </a:spcAft>
+              <a:buSzPct val="100000"/>
+              <a:buChar char="•"/>
+            </a:pPr>
+            <a:r>
+              <a:rPr lang="en-US" sz="1700" dirty="0">
                 <a:solidFill>
                   <a:schemeClr val="tx1"/>
                 </a:solidFill>
               </a:rPr>
-              <a:t>høyreklikkboblen og andre kartbobler</a:t>
-            </a:r>
-            <a:endParaRPr lang="en-US" sz="1300" dirty="0"/>
-          </a:p>
-        </p:txBody>
-      </p:sp>
-      <p:sp>
-        <p:nvSpPr>
-          <p:cNvPr id="22012" name="Lag Markører"/>
+              <a:t>Samme demping og overlegg</a:t>
+            </a:r>
+            <a:endParaRPr lang="en-US" sz="1700" dirty="0"/>
+          </a:p>
+          <a:p>
+            <a:pPr marL="228600" indent="-228600">
+              <a:spcAft>
+                <a:spcPts val="800"/>
+              </a:spcAft>
+              <a:buSzPct val="100000"/>
+              <a:buChar char="•"/>
+            </a:pPr>
+            <a:r>
+              <a:rPr lang="en-US" sz="1700" dirty="0">
+                <a:solidFill>
+                  <a:schemeClr val="tx1"/>
+                </a:solidFill>
+              </a:rPr>
+              <a:t>Beholder nettstedets utsnitt</a:t>
+            </a:r>
+            <a:endParaRPr lang="en-US" sz="1700" dirty="0"/>
+          </a:p>
+          <a:p>
+            <a:pPr marL="228600" indent="-228600">
+              <a:spcAft>
+                <a:spcPts val="800"/>
+              </a:spcAft>
+              <a:buSzPct val="100000"/>
+              <a:buChar char="•"/>
+            </a:pPr>
+            <a:r>
+              <a:rPr lang="en-US" sz="1700" dirty="0">
+                <a:solidFill>
+                  <a:schemeClr val="tx1"/>
+                </a:solidFill>
+              </a:rPr>
+              <a:t>Endrer aldri valget ditt</a:t>
+            </a:r>
+            <a:endParaRPr lang="en-US" sz="1700" dirty="0"/>
+          </a:p>
+        </p:txBody>
+      </p:sp>
+      <p:sp>
+        <p:nvSpPr>
+          <p:cNvPr id="22013" name="Kort Hjem"/>
           <p:cNvSpPr/>
           <p:nvPr/>
         </p:nvSpPr>
         <p:spPr>
           <a:xfrm>
-            <a:off x="548640" y="2377440"/>
-            <a:ext cx="11094415" cy="384048"/>
+            <a:off x="8158277" y="1508760"/>
+            <a:ext cx="3484778" cy="4206240"/>
           </a:xfrm>
           <a:prstGeom prst="roundRect">
             <a:avLst>
-              <a:gd name="adj" fmla="val 16667"/>
+              <a:gd name="adj" fmla="val 3149"/>
             </a:avLst>
           </a:prstGeom>
           <a:solidFill>
@@ -4277,565 +4333,17 @@
       </p:sp>
       <p:sp>
         <p:nvSpPr>
-          <p:cNvPr id="22013" name="Text 11"/>
-          <p:cNvSpPr txBox="1"/>
-          <p:nvPr/>
-        </p:nvSpPr>
-        <p:spPr>
-          <a:xfrm>
-            <a:off x="749808" y="2377440"/>
-            <a:ext cx="2240280" cy="384048"/>
-          </a:xfrm>
-          <a:prstGeom prst="rect">
-            <a:avLst/>
-          </a:prstGeom>
-          <a:noFill/>
-          <a:ln/>
-        </p:spPr>
-        <p:txBody>
-          <a:bodyPr wrap="square" lIns="0" tIns="0" rIns="0" bIns="0" rtlCol="0" anchor="ctr"/>
-          <a:lstStyle/>
-          <a:p>
-            <a:pPr indent="0" marL="0">
-              <a:buNone/>
-            </a:pPr>
-            <a:r>
-              <a:rPr lang="en-US" sz="1400" b="1" dirty="0">
-                <a:solidFill>
-                  <a:schemeClr val="tx1"/>
-                </a:solidFill>
-              </a:rPr>
-              <a:t>Markører</a:t>
-            </a:r>
-            <a:endParaRPr lang="en-US" sz="1400" dirty="0"/>
-          </a:p>
-        </p:txBody>
-      </p:sp>
-      <p:sp>
-        <p:nvSpPr>
-          <p:cNvPr id="22014" name="Text 12"/>
-          <p:cNvSpPr txBox="1"/>
-          <p:nvPr/>
-        </p:nvSpPr>
-        <p:spPr>
-          <a:xfrm>
-            <a:off x="3264408" y="2377440"/>
-            <a:ext cx="1783080" cy="384048"/>
-          </a:xfrm>
-          <a:prstGeom prst="rect">
-            <a:avLst/>
-          </a:prstGeom>
-          <a:noFill/>
-          <a:ln/>
-        </p:spPr>
-        <p:txBody>
-          <a:bodyPr wrap="square" lIns="0" tIns="0" rIns="0" bIns="0" rtlCol="0" anchor="ctr"/>
-          <a:lstStyle/>
-          <a:p>
-            <a:pPr indent="0" marL="0">
-              <a:buNone/>
-            </a:pPr>
-            <a:r>
-              <a:rPr lang="en-US" sz="1200" dirty="0">
-                <a:solidFill>
-                  <a:schemeClr val="tx1"/>
-                </a:solidFill>
-                <a:latin typeface="Courier New" pitchFamily="34" charset="0"/>
-                <a:ea typeface="Courier New" pitchFamily="34" charset="-122"/>
-                <a:cs typeface="Courier New" pitchFamily="34" charset="-120"/>
-              </a:rPr>
-              <a:t>markerPane · 600</a:t>
-            </a:r>
-            <a:endParaRPr lang="en-US" sz="1200" dirty="0"/>
-          </a:p>
-        </p:txBody>
-      </p:sp>
-      <p:sp>
-        <p:nvSpPr>
-          <p:cNvPr id="22015" name="Text 13"/>
-          <p:cNvSpPr txBox="1"/>
-          <p:nvPr/>
-        </p:nvSpPr>
-        <p:spPr>
-          <a:xfrm>
-            <a:off x="5138928" y="2377440"/>
-            <a:ext cx="6302959" cy="384048"/>
-          </a:xfrm>
-          <a:prstGeom prst="rect">
-            <a:avLst/>
-          </a:prstGeom>
-          <a:noFill/>
-          <a:ln/>
-        </p:spPr>
-        <p:txBody>
-          <a:bodyPr wrap="square" lIns="0" tIns="0" rIns="0" bIns="0" rtlCol="0" anchor="ctr"/>
-          <a:lstStyle/>
-          <a:p>
-            <a:pPr indent="0" marL="0">
-              <a:buNone/>
-            </a:pPr>
-            <a:r>
-              <a:rPr lang="en-US" sz="1300" dirty="0">
-                <a:solidFill>
-                  <a:schemeClr val="tx1"/>
-                </a:solidFill>
-              </a:rPr>
-              <a:t>cacheikonene på /play/map, merkenåler, etiketter og posisjonen din</a:t>
-            </a:r>
-            <a:endParaRPr lang="en-US" sz="1300" dirty="0"/>
-          </a:p>
-        </p:txBody>
-      </p:sp>
-      <p:sp>
-        <p:nvSpPr>
-          <p:cNvPr id="22016" name="Lag Tegninger"/>
+          <p:cNvPr id="22014" name="Ikon home sirkel"/>
           <p:cNvSpPr/>
           <p:nvPr/>
         </p:nvSpPr>
         <p:spPr>
           <a:xfrm>
-            <a:off x="548640" y="2807208"/>
-            <a:ext cx="11094415" cy="384048"/>
-          </a:xfrm>
-          <a:prstGeom prst="roundRect">
-            <a:avLst>
-              <a:gd name="adj" fmla="val 16667"/>
-            </a:avLst>
-          </a:prstGeom>
-          <a:solidFill>
-            <a:schemeClr val="bg2"/>
-          </a:solidFill>
-          <a:ln/>
-        </p:spPr>
-      </p:sp>
-      <p:sp>
-        <p:nvSpPr>
-          <p:cNvPr id="22017" name="Text 15"/>
-          <p:cNvSpPr txBox="1"/>
-          <p:nvPr/>
-        </p:nvSpPr>
-        <p:spPr>
-          <a:xfrm>
-            <a:off x="749808" y="2807208"/>
-            <a:ext cx="2240280" cy="384048"/>
-          </a:xfrm>
-          <a:prstGeom prst="rect">
-            <a:avLst/>
-          </a:prstGeom>
-          <a:noFill/>
-          <a:ln/>
-        </p:spPr>
-        <p:txBody>
-          <a:bodyPr wrap="square" lIns="0" tIns="0" rIns="0" bIns="0" rtlCol="0" anchor="ctr"/>
-          <a:lstStyle/>
-          <a:p>
-            <a:pPr indent="0" marL="0">
-              <a:buNone/>
-            </a:pPr>
-            <a:r>
-              <a:rPr lang="en-US" sz="1400" b="1" dirty="0">
-                <a:solidFill>
-                  <a:schemeClr val="tx1"/>
-                </a:solidFill>
-              </a:rPr>
-              <a:t>Tegninger</a:t>
-            </a:r>
-            <a:endParaRPr lang="en-US" sz="1400" dirty="0"/>
-          </a:p>
-        </p:txBody>
-      </p:sp>
-      <p:sp>
-        <p:nvSpPr>
-          <p:cNvPr id="22018" name="Text 16"/>
-          <p:cNvSpPr txBox="1"/>
-          <p:nvPr/>
-        </p:nvSpPr>
-        <p:spPr>
-          <a:xfrm>
-            <a:off x="3264408" y="2807208"/>
-            <a:ext cx="1783080" cy="384048"/>
-          </a:xfrm>
-          <a:prstGeom prst="rect">
-            <a:avLst/>
-          </a:prstGeom>
-          <a:noFill/>
-          <a:ln/>
-        </p:spPr>
-        <p:txBody>
-          <a:bodyPr wrap="square" lIns="0" tIns="0" rIns="0" bIns="0" rtlCol="0" anchor="ctr"/>
-          <a:lstStyle/>
-          <a:p>
-            <a:pPr indent="0" marL="0">
-              <a:buNone/>
-            </a:pPr>
-            <a:r>
-              <a:rPr lang="en-US" sz="1200" dirty="0">
-                <a:solidFill>
-                  <a:schemeClr val="tx1"/>
-                </a:solidFill>
-                <a:latin typeface="Courier New" pitchFamily="34" charset="0"/>
-                <a:ea typeface="Courier New" pitchFamily="34" charset="-122"/>
-                <a:cs typeface="Courier New" pitchFamily="34" charset="-120"/>
-              </a:rPr>
-              <a:t>overlayPane · 400</a:t>
-            </a:r>
-            <a:endParaRPr lang="en-US" sz="1200" dirty="0"/>
-          </a:p>
-        </p:txBody>
-      </p:sp>
-      <p:sp>
-        <p:nvSpPr>
-          <p:cNvPr id="22019" name="Text 17"/>
-          <p:cNvSpPr txBox="1"/>
-          <p:nvPr/>
-        </p:nvSpPr>
-        <p:spPr>
-          <a:xfrm>
-            <a:off x="5138928" y="2807208"/>
-            <a:ext cx="6302959" cy="384048"/>
-          </a:xfrm>
-          <a:prstGeom prst="rect">
-            <a:avLst/>
-          </a:prstGeom>
-          <a:noFill/>
-          <a:ln/>
-        </p:spPr>
-        <p:txBody>
-          <a:bodyPr wrap="square" lIns="0" tIns="0" rIns="0" bIns="0" rtlCol="0" anchor="ctr"/>
-          <a:lstStyle/>
-          <a:p>
-            <a:pPr indent="0" marL="0">
-              <a:buNone/>
-            </a:pPr>
-            <a:r>
-              <a:rPr lang="en-US" sz="1300" dirty="0">
-                <a:solidFill>
-                  <a:schemeClr val="tx1"/>
-                </a:solidFill>
-              </a:rPr>
-              <a:t>161 m-sirkler, målelinjer, projiseringslinjer og nøyaktighetssirkelen</a:t>
-            </a:r>
-            <a:endParaRPr lang="en-US" sz="1300" dirty="0"/>
-          </a:p>
-        </p:txBody>
-      </p:sp>
-      <p:sp>
-        <p:nvSpPr>
-          <p:cNvPr id="22020" name="Text 18"/>
-          <p:cNvSpPr txBox="1"/>
-          <p:nvPr/>
-        </p:nvSpPr>
-        <p:spPr>
-          <a:xfrm>
-            <a:off x="548640" y="3328416"/>
-            <a:ext cx="11094415" cy="274320"/>
-          </a:xfrm>
-          <a:prstGeom prst="rect">
-            <a:avLst/>
-          </a:prstGeom>
-          <a:noFill/>
-          <a:ln/>
-        </p:spPr>
-        <p:txBody>
-          <a:bodyPr wrap="square" lIns="0" tIns="0" rIns="0" bIns="0" rtlCol="0" anchor="ctr"/>
-          <a:lstStyle/>
-          <a:p>
-            <a:pPr indent="0" marL="0">
-              <a:buNone/>
-            </a:pPr>
-            <a:r>
-              <a:rPr lang="en-US" sz="1100" b="1" spc="100" kern="0" dirty="0">
-                <a:solidFill>
-                  <a:schemeClr val="accent4"/>
-                </a:solidFill>
-              </a:rPr>
-              <a:t>KARTFLISENE (TILEPANE · 200) – SORTERT ETTER Z-INDEKS</a:t>
-            </a:r>
-            <a:endParaRPr lang="en-US" sz="1100" dirty="0"/>
-          </a:p>
-        </p:txBody>
-      </p:sp>
-      <p:sp>
-        <p:nvSpPr>
-          <p:cNvPr id="22021" name="Lag Nettstedets øvrige fliser"/>
-          <p:cNvSpPr/>
-          <p:nvPr/>
-        </p:nvSpPr>
-        <p:spPr>
-          <a:xfrm>
-            <a:off x="548640" y="3639312"/>
-            <a:ext cx="11094415" cy="384048"/>
-          </a:xfrm>
-          <a:prstGeom prst="roundRect">
-            <a:avLst>
-              <a:gd name="adj" fmla="val 16667"/>
-            </a:avLst>
-          </a:prstGeom>
-          <a:solidFill>
-            <a:schemeClr val="accent2"/>
-          </a:solidFill>
-          <a:ln/>
-        </p:spPr>
-      </p:sp>
-      <p:sp>
-        <p:nvSpPr>
-          <p:cNvPr id="22022" name="Text 20"/>
-          <p:cNvSpPr txBox="1"/>
-          <p:nvPr/>
-        </p:nvSpPr>
-        <p:spPr>
-          <a:xfrm>
-            <a:off x="749808" y="3639312"/>
-            <a:ext cx="2240280" cy="384048"/>
-          </a:xfrm>
-          <a:prstGeom prst="rect">
-            <a:avLst/>
-          </a:prstGeom>
-          <a:noFill/>
-          <a:ln/>
-        </p:spPr>
-        <p:txBody>
-          <a:bodyPr wrap="square" lIns="0" tIns="0" rIns="0" bIns="0" rtlCol="0" anchor="ctr"/>
-          <a:lstStyle/>
-          <a:p>
-            <a:pPr indent="0" marL="0">
-              <a:buNone/>
-            </a:pPr>
-            <a:r>
-              <a:rPr lang="en-US" sz="1400" b="1" dirty="0">
-                <a:solidFill>
-                  <a:schemeClr val="bg1"/>
-                </a:solidFill>
-              </a:rPr>
-              <a:t>Nettstedets øvrige fliser</a:t>
-            </a:r>
-            <a:endParaRPr lang="en-US" sz="1400" dirty="0"/>
-          </a:p>
-        </p:txBody>
-      </p:sp>
-      <p:sp>
-        <p:nvSpPr>
-          <p:cNvPr id="22023" name="Text 21"/>
-          <p:cNvSpPr txBox="1"/>
-          <p:nvPr/>
-        </p:nvSpPr>
-        <p:spPr>
-          <a:xfrm>
-            <a:off x="3264408" y="3639312"/>
-            <a:ext cx="1783080" cy="384048"/>
-          </a:xfrm>
-          <a:prstGeom prst="rect">
-            <a:avLst/>
-          </a:prstGeom>
-          <a:noFill/>
-          <a:ln/>
-        </p:spPr>
-        <p:txBody>
-          <a:bodyPr wrap="square" lIns="0" tIns="0" rIns="0" bIns="0" rtlCol="0" anchor="ctr"/>
-          <a:lstStyle/>
-          <a:p>
-            <a:pPr indent="0" marL="0">
-              <a:buNone/>
-            </a:pPr>
-            <a:r>
-              <a:rPr lang="en-US" sz="1200" dirty="0">
-                <a:solidFill>
-                  <a:schemeClr val="bg1"/>
-                </a:solidFill>
-                <a:latin typeface="Courier New" pitchFamily="34" charset="0"/>
-                <a:ea typeface="Courier New" pitchFamily="34" charset="-122"/>
-                <a:cs typeface="Courier New" pitchFamily="34" charset="-120"/>
-              </a:rPr>
-              <a:t>z = bz + 10</a:t>
-            </a:r>
-            <a:endParaRPr lang="en-US" sz="1200" dirty="0"/>
-          </a:p>
-        </p:txBody>
-      </p:sp>
-      <p:sp>
-        <p:nvSpPr>
-          <p:cNvPr id="22024" name="Text 22"/>
-          <p:cNvSpPr txBox="1"/>
-          <p:nvPr/>
-        </p:nvSpPr>
-        <p:spPr>
-          <a:xfrm>
-            <a:off x="5138928" y="3639312"/>
-            <a:ext cx="6302959" cy="384048"/>
-          </a:xfrm>
-          <a:prstGeom prst="rect">
-            <a:avLst/>
-          </a:prstGeom>
-          <a:noFill/>
-          <a:ln/>
-        </p:spPr>
-        <p:txBody>
-          <a:bodyPr wrap="square" lIns="0" tIns="0" rIns="0" bIns="0" rtlCol="0" anchor="ctr"/>
-          <a:lstStyle/>
-          <a:p>
-            <a:pPr indent="0" marL="0">
-              <a:buNone/>
-            </a:pPr>
-            <a:r>
-              <a:rPr lang="en-US" sz="1300" dirty="0">
-                <a:solidFill>
-                  <a:schemeClr val="bg1"/>
-                </a:solidFill>
-              </a:rPr>
-              <a:t>cacheikonene på /map – løftes alltid over dine lag</a:t>
-            </a:r>
-            <a:endParaRPr lang="en-US" sz="1300" dirty="0"/>
-          </a:p>
-        </p:txBody>
-      </p:sp>
-      <p:sp>
-        <p:nvSpPr>
-          <p:cNvPr id="22025" name="Lag Forhåndsvisning"/>
-          <p:cNvSpPr/>
-          <p:nvPr/>
-        </p:nvSpPr>
-        <p:spPr>
-          <a:xfrm>
-            <a:off x="548640" y="4069080"/>
-            <a:ext cx="11094415" cy="384048"/>
-          </a:xfrm>
-          <a:prstGeom prst="roundRect">
-            <a:avLst>
-              <a:gd name="adj" fmla="val 16667"/>
-            </a:avLst>
-          </a:prstGeom>
-          <a:solidFill>
-            <a:schemeClr val="accent3"/>
-          </a:solidFill>
-          <a:ln/>
-        </p:spPr>
-      </p:sp>
-      <p:sp>
-        <p:nvSpPr>
-          <p:cNvPr id="22026" name="Text 24"/>
-          <p:cNvSpPr txBox="1"/>
-          <p:nvPr/>
-        </p:nvSpPr>
-        <p:spPr>
-          <a:xfrm>
-            <a:off x="749808" y="4069080"/>
-            <a:ext cx="2240280" cy="384048"/>
-          </a:xfrm>
-          <a:prstGeom prst="rect">
-            <a:avLst/>
-          </a:prstGeom>
-          <a:noFill/>
-          <a:ln/>
-        </p:spPr>
-        <p:txBody>
-          <a:bodyPr wrap="square" lIns="0" tIns="0" rIns="0" bIns="0" rtlCol="0" anchor="ctr"/>
-          <a:lstStyle/>
-          <a:p>
-            <a:pPr indent="0" marL="0">
-              <a:buNone/>
-            </a:pPr>
-            <a:r>
-              <a:rPr lang="en-US" sz="1400" b="1" dirty="0">
-                <a:solidFill>
-                  <a:schemeClr val="bg1"/>
-                </a:solidFill>
-              </a:rPr>
-              <a:t>Forhåndsvisning</a:t>
-            </a:r>
-            <a:endParaRPr lang="en-US" sz="1400" dirty="0"/>
-          </a:p>
-        </p:txBody>
-      </p:sp>
-      <p:sp>
-        <p:nvSpPr>
-          <p:cNvPr id="22027" name="Text 25"/>
-          <p:cNvSpPr txBox="1"/>
-          <p:nvPr/>
-        </p:nvSpPr>
-        <p:spPr>
-          <a:xfrm>
-            <a:off x="3264408" y="4069080"/>
-            <a:ext cx="1783080" cy="384048"/>
-          </a:xfrm>
-          <a:prstGeom prst="rect">
-            <a:avLst/>
-          </a:prstGeom>
-          <a:noFill/>
-          <a:ln/>
-        </p:spPr>
-        <p:txBody>
-          <a:bodyPr wrap="square" lIns="0" tIns="0" rIns="0" bIns="0" rtlCol="0" anchor="ctr"/>
-          <a:lstStyle/>
-          <a:p>
-            <a:pPr indent="0" marL="0">
-              <a:buNone/>
-            </a:pPr>
-            <a:r>
-              <a:rPr lang="en-US" sz="1200" dirty="0">
-                <a:solidFill>
-                  <a:schemeClr val="bg1"/>
-                </a:solidFill>
-                <a:latin typeface="Courier New" pitchFamily="34" charset="0"/>
-                <a:ea typeface="Courier New" pitchFamily="34" charset="-122"/>
-                <a:cs typeface="Courier New" pitchFamily="34" charset="-120"/>
-              </a:rPr>
-              <a:t>z = bz + 3</a:t>
-            </a:r>
-            <a:endParaRPr lang="en-US" sz="1200" dirty="0"/>
-          </a:p>
-        </p:txBody>
-      </p:sp>
-      <p:sp>
-        <p:nvSpPr>
-          <p:cNvPr id="22028" name="Text 26"/>
-          <p:cNvSpPr txBox="1"/>
-          <p:nvPr/>
-        </p:nvSpPr>
-        <p:spPr>
-          <a:xfrm>
-            <a:off x="5138928" y="4069080"/>
-            <a:ext cx="6302959" cy="384048"/>
-          </a:xfrm>
-          <a:prstGeom prst="rect">
-            <a:avLst/>
-          </a:prstGeom>
-          <a:noFill/>
-          <a:ln/>
-        </p:spPr>
-        <p:txBody>
-          <a:bodyPr wrap="square" lIns="0" tIns="0" rIns="0" bIns="0" rtlCol="0" anchor="ctr"/>
-          <a:lstStyle/>
-          <a:p>
-            <a:pPr indent="0" marL="0">
-              <a:buNone/>
-            </a:pPr>
-            <a:r>
-              <a:rPr lang="en-US" sz="1300" dirty="0">
-                <a:solidFill>
-                  <a:schemeClr val="bg1"/>
-                </a:solidFill>
-              </a:rPr>
-              <a:t>laget du prøver i redigeringsdialogen</a:t>
-            </a:r>
-            <a:endParaRPr lang="en-US" sz="1300" dirty="0"/>
-          </a:p>
-        </p:txBody>
-      </p:sp>
-      <p:sp>
-        <p:nvSpPr>
-          <p:cNvPr id="22029" name="Lag Dine overlegg"/>
-          <p:cNvSpPr/>
-          <p:nvPr/>
-        </p:nvSpPr>
-        <p:spPr>
-          <a:xfrm>
-            <a:off x="548640" y="4498848"/>
-            <a:ext cx="11094415" cy="384048"/>
-          </a:xfrm>
-          <a:prstGeom prst="roundRect">
-            <a:avLst>
-              <a:gd name="adj" fmla="val 16667"/>
-            </a:avLst>
+            <a:off x="8524037" y="1920240"/>
+            <a:ext cx="822960" cy="822960"/>
+          </a:xfrm>
+          <a:prstGeom prst="ellipse">
+            <a:avLst/>
           </a:prstGeom>
           <a:solidFill>
             <a:schemeClr val="accent1"/>
@@ -4843,16 +4351,40 @@
           <a:ln/>
         </p:spPr>
       </p:sp>
-      <p:sp>
-        <p:nvSpPr>
-          <p:cNvPr id="22030" name="Text 28"/>
+      <p:pic>
+        <p:nvPicPr>
+          <p:cNvPr id="22015" name="Ikon home" descr="home">    </p:cNvPr>
+          <p:cNvPicPr>
+            <a:picLocks noChangeAspect="1"/>
+          </p:cNvPicPr>
+          <p:nvPr/>
+        </p:nvPicPr>
+        <p:blipFill>
+          <a:blip r:embed="rId3"/>
+          <a:stretch>
+            <a:fillRect/>
+          </a:stretch>
+        </p:blipFill>
+        <p:spPr>
+          <a:xfrm>
+            <a:off x="8705088" y="2101291"/>
+            <a:ext cx="460858" cy="460858"/>
+          </a:xfrm>
+          <a:prstGeom prst="rect">
+            <a:avLst/>
+          </a:prstGeom>
+        </p:spPr>
+      </p:pic>
+      <p:sp>
+        <p:nvSpPr>
+          <p:cNvPr id="22016" name="Text 11"/>
           <p:cNvSpPr txBox="1"/>
           <p:nvPr/>
         </p:nvSpPr>
         <p:spPr>
           <a:xfrm>
-            <a:off x="749808" y="4498848"/>
-            <a:ext cx="2240280" cy="384048"/>
+            <a:off x="8524037" y="2971800"/>
+            <a:ext cx="2753258" cy="502920"/>
           </a:xfrm>
           <a:prstGeom prst="rect">
             <a:avLst/>
@@ -4868,27 +4400,27 @@
               <a:buNone/>
             </a:pPr>
             <a:r>
-              <a:rPr lang="en-US" sz="1400" b="1" dirty="0">
-                <a:solidFill>
-                  <a:schemeClr val="bg1"/>
-                </a:solidFill>
-              </a:rPr>
-              <a:t>Dine overlegg</a:t>
-            </a:r>
-            <a:endParaRPr lang="en-US" sz="1400" dirty="0"/>
-          </a:p>
-        </p:txBody>
-      </p:sp>
-      <p:sp>
-        <p:nvSpPr>
-          <p:cNvPr id="22031" name="Text 29"/>
+              <a:rPr lang="en-US" sz="2200" b="1" dirty="0">
+                <a:solidFill>
+                  <a:schemeClr val="tx1"/>
+                </a:solidFill>
+              </a:rPr>
+              <a:t>Hjem</a:t>
+            </a:r>
+            <a:endParaRPr lang="en-US" sz="2200" dirty="0"/>
+          </a:p>
+        </p:txBody>
+      </p:sp>
+      <p:sp>
+        <p:nvSpPr>
+          <p:cNvPr id="22017" name="Text 12"/>
           <p:cNvSpPr txBox="1"/>
           <p:nvPr/>
         </p:nvSpPr>
         <p:spPr>
           <a:xfrm>
-            <a:off x="3264408" y="4498848"/>
-            <a:ext cx="1783080" cy="384048"/>
+            <a:off x="8524037" y="3611880"/>
+            <a:ext cx="2753258" cy="1828800"/>
           </a:xfrm>
           <a:prstGeom prst="rect">
             <a:avLst/>
@@ -4897,368 +4429,67 @@
           <a:ln/>
         </p:spPr>
         <p:txBody>
-          <a:bodyPr wrap="square" lIns="0" tIns="0" rIns="0" bIns="0" rtlCol="0" anchor="ctr"/>
-          <a:lstStyle/>
-          <a:p>
-            <a:pPr indent="0" marL="0">
-              <a:buNone/>
-            </a:pPr>
-            <a:r>
-              <a:rPr lang="en-US" sz="1200" dirty="0">
-                <a:solidFill>
-                  <a:schemeClr val="bg1"/>
-                </a:solidFill>
-                <a:latin typeface="Courier New" pitchFamily="34" charset="0"/>
-                <a:ea typeface="Courier New" pitchFamily="34" charset="-122"/>
-                <a:cs typeface="Courier New" pitchFamily="34" charset="-120"/>
-              </a:rPr>
-              <a:t>z = bz + 2</a:t>
-            </a:r>
-            <a:endParaRPr lang="en-US" sz="1200" dirty="0"/>
-          </a:p>
-        </p:txBody>
-      </p:sp>
-      <p:sp>
-        <p:nvSpPr>
-          <p:cNvPr id="22032" name="Text 30"/>
-          <p:cNvSpPr txBox="1"/>
-          <p:nvPr/>
-        </p:nvSpPr>
-        <p:spPr>
-          <a:xfrm>
-            <a:off x="5138928" y="4498848"/>
-            <a:ext cx="6302959" cy="384048"/>
-          </a:xfrm>
-          <a:prstGeom prst="rect">
-            <a:avLst/>
-          </a:prstGeom>
-          <a:noFill/>
-          <a:ln/>
-        </p:spPr>
-        <p:txBody>
-          <a:bodyPr wrap="square" lIns="0" tIns="0" rIns="0" bIns="0" rtlCol="0" anchor="ctr"/>
-          <a:lstStyle/>
-          <a:p>
-            <a:pPr indent="0" marL="0">
-              <a:buNone/>
-            </a:pPr>
-            <a:r>
-              <a:rPr lang="en-US" sz="1300" dirty="0">
-                <a:solidFill>
-                  <a:schemeClr val="bg1"/>
-                </a:solidFill>
-              </a:rPr>
-              <a:t>turruter, eiendomsgrenser, terrengskygge – egen glidebryter for synlighet</a:t>
-            </a:r>
-            <a:endParaRPr lang="en-US" sz="1300" dirty="0"/>
-          </a:p>
-        </p:txBody>
-      </p:sp>
-      <p:sp>
-        <p:nvSpPr>
-          <p:cNvPr id="22033" name="Lag Ditt bakgrunnskart"/>
-          <p:cNvSpPr/>
-          <p:nvPr/>
-        </p:nvSpPr>
-        <p:spPr>
-          <a:xfrm>
-            <a:off x="548640" y="4928616"/>
-            <a:ext cx="11094415" cy="384048"/>
-          </a:xfrm>
-          <a:prstGeom prst="roundRect">
-            <a:avLst>
-              <a:gd name="adj" fmla="val 16667"/>
-            </a:avLst>
-          </a:prstGeom>
-          <a:solidFill>
-            <a:schemeClr val="tx2"/>
-          </a:solidFill>
-          <a:ln/>
-        </p:spPr>
-      </p:sp>
-      <p:sp>
-        <p:nvSpPr>
-          <p:cNvPr id="22034" name="Text 32"/>
-          <p:cNvSpPr txBox="1"/>
-          <p:nvPr/>
-        </p:nvSpPr>
-        <p:spPr>
-          <a:xfrm>
-            <a:off x="749808" y="4928616"/>
-            <a:ext cx="2240280" cy="384048"/>
-          </a:xfrm>
-          <a:prstGeom prst="rect">
-            <a:avLst/>
-          </a:prstGeom>
-          <a:noFill/>
-          <a:ln/>
-        </p:spPr>
-        <p:txBody>
-          <a:bodyPr wrap="square" lIns="0" tIns="0" rIns="0" bIns="0" rtlCol="0" anchor="ctr"/>
-          <a:lstStyle/>
-          <a:p>
-            <a:pPr indent="0" marL="0">
-              <a:buNone/>
-            </a:pPr>
-            <a:r>
-              <a:rPr lang="en-US" sz="1400" b="1" dirty="0">
-                <a:solidFill>
-                  <a:schemeClr val="bg1"/>
-                </a:solidFill>
-              </a:rPr>
-              <a:t>Ditt bakgrunnskart</a:t>
-            </a:r>
-            <a:endParaRPr lang="en-US" sz="1400" dirty="0"/>
-          </a:p>
-        </p:txBody>
-      </p:sp>
-      <p:sp>
-        <p:nvSpPr>
-          <p:cNvPr id="22035" name="Text 33"/>
-          <p:cNvSpPr txBox="1"/>
-          <p:nvPr/>
-        </p:nvSpPr>
-        <p:spPr>
-          <a:xfrm>
-            <a:off x="3264408" y="4928616"/>
-            <a:ext cx="1783080" cy="384048"/>
-          </a:xfrm>
-          <a:prstGeom prst="rect">
-            <a:avLst/>
-          </a:prstGeom>
-          <a:noFill/>
-          <a:ln/>
-        </p:spPr>
-        <p:txBody>
-          <a:bodyPr wrap="square" lIns="0" tIns="0" rIns="0" bIns="0" rtlCol="0" anchor="ctr"/>
-          <a:lstStyle/>
-          <a:p>
-            <a:pPr indent="0" marL="0">
-              <a:buNone/>
-            </a:pPr>
-            <a:r>
-              <a:rPr lang="en-US" sz="1200" dirty="0">
-                <a:solidFill>
-                  <a:schemeClr val="bg1"/>
-                </a:solidFill>
-                <a:latin typeface="Courier New" pitchFamily="34" charset="0"/>
-                <a:ea typeface="Courier New" pitchFamily="34" charset="-122"/>
-                <a:cs typeface="Courier New" pitchFamily="34" charset="-120"/>
-              </a:rPr>
-              <a:t>z = bz + 1</a:t>
-            </a:r>
-            <a:endParaRPr lang="en-US" sz="1200" dirty="0"/>
-          </a:p>
-        </p:txBody>
-      </p:sp>
-      <p:sp>
-        <p:nvSpPr>
-          <p:cNvPr id="22036" name="Text 34"/>
-          <p:cNvSpPr txBox="1"/>
-          <p:nvPr/>
-        </p:nvSpPr>
-        <p:spPr>
-          <a:xfrm>
-            <a:off x="5138928" y="4928616"/>
-            <a:ext cx="6302959" cy="384048"/>
-          </a:xfrm>
-          <a:prstGeom prst="rect">
-            <a:avLst/>
-          </a:prstGeom>
-          <a:noFill/>
-          <a:ln/>
-        </p:spPr>
-        <p:txBody>
-          <a:bodyPr wrap="square" lIns="0" tIns="0" rIns="0" bIns="0" rtlCol="0" anchor="ctr"/>
-          <a:lstStyle/>
-          <a:p>
-            <a:pPr indent="0" marL="0">
-              <a:buNone/>
-            </a:pPr>
-            <a:r>
-              <a:rPr lang="en-US" sz="1300" dirty="0">
-                <a:solidFill>
-                  <a:schemeClr val="bg1"/>
-                </a:solidFill>
-              </a:rPr>
-              <a:t>helt dekkende – dempes mot hvitt med fargefilter, høyst 50 %</a:t>
-            </a:r>
-            <a:endParaRPr lang="en-US" sz="1300" dirty="0"/>
-          </a:p>
-        </p:txBody>
-      </p:sp>
-      <p:sp>
-        <p:nvSpPr>
-          <p:cNvPr id="22037" name="Lag geocaching.com-kartet"/>
-          <p:cNvSpPr/>
-          <p:nvPr/>
-        </p:nvSpPr>
-        <p:spPr>
-          <a:xfrm>
-            <a:off x="548640" y="5358384"/>
-            <a:ext cx="11094415" cy="384048"/>
-          </a:xfrm>
-          <a:prstGeom prst="roundRect">
-            <a:avLst>
-              <a:gd name="adj" fmla="val 16667"/>
-            </a:avLst>
-          </a:prstGeom>
-          <a:solidFill>
-            <a:schemeClr val="accent5"/>
-          </a:solidFill>
-          <a:ln/>
-        </p:spPr>
-      </p:sp>
-      <p:sp>
-        <p:nvSpPr>
-          <p:cNvPr id="22038" name="Text 36"/>
-          <p:cNvSpPr txBox="1"/>
-          <p:nvPr/>
-        </p:nvSpPr>
-        <p:spPr>
-          <a:xfrm>
-            <a:off x="749808" y="5358384"/>
-            <a:ext cx="2240280" cy="384048"/>
-          </a:xfrm>
-          <a:prstGeom prst="rect">
-            <a:avLst/>
-          </a:prstGeom>
-          <a:noFill/>
-          <a:ln/>
-        </p:spPr>
-        <p:txBody>
-          <a:bodyPr wrap="square" lIns="0" tIns="0" rIns="0" bIns="0" rtlCol="0" anchor="ctr"/>
-          <a:lstStyle/>
-          <a:p>
-            <a:pPr indent="0" marL="0">
-              <a:buNone/>
-            </a:pPr>
-            <a:r>
-              <a:rPr lang="en-US" sz="1400" b="1" dirty="0">
+          <a:bodyPr wrap="square" lIns="0" tIns="0" rIns="0" bIns="0" rtlCol="0" anchor="t"/>
+          <a:lstStyle/>
+          <a:p>
+            <a:pPr marL="228600" indent="-228600">
+              <a:spcAft>
+                <a:spcPts val="800"/>
+              </a:spcAft>
+              <a:buSzPct val="100000"/>
+              <a:buChar char="•"/>
+            </a:pPr>
+            <a:r>
+              <a:rPr lang="en-US" sz="1700" dirty="0">
                 <a:solidFill>
                   <a:schemeClr val="tx1"/>
                 </a:solidFill>
               </a:rPr>
-              <a:t>geocaching.com-kartet</a:t>
-            </a:r>
-            <a:endParaRPr lang="en-US" sz="1400" dirty="0"/>
-          </a:p>
-        </p:txBody>
-      </p:sp>
-      <p:sp>
-        <p:nvSpPr>
-          <p:cNvPr id="22039" name="Text 37"/>
-          <p:cNvSpPr txBox="1"/>
-          <p:nvPr/>
-        </p:nvSpPr>
-        <p:spPr>
-          <a:xfrm>
-            <a:off x="3264408" y="5358384"/>
-            <a:ext cx="1783080" cy="384048"/>
-          </a:xfrm>
-          <a:prstGeom prst="rect">
-            <a:avLst/>
-          </a:prstGeom>
-          <a:noFill/>
-          <a:ln/>
-        </p:spPr>
-        <p:txBody>
-          <a:bodyPr wrap="square" lIns="0" tIns="0" rIns="0" bIns="0" rtlCol="0" anchor="ctr"/>
-          <a:lstStyle/>
-          <a:p>
-            <a:pPr indent="0" marL="0">
-              <a:buNone/>
-            </a:pPr>
-            <a:r>
-              <a:rPr lang="en-US" sz="1200" dirty="0">
+              <a:t>Ett klikk tar deg hjem</a:t>
+            </a:r>
+            <a:endParaRPr lang="en-US" sz="1700" dirty="0"/>
+          </a:p>
+          <a:p>
+            <a:pPr marL="228600" indent="-228600">
+              <a:spcAft>
+                <a:spcPts val="800"/>
+              </a:spcAft>
+              <a:buSzPct val="100000"/>
+              <a:buChar char="•"/>
+            </a:pPr>
+            <a:r>
+              <a:rPr lang="en-US" sz="1700" dirty="0">
                 <a:solidFill>
                   <a:schemeClr val="tx1"/>
                 </a:solidFill>
-                <a:latin typeface="Courier New" pitchFamily="34" charset="0"/>
-                <a:ea typeface="Courier New" pitchFamily="34" charset="-122"/>
-                <a:cs typeface="Courier New" pitchFamily="34" charset="-120"/>
-              </a:rPr>
-              <a:t>z = bz</a:t>
-            </a:r>
-            <a:endParaRPr lang="en-US" sz="1200" dirty="0"/>
-          </a:p>
-        </p:txBody>
-      </p:sp>
-      <p:sp>
-        <p:nvSpPr>
-          <p:cNvPr id="22040" name="Text 38"/>
-          <p:cNvSpPr txBox="1"/>
-          <p:nvPr/>
-        </p:nvSpPr>
-        <p:spPr>
-          <a:xfrm>
-            <a:off x="5138928" y="5358384"/>
-            <a:ext cx="6302959" cy="384048"/>
-          </a:xfrm>
-          <a:prstGeom prst="rect">
-            <a:avLst/>
-          </a:prstGeom>
-          <a:noFill/>
-          <a:ln/>
-        </p:spPr>
-        <p:txBody>
-          <a:bodyPr wrap="square" lIns="0" tIns="0" rIns="0" bIns="0" rtlCol="0" anchor="ctr"/>
-          <a:lstStyle/>
-          <a:p>
-            <a:pPr indent="0" marL="0">
-              <a:buNone/>
-            </a:pPr>
-            <a:r>
-              <a:rPr lang="en-US" sz="1300" dirty="0">
+              </a:rPr>
+              <a:t>Første gang søker du opp adressen</a:t>
+            </a:r>
+            <a:endParaRPr lang="en-US" sz="1700" dirty="0"/>
+          </a:p>
+          <a:p>
+            <a:pPr marL="228600" indent="-228600">
+              <a:spcAft>
+                <a:spcPts val="800"/>
+              </a:spcAft>
+              <a:buSzPct val="100000"/>
+              <a:buChar char="•"/>
+            </a:pPr>
+            <a:r>
+              <a:rPr lang="en-US" sz="1700" dirty="0">
                 <a:solidFill>
                   <a:schemeClr val="tx1"/>
                 </a:solidFill>
               </a:rPr>
-              <a:t>nettstedets bakgrunn – dekkes av ditt kart, dempes når det selv er valgt</a:t>
-            </a:r>
-            <a:endParaRPr lang="en-US" sz="1300" dirty="0"/>
-          </a:p>
-        </p:txBody>
-      </p:sp>
-      <p:sp>
-        <p:nvSpPr>
-          <p:cNvPr id="22041" name="Text 39"/>
-          <p:cNvSpPr txBox="1"/>
-          <p:nvPr/>
-        </p:nvSpPr>
-        <p:spPr>
-          <a:xfrm>
-            <a:off x="548640" y="5861304"/>
-            <a:ext cx="11094415" cy="457200"/>
-          </a:xfrm>
-          <a:prstGeom prst="rect">
-            <a:avLst/>
-          </a:prstGeom>
-          <a:noFill/>
-          <a:ln/>
-        </p:spPr>
-        <p:txBody>
-          <a:bodyPr wrap="square" lIns="0" tIns="0" rIns="0" bIns="0" rtlCol="0" anchor="t"/>
-          <a:lstStyle/>
-          <a:p>
-            <a:pPr indent="0" marL="0">
-              <a:buNone/>
-            </a:pPr>
-            <a:r>
-              <a:rPr lang="en-US" sz="1150" dirty="0">
-                <a:solidFill>
-                  <a:schemeClr val="accent4"/>
-                </a:solidFill>
-              </a:rPr>
-              <a:t>bz = z-indeksen til nettstedets bakgrunn. På /play/map er nettstedets bakgrunn et vektorkart (WebGL). På /map lastes i tillegg et usynlig cacherutenett (UTFGrid) som brukes til 161 m-sirklene og til å feste høyreklikkboblen til cacher.</a:t>
-            </a:r>
-            <a:endParaRPr lang="en-US" sz="1150" dirty="0"/>
-          </a:p>
-        </p:txBody>
-      </p:sp>
-      <p:sp>
-        <p:nvSpPr>
-          <p:cNvPr id="22042" name="Slide Number Placeholder 0"/>
+              <a:t>Lagres bare i nettleseren din</a:t>
+            </a:r>
+            <a:endParaRPr lang="en-US" sz="1700" dirty="0"/>
+          </a:p>
+        </p:txBody>
+      </p:sp>
+      <p:sp>
+        <p:nvSpPr>
+          <p:cNvPr id="22018" name="Slide Number Placeholder 0"/>
           <p:cNvSpPr>
             <a:spLocks noGrp="1"/>
           </p:cNvSpPr>
@@ -5358,7 +4589,7 @@
                   <a:schemeClr val="tx2"/>
                 </a:solidFill>
               </a:rPr>
-              <a:t>Under panseret</a:t>
+              <a:t>Slik ligger kartlagene</a:t>
             </a:r>
             <a:endParaRPr lang="en-US" sz="3600" dirty="0"/>
           </a:p>
@@ -5366,17 +4597,889 @@
       </p:sp>
       <p:sp>
         <p:nvSpPr>
-          <p:cNvPr id="23003" name="Ikon layers sirkel"/>
+          <p:cNvPr id="23003" name="Text 1"/>
+          <p:cNvSpPr txBox="1"/>
+          <p:nvPr/>
+        </p:nvSpPr>
+        <p:spPr>
+          <a:xfrm>
+            <a:off x="548640" y="1207008"/>
+            <a:ext cx="11094415" cy="274320"/>
+          </a:xfrm>
+          <a:prstGeom prst="rect">
+            <a:avLst/>
+          </a:prstGeom>
+          <a:noFill/>
+          <a:ln/>
+        </p:spPr>
+        <p:txBody>
+          <a:bodyPr wrap="square" lIns="0" tIns="0" rIns="0" bIns="0" rtlCol="0" anchor="ctr"/>
+          <a:lstStyle/>
+          <a:p>
+            <a:pPr indent="0" marL="0">
+              <a:buNone/>
+            </a:pPr>
+            <a:r>
+              <a:rPr lang="en-US" sz="1100" b="1" spc="100" kern="0" dirty="0">
+                <a:solidFill>
+                  <a:schemeClr val="accent4"/>
+                </a:solidFill>
+              </a:rPr>
+              <a:t>OVER KARTFLISENE</a:t>
+            </a:r>
+            <a:endParaRPr lang="en-US" sz="1100" dirty="0"/>
+          </a:p>
+        </p:txBody>
+      </p:sp>
+      <p:sp>
+        <p:nvSpPr>
+          <p:cNvPr id="23004" name="Lag Kontroller"/>
           <p:cNvSpPr/>
           <p:nvPr/>
         </p:nvSpPr>
         <p:spPr>
           <a:xfrm>
-            <a:off x="548640" y="1591056"/>
-            <a:ext cx="512064" cy="512064"/>
-          </a:xfrm>
-          <a:prstGeom prst="ellipse">
-            <a:avLst/>
+            <a:off x="548640" y="1517904"/>
+            <a:ext cx="11094415" cy="384048"/>
+          </a:xfrm>
+          <a:prstGeom prst="roundRect">
+            <a:avLst>
+              <a:gd name="adj" fmla="val 16667"/>
+            </a:avLst>
+          </a:prstGeom>
+          <a:solidFill>
+            <a:schemeClr val="bg2"/>
+          </a:solidFill>
+          <a:ln/>
+        </p:spPr>
+      </p:sp>
+      <p:sp>
+        <p:nvSpPr>
+          <p:cNvPr id="23005" name="Text 3"/>
+          <p:cNvSpPr txBox="1"/>
+          <p:nvPr/>
+        </p:nvSpPr>
+        <p:spPr>
+          <a:xfrm>
+            <a:off x="749808" y="1517904"/>
+            <a:ext cx="2240280" cy="384048"/>
+          </a:xfrm>
+          <a:prstGeom prst="rect">
+            <a:avLst/>
+          </a:prstGeom>
+          <a:noFill/>
+          <a:ln/>
+        </p:spPr>
+        <p:txBody>
+          <a:bodyPr wrap="square" lIns="0" tIns="0" rIns="0" bIns="0" rtlCol="0" anchor="ctr"/>
+          <a:lstStyle/>
+          <a:p>
+            <a:pPr indent="0" marL="0">
+              <a:buNone/>
+            </a:pPr>
+            <a:r>
+              <a:rPr lang="en-US" sz="1400" b="1" dirty="0">
+                <a:solidFill>
+                  <a:schemeClr val="tx1"/>
+                </a:solidFill>
+              </a:rPr>
+              <a:t>Kontroller</a:t>
+            </a:r>
+            <a:endParaRPr lang="en-US" sz="1400" dirty="0"/>
+          </a:p>
+        </p:txBody>
+      </p:sp>
+      <p:sp>
+        <p:nvSpPr>
+          <p:cNvPr id="23006" name="Text 4"/>
+          <p:cNvSpPr txBox="1"/>
+          <p:nvPr/>
+        </p:nvSpPr>
+        <p:spPr>
+          <a:xfrm>
+            <a:off x="3264408" y="1517904"/>
+            <a:ext cx="1783080" cy="384048"/>
+          </a:xfrm>
+          <a:prstGeom prst="rect">
+            <a:avLst/>
+          </a:prstGeom>
+          <a:noFill/>
+          <a:ln/>
+        </p:spPr>
+        <p:txBody>
+          <a:bodyPr wrap="square" lIns="0" tIns="0" rIns="0" bIns="0" rtlCol="0" anchor="ctr"/>
+          <a:lstStyle/>
+          <a:p>
+            <a:pPr indent="0" marL="0">
+              <a:buNone/>
+            </a:pPr>
+            <a:r>
+              <a:rPr lang="en-US" sz="1200" dirty="0">
+                <a:solidFill>
+                  <a:schemeClr val="tx1"/>
+                </a:solidFill>
+                <a:latin typeface="Courier New" pitchFamily="34" charset="0"/>
+                <a:ea typeface="Courier New" pitchFamily="34" charset="-122"/>
+                <a:cs typeface="Courier New" pitchFamily="34" charset="-120"/>
+              </a:rPr>
+              <a:t>kontroller · 1000</a:t>
+            </a:r>
+            <a:endParaRPr lang="en-US" sz="1200" dirty="0"/>
+          </a:p>
+        </p:txBody>
+      </p:sp>
+      <p:sp>
+        <p:nvSpPr>
+          <p:cNvPr id="23007" name="Text 5"/>
+          <p:cNvSpPr txBox="1"/>
+          <p:nvPr/>
+        </p:nvSpPr>
+        <p:spPr>
+          <a:xfrm>
+            <a:off x="5138928" y="1517904"/>
+            <a:ext cx="6302959" cy="384048"/>
+          </a:xfrm>
+          <a:prstGeom prst="rect">
+            <a:avLst/>
+          </a:prstGeom>
+          <a:noFill/>
+          <a:ln/>
+        </p:spPr>
+        <p:txBody>
+          <a:bodyPr wrap="square" lIns="0" tIns="0" rIns="0" bIns="0" rtlCol="0" anchor="ctr"/>
+          <a:lstStyle/>
+          <a:p>
+            <a:pPr indent="0" marL="0">
+              <a:buNone/>
+            </a:pPr>
+            <a:r>
+              <a:rPr lang="en-US" sz="1300" dirty="0">
+                <a:solidFill>
+                  <a:schemeClr val="tx1"/>
+                </a:solidFill>
+              </a:rPr>
+              <a:t>verktøylinjen, kartlagpanelet, koordinatvisningen og kreditteringen</a:t>
+            </a:r>
+            <a:endParaRPr lang="en-US" sz="1300" dirty="0"/>
+          </a:p>
+        </p:txBody>
+      </p:sp>
+      <p:sp>
+        <p:nvSpPr>
+          <p:cNvPr id="23008" name="Lag Bobler"/>
+          <p:cNvSpPr/>
+          <p:nvPr/>
+        </p:nvSpPr>
+        <p:spPr>
+          <a:xfrm>
+            <a:off x="548640" y="1947672"/>
+            <a:ext cx="11094415" cy="384048"/>
+          </a:xfrm>
+          <a:prstGeom prst="roundRect">
+            <a:avLst>
+              <a:gd name="adj" fmla="val 16667"/>
+            </a:avLst>
+          </a:prstGeom>
+          <a:solidFill>
+            <a:schemeClr val="bg2"/>
+          </a:solidFill>
+          <a:ln/>
+        </p:spPr>
+      </p:sp>
+      <p:sp>
+        <p:nvSpPr>
+          <p:cNvPr id="23009" name="Text 7"/>
+          <p:cNvSpPr txBox="1"/>
+          <p:nvPr/>
+        </p:nvSpPr>
+        <p:spPr>
+          <a:xfrm>
+            <a:off x="749808" y="1947672"/>
+            <a:ext cx="2240280" cy="384048"/>
+          </a:xfrm>
+          <a:prstGeom prst="rect">
+            <a:avLst/>
+          </a:prstGeom>
+          <a:noFill/>
+          <a:ln/>
+        </p:spPr>
+        <p:txBody>
+          <a:bodyPr wrap="square" lIns="0" tIns="0" rIns="0" bIns="0" rtlCol="0" anchor="ctr"/>
+          <a:lstStyle/>
+          <a:p>
+            <a:pPr indent="0" marL="0">
+              <a:buNone/>
+            </a:pPr>
+            <a:r>
+              <a:rPr lang="en-US" sz="1400" b="1" dirty="0">
+                <a:solidFill>
+                  <a:schemeClr val="tx1"/>
+                </a:solidFill>
+              </a:rPr>
+              <a:t>Bobler</a:t>
+            </a:r>
+            <a:endParaRPr lang="en-US" sz="1400" dirty="0"/>
+          </a:p>
+        </p:txBody>
+      </p:sp>
+      <p:sp>
+        <p:nvSpPr>
+          <p:cNvPr id="23010" name="Text 8"/>
+          <p:cNvSpPr txBox="1"/>
+          <p:nvPr/>
+        </p:nvSpPr>
+        <p:spPr>
+          <a:xfrm>
+            <a:off x="3264408" y="1947672"/>
+            <a:ext cx="1783080" cy="384048"/>
+          </a:xfrm>
+          <a:prstGeom prst="rect">
+            <a:avLst/>
+          </a:prstGeom>
+          <a:noFill/>
+          <a:ln/>
+        </p:spPr>
+        <p:txBody>
+          <a:bodyPr wrap="square" lIns="0" tIns="0" rIns="0" bIns="0" rtlCol="0" anchor="ctr"/>
+          <a:lstStyle/>
+          <a:p>
+            <a:pPr indent="0" marL="0">
+              <a:buNone/>
+            </a:pPr>
+            <a:r>
+              <a:rPr lang="en-US" sz="1200" dirty="0">
+                <a:solidFill>
+                  <a:schemeClr val="tx1"/>
+                </a:solidFill>
+                <a:latin typeface="Courier New" pitchFamily="34" charset="0"/>
+                <a:ea typeface="Courier New" pitchFamily="34" charset="-122"/>
+                <a:cs typeface="Courier New" pitchFamily="34" charset="-120"/>
+              </a:rPr>
+              <a:t>popupPane · 700</a:t>
+            </a:r>
+            <a:endParaRPr lang="en-US" sz="1200" dirty="0"/>
+          </a:p>
+        </p:txBody>
+      </p:sp>
+      <p:sp>
+        <p:nvSpPr>
+          <p:cNvPr id="23011" name="Text 9"/>
+          <p:cNvSpPr txBox="1"/>
+          <p:nvPr/>
+        </p:nvSpPr>
+        <p:spPr>
+          <a:xfrm>
+            <a:off x="5138928" y="1947672"/>
+            <a:ext cx="6302959" cy="384048"/>
+          </a:xfrm>
+          <a:prstGeom prst="rect">
+            <a:avLst/>
+          </a:prstGeom>
+          <a:noFill/>
+          <a:ln/>
+        </p:spPr>
+        <p:txBody>
+          <a:bodyPr wrap="square" lIns="0" tIns="0" rIns="0" bIns="0" rtlCol="0" anchor="ctr"/>
+          <a:lstStyle/>
+          <a:p>
+            <a:pPr indent="0" marL="0">
+              <a:buNone/>
+            </a:pPr>
+            <a:r>
+              <a:rPr lang="en-US" sz="1300" dirty="0">
+                <a:solidFill>
+                  <a:schemeClr val="tx1"/>
+                </a:solidFill>
+              </a:rPr>
+              <a:t>høyreklikkboblen og andre kartbobler</a:t>
+            </a:r>
+            <a:endParaRPr lang="en-US" sz="1300" dirty="0"/>
+          </a:p>
+        </p:txBody>
+      </p:sp>
+      <p:sp>
+        <p:nvSpPr>
+          <p:cNvPr id="23012" name="Lag Markører"/>
+          <p:cNvSpPr/>
+          <p:nvPr/>
+        </p:nvSpPr>
+        <p:spPr>
+          <a:xfrm>
+            <a:off x="548640" y="2377440"/>
+            <a:ext cx="11094415" cy="384048"/>
+          </a:xfrm>
+          <a:prstGeom prst="roundRect">
+            <a:avLst>
+              <a:gd name="adj" fmla="val 16667"/>
+            </a:avLst>
+          </a:prstGeom>
+          <a:solidFill>
+            <a:schemeClr val="bg2"/>
+          </a:solidFill>
+          <a:ln/>
+        </p:spPr>
+      </p:sp>
+      <p:sp>
+        <p:nvSpPr>
+          <p:cNvPr id="23013" name="Text 11"/>
+          <p:cNvSpPr txBox="1"/>
+          <p:nvPr/>
+        </p:nvSpPr>
+        <p:spPr>
+          <a:xfrm>
+            <a:off x="749808" y="2377440"/>
+            <a:ext cx="2240280" cy="384048"/>
+          </a:xfrm>
+          <a:prstGeom prst="rect">
+            <a:avLst/>
+          </a:prstGeom>
+          <a:noFill/>
+          <a:ln/>
+        </p:spPr>
+        <p:txBody>
+          <a:bodyPr wrap="square" lIns="0" tIns="0" rIns="0" bIns="0" rtlCol="0" anchor="ctr"/>
+          <a:lstStyle/>
+          <a:p>
+            <a:pPr indent="0" marL="0">
+              <a:buNone/>
+            </a:pPr>
+            <a:r>
+              <a:rPr lang="en-US" sz="1400" b="1" dirty="0">
+                <a:solidFill>
+                  <a:schemeClr val="tx1"/>
+                </a:solidFill>
+              </a:rPr>
+              <a:t>Markører</a:t>
+            </a:r>
+            <a:endParaRPr lang="en-US" sz="1400" dirty="0"/>
+          </a:p>
+        </p:txBody>
+      </p:sp>
+      <p:sp>
+        <p:nvSpPr>
+          <p:cNvPr id="23014" name="Text 12"/>
+          <p:cNvSpPr txBox="1"/>
+          <p:nvPr/>
+        </p:nvSpPr>
+        <p:spPr>
+          <a:xfrm>
+            <a:off x="3264408" y="2377440"/>
+            <a:ext cx="1783080" cy="384048"/>
+          </a:xfrm>
+          <a:prstGeom prst="rect">
+            <a:avLst/>
+          </a:prstGeom>
+          <a:noFill/>
+          <a:ln/>
+        </p:spPr>
+        <p:txBody>
+          <a:bodyPr wrap="square" lIns="0" tIns="0" rIns="0" bIns="0" rtlCol="0" anchor="ctr"/>
+          <a:lstStyle/>
+          <a:p>
+            <a:pPr indent="0" marL="0">
+              <a:buNone/>
+            </a:pPr>
+            <a:r>
+              <a:rPr lang="en-US" sz="1200" dirty="0">
+                <a:solidFill>
+                  <a:schemeClr val="tx1"/>
+                </a:solidFill>
+                <a:latin typeface="Courier New" pitchFamily="34" charset="0"/>
+                <a:ea typeface="Courier New" pitchFamily="34" charset="-122"/>
+                <a:cs typeface="Courier New" pitchFamily="34" charset="-120"/>
+              </a:rPr>
+              <a:t>markerPane · 600</a:t>
+            </a:r>
+            <a:endParaRPr lang="en-US" sz="1200" dirty="0"/>
+          </a:p>
+        </p:txBody>
+      </p:sp>
+      <p:sp>
+        <p:nvSpPr>
+          <p:cNvPr id="23015" name="Text 13"/>
+          <p:cNvSpPr txBox="1"/>
+          <p:nvPr/>
+        </p:nvSpPr>
+        <p:spPr>
+          <a:xfrm>
+            <a:off x="5138928" y="2377440"/>
+            <a:ext cx="6302959" cy="384048"/>
+          </a:xfrm>
+          <a:prstGeom prst="rect">
+            <a:avLst/>
+          </a:prstGeom>
+          <a:noFill/>
+          <a:ln/>
+        </p:spPr>
+        <p:txBody>
+          <a:bodyPr wrap="square" lIns="0" tIns="0" rIns="0" bIns="0" rtlCol="0" anchor="ctr"/>
+          <a:lstStyle/>
+          <a:p>
+            <a:pPr indent="0" marL="0">
+              <a:buNone/>
+            </a:pPr>
+            <a:r>
+              <a:rPr lang="en-US" sz="1300" dirty="0">
+                <a:solidFill>
+                  <a:schemeClr val="tx1"/>
+                </a:solidFill>
+              </a:rPr>
+              <a:t>cacheikonene på /play/map, merkenåler, etiketter og posisjonen din</a:t>
+            </a:r>
+            <a:endParaRPr lang="en-US" sz="1300" dirty="0"/>
+          </a:p>
+        </p:txBody>
+      </p:sp>
+      <p:sp>
+        <p:nvSpPr>
+          <p:cNvPr id="23016" name="Lag Tegninger"/>
+          <p:cNvSpPr/>
+          <p:nvPr/>
+        </p:nvSpPr>
+        <p:spPr>
+          <a:xfrm>
+            <a:off x="548640" y="2807208"/>
+            <a:ext cx="11094415" cy="384048"/>
+          </a:xfrm>
+          <a:prstGeom prst="roundRect">
+            <a:avLst>
+              <a:gd name="adj" fmla="val 16667"/>
+            </a:avLst>
+          </a:prstGeom>
+          <a:solidFill>
+            <a:schemeClr val="bg2"/>
+          </a:solidFill>
+          <a:ln/>
+        </p:spPr>
+      </p:sp>
+      <p:sp>
+        <p:nvSpPr>
+          <p:cNvPr id="23017" name="Text 15"/>
+          <p:cNvSpPr txBox="1"/>
+          <p:nvPr/>
+        </p:nvSpPr>
+        <p:spPr>
+          <a:xfrm>
+            <a:off x="749808" y="2807208"/>
+            <a:ext cx="2240280" cy="384048"/>
+          </a:xfrm>
+          <a:prstGeom prst="rect">
+            <a:avLst/>
+          </a:prstGeom>
+          <a:noFill/>
+          <a:ln/>
+        </p:spPr>
+        <p:txBody>
+          <a:bodyPr wrap="square" lIns="0" tIns="0" rIns="0" bIns="0" rtlCol="0" anchor="ctr"/>
+          <a:lstStyle/>
+          <a:p>
+            <a:pPr indent="0" marL="0">
+              <a:buNone/>
+            </a:pPr>
+            <a:r>
+              <a:rPr lang="en-US" sz="1400" b="1" dirty="0">
+                <a:solidFill>
+                  <a:schemeClr val="tx1"/>
+                </a:solidFill>
+              </a:rPr>
+              <a:t>Tegninger</a:t>
+            </a:r>
+            <a:endParaRPr lang="en-US" sz="1400" dirty="0"/>
+          </a:p>
+        </p:txBody>
+      </p:sp>
+      <p:sp>
+        <p:nvSpPr>
+          <p:cNvPr id="23018" name="Text 16"/>
+          <p:cNvSpPr txBox="1"/>
+          <p:nvPr/>
+        </p:nvSpPr>
+        <p:spPr>
+          <a:xfrm>
+            <a:off x="3264408" y="2807208"/>
+            <a:ext cx="1783080" cy="384048"/>
+          </a:xfrm>
+          <a:prstGeom prst="rect">
+            <a:avLst/>
+          </a:prstGeom>
+          <a:noFill/>
+          <a:ln/>
+        </p:spPr>
+        <p:txBody>
+          <a:bodyPr wrap="square" lIns="0" tIns="0" rIns="0" bIns="0" rtlCol="0" anchor="ctr"/>
+          <a:lstStyle/>
+          <a:p>
+            <a:pPr indent="0" marL="0">
+              <a:buNone/>
+            </a:pPr>
+            <a:r>
+              <a:rPr lang="en-US" sz="1200" dirty="0">
+                <a:solidFill>
+                  <a:schemeClr val="tx1"/>
+                </a:solidFill>
+                <a:latin typeface="Courier New" pitchFamily="34" charset="0"/>
+                <a:ea typeface="Courier New" pitchFamily="34" charset="-122"/>
+                <a:cs typeface="Courier New" pitchFamily="34" charset="-120"/>
+              </a:rPr>
+              <a:t>overlayPane · 400</a:t>
+            </a:r>
+            <a:endParaRPr lang="en-US" sz="1200" dirty="0"/>
+          </a:p>
+        </p:txBody>
+      </p:sp>
+      <p:sp>
+        <p:nvSpPr>
+          <p:cNvPr id="23019" name="Text 17"/>
+          <p:cNvSpPr txBox="1"/>
+          <p:nvPr/>
+        </p:nvSpPr>
+        <p:spPr>
+          <a:xfrm>
+            <a:off x="5138928" y="2807208"/>
+            <a:ext cx="6302959" cy="384048"/>
+          </a:xfrm>
+          <a:prstGeom prst="rect">
+            <a:avLst/>
+          </a:prstGeom>
+          <a:noFill/>
+          <a:ln/>
+        </p:spPr>
+        <p:txBody>
+          <a:bodyPr wrap="square" lIns="0" tIns="0" rIns="0" bIns="0" rtlCol="0" anchor="ctr"/>
+          <a:lstStyle/>
+          <a:p>
+            <a:pPr indent="0" marL="0">
+              <a:buNone/>
+            </a:pPr>
+            <a:r>
+              <a:rPr lang="en-US" sz="1300" dirty="0">
+                <a:solidFill>
+                  <a:schemeClr val="tx1"/>
+                </a:solidFill>
+              </a:rPr>
+              <a:t>161 m-sirkler, målelinjer, projiseringslinjer og nøyaktighetssirkelen</a:t>
+            </a:r>
+            <a:endParaRPr lang="en-US" sz="1300" dirty="0"/>
+          </a:p>
+        </p:txBody>
+      </p:sp>
+      <p:sp>
+        <p:nvSpPr>
+          <p:cNvPr id="23020" name="Text 18"/>
+          <p:cNvSpPr txBox="1"/>
+          <p:nvPr/>
+        </p:nvSpPr>
+        <p:spPr>
+          <a:xfrm>
+            <a:off x="548640" y="3328416"/>
+            <a:ext cx="11094415" cy="274320"/>
+          </a:xfrm>
+          <a:prstGeom prst="rect">
+            <a:avLst/>
+          </a:prstGeom>
+          <a:noFill/>
+          <a:ln/>
+        </p:spPr>
+        <p:txBody>
+          <a:bodyPr wrap="square" lIns="0" tIns="0" rIns="0" bIns="0" rtlCol="0" anchor="ctr"/>
+          <a:lstStyle/>
+          <a:p>
+            <a:pPr indent="0" marL="0">
+              <a:buNone/>
+            </a:pPr>
+            <a:r>
+              <a:rPr lang="en-US" sz="1100" b="1" spc="100" kern="0" dirty="0">
+                <a:solidFill>
+                  <a:schemeClr val="accent4"/>
+                </a:solidFill>
+              </a:rPr>
+              <a:t>KARTFLISENE (TILEPANE · 200) – SORTERT ETTER Z-INDEKS</a:t>
+            </a:r>
+            <a:endParaRPr lang="en-US" sz="1100" dirty="0"/>
+          </a:p>
+        </p:txBody>
+      </p:sp>
+      <p:sp>
+        <p:nvSpPr>
+          <p:cNvPr id="23021" name="Lag Nettstedets øvrige fliser"/>
+          <p:cNvSpPr/>
+          <p:nvPr/>
+        </p:nvSpPr>
+        <p:spPr>
+          <a:xfrm>
+            <a:off x="548640" y="3639312"/>
+            <a:ext cx="11094415" cy="384048"/>
+          </a:xfrm>
+          <a:prstGeom prst="roundRect">
+            <a:avLst>
+              <a:gd name="adj" fmla="val 16667"/>
+            </a:avLst>
+          </a:prstGeom>
+          <a:solidFill>
+            <a:schemeClr val="accent2"/>
+          </a:solidFill>
+          <a:ln/>
+        </p:spPr>
+      </p:sp>
+      <p:sp>
+        <p:nvSpPr>
+          <p:cNvPr id="23022" name="Text 20"/>
+          <p:cNvSpPr txBox="1"/>
+          <p:nvPr/>
+        </p:nvSpPr>
+        <p:spPr>
+          <a:xfrm>
+            <a:off x="749808" y="3639312"/>
+            <a:ext cx="2240280" cy="384048"/>
+          </a:xfrm>
+          <a:prstGeom prst="rect">
+            <a:avLst/>
+          </a:prstGeom>
+          <a:noFill/>
+          <a:ln/>
+        </p:spPr>
+        <p:txBody>
+          <a:bodyPr wrap="square" lIns="0" tIns="0" rIns="0" bIns="0" rtlCol="0" anchor="ctr"/>
+          <a:lstStyle/>
+          <a:p>
+            <a:pPr indent="0" marL="0">
+              <a:buNone/>
+            </a:pPr>
+            <a:r>
+              <a:rPr lang="en-US" sz="1400" b="1" dirty="0">
+                <a:solidFill>
+                  <a:schemeClr val="bg1"/>
+                </a:solidFill>
+              </a:rPr>
+              <a:t>Nettstedets øvrige fliser</a:t>
+            </a:r>
+            <a:endParaRPr lang="en-US" sz="1400" dirty="0"/>
+          </a:p>
+        </p:txBody>
+      </p:sp>
+      <p:sp>
+        <p:nvSpPr>
+          <p:cNvPr id="23023" name="Text 21"/>
+          <p:cNvSpPr txBox="1"/>
+          <p:nvPr/>
+        </p:nvSpPr>
+        <p:spPr>
+          <a:xfrm>
+            <a:off x="3264408" y="3639312"/>
+            <a:ext cx="1783080" cy="384048"/>
+          </a:xfrm>
+          <a:prstGeom prst="rect">
+            <a:avLst/>
+          </a:prstGeom>
+          <a:noFill/>
+          <a:ln/>
+        </p:spPr>
+        <p:txBody>
+          <a:bodyPr wrap="square" lIns="0" tIns="0" rIns="0" bIns="0" rtlCol="0" anchor="ctr"/>
+          <a:lstStyle/>
+          <a:p>
+            <a:pPr indent="0" marL="0">
+              <a:buNone/>
+            </a:pPr>
+            <a:r>
+              <a:rPr lang="en-US" sz="1200" dirty="0">
+                <a:solidFill>
+                  <a:schemeClr val="bg1"/>
+                </a:solidFill>
+                <a:latin typeface="Courier New" pitchFamily="34" charset="0"/>
+                <a:ea typeface="Courier New" pitchFamily="34" charset="-122"/>
+                <a:cs typeface="Courier New" pitchFamily="34" charset="-120"/>
+              </a:rPr>
+              <a:t>z = bz + 10</a:t>
+            </a:r>
+            <a:endParaRPr lang="en-US" sz="1200" dirty="0"/>
+          </a:p>
+        </p:txBody>
+      </p:sp>
+      <p:sp>
+        <p:nvSpPr>
+          <p:cNvPr id="23024" name="Text 22"/>
+          <p:cNvSpPr txBox="1"/>
+          <p:nvPr/>
+        </p:nvSpPr>
+        <p:spPr>
+          <a:xfrm>
+            <a:off x="5138928" y="3639312"/>
+            <a:ext cx="6302959" cy="384048"/>
+          </a:xfrm>
+          <a:prstGeom prst="rect">
+            <a:avLst/>
+          </a:prstGeom>
+          <a:noFill/>
+          <a:ln/>
+        </p:spPr>
+        <p:txBody>
+          <a:bodyPr wrap="square" lIns="0" tIns="0" rIns="0" bIns="0" rtlCol="0" anchor="ctr"/>
+          <a:lstStyle/>
+          <a:p>
+            <a:pPr indent="0" marL="0">
+              <a:buNone/>
+            </a:pPr>
+            <a:r>
+              <a:rPr lang="en-US" sz="1300" dirty="0">
+                <a:solidFill>
+                  <a:schemeClr val="bg1"/>
+                </a:solidFill>
+              </a:rPr>
+              <a:t>cacheikonene på /map – løftes alltid over dine lag</a:t>
+            </a:r>
+            <a:endParaRPr lang="en-US" sz="1300" dirty="0"/>
+          </a:p>
+        </p:txBody>
+      </p:sp>
+      <p:sp>
+        <p:nvSpPr>
+          <p:cNvPr id="23025" name="Lag Forhåndsvisning"/>
+          <p:cNvSpPr/>
+          <p:nvPr/>
+        </p:nvSpPr>
+        <p:spPr>
+          <a:xfrm>
+            <a:off x="548640" y="4069080"/>
+            <a:ext cx="11094415" cy="384048"/>
+          </a:xfrm>
+          <a:prstGeom prst="roundRect">
+            <a:avLst>
+              <a:gd name="adj" fmla="val 16667"/>
+            </a:avLst>
+          </a:prstGeom>
+          <a:solidFill>
+            <a:schemeClr val="accent3"/>
+          </a:solidFill>
+          <a:ln/>
+        </p:spPr>
+      </p:sp>
+      <p:sp>
+        <p:nvSpPr>
+          <p:cNvPr id="23026" name="Text 24"/>
+          <p:cNvSpPr txBox="1"/>
+          <p:nvPr/>
+        </p:nvSpPr>
+        <p:spPr>
+          <a:xfrm>
+            <a:off x="749808" y="4069080"/>
+            <a:ext cx="2240280" cy="384048"/>
+          </a:xfrm>
+          <a:prstGeom prst="rect">
+            <a:avLst/>
+          </a:prstGeom>
+          <a:noFill/>
+          <a:ln/>
+        </p:spPr>
+        <p:txBody>
+          <a:bodyPr wrap="square" lIns="0" tIns="0" rIns="0" bIns="0" rtlCol="0" anchor="ctr"/>
+          <a:lstStyle/>
+          <a:p>
+            <a:pPr indent="0" marL="0">
+              <a:buNone/>
+            </a:pPr>
+            <a:r>
+              <a:rPr lang="en-US" sz="1400" b="1" dirty="0">
+                <a:solidFill>
+                  <a:schemeClr val="bg1"/>
+                </a:solidFill>
+              </a:rPr>
+              <a:t>Forhåndsvisning</a:t>
+            </a:r>
+            <a:endParaRPr lang="en-US" sz="1400" dirty="0"/>
+          </a:p>
+        </p:txBody>
+      </p:sp>
+      <p:sp>
+        <p:nvSpPr>
+          <p:cNvPr id="23027" name="Text 25"/>
+          <p:cNvSpPr txBox="1"/>
+          <p:nvPr/>
+        </p:nvSpPr>
+        <p:spPr>
+          <a:xfrm>
+            <a:off x="3264408" y="4069080"/>
+            <a:ext cx="1783080" cy="384048"/>
+          </a:xfrm>
+          <a:prstGeom prst="rect">
+            <a:avLst/>
+          </a:prstGeom>
+          <a:noFill/>
+          <a:ln/>
+        </p:spPr>
+        <p:txBody>
+          <a:bodyPr wrap="square" lIns="0" tIns="0" rIns="0" bIns="0" rtlCol="0" anchor="ctr"/>
+          <a:lstStyle/>
+          <a:p>
+            <a:pPr indent="0" marL="0">
+              <a:buNone/>
+            </a:pPr>
+            <a:r>
+              <a:rPr lang="en-US" sz="1200" dirty="0">
+                <a:solidFill>
+                  <a:schemeClr val="bg1"/>
+                </a:solidFill>
+                <a:latin typeface="Courier New" pitchFamily="34" charset="0"/>
+                <a:ea typeface="Courier New" pitchFamily="34" charset="-122"/>
+                <a:cs typeface="Courier New" pitchFamily="34" charset="-120"/>
+              </a:rPr>
+              <a:t>z = bz + 3</a:t>
+            </a:r>
+            <a:endParaRPr lang="en-US" sz="1200" dirty="0"/>
+          </a:p>
+        </p:txBody>
+      </p:sp>
+      <p:sp>
+        <p:nvSpPr>
+          <p:cNvPr id="23028" name="Text 26"/>
+          <p:cNvSpPr txBox="1"/>
+          <p:nvPr/>
+        </p:nvSpPr>
+        <p:spPr>
+          <a:xfrm>
+            <a:off x="5138928" y="4069080"/>
+            <a:ext cx="6302959" cy="384048"/>
+          </a:xfrm>
+          <a:prstGeom prst="rect">
+            <a:avLst/>
+          </a:prstGeom>
+          <a:noFill/>
+          <a:ln/>
+        </p:spPr>
+        <p:txBody>
+          <a:bodyPr wrap="square" lIns="0" tIns="0" rIns="0" bIns="0" rtlCol="0" anchor="ctr"/>
+          <a:lstStyle/>
+          <a:p>
+            <a:pPr indent="0" marL="0">
+              <a:buNone/>
+            </a:pPr>
+            <a:r>
+              <a:rPr lang="en-US" sz="1300" dirty="0">
+                <a:solidFill>
+                  <a:schemeClr val="bg1"/>
+                </a:solidFill>
+              </a:rPr>
+              <a:t>laget du prøver i redigeringsdialogen</a:t>
+            </a:r>
+            <a:endParaRPr lang="en-US" sz="1300" dirty="0"/>
+          </a:p>
+        </p:txBody>
+      </p:sp>
+      <p:sp>
+        <p:nvSpPr>
+          <p:cNvPr id="23029" name="Lag Dine overlegg"/>
+          <p:cNvSpPr/>
+          <p:nvPr/>
+        </p:nvSpPr>
+        <p:spPr>
+          <a:xfrm>
+            <a:off x="548640" y="4498848"/>
+            <a:ext cx="11094415" cy="384048"/>
+          </a:xfrm>
+          <a:prstGeom prst="roundRect">
+            <a:avLst>
+              <a:gd name="adj" fmla="val 16667"/>
+            </a:avLst>
           </a:prstGeom>
           <a:solidFill>
             <a:schemeClr val="accent1"/>
@@ -5384,40 +5487,16 @@
           <a:ln/>
         </p:spPr>
       </p:sp>
-      <p:pic>
-        <p:nvPicPr>
-          <p:cNvPr id="23004" name="Ikon layers" descr="layers">    </p:cNvPr>
-          <p:cNvPicPr>
-            <a:picLocks noChangeAspect="1"/>
-          </p:cNvPicPr>
-          <p:nvPr/>
-        </p:nvPicPr>
-        <p:blipFill>
-          <a:blip r:embed="rId1"/>
-          <a:stretch>
-            <a:fillRect/>
-          </a:stretch>
-        </p:blipFill>
-        <p:spPr>
-          <a:xfrm>
-            <a:off x="661294" y="1703710"/>
-            <a:ext cx="286756" cy="286756"/>
-          </a:xfrm>
-          <a:prstGeom prst="rect">
-            <a:avLst/>
-          </a:prstGeom>
-        </p:spPr>
-      </p:pic>
-      <p:sp>
-        <p:nvSpPr>
-          <p:cNvPr id="23005" name="Text 2"/>
+      <p:sp>
+        <p:nvSpPr>
+          <p:cNvPr id="23030" name="Text 28"/>
           <p:cNvSpPr txBox="1"/>
           <p:nvPr/>
         </p:nvSpPr>
         <p:spPr>
           <a:xfrm>
-            <a:off x="1261872" y="1517904"/>
-            <a:ext cx="4590288" cy="1280160"/>
+            <a:off x="749808" y="4498848"/>
+            <a:ext cx="2240280" cy="384048"/>
           </a:xfrm>
           <a:prstGeom prst="rect">
             <a:avLst/>
@@ -5426,547 +5505,404 @@
           <a:ln/>
         </p:spPr>
         <p:txBody>
+          <a:bodyPr wrap="square" lIns="0" tIns="0" rIns="0" bIns="0" rtlCol="0" anchor="ctr"/>
+          <a:lstStyle/>
+          <a:p>
+            <a:pPr indent="0" marL="0">
+              <a:buNone/>
+            </a:pPr>
+            <a:r>
+              <a:rPr lang="en-US" sz="1400" b="1" dirty="0">
+                <a:solidFill>
+                  <a:schemeClr val="bg1"/>
+                </a:solidFill>
+              </a:rPr>
+              <a:t>Dine overlegg</a:t>
+            </a:r>
+            <a:endParaRPr lang="en-US" sz="1400" dirty="0"/>
+          </a:p>
+        </p:txBody>
+      </p:sp>
+      <p:sp>
+        <p:nvSpPr>
+          <p:cNvPr id="23031" name="Text 29"/>
+          <p:cNvSpPr txBox="1"/>
+          <p:nvPr/>
+        </p:nvSpPr>
+        <p:spPr>
+          <a:xfrm>
+            <a:off x="3264408" y="4498848"/>
+            <a:ext cx="1783080" cy="384048"/>
+          </a:xfrm>
+          <a:prstGeom prst="rect">
+            <a:avLst/>
+          </a:prstGeom>
+          <a:noFill/>
+          <a:ln/>
+        </p:spPr>
+        <p:txBody>
+          <a:bodyPr wrap="square" lIns="0" tIns="0" rIns="0" bIns="0" rtlCol="0" anchor="ctr"/>
+          <a:lstStyle/>
+          <a:p>
+            <a:pPr indent="0" marL="0">
+              <a:buNone/>
+            </a:pPr>
+            <a:r>
+              <a:rPr lang="en-US" sz="1200" dirty="0">
+                <a:solidFill>
+                  <a:schemeClr val="bg1"/>
+                </a:solidFill>
+                <a:latin typeface="Courier New" pitchFamily="34" charset="0"/>
+                <a:ea typeface="Courier New" pitchFamily="34" charset="-122"/>
+                <a:cs typeface="Courier New" pitchFamily="34" charset="-120"/>
+              </a:rPr>
+              <a:t>z = bz + 2</a:t>
+            </a:r>
+            <a:endParaRPr lang="en-US" sz="1200" dirty="0"/>
+          </a:p>
+        </p:txBody>
+      </p:sp>
+      <p:sp>
+        <p:nvSpPr>
+          <p:cNvPr id="23032" name="Text 30"/>
+          <p:cNvSpPr txBox="1"/>
+          <p:nvPr/>
+        </p:nvSpPr>
+        <p:spPr>
+          <a:xfrm>
+            <a:off x="5138928" y="4498848"/>
+            <a:ext cx="6302959" cy="384048"/>
+          </a:xfrm>
+          <a:prstGeom prst="rect">
+            <a:avLst/>
+          </a:prstGeom>
+          <a:noFill/>
+          <a:ln/>
+        </p:spPr>
+        <p:txBody>
+          <a:bodyPr wrap="square" lIns="0" tIns="0" rIns="0" bIns="0" rtlCol="0" anchor="ctr"/>
+          <a:lstStyle/>
+          <a:p>
+            <a:pPr indent="0" marL="0">
+              <a:buNone/>
+            </a:pPr>
+            <a:r>
+              <a:rPr lang="en-US" sz="1300" dirty="0">
+                <a:solidFill>
+                  <a:schemeClr val="bg1"/>
+                </a:solidFill>
+              </a:rPr>
+              <a:t>turruter, eiendomsgrenser, terrengskygge – egen glidebryter for synlighet</a:t>
+            </a:r>
+            <a:endParaRPr lang="en-US" sz="1300" dirty="0"/>
+          </a:p>
+        </p:txBody>
+      </p:sp>
+      <p:sp>
+        <p:nvSpPr>
+          <p:cNvPr id="23033" name="Lag Ditt bakgrunnskart"/>
+          <p:cNvSpPr/>
+          <p:nvPr/>
+        </p:nvSpPr>
+        <p:spPr>
+          <a:xfrm>
+            <a:off x="548640" y="4928616"/>
+            <a:ext cx="11094415" cy="384048"/>
+          </a:xfrm>
+          <a:prstGeom prst="roundRect">
+            <a:avLst>
+              <a:gd name="adj" fmla="val 16667"/>
+            </a:avLst>
+          </a:prstGeom>
+          <a:solidFill>
+            <a:schemeClr val="tx2"/>
+          </a:solidFill>
+          <a:ln/>
+        </p:spPr>
+      </p:sp>
+      <p:sp>
+        <p:nvSpPr>
+          <p:cNvPr id="23034" name="Text 32"/>
+          <p:cNvSpPr txBox="1"/>
+          <p:nvPr/>
+        </p:nvSpPr>
+        <p:spPr>
+          <a:xfrm>
+            <a:off x="749808" y="4928616"/>
+            <a:ext cx="2240280" cy="384048"/>
+          </a:xfrm>
+          <a:prstGeom prst="rect">
+            <a:avLst/>
+          </a:prstGeom>
+          <a:noFill/>
+          <a:ln/>
+        </p:spPr>
+        <p:txBody>
+          <a:bodyPr wrap="square" lIns="0" tIns="0" rIns="0" bIns="0" rtlCol="0" anchor="ctr"/>
+          <a:lstStyle/>
+          <a:p>
+            <a:pPr indent="0" marL="0">
+              <a:buNone/>
+            </a:pPr>
+            <a:r>
+              <a:rPr lang="en-US" sz="1400" b="1" dirty="0">
+                <a:solidFill>
+                  <a:schemeClr val="bg1"/>
+                </a:solidFill>
+              </a:rPr>
+              <a:t>Ditt bakgrunnskart</a:t>
+            </a:r>
+            <a:endParaRPr lang="en-US" sz="1400" dirty="0"/>
+          </a:p>
+        </p:txBody>
+      </p:sp>
+      <p:sp>
+        <p:nvSpPr>
+          <p:cNvPr id="23035" name="Text 33"/>
+          <p:cNvSpPr txBox="1"/>
+          <p:nvPr/>
+        </p:nvSpPr>
+        <p:spPr>
+          <a:xfrm>
+            <a:off x="3264408" y="4928616"/>
+            <a:ext cx="1783080" cy="384048"/>
+          </a:xfrm>
+          <a:prstGeom prst="rect">
+            <a:avLst/>
+          </a:prstGeom>
+          <a:noFill/>
+          <a:ln/>
+        </p:spPr>
+        <p:txBody>
+          <a:bodyPr wrap="square" lIns="0" tIns="0" rIns="0" bIns="0" rtlCol="0" anchor="ctr"/>
+          <a:lstStyle/>
+          <a:p>
+            <a:pPr indent="0" marL="0">
+              <a:buNone/>
+            </a:pPr>
+            <a:r>
+              <a:rPr lang="en-US" sz="1200" dirty="0">
+                <a:solidFill>
+                  <a:schemeClr val="bg1"/>
+                </a:solidFill>
+                <a:latin typeface="Courier New" pitchFamily="34" charset="0"/>
+                <a:ea typeface="Courier New" pitchFamily="34" charset="-122"/>
+                <a:cs typeface="Courier New" pitchFamily="34" charset="-120"/>
+              </a:rPr>
+              <a:t>z = bz + 1</a:t>
+            </a:r>
+            <a:endParaRPr lang="en-US" sz="1200" dirty="0"/>
+          </a:p>
+        </p:txBody>
+      </p:sp>
+      <p:sp>
+        <p:nvSpPr>
+          <p:cNvPr id="23036" name="Text 34"/>
+          <p:cNvSpPr txBox="1"/>
+          <p:nvPr/>
+        </p:nvSpPr>
+        <p:spPr>
+          <a:xfrm>
+            <a:off x="5138928" y="4928616"/>
+            <a:ext cx="6302959" cy="384048"/>
+          </a:xfrm>
+          <a:prstGeom prst="rect">
+            <a:avLst/>
+          </a:prstGeom>
+          <a:noFill/>
+          <a:ln/>
+        </p:spPr>
+        <p:txBody>
+          <a:bodyPr wrap="square" lIns="0" tIns="0" rIns="0" bIns="0" rtlCol="0" anchor="ctr"/>
+          <a:lstStyle/>
+          <a:p>
+            <a:pPr indent="0" marL="0">
+              <a:buNone/>
+            </a:pPr>
+            <a:r>
+              <a:rPr lang="en-US" sz="1300" dirty="0">
+                <a:solidFill>
+                  <a:schemeClr val="bg1"/>
+                </a:solidFill>
+              </a:rPr>
+              <a:t>helt dekkende – dempes mot hvitt med fargefilter, høyst 50 %</a:t>
+            </a:r>
+            <a:endParaRPr lang="en-US" sz="1300" dirty="0"/>
+          </a:p>
+        </p:txBody>
+      </p:sp>
+      <p:sp>
+        <p:nvSpPr>
+          <p:cNvPr id="23037" name="Lag geocaching.com-kartet"/>
+          <p:cNvSpPr/>
+          <p:nvPr/>
+        </p:nvSpPr>
+        <p:spPr>
+          <a:xfrm>
+            <a:off x="548640" y="5358384"/>
+            <a:ext cx="11094415" cy="384048"/>
+          </a:xfrm>
+          <a:prstGeom prst="roundRect">
+            <a:avLst>
+              <a:gd name="adj" fmla="val 16667"/>
+            </a:avLst>
+          </a:prstGeom>
+          <a:solidFill>
+            <a:schemeClr val="accent5"/>
+          </a:solidFill>
+          <a:ln/>
+        </p:spPr>
+      </p:sp>
+      <p:sp>
+        <p:nvSpPr>
+          <p:cNvPr id="23038" name="Text 36"/>
+          <p:cNvSpPr txBox="1"/>
+          <p:nvPr/>
+        </p:nvSpPr>
+        <p:spPr>
+          <a:xfrm>
+            <a:off x="749808" y="5358384"/>
+            <a:ext cx="2240280" cy="384048"/>
+          </a:xfrm>
+          <a:prstGeom prst="rect">
+            <a:avLst/>
+          </a:prstGeom>
+          <a:noFill/>
+          <a:ln/>
+        </p:spPr>
+        <p:txBody>
+          <a:bodyPr wrap="square" lIns="0" tIns="0" rIns="0" bIns="0" rtlCol="0" anchor="ctr"/>
+          <a:lstStyle/>
+          <a:p>
+            <a:pPr indent="0" marL="0">
+              <a:buNone/>
+            </a:pPr>
+            <a:r>
+              <a:rPr lang="en-US" sz="1400" b="1" dirty="0">
+                <a:solidFill>
+                  <a:schemeClr val="tx1"/>
+                </a:solidFill>
+              </a:rPr>
+              <a:t>geocaching.com-kartet</a:t>
+            </a:r>
+            <a:endParaRPr lang="en-US" sz="1400" dirty="0"/>
+          </a:p>
+        </p:txBody>
+      </p:sp>
+      <p:sp>
+        <p:nvSpPr>
+          <p:cNvPr id="23039" name="Text 37"/>
+          <p:cNvSpPr txBox="1"/>
+          <p:nvPr/>
+        </p:nvSpPr>
+        <p:spPr>
+          <a:xfrm>
+            <a:off x="3264408" y="5358384"/>
+            <a:ext cx="1783080" cy="384048"/>
+          </a:xfrm>
+          <a:prstGeom prst="rect">
+            <a:avLst/>
+          </a:prstGeom>
+          <a:noFill/>
+          <a:ln/>
+        </p:spPr>
+        <p:txBody>
+          <a:bodyPr wrap="square" lIns="0" tIns="0" rIns="0" bIns="0" rtlCol="0" anchor="ctr"/>
+          <a:lstStyle/>
+          <a:p>
+            <a:pPr indent="0" marL="0">
+              <a:buNone/>
+            </a:pPr>
+            <a:r>
+              <a:rPr lang="en-US" sz="1200" dirty="0">
+                <a:solidFill>
+                  <a:schemeClr val="tx1"/>
+                </a:solidFill>
+                <a:latin typeface="Courier New" pitchFamily="34" charset="0"/>
+                <a:ea typeface="Courier New" pitchFamily="34" charset="-122"/>
+                <a:cs typeface="Courier New" pitchFamily="34" charset="-120"/>
+              </a:rPr>
+              <a:t>z = bz</a:t>
+            </a:r>
+            <a:endParaRPr lang="en-US" sz="1200" dirty="0"/>
+          </a:p>
+        </p:txBody>
+      </p:sp>
+      <p:sp>
+        <p:nvSpPr>
+          <p:cNvPr id="23040" name="Text 38"/>
+          <p:cNvSpPr txBox="1"/>
+          <p:nvPr/>
+        </p:nvSpPr>
+        <p:spPr>
+          <a:xfrm>
+            <a:off x="5138928" y="5358384"/>
+            <a:ext cx="6302959" cy="384048"/>
+          </a:xfrm>
+          <a:prstGeom prst="rect">
+            <a:avLst/>
+          </a:prstGeom>
+          <a:noFill/>
+          <a:ln/>
+        </p:spPr>
+        <p:txBody>
+          <a:bodyPr wrap="square" lIns="0" tIns="0" rIns="0" bIns="0" rtlCol="0" anchor="ctr"/>
+          <a:lstStyle/>
+          <a:p>
+            <a:pPr indent="0" marL="0">
+              <a:buNone/>
+            </a:pPr>
+            <a:r>
+              <a:rPr lang="en-US" sz="1300" dirty="0">
+                <a:solidFill>
+                  <a:schemeClr val="tx1"/>
+                </a:solidFill>
+              </a:rPr>
+              <a:t>nettstedets bakgrunn – dekkes av ditt kart, dempes når det selv er valgt</a:t>
+            </a:r>
+            <a:endParaRPr lang="en-US" sz="1300" dirty="0"/>
+          </a:p>
+        </p:txBody>
+      </p:sp>
+      <p:sp>
+        <p:nvSpPr>
+          <p:cNvPr id="23041" name="Text 39"/>
+          <p:cNvSpPr txBox="1"/>
+          <p:nvPr/>
+        </p:nvSpPr>
+        <p:spPr>
+          <a:xfrm>
+            <a:off x="548640" y="5861304"/>
+            <a:ext cx="11094415" cy="457200"/>
+          </a:xfrm>
+          <a:prstGeom prst="rect">
+            <a:avLst/>
+          </a:prstGeom>
+          <a:noFill/>
+          <a:ln/>
+        </p:spPr>
+        <p:txBody>
           <a:bodyPr wrap="square" lIns="0" tIns="0" rIns="0" bIns="0" rtlCol="0" anchor="t"/>
           <a:lstStyle/>
           <a:p>
             <a:pPr indent="0" marL="0">
-              <a:spcAft>
-                <a:spcPts val="200"/>
-              </a:spcAft>
-              <a:buNone/>
-            </a:pPr>
-            <a:r>
-              <a:rPr lang="en-US" sz="1700" b="1" dirty="0">
-                <a:solidFill>
-                  <a:schemeClr val="tx1"/>
-                </a:solidFill>
-              </a:rPr>
-              <a:t>Fjerner aldri nettstedets lag</a:t>
-            </a:r>
-            <a:endParaRPr lang="en-US" sz="1700" dirty="0"/>
-          </a:p>
-          <a:p>
-            <a:pPr indent="0" marL="0">
-              <a:spcAft>
-                <a:spcPts val="200"/>
-              </a:spcAft>
-              <a:buNone/>
-            </a:pPr>
-            <a:r>
-              <a:rPr lang="en-US" sz="1400" dirty="0">
+              <a:buNone/>
+            </a:pPr>
+            <a:r>
+              <a:rPr lang="en-US" sz="1150" dirty="0">
                 <a:solidFill>
                   <a:schemeClr val="accent4"/>
                 </a:solidFill>
               </a:rPr>
-              <a:t>Skriptet legger sine egne lag inn mellom, sortert etter z-indeks</a:t>
-            </a:r>
-            <a:endParaRPr lang="en-US" sz="1700" dirty="0"/>
-          </a:p>
-        </p:txBody>
-      </p:sp>
-      <p:sp>
-        <p:nvSpPr>
-          <p:cNvPr id="23006" name="Ikon eraser sirkel"/>
-          <p:cNvSpPr/>
-          <p:nvPr/>
-        </p:nvSpPr>
-        <p:spPr>
-          <a:xfrm>
-            <a:off x="548640" y="2916936"/>
-            <a:ext cx="512064" cy="512064"/>
-          </a:xfrm>
-          <a:prstGeom prst="ellipse">
-            <a:avLst/>
-          </a:prstGeom>
-          <a:solidFill>
-            <a:schemeClr val="accent1"/>
-          </a:solidFill>
-          <a:ln/>
-        </p:spPr>
-      </p:sp>
-      <p:pic>
-        <p:nvPicPr>
-          <p:cNvPr id="23007" name="Ikon eraser" descr="eraser">    </p:cNvPr>
-          <p:cNvPicPr>
-            <a:picLocks noChangeAspect="1"/>
-          </p:cNvPicPr>
-          <p:nvPr/>
-        </p:nvPicPr>
-        <p:blipFill>
-          <a:blip r:embed="rId2"/>
-          <a:stretch>
-            <a:fillRect/>
-          </a:stretch>
-        </p:blipFill>
-        <p:spPr>
-          <a:xfrm>
-            <a:off x="661294" y="3029590"/>
-            <a:ext cx="286756" cy="286756"/>
-          </a:xfrm>
-          <a:prstGeom prst="rect">
-            <a:avLst/>
-          </a:prstGeom>
-        </p:spPr>
-      </p:pic>
-      <p:sp>
-        <p:nvSpPr>
-          <p:cNvPr id="23008" name="Text 4"/>
-          <p:cNvSpPr txBox="1"/>
-          <p:nvPr/>
-        </p:nvSpPr>
-        <p:spPr>
-          <a:xfrm>
-            <a:off x="1261872" y="2843784"/>
-            <a:ext cx="4590288" cy="1280160"/>
-          </a:xfrm>
-          <a:prstGeom prst="rect">
-            <a:avLst/>
-          </a:prstGeom>
-          <a:noFill/>
-          <a:ln/>
-        </p:spPr>
-        <p:txBody>
-          <a:bodyPr wrap="square" lIns="0" tIns="0" rIns="0" bIns="0" rtlCol="0" anchor="t"/>
-          <a:lstStyle/>
-          <a:p>
-            <a:pPr indent="0" marL="0">
-              <a:spcAft>
-                <a:spcPts val="200"/>
-              </a:spcAft>
-              <a:buNone/>
-            </a:pPr>
-            <a:r>
-              <a:rPr lang="en-US" sz="1700" b="1" dirty="0">
-                <a:solidFill>
-                  <a:schemeClr val="tx1"/>
-                </a:solidFill>
-              </a:rPr>
-              <a:t>Ingen skjøter mellom flisene</a:t>
-            </a:r>
-            <a:endParaRPr lang="en-US" sz="1700" dirty="0"/>
-          </a:p>
-          <a:p>
-            <a:pPr indent="0" marL="0">
-              <a:spcAft>
-                <a:spcPts val="200"/>
-              </a:spcAft>
-              <a:buNone/>
-            </a:pPr>
-            <a:r>
-              <a:rPr lang="en-US" sz="1400" dirty="0">
-                <a:solidFill>
-                  <a:schemeClr val="accent4"/>
-                </a:solidFill>
-              </a:rPr>
-              <a:t>Flisene tegnes 1 piksel større, også ved 110 og 125 % skjermskalering</a:t>
-            </a:r>
-            <a:endParaRPr lang="en-US" sz="1700" dirty="0"/>
-          </a:p>
-        </p:txBody>
-      </p:sp>
-      <p:sp>
-        <p:nvSpPr>
-          <p:cNvPr id="23009" name="Ikon ring sirkel"/>
-          <p:cNvSpPr/>
-          <p:nvPr/>
-        </p:nvSpPr>
-        <p:spPr>
-          <a:xfrm>
-            <a:off x="548640" y="4242816"/>
-            <a:ext cx="512064" cy="512064"/>
-          </a:xfrm>
-          <a:prstGeom prst="ellipse">
-            <a:avLst/>
-          </a:prstGeom>
-          <a:solidFill>
-            <a:schemeClr val="accent1"/>
-          </a:solidFill>
-          <a:ln/>
-        </p:spPr>
-      </p:sp>
-      <p:pic>
-        <p:nvPicPr>
-          <p:cNvPr id="23010" name="Ikon ring" descr="ring">    </p:cNvPr>
-          <p:cNvPicPr>
-            <a:picLocks noChangeAspect="1"/>
-          </p:cNvPicPr>
-          <p:nvPr/>
-        </p:nvPicPr>
-        <p:blipFill>
-          <a:blip r:embed="rId3"/>
-          <a:stretch>
-            <a:fillRect/>
-          </a:stretch>
-        </p:blipFill>
-        <p:spPr>
-          <a:xfrm>
-            <a:off x="661294" y="4355470"/>
-            <a:ext cx="286756" cy="286756"/>
-          </a:xfrm>
-          <a:prstGeom prst="rect">
-            <a:avLst/>
-          </a:prstGeom>
-        </p:spPr>
-      </p:pic>
-      <p:sp>
-        <p:nvSpPr>
-          <p:cNvPr id="23011" name="Text 6"/>
-          <p:cNvSpPr txBox="1"/>
-          <p:nvPr/>
-        </p:nvSpPr>
-        <p:spPr>
-          <a:xfrm>
-            <a:off x="1261872" y="4169664"/>
-            <a:ext cx="4590288" cy="1280160"/>
-          </a:xfrm>
-          <a:prstGeom prst="rect">
-            <a:avLst/>
-          </a:prstGeom>
-          <a:noFill/>
-          <a:ln/>
-        </p:spPr>
-        <p:txBody>
-          <a:bodyPr wrap="square" lIns="0" tIns="0" rIns="0" bIns="0" rtlCol="0" anchor="t"/>
-          <a:lstStyle/>
-          <a:p>
-            <a:pPr indent="0" marL="0">
-              <a:spcAft>
-                <a:spcPts val="200"/>
-              </a:spcAft>
-              <a:buNone/>
-            </a:pPr>
-            <a:r>
-              <a:rPr lang="en-US" sz="1700" b="1" dirty="0">
-                <a:solidFill>
-                  <a:schemeClr val="tx1"/>
-                </a:solidFill>
-              </a:rPr>
-              <a:t>Demping uten gjennomskinn</a:t>
-            </a:r>
-            <a:endParaRPr lang="en-US" sz="1700" dirty="0"/>
-          </a:p>
-          <a:p>
-            <a:pPr indent="0" marL="0">
-              <a:spcAft>
-                <a:spcPts val="200"/>
-              </a:spcAft>
-              <a:buNone/>
-            </a:pPr>
-            <a:r>
-              <a:rPr lang="en-US" sz="1400" dirty="0">
-                <a:solidFill>
-                  <a:schemeClr val="accent4"/>
-                </a:solidFill>
-              </a:rPr>
-              <a:t>Et fargefilter bleker kartet mot hvitt – nettstedets kart skinner aldri gjennom</a:t>
-            </a:r>
-            <a:endParaRPr lang="en-US" sz="1700" dirty="0"/>
-          </a:p>
-        </p:txBody>
-      </p:sp>
-      <p:sp>
-        <p:nvSpPr>
-          <p:cNvPr id="23012" name="Ikon locate sirkel"/>
-          <p:cNvSpPr/>
-          <p:nvPr/>
-        </p:nvSpPr>
-        <p:spPr>
-          <a:xfrm>
-            <a:off x="6355080" y="1591056"/>
-            <a:ext cx="512064" cy="512064"/>
-          </a:xfrm>
-          <a:prstGeom prst="ellipse">
-            <a:avLst/>
-          </a:prstGeom>
-          <a:solidFill>
-            <a:schemeClr val="accent1"/>
-          </a:solidFill>
-          <a:ln/>
-        </p:spPr>
-      </p:sp>
-      <p:pic>
-        <p:nvPicPr>
-          <p:cNvPr id="23013" name="Ikon locate" descr="locate">    </p:cNvPr>
-          <p:cNvPicPr>
-            <a:picLocks noChangeAspect="1"/>
-          </p:cNvPicPr>
-          <p:nvPr/>
-        </p:nvPicPr>
-        <p:blipFill>
-          <a:blip r:embed="rId4"/>
-          <a:stretch>
-            <a:fillRect/>
-          </a:stretch>
-        </p:blipFill>
-        <p:spPr>
-          <a:xfrm>
-            <a:off x="6467734" y="1703710"/>
-            <a:ext cx="286756" cy="286756"/>
-          </a:xfrm>
-          <a:prstGeom prst="rect">
-            <a:avLst/>
-          </a:prstGeom>
-        </p:spPr>
-      </p:pic>
-      <p:sp>
-        <p:nvSpPr>
-          <p:cNvPr id="23014" name="Text 8"/>
-          <p:cNvSpPr txBox="1"/>
-          <p:nvPr/>
-        </p:nvSpPr>
-        <p:spPr>
-          <a:xfrm>
-            <a:off x="7068312" y="1517904"/>
-            <a:ext cx="4590288" cy="1280160"/>
-          </a:xfrm>
-          <a:prstGeom prst="rect">
-            <a:avLst/>
-          </a:prstGeom>
-          <a:noFill/>
-          <a:ln/>
-        </p:spPr>
-        <p:txBody>
-          <a:bodyPr wrap="square" lIns="0" tIns="0" rIns="0" bIns="0" rtlCol="0" anchor="t"/>
-          <a:lstStyle/>
-          <a:p>
-            <a:pPr indent="0" marL="0">
-              <a:spcAft>
-                <a:spcPts val="200"/>
-              </a:spcAft>
-              <a:buNone/>
-            </a:pPr>
-            <a:r>
-              <a:rPr lang="en-US" sz="1700" b="1" dirty="0">
-                <a:solidFill>
-                  <a:schemeClr val="tx1"/>
-                </a:solidFill>
-              </a:rPr>
-              <a:t>Finner kartet selv</a:t>
-            </a:r>
-            <a:endParaRPr lang="en-US" sz="1700" dirty="0"/>
-          </a:p>
-          <a:p>
-            <a:pPr indent="0" marL="0">
-              <a:spcAft>
-                <a:spcPts val="200"/>
-              </a:spcAft>
-              <a:buNone/>
-            </a:pPr>
-            <a:r>
-              <a:rPr lang="en-US" sz="1400" dirty="0">
-                <a:solidFill>
-                  <a:schemeClr val="accent4"/>
-                </a:solidFill>
-              </a:rPr>
-              <a:t>Fanger opp Leaflet når siden laster, også på /play/map og cachesidene</a:t>
-            </a:r>
-            <a:endParaRPr lang="en-US" sz="1700" dirty="0"/>
-          </a:p>
-        </p:txBody>
-      </p:sp>
-      <p:sp>
-        <p:nvSpPr>
-          <p:cNvPr id="23015" name="Ikon check sirkel"/>
-          <p:cNvSpPr/>
-          <p:nvPr/>
-        </p:nvSpPr>
-        <p:spPr>
-          <a:xfrm>
-            <a:off x="6355080" y="2916936"/>
-            <a:ext cx="512064" cy="512064"/>
-          </a:xfrm>
-          <a:prstGeom prst="ellipse">
-            <a:avLst/>
-          </a:prstGeom>
-          <a:solidFill>
-            <a:schemeClr val="accent1"/>
-          </a:solidFill>
-          <a:ln/>
-        </p:spPr>
-      </p:sp>
-      <p:pic>
-        <p:nvPicPr>
-          <p:cNvPr id="23016" name="Ikon check" descr="check">    </p:cNvPr>
-          <p:cNvPicPr>
-            <a:picLocks noChangeAspect="1"/>
-          </p:cNvPicPr>
-          <p:nvPr/>
-        </p:nvPicPr>
-        <p:blipFill>
-          <a:blip r:embed="rId5"/>
-          <a:stretch>
-            <a:fillRect/>
-          </a:stretch>
-        </p:blipFill>
-        <p:spPr>
-          <a:xfrm>
-            <a:off x="6467734" y="3029590"/>
-            <a:ext cx="286756" cy="286756"/>
-          </a:xfrm>
-          <a:prstGeom prst="rect">
-            <a:avLst/>
-          </a:prstGeom>
-        </p:spPr>
-      </p:pic>
-      <p:sp>
-        <p:nvSpPr>
-          <p:cNvPr id="23017" name="Text 10"/>
-          <p:cNvSpPr txBox="1"/>
-          <p:nvPr/>
-        </p:nvSpPr>
-        <p:spPr>
-          <a:xfrm>
-            <a:off x="7068312" y="2843784"/>
-            <a:ext cx="4590288" cy="1280160"/>
-          </a:xfrm>
-          <a:prstGeom prst="rect">
-            <a:avLst/>
-          </a:prstGeom>
-          <a:noFill/>
-          <a:ln/>
-        </p:spPr>
-        <p:txBody>
-          <a:bodyPr wrap="square" lIns="0" tIns="0" rIns="0" bIns="0" rtlCol="0" anchor="t"/>
-          <a:lstStyle/>
-          <a:p>
-            <a:pPr indent="0" marL="0">
-              <a:spcAft>
-                <a:spcPts val="200"/>
-              </a:spcAft>
-              <a:buNone/>
-            </a:pPr>
-            <a:r>
-              <a:rPr lang="en-US" sz="1700" b="1" dirty="0">
-                <a:solidFill>
-                  <a:schemeClr val="tx1"/>
-                </a:solidFill>
-              </a:rPr>
-              <a:t>Rører ikke skjemaet</a:t>
-            </a:r>
-            <a:endParaRPr lang="en-US" sz="1700" dirty="0"/>
-          </a:p>
-          <a:p>
-            <a:pPr indent="0" marL="0">
-              <a:spcAft>
-                <a:spcPts val="200"/>
-              </a:spcAft>
-              <a:buNone/>
-            </a:pPr>
-            <a:r>
-              <a:rPr lang="en-US" sz="1400" dirty="0">
-                <a:solidFill>
-                  <a:schemeClr val="accent4"/>
-                </a:solidFill>
-              </a:rPr>
-              <a:t>Ingen knapp kan sende inn sidens ASP.NET-skjema, så siden lastes aldri på nytt</a:t>
-            </a:r>
-            <a:endParaRPr lang="en-US" sz="1700" dirty="0"/>
-          </a:p>
-        </p:txBody>
-      </p:sp>
-      <p:sp>
-        <p:nvSpPr>
-          <p:cNvPr id="23018" name="Ikon search sirkel"/>
-          <p:cNvSpPr/>
-          <p:nvPr/>
-        </p:nvSpPr>
-        <p:spPr>
-          <a:xfrm>
-            <a:off x="6355080" y="4242816"/>
-            <a:ext cx="512064" cy="512064"/>
-          </a:xfrm>
-          <a:prstGeom prst="ellipse">
-            <a:avLst/>
-          </a:prstGeom>
-          <a:solidFill>
-            <a:schemeClr val="accent1"/>
-          </a:solidFill>
-          <a:ln/>
-        </p:spPr>
-      </p:sp>
-      <p:pic>
-        <p:nvPicPr>
-          <p:cNvPr id="23019" name="Ikon search" descr="search">    </p:cNvPr>
-          <p:cNvPicPr>
-            <a:picLocks noChangeAspect="1"/>
-          </p:cNvPicPr>
-          <p:nvPr/>
-        </p:nvPicPr>
-        <p:blipFill>
-          <a:blip r:embed="rId6"/>
-          <a:stretch>
-            <a:fillRect/>
-          </a:stretch>
-        </p:blipFill>
-        <p:spPr>
-          <a:xfrm>
-            <a:off x="6467734" y="4355470"/>
-            <a:ext cx="286756" cy="286756"/>
-          </a:xfrm>
-          <a:prstGeom prst="rect">
-            <a:avLst/>
-          </a:prstGeom>
-        </p:spPr>
-      </p:pic>
-      <p:sp>
-        <p:nvSpPr>
-          <p:cNvPr id="23020" name="Text 12"/>
-          <p:cNvSpPr txBox="1"/>
-          <p:nvPr/>
-        </p:nvSpPr>
-        <p:spPr>
-          <a:xfrm>
-            <a:off x="7068312" y="4169664"/>
-            <a:ext cx="4590288" cy="1280160"/>
-          </a:xfrm>
-          <a:prstGeom prst="rect">
-            <a:avLst/>
-          </a:prstGeom>
-          <a:noFill/>
-          <a:ln/>
-        </p:spPr>
-        <p:txBody>
-          <a:bodyPr wrap="square" lIns="0" tIns="0" rIns="0" bIns="0" rtlCol="0" anchor="t"/>
-          <a:lstStyle/>
-          <a:p>
-            <a:pPr indent="0" marL="0">
-              <a:spcAft>
-                <a:spcPts val="200"/>
-              </a:spcAft>
-              <a:buNone/>
-            </a:pPr>
-            <a:r>
-              <a:rPr lang="en-US" sz="1700" b="1" dirty="0">
-                <a:solidFill>
-                  <a:schemeClr val="tx1"/>
-                </a:solidFill>
-              </a:rPr>
-              <a:t>Feilsøking innebygd</a:t>
-            </a:r>
-            <a:endParaRPr lang="en-US" sz="1700" dirty="0"/>
-          </a:p>
-          <a:p>
-            <a:pPr indent="0" marL="0">
-              <a:spcAft>
-                <a:spcPts val="200"/>
-              </a:spcAft>
-              <a:buNone/>
-            </a:pPr>
-            <a:r>
-              <a:rPr lang="en-US" sz="1400" dirty="0">
-                <a:solidFill>
-                  <a:schemeClr val="accent4"/>
-                </a:solidFill>
-              </a:rPr>
-              <a:t>gcctReport(), gcctCacheDebug(), gcctStageTest() og gcctSnapTest() i konsollen gir korte rapporter uten personopplysninger</a:t>
-            </a:r>
-            <a:endParaRPr lang="en-US" sz="1700" dirty="0"/>
-          </a:p>
-        </p:txBody>
-      </p:sp>
-      <p:sp>
-        <p:nvSpPr>
-          <p:cNvPr id="23021" name="Slide Number Placeholder 0"/>
+              <a:t>bz = z-indeksen til nettstedets bakgrunn. På /play/map er nettstedets bakgrunn et vektorkart (WebGL). På /map lastes i tillegg et usynlig cacherutenett (UTFGrid) som brukes til 161 m-sirklene og til å feste høyreklikkboblen til cacher.</a:t>
+            </a:r>
+            <a:endParaRPr lang="en-US" sz="1150" dirty="0"/>
+          </a:p>
+        </p:txBody>
+      </p:sp>
+      <p:sp>
+        <p:nvSpPr>
+          <p:cNvPr id="23042" name="Slide Number Placeholder 0"/>
           <p:cNvSpPr>
             <a:spLocks noGrp="1"/>
           </p:cNvSpPr>
@@ -6066,7 +6002,7 @@
                   <a:schemeClr val="tx2"/>
                 </a:solidFill>
               </a:rPr>
-              <a:t>Kom i gang på tre minutter</a:t>
+              <a:t>Under panseret</a:t>
             </a:r>
             <a:endParaRPr lang="en-US" sz="3600" dirty="0"/>
           </a:p>
@@ -6074,14 +6010,14 @@
       </p:sp>
       <p:sp>
         <p:nvSpPr>
-          <p:cNvPr id="24003" name="Steg 1"/>
+          <p:cNvPr id="24003" name="Ikon layers sirkel"/>
           <p:cNvSpPr/>
           <p:nvPr/>
         </p:nvSpPr>
         <p:spPr>
           <a:xfrm>
-            <a:off x="548640" y="1463040"/>
-            <a:ext cx="731520" cy="731520"/>
+            <a:off x="548640" y="1591056"/>
+            <a:ext cx="512064" cy="512064"/>
           </a:xfrm>
           <a:prstGeom prst="ellipse">
             <a:avLst/>
@@ -6092,367 +6028,9 @@
           <a:ln/>
         </p:spPr>
       </p:sp>
-      <p:sp>
-        <p:nvSpPr>
-          <p:cNvPr id="24004" name="Text 2"/>
-          <p:cNvSpPr txBox="1"/>
-          <p:nvPr/>
-        </p:nvSpPr>
-        <p:spPr>
-          <a:xfrm>
-            <a:off x="548640" y="1463040"/>
-            <a:ext cx="731520" cy="731520"/>
-          </a:xfrm>
-          <a:prstGeom prst="rect">
-            <a:avLst/>
-          </a:prstGeom>
-          <a:noFill/>
-          <a:ln/>
-        </p:spPr>
-        <p:txBody>
-          <a:bodyPr wrap="square" lIns="0" tIns="0" rIns="0" bIns="0" rtlCol="0" anchor="ctr"/>
-          <a:lstStyle/>
-          <a:p>
-            <a:pPr algn="ctr" indent="0" marL="0">
-              <a:buNone/>
-            </a:pPr>
-            <a:r>
-              <a:rPr lang="en-US" sz="2600" b="1" dirty="0">
-                <a:solidFill>
-                  <a:schemeClr val="bg1"/>
-                </a:solidFill>
-              </a:rPr>
-              <a:t>1</a:t>
-            </a:r>
-            <a:endParaRPr lang="en-US" sz="2600" dirty="0"/>
-          </a:p>
-        </p:txBody>
-      </p:sp>
-      <p:sp>
-        <p:nvSpPr>
-          <p:cNvPr id="24005" name="Text 3"/>
-          <p:cNvSpPr txBox="1"/>
-          <p:nvPr/>
-        </p:nvSpPr>
-        <p:spPr>
-          <a:xfrm>
-            <a:off x="548640" y="2377440"/>
-            <a:ext cx="3301898" cy="1463040"/>
-          </a:xfrm>
-          <a:prstGeom prst="rect">
-            <a:avLst/>
-          </a:prstGeom>
-          <a:noFill/>
-          <a:ln/>
-        </p:spPr>
-        <p:txBody>
-          <a:bodyPr wrap="square" lIns="0" tIns="0" rIns="0" bIns="0" rtlCol="0" anchor="t"/>
-          <a:lstStyle/>
-          <a:p>
-            <a:pPr indent="0" marL="0">
-              <a:spcAft>
-                <a:spcPts val="400"/>
-              </a:spcAft>
-              <a:buNone/>
-            </a:pPr>
-            <a:r>
-              <a:rPr lang="en-US" sz="1900" b="1" dirty="0">
-                <a:solidFill>
-                  <a:schemeClr val="tx1"/>
-                </a:solidFill>
-              </a:rPr>
-              <a:t>Installer en skriptbehandler</a:t>
-            </a:r>
-            <a:endParaRPr lang="en-US" sz="1900" dirty="0"/>
-          </a:p>
-          <a:p>
-            <a:pPr indent="0" marL="0">
-              <a:spcAft>
-                <a:spcPts val="400"/>
-              </a:spcAft>
-              <a:buNone/>
-            </a:pPr>
-            <a:r>
-              <a:rPr lang="en-US" sz="1400" dirty="0">
-                <a:solidFill>
-                  <a:schemeClr val="accent4"/>
-                </a:solidFill>
-              </a:rPr>
-              <a:t>Tampermonkey eller Violentmonkey i Chrome, Edge, Firefox eller Safari</a:t>
-            </a:r>
-            <a:endParaRPr lang="en-US" sz="1900" dirty="0"/>
-          </a:p>
-        </p:txBody>
-      </p:sp>
-      <p:sp>
-        <p:nvSpPr>
-          <p:cNvPr id="24006" name="Steg 2"/>
-          <p:cNvSpPr/>
-          <p:nvPr/>
-        </p:nvSpPr>
-        <p:spPr>
-          <a:xfrm>
-            <a:off x="4353458" y="1463040"/>
-            <a:ext cx="731520" cy="731520"/>
-          </a:xfrm>
-          <a:prstGeom prst="ellipse">
-            <a:avLst/>
-          </a:prstGeom>
-          <a:solidFill>
-            <a:schemeClr val="accent1"/>
-          </a:solidFill>
-          <a:ln/>
-        </p:spPr>
-      </p:sp>
-      <p:sp>
-        <p:nvSpPr>
-          <p:cNvPr id="24007" name="Text 5"/>
-          <p:cNvSpPr txBox="1"/>
-          <p:nvPr/>
-        </p:nvSpPr>
-        <p:spPr>
-          <a:xfrm>
-            <a:off x="4353458" y="1463040"/>
-            <a:ext cx="731520" cy="731520"/>
-          </a:xfrm>
-          <a:prstGeom prst="rect">
-            <a:avLst/>
-          </a:prstGeom>
-          <a:noFill/>
-          <a:ln/>
-        </p:spPr>
-        <p:txBody>
-          <a:bodyPr wrap="square" lIns="0" tIns="0" rIns="0" bIns="0" rtlCol="0" anchor="ctr"/>
-          <a:lstStyle/>
-          <a:p>
-            <a:pPr algn="ctr" indent="0" marL="0">
-              <a:buNone/>
-            </a:pPr>
-            <a:r>
-              <a:rPr lang="en-US" sz="2600" b="1" dirty="0">
-                <a:solidFill>
-                  <a:schemeClr val="bg1"/>
-                </a:solidFill>
-              </a:rPr>
-              <a:t>2</a:t>
-            </a:r>
-            <a:endParaRPr lang="en-US" sz="2600" dirty="0"/>
-          </a:p>
-        </p:txBody>
-      </p:sp>
-      <p:sp>
-        <p:nvSpPr>
-          <p:cNvPr id="24008" name="Text 6"/>
-          <p:cNvSpPr txBox="1"/>
-          <p:nvPr/>
-        </p:nvSpPr>
-        <p:spPr>
-          <a:xfrm>
-            <a:off x="4353458" y="2377440"/>
-            <a:ext cx="3301898" cy="1463040"/>
-          </a:xfrm>
-          <a:prstGeom prst="rect">
-            <a:avLst/>
-          </a:prstGeom>
-          <a:noFill/>
-          <a:ln/>
-        </p:spPr>
-        <p:txBody>
-          <a:bodyPr wrap="square" lIns="0" tIns="0" rIns="0" bIns="0" rtlCol="0" anchor="t"/>
-          <a:lstStyle/>
-          <a:p>
-            <a:pPr indent="0" marL="0">
-              <a:spcAft>
-                <a:spcPts val="400"/>
-              </a:spcAft>
-              <a:buNone/>
-            </a:pPr>
-            <a:r>
-              <a:rPr lang="en-US" sz="1900" b="1" dirty="0">
-                <a:solidFill>
-                  <a:schemeClr val="tx1"/>
-                </a:solidFill>
-              </a:rPr>
-              <a:t>Legg til skriptet</a:t>
-            </a:r>
-            <a:endParaRPr lang="en-US" sz="1900" dirty="0"/>
-          </a:p>
-          <a:p>
-            <a:pPr indent="0" marL="0">
-              <a:spcAft>
-                <a:spcPts val="400"/>
-              </a:spcAft>
-              <a:buNone/>
-            </a:pPr>
-            <a:r>
-              <a:rPr lang="en-US" sz="1400" dirty="0">
-                <a:solidFill>
-                  <a:schemeClr val="accent4"/>
-                </a:solidFill>
-              </a:rPr>
-              <a:t>Åpne geocaching-custom-tiles.user.js og lagre det i behandleren</a:t>
-            </a:r>
-            <a:endParaRPr lang="en-US" sz="1900" dirty="0"/>
-          </a:p>
-        </p:txBody>
-      </p:sp>
-      <p:sp>
-        <p:nvSpPr>
-          <p:cNvPr id="24009" name="Steg 3"/>
-          <p:cNvSpPr/>
-          <p:nvPr/>
-        </p:nvSpPr>
-        <p:spPr>
-          <a:xfrm>
-            <a:off x="8158277" y="1463040"/>
-            <a:ext cx="731520" cy="731520"/>
-          </a:xfrm>
-          <a:prstGeom prst="ellipse">
-            <a:avLst/>
-          </a:prstGeom>
-          <a:solidFill>
-            <a:schemeClr val="accent1"/>
-          </a:solidFill>
-          <a:ln/>
-        </p:spPr>
-      </p:sp>
-      <p:sp>
-        <p:nvSpPr>
-          <p:cNvPr id="24010" name="Text 8"/>
-          <p:cNvSpPr txBox="1"/>
-          <p:nvPr/>
-        </p:nvSpPr>
-        <p:spPr>
-          <a:xfrm>
-            <a:off x="8158277" y="1463040"/>
-            <a:ext cx="731520" cy="731520"/>
-          </a:xfrm>
-          <a:prstGeom prst="rect">
-            <a:avLst/>
-          </a:prstGeom>
-          <a:noFill/>
-          <a:ln/>
-        </p:spPr>
-        <p:txBody>
-          <a:bodyPr wrap="square" lIns="0" tIns="0" rIns="0" bIns="0" rtlCol="0" anchor="ctr"/>
-          <a:lstStyle/>
-          <a:p>
-            <a:pPr algn="ctr" indent="0" marL="0">
-              <a:buNone/>
-            </a:pPr>
-            <a:r>
-              <a:rPr lang="en-US" sz="2600" b="1" dirty="0">
-                <a:solidFill>
-                  <a:schemeClr val="bg1"/>
-                </a:solidFill>
-              </a:rPr>
-              <a:t>3</a:t>
-            </a:r>
-            <a:endParaRPr lang="en-US" sz="2600" dirty="0"/>
-          </a:p>
-        </p:txBody>
-      </p:sp>
-      <p:sp>
-        <p:nvSpPr>
-          <p:cNvPr id="24011" name="Text 9"/>
-          <p:cNvSpPr txBox="1"/>
-          <p:nvPr/>
-        </p:nvSpPr>
-        <p:spPr>
-          <a:xfrm>
-            <a:off x="8158277" y="2377440"/>
-            <a:ext cx="3301898" cy="1463040"/>
-          </a:xfrm>
-          <a:prstGeom prst="rect">
-            <a:avLst/>
-          </a:prstGeom>
-          <a:noFill/>
-          <a:ln/>
-        </p:spPr>
-        <p:txBody>
-          <a:bodyPr wrap="square" lIns="0" tIns="0" rIns="0" bIns="0" rtlCol="0" anchor="t"/>
-          <a:lstStyle/>
-          <a:p>
-            <a:pPr indent="0" marL="0">
-              <a:spcAft>
-                <a:spcPts val="400"/>
-              </a:spcAft>
-              <a:buNone/>
-            </a:pPr>
-            <a:r>
-              <a:rPr lang="en-US" sz="1900" b="1" dirty="0">
-                <a:solidFill>
-                  <a:schemeClr val="tx1"/>
-                </a:solidFill>
-              </a:rPr>
-              <a:t>Åpne et kart</a:t>
-            </a:r>
-            <a:endParaRPr lang="en-US" sz="1900" dirty="0"/>
-          </a:p>
-          <a:p>
-            <a:pPr indent="0" marL="0">
-              <a:spcAft>
-                <a:spcPts val="400"/>
-              </a:spcAft>
-              <a:buNone/>
-            </a:pPr>
-            <a:r>
-              <a:rPr lang="en-US" sz="1400" dirty="0">
-                <a:solidFill>
-                  <a:schemeClr val="accent4"/>
-                </a:solidFill>
-              </a:rPr>
-              <a:t>geocaching.com/map eller /play/map – verktøylinjen dukker opp til høyre</a:t>
-            </a:r>
-            <a:endParaRPr lang="en-US" sz="1900" dirty="0"/>
-          </a:p>
-        </p:txBody>
-      </p:sp>
-      <p:sp>
-        <p:nvSpPr>
-          <p:cNvPr id="24012" name="Personvern"/>
-          <p:cNvSpPr/>
-          <p:nvPr/>
-        </p:nvSpPr>
-        <p:spPr>
-          <a:xfrm>
-            <a:off x="548640" y="3977640"/>
-            <a:ext cx="11094415" cy="1783080"/>
-          </a:xfrm>
-          <a:prstGeom prst="roundRect">
-            <a:avLst>
-              <a:gd name="adj" fmla="val 6154"/>
-            </a:avLst>
-          </a:prstGeom>
-          <a:solidFill>
-            <a:schemeClr val="bg2"/>
-          </a:solidFill>
-          <a:ln/>
-        </p:spPr>
-      </p:sp>
-      <p:sp>
-        <p:nvSpPr>
-          <p:cNvPr id="24013" name="Ikon check sirkel"/>
-          <p:cNvSpPr/>
-          <p:nvPr/>
-        </p:nvSpPr>
-        <p:spPr>
-          <a:xfrm>
-            <a:off x="868680" y="4251960"/>
-            <a:ext cx="640080" cy="640080"/>
-          </a:xfrm>
-          <a:prstGeom prst="ellipse">
-            <a:avLst/>
-          </a:prstGeom>
-          <a:solidFill>
-            <a:schemeClr val="accent1"/>
-          </a:solidFill>
-          <a:ln/>
-        </p:spPr>
-      </p:sp>
       <p:pic>
         <p:nvPicPr>
-          <p:cNvPr id="24014" name="Ikon check" descr="check">    </p:cNvPr>
+          <p:cNvPr id="24004" name="Ikon layers" descr="layers">    </p:cNvPr>
           <p:cNvPicPr>
             <a:picLocks noChangeAspect="1"/>
           </p:cNvPicPr>
@@ -6466,8 +6044,8 @@
         </p:blipFill>
         <p:spPr>
           <a:xfrm>
-            <a:off x="1009498" y="4392778"/>
-            <a:ext cx="358445" cy="358445"/>
+            <a:off x="661294" y="1703710"/>
+            <a:ext cx="286756" cy="286756"/>
           </a:xfrm>
           <a:prstGeom prst="rect">
             <a:avLst/>
@@ -6476,14 +6054,14 @@
       </p:pic>
       <p:sp>
         <p:nvSpPr>
-          <p:cNvPr id="24015" name="Text 12"/>
+          <p:cNvPr id="24005" name="Text 2"/>
           <p:cNvSpPr txBox="1"/>
           <p:nvPr/>
         </p:nvSpPr>
         <p:spPr>
           <a:xfrm>
-            <a:off x="1737360" y="4206240"/>
-            <a:ext cx="9585655" cy="1417320"/>
+            <a:off x="1261872" y="1517904"/>
+            <a:ext cx="4590288" cy="1280160"/>
           </a:xfrm>
           <a:prstGeom prst="rect">
             <a:avLst/>
@@ -6497,42 +6075,542 @@
           <a:p>
             <a:pPr indent="0" marL="0">
               <a:spcAft>
-                <a:spcPts val="400"/>
+                <a:spcPts val="200"/>
               </a:spcAft>
               <a:buNone/>
             </a:pPr>
             <a:r>
-              <a:rPr lang="en-US" sz="1900" b="1" dirty="0">
+              <a:rPr lang="en-US" sz="1700" b="1" dirty="0">
                 <a:solidFill>
                   <a:schemeClr val="tx1"/>
                 </a:solidFill>
               </a:rPr>
-              <a:t>Personvern</a:t>
-            </a:r>
-            <a:endParaRPr lang="en-US" sz="1900" dirty="0"/>
+              <a:t>Fjerner aldri nettstedets lag</a:t>
+            </a:r>
+            <a:endParaRPr lang="en-US" sz="1700" dirty="0"/>
           </a:p>
           <a:p>
             <a:pPr indent="0" marL="0">
               <a:spcAft>
-                <a:spcPts val="400"/>
+                <a:spcPts val="200"/>
               </a:spcAft>
               <a:buNone/>
             </a:pPr>
             <a:r>
-              <a:rPr lang="en-US" sz="1500" dirty="0">
+              <a:rPr lang="en-US" sz="1400" dirty="0">
+                <a:solidFill>
+                  <a:schemeClr val="accent4"/>
+                </a:solidFill>
+              </a:rPr>
+              <a:t>Skriptet legger sine egne lag inn mellom, sortert etter z-indeks</a:t>
+            </a:r>
+            <a:endParaRPr lang="en-US" sz="1700" dirty="0"/>
+          </a:p>
+        </p:txBody>
+      </p:sp>
+      <p:sp>
+        <p:nvSpPr>
+          <p:cNvPr id="24006" name="Ikon eraser sirkel"/>
+          <p:cNvSpPr/>
+          <p:nvPr/>
+        </p:nvSpPr>
+        <p:spPr>
+          <a:xfrm>
+            <a:off x="548640" y="2916936"/>
+            <a:ext cx="512064" cy="512064"/>
+          </a:xfrm>
+          <a:prstGeom prst="ellipse">
+            <a:avLst/>
+          </a:prstGeom>
+          <a:solidFill>
+            <a:schemeClr val="accent1"/>
+          </a:solidFill>
+          <a:ln/>
+        </p:spPr>
+      </p:sp>
+      <p:pic>
+        <p:nvPicPr>
+          <p:cNvPr id="24007" name="Ikon eraser" descr="eraser">    </p:cNvPr>
+          <p:cNvPicPr>
+            <a:picLocks noChangeAspect="1"/>
+          </p:cNvPicPr>
+          <p:nvPr/>
+        </p:nvPicPr>
+        <p:blipFill>
+          <a:blip r:embed="rId2"/>
+          <a:stretch>
+            <a:fillRect/>
+          </a:stretch>
+        </p:blipFill>
+        <p:spPr>
+          <a:xfrm>
+            <a:off x="661294" y="3029590"/>
+            <a:ext cx="286756" cy="286756"/>
+          </a:xfrm>
+          <a:prstGeom prst="rect">
+            <a:avLst/>
+          </a:prstGeom>
+        </p:spPr>
+      </p:pic>
+      <p:sp>
+        <p:nvSpPr>
+          <p:cNvPr id="24008" name="Text 4"/>
+          <p:cNvSpPr txBox="1"/>
+          <p:nvPr/>
+        </p:nvSpPr>
+        <p:spPr>
+          <a:xfrm>
+            <a:off x="1261872" y="2843784"/>
+            <a:ext cx="4590288" cy="1280160"/>
+          </a:xfrm>
+          <a:prstGeom prst="rect">
+            <a:avLst/>
+          </a:prstGeom>
+          <a:noFill/>
+          <a:ln/>
+        </p:spPr>
+        <p:txBody>
+          <a:bodyPr wrap="square" lIns="0" tIns="0" rIns="0" bIns="0" rtlCol="0" anchor="t"/>
+          <a:lstStyle/>
+          <a:p>
+            <a:pPr indent="0" marL="0">
+              <a:spcAft>
+                <a:spcPts val="200"/>
+              </a:spcAft>
+              <a:buNone/>
+            </a:pPr>
+            <a:r>
+              <a:rPr lang="en-US" sz="1700" b="1" dirty="0">
                 <a:solidFill>
                   <a:schemeClr val="tx1"/>
                 </a:solidFill>
               </a:rPr>
-              <a:t>Skriptet samler ikke inn eller sender personopplysninger og har ingen egen server. Det kontakter bare kartserverne du slår på, Kartverket og Photon når du søker, og geocaching.coms eget cachesøk og cachesider når 161 m-sirklene er på. Posisjonen din hentes bare når du ber om den. Alle innstillinger lagres i nettleseren.</a:t>
-            </a:r>
-            <a:endParaRPr lang="en-US" sz="1900" dirty="0"/>
-          </a:p>
-        </p:txBody>
-      </p:sp>
-      <p:sp>
-        <p:nvSpPr>
-          <p:cNvPr id="24016" name="Slide Number Placeholder 0"/>
+              <a:t>Ingen skjøter mellom flisene</a:t>
+            </a:r>
+            <a:endParaRPr lang="en-US" sz="1700" dirty="0"/>
+          </a:p>
+          <a:p>
+            <a:pPr indent="0" marL="0">
+              <a:spcAft>
+                <a:spcPts val="200"/>
+              </a:spcAft>
+              <a:buNone/>
+            </a:pPr>
+            <a:r>
+              <a:rPr lang="en-US" sz="1400" dirty="0">
+                <a:solidFill>
+                  <a:schemeClr val="accent4"/>
+                </a:solidFill>
+              </a:rPr>
+              <a:t>Flisene tegnes 1 piksel større, også ved 110 og 125 % skjermskalering</a:t>
+            </a:r>
+            <a:endParaRPr lang="en-US" sz="1700" dirty="0"/>
+          </a:p>
+        </p:txBody>
+      </p:sp>
+      <p:sp>
+        <p:nvSpPr>
+          <p:cNvPr id="24009" name="Ikon ring sirkel"/>
+          <p:cNvSpPr/>
+          <p:nvPr/>
+        </p:nvSpPr>
+        <p:spPr>
+          <a:xfrm>
+            <a:off x="548640" y="4242816"/>
+            <a:ext cx="512064" cy="512064"/>
+          </a:xfrm>
+          <a:prstGeom prst="ellipse">
+            <a:avLst/>
+          </a:prstGeom>
+          <a:solidFill>
+            <a:schemeClr val="accent1"/>
+          </a:solidFill>
+          <a:ln/>
+        </p:spPr>
+      </p:sp>
+      <p:pic>
+        <p:nvPicPr>
+          <p:cNvPr id="24010" name="Ikon ring" descr="ring">    </p:cNvPr>
+          <p:cNvPicPr>
+            <a:picLocks noChangeAspect="1"/>
+          </p:cNvPicPr>
+          <p:nvPr/>
+        </p:nvPicPr>
+        <p:blipFill>
+          <a:blip r:embed="rId3"/>
+          <a:stretch>
+            <a:fillRect/>
+          </a:stretch>
+        </p:blipFill>
+        <p:spPr>
+          <a:xfrm>
+            <a:off x="661294" y="4355470"/>
+            <a:ext cx="286756" cy="286756"/>
+          </a:xfrm>
+          <a:prstGeom prst="rect">
+            <a:avLst/>
+          </a:prstGeom>
+        </p:spPr>
+      </p:pic>
+      <p:sp>
+        <p:nvSpPr>
+          <p:cNvPr id="24011" name="Text 6"/>
+          <p:cNvSpPr txBox="1"/>
+          <p:nvPr/>
+        </p:nvSpPr>
+        <p:spPr>
+          <a:xfrm>
+            <a:off x="1261872" y="4169664"/>
+            <a:ext cx="4590288" cy="1280160"/>
+          </a:xfrm>
+          <a:prstGeom prst="rect">
+            <a:avLst/>
+          </a:prstGeom>
+          <a:noFill/>
+          <a:ln/>
+        </p:spPr>
+        <p:txBody>
+          <a:bodyPr wrap="square" lIns="0" tIns="0" rIns="0" bIns="0" rtlCol="0" anchor="t"/>
+          <a:lstStyle/>
+          <a:p>
+            <a:pPr indent="0" marL="0">
+              <a:spcAft>
+                <a:spcPts val="200"/>
+              </a:spcAft>
+              <a:buNone/>
+            </a:pPr>
+            <a:r>
+              <a:rPr lang="en-US" sz="1700" b="1" dirty="0">
+                <a:solidFill>
+                  <a:schemeClr val="tx1"/>
+                </a:solidFill>
+              </a:rPr>
+              <a:t>Demping uten gjennomskinn</a:t>
+            </a:r>
+            <a:endParaRPr lang="en-US" sz="1700" dirty="0"/>
+          </a:p>
+          <a:p>
+            <a:pPr indent="0" marL="0">
+              <a:spcAft>
+                <a:spcPts val="200"/>
+              </a:spcAft>
+              <a:buNone/>
+            </a:pPr>
+            <a:r>
+              <a:rPr lang="en-US" sz="1400" dirty="0">
+                <a:solidFill>
+                  <a:schemeClr val="accent4"/>
+                </a:solidFill>
+              </a:rPr>
+              <a:t>Et fargefilter bleker kartet mot hvitt – nettstedets kart skinner aldri gjennom</a:t>
+            </a:r>
+            <a:endParaRPr lang="en-US" sz="1700" dirty="0"/>
+          </a:p>
+        </p:txBody>
+      </p:sp>
+      <p:sp>
+        <p:nvSpPr>
+          <p:cNvPr id="24012" name="Ikon locate sirkel"/>
+          <p:cNvSpPr/>
+          <p:nvPr/>
+        </p:nvSpPr>
+        <p:spPr>
+          <a:xfrm>
+            <a:off x="6355080" y="1591056"/>
+            <a:ext cx="512064" cy="512064"/>
+          </a:xfrm>
+          <a:prstGeom prst="ellipse">
+            <a:avLst/>
+          </a:prstGeom>
+          <a:solidFill>
+            <a:schemeClr val="accent1"/>
+          </a:solidFill>
+          <a:ln/>
+        </p:spPr>
+      </p:sp>
+      <p:pic>
+        <p:nvPicPr>
+          <p:cNvPr id="24013" name="Ikon locate" descr="locate">    </p:cNvPr>
+          <p:cNvPicPr>
+            <a:picLocks noChangeAspect="1"/>
+          </p:cNvPicPr>
+          <p:nvPr/>
+        </p:nvPicPr>
+        <p:blipFill>
+          <a:blip r:embed="rId4"/>
+          <a:stretch>
+            <a:fillRect/>
+          </a:stretch>
+        </p:blipFill>
+        <p:spPr>
+          <a:xfrm>
+            <a:off x="6467734" y="1703710"/>
+            <a:ext cx="286756" cy="286756"/>
+          </a:xfrm>
+          <a:prstGeom prst="rect">
+            <a:avLst/>
+          </a:prstGeom>
+        </p:spPr>
+      </p:pic>
+      <p:sp>
+        <p:nvSpPr>
+          <p:cNvPr id="24014" name="Text 8"/>
+          <p:cNvSpPr txBox="1"/>
+          <p:nvPr/>
+        </p:nvSpPr>
+        <p:spPr>
+          <a:xfrm>
+            <a:off x="7068312" y="1517904"/>
+            <a:ext cx="4590288" cy="1280160"/>
+          </a:xfrm>
+          <a:prstGeom prst="rect">
+            <a:avLst/>
+          </a:prstGeom>
+          <a:noFill/>
+          <a:ln/>
+        </p:spPr>
+        <p:txBody>
+          <a:bodyPr wrap="square" lIns="0" tIns="0" rIns="0" bIns="0" rtlCol="0" anchor="t"/>
+          <a:lstStyle/>
+          <a:p>
+            <a:pPr indent="0" marL="0">
+              <a:spcAft>
+                <a:spcPts val="200"/>
+              </a:spcAft>
+              <a:buNone/>
+            </a:pPr>
+            <a:r>
+              <a:rPr lang="en-US" sz="1700" b="1" dirty="0">
+                <a:solidFill>
+                  <a:schemeClr val="tx1"/>
+                </a:solidFill>
+              </a:rPr>
+              <a:t>Finner kartet selv</a:t>
+            </a:r>
+            <a:endParaRPr lang="en-US" sz="1700" dirty="0"/>
+          </a:p>
+          <a:p>
+            <a:pPr indent="0" marL="0">
+              <a:spcAft>
+                <a:spcPts val="200"/>
+              </a:spcAft>
+              <a:buNone/>
+            </a:pPr>
+            <a:r>
+              <a:rPr lang="en-US" sz="1400" dirty="0">
+                <a:solidFill>
+                  <a:schemeClr val="accent4"/>
+                </a:solidFill>
+              </a:rPr>
+              <a:t>Fanger opp Leaflet når siden laster, også på /play/map og cachesidene</a:t>
+            </a:r>
+            <a:endParaRPr lang="en-US" sz="1700" dirty="0"/>
+          </a:p>
+        </p:txBody>
+      </p:sp>
+      <p:sp>
+        <p:nvSpPr>
+          <p:cNvPr id="24015" name="Ikon check sirkel"/>
+          <p:cNvSpPr/>
+          <p:nvPr/>
+        </p:nvSpPr>
+        <p:spPr>
+          <a:xfrm>
+            <a:off x="6355080" y="2916936"/>
+            <a:ext cx="512064" cy="512064"/>
+          </a:xfrm>
+          <a:prstGeom prst="ellipse">
+            <a:avLst/>
+          </a:prstGeom>
+          <a:solidFill>
+            <a:schemeClr val="accent1"/>
+          </a:solidFill>
+          <a:ln/>
+        </p:spPr>
+      </p:sp>
+      <p:pic>
+        <p:nvPicPr>
+          <p:cNvPr id="24016" name="Ikon check" descr="check">    </p:cNvPr>
+          <p:cNvPicPr>
+            <a:picLocks noChangeAspect="1"/>
+          </p:cNvPicPr>
+          <p:nvPr/>
+        </p:nvPicPr>
+        <p:blipFill>
+          <a:blip r:embed="rId5"/>
+          <a:stretch>
+            <a:fillRect/>
+          </a:stretch>
+        </p:blipFill>
+        <p:spPr>
+          <a:xfrm>
+            <a:off x="6467734" y="3029590"/>
+            <a:ext cx="286756" cy="286756"/>
+          </a:xfrm>
+          <a:prstGeom prst="rect">
+            <a:avLst/>
+          </a:prstGeom>
+        </p:spPr>
+      </p:pic>
+      <p:sp>
+        <p:nvSpPr>
+          <p:cNvPr id="24017" name="Text 10"/>
+          <p:cNvSpPr txBox="1"/>
+          <p:nvPr/>
+        </p:nvSpPr>
+        <p:spPr>
+          <a:xfrm>
+            <a:off x="7068312" y="2843784"/>
+            <a:ext cx="4590288" cy="1280160"/>
+          </a:xfrm>
+          <a:prstGeom prst="rect">
+            <a:avLst/>
+          </a:prstGeom>
+          <a:noFill/>
+          <a:ln/>
+        </p:spPr>
+        <p:txBody>
+          <a:bodyPr wrap="square" lIns="0" tIns="0" rIns="0" bIns="0" rtlCol="0" anchor="t"/>
+          <a:lstStyle/>
+          <a:p>
+            <a:pPr indent="0" marL="0">
+              <a:spcAft>
+                <a:spcPts val="200"/>
+              </a:spcAft>
+              <a:buNone/>
+            </a:pPr>
+            <a:r>
+              <a:rPr lang="en-US" sz="1700" b="1" dirty="0">
+                <a:solidFill>
+                  <a:schemeClr val="tx1"/>
+                </a:solidFill>
+              </a:rPr>
+              <a:t>Rører ikke skjemaet</a:t>
+            </a:r>
+            <a:endParaRPr lang="en-US" sz="1700" dirty="0"/>
+          </a:p>
+          <a:p>
+            <a:pPr indent="0" marL="0">
+              <a:spcAft>
+                <a:spcPts val="200"/>
+              </a:spcAft>
+              <a:buNone/>
+            </a:pPr>
+            <a:r>
+              <a:rPr lang="en-US" sz="1400" dirty="0">
+                <a:solidFill>
+                  <a:schemeClr val="accent4"/>
+                </a:solidFill>
+              </a:rPr>
+              <a:t>Ingen knapp kan sende inn sidens ASP.NET-skjema, så siden lastes aldri på nytt</a:t>
+            </a:r>
+            <a:endParaRPr lang="en-US" sz="1700" dirty="0"/>
+          </a:p>
+        </p:txBody>
+      </p:sp>
+      <p:sp>
+        <p:nvSpPr>
+          <p:cNvPr id="24018" name="Ikon search sirkel"/>
+          <p:cNvSpPr/>
+          <p:nvPr/>
+        </p:nvSpPr>
+        <p:spPr>
+          <a:xfrm>
+            <a:off x="6355080" y="4242816"/>
+            <a:ext cx="512064" cy="512064"/>
+          </a:xfrm>
+          <a:prstGeom prst="ellipse">
+            <a:avLst/>
+          </a:prstGeom>
+          <a:solidFill>
+            <a:schemeClr val="accent1"/>
+          </a:solidFill>
+          <a:ln/>
+        </p:spPr>
+      </p:sp>
+      <p:pic>
+        <p:nvPicPr>
+          <p:cNvPr id="24019" name="Ikon search" descr="search">    </p:cNvPr>
+          <p:cNvPicPr>
+            <a:picLocks noChangeAspect="1"/>
+          </p:cNvPicPr>
+          <p:nvPr/>
+        </p:nvPicPr>
+        <p:blipFill>
+          <a:blip r:embed="rId6"/>
+          <a:stretch>
+            <a:fillRect/>
+          </a:stretch>
+        </p:blipFill>
+        <p:spPr>
+          <a:xfrm>
+            <a:off x="6467734" y="4355470"/>
+            <a:ext cx="286756" cy="286756"/>
+          </a:xfrm>
+          <a:prstGeom prst="rect">
+            <a:avLst/>
+          </a:prstGeom>
+        </p:spPr>
+      </p:pic>
+      <p:sp>
+        <p:nvSpPr>
+          <p:cNvPr id="24020" name="Text 12"/>
+          <p:cNvSpPr txBox="1"/>
+          <p:nvPr/>
+        </p:nvSpPr>
+        <p:spPr>
+          <a:xfrm>
+            <a:off x="7068312" y="4169664"/>
+            <a:ext cx="4590288" cy="1280160"/>
+          </a:xfrm>
+          <a:prstGeom prst="rect">
+            <a:avLst/>
+          </a:prstGeom>
+          <a:noFill/>
+          <a:ln/>
+        </p:spPr>
+        <p:txBody>
+          <a:bodyPr wrap="square" lIns="0" tIns="0" rIns="0" bIns="0" rtlCol="0" anchor="t"/>
+          <a:lstStyle/>
+          <a:p>
+            <a:pPr indent="0" marL="0">
+              <a:spcAft>
+                <a:spcPts val="200"/>
+              </a:spcAft>
+              <a:buNone/>
+            </a:pPr>
+            <a:r>
+              <a:rPr lang="en-US" sz="1700" b="1" dirty="0">
+                <a:solidFill>
+                  <a:schemeClr val="tx1"/>
+                </a:solidFill>
+              </a:rPr>
+              <a:t>Feilsøking innebygd</a:t>
+            </a:r>
+            <a:endParaRPr lang="en-US" sz="1700" dirty="0"/>
+          </a:p>
+          <a:p>
+            <a:pPr indent="0" marL="0">
+              <a:spcAft>
+                <a:spcPts val="200"/>
+              </a:spcAft>
+              <a:buNone/>
+            </a:pPr>
+            <a:r>
+              <a:rPr lang="en-US" sz="1400" dirty="0">
+                <a:solidFill>
+                  <a:schemeClr val="accent4"/>
+                </a:solidFill>
+              </a:rPr>
+              <a:t>gcctReport(), gcctCacheDebug(), gcctStageTest() og gcctSnapTest() i konsollen gir korte rapporter uten personopplysninger</a:t>
+            </a:r>
+            <a:endParaRPr lang="en-US" sz="1700" dirty="0"/>
+          </a:p>
+        </p:txBody>
+      </p:sp>
+      <p:sp>
+        <p:nvSpPr>
+          <p:cNvPr id="24021" name="Slide Number Placeholder 0"/>
           <p:cNvSpPr>
             <a:spLocks noGrp="1"/>
           </p:cNvSpPr>
@@ -6610,8 +6688,8 @@
         </p:nvSpPr>
         <p:spPr>
           <a:xfrm>
-            <a:off x="548640" y="1828800"/>
-            <a:ext cx="6035040" cy="1737360"/>
+            <a:off x="548640" y="384048"/>
+            <a:ext cx="11094415" cy="777240"/>
           </a:xfrm>
           <a:prstGeom prst="rect">
             <a:avLst/>
@@ -6620,50 +6698,278 @@
           <a:ln/>
         </p:spPr>
         <p:txBody>
-          <a:bodyPr wrap="square" lIns="0" tIns="0" rIns="0" bIns="0" rtlCol="0" anchor="b"/>
+          <a:bodyPr wrap="square" lIns="0" tIns="0" rIns="0" bIns="0" rtlCol="0" anchor="ctr"/>
           <a:lstStyle/>
           <a:p>
             <a:pPr algn="l" indent="0" marL="0">
               <a:buNone/>
             </a:pPr>
             <a:r>
-              <a:rPr lang="en-US" sz="4400" b="1" dirty="0">
+              <a:rPr lang="en-US" sz="3600" b="1" dirty="0">
+                <a:solidFill>
+                  <a:schemeClr val="tx2"/>
+                </a:solidFill>
+              </a:rPr>
+              <a:t>Kom i gang på tre minutter</a:t>
+            </a:r>
+            <a:endParaRPr lang="en-US" sz="3600" dirty="0"/>
+          </a:p>
+        </p:txBody>
+      </p:sp>
+      <p:sp>
+        <p:nvSpPr>
+          <p:cNvPr id="25003" name="Steg 1"/>
+          <p:cNvSpPr/>
+          <p:nvPr/>
+        </p:nvSpPr>
+        <p:spPr>
+          <a:xfrm>
+            <a:off x="548640" y="1463040"/>
+            <a:ext cx="731520" cy="731520"/>
+          </a:xfrm>
+          <a:prstGeom prst="ellipse">
+            <a:avLst/>
+          </a:prstGeom>
+          <a:solidFill>
+            <a:schemeClr val="accent1"/>
+          </a:solidFill>
+          <a:ln/>
+        </p:spPr>
+      </p:sp>
+      <p:sp>
+        <p:nvSpPr>
+          <p:cNvPr id="25004" name="Text 2"/>
+          <p:cNvSpPr txBox="1"/>
+          <p:nvPr/>
+        </p:nvSpPr>
+        <p:spPr>
+          <a:xfrm>
+            <a:off x="548640" y="1463040"/>
+            <a:ext cx="731520" cy="731520"/>
+          </a:xfrm>
+          <a:prstGeom prst="rect">
+            <a:avLst/>
+          </a:prstGeom>
+          <a:noFill/>
+          <a:ln/>
+        </p:spPr>
+        <p:txBody>
+          <a:bodyPr wrap="square" lIns="0" tIns="0" rIns="0" bIns="0" rtlCol="0" anchor="ctr"/>
+          <a:lstStyle/>
+          <a:p>
+            <a:pPr algn="ctr" indent="0" marL="0">
+              <a:buNone/>
+            </a:pPr>
+            <a:r>
+              <a:rPr lang="en-US" sz="2600" b="1" dirty="0">
                 <a:solidFill>
                   <a:schemeClr val="bg1"/>
                 </a:solidFill>
               </a:rPr>
-              <a:t>Bedre kart for</a:t>
-            </a:r>
-            <a:endParaRPr lang="en-US" sz="4400" dirty="0"/>
-          </a:p>
-          <a:p>
-            <a:pPr algn="l" indent="0" marL="0">
-              <a:buNone/>
-            </a:pPr>
-            <a:r>
-              <a:rPr lang="en-US" sz="4400" b="1" dirty="0">
+              <a:t>1</a:t>
+            </a:r>
+            <a:endParaRPr lang="en-US" sz="2600" dirty="0"/>
+          </a:p>
+        </p:txBody>
+      </p:sp>
+      <p:sp>
+        <p:nvSpPr>
+          <p:cNvPr id="25005" name="Text 3"/>
+          <p:cNvSpPr txBox="1"/>
+          <p:nvPr/>
+        </p:nvSpPr>
+        <p:spPr>
+          <a:xfrm>
+            <a:off x="548640" y="2377440"/>
+            <a:ext cx="3301898" cy="1463040"/>
+          </a:xfrm>
+          <a:prstGeom prst="rect">
+            <a:avLst/>
+          </a:prstGeom>
+          <a:noFill/>
+          <a:ln/>
+        </p:spPr>
+        <p:txBody>
+          <a:bodyPr wrap="square" lIns="0" tIns="0" rIns="0" bIns="0" rtlCol="0" anchor="t"/>
+          <a:lstStyle/>
+          <a:p>
+            <a:pPr indent="0" marL="0">
+              <a:spcAft>
+                <a:spcPts val="400"/>
+              </a:spcAft>
+              <a:buNone/>
+            </a:pPr>
+            <a:r>
+              <a:rPr lang="en-US" sz="1900" b="1" dirty="0">
+                <a:solidFill>
+                  <a:schemeClr val="tx1"/>
+                </a:solidFill>
+              </a:rPr>
+              <a:t>Installer en skriptbehandler</a:t>
+            </a:r>
+            <a:endParaRPr lang="en-US" sz="1900" dirty="0"/>
+          </a:p>
+          <a:p>
+            <a:pPr indent="0" marL="0">
+              <a:spcAft>
+                <a:spcPts val="400"/>
+              </a:spcAft>
+              <a:buNone/>
+            </a:pPr>
+            <a:r>
+              <a:rPr lang="en-US" sz="1400" dirty="0">
+                <a:solidFill>
+                  <a:schemeClr val="accent4"/>
+                </a:solidFill>
+              </a:rPr>
+              <a:t>Tampermonkey eller Violentmonkey i Chrome, Edge, Firefox eller Safari</a:t>
+            </a:r>
+            <a:endParaRPr lang="en-US" sz="1900" dirty="0"/>
+          </a:p>
+        </p:txBody>
+      </p:sp>
+      <p:sp>
+        <p:nvSpPr>
+          <p:cNvPr id="25006" name="Steg 2"/>
+          <p:cNvSpPr/>
+          <p:nvPr/>
+        </p:nvSpPr>
+        <p:spPr>
+          <a:xfrm>
+            <a:off x="4353458" y="1463040"/>
+            <a:ext cx="731520" cy="731520"/>
+          </a:xfrm>
+          <a:prstGeom prst="ellipse">
+            <a:avLst/>
+          </a:prstGeom>
+          <a:solidFill>
+            <a:schemeClr val="accent1"/>
+          </a:solidFill>
+          <a:ln/>
+        </p:spPr>
+      </p:sp>
+      <p:sp>
+        <p:nvSpPr>
+          <p:cNvPr id="25007" name="Text 5"/>
+          <p:cNvSpPr txBox="1"/>
+          <p:nvPr/>
+        </p:nvSpPr>
+        <p:spPr>
+          <a:xfrm>
+            <a:off x="4353458" y="1463040"/>
+            <a:ext cx="731520" cy="731520"/>
+          </a:xfrm>
+          <a:prstGeom prst="rect">
+            <a:avLst/>
+          </a:prstGeom>
+          <a:noFill/>
+          <a:ln/>
+        </p:spPr>
+        <p:txBody>
+          <a:bodyPr wrap="square" lIns="0" tIns="0" rIns="0" bIns="0" rtlCol="0" anchor="ctr"/>
+          <a:lstStyle/>
+          <a:p>
+            <a:pPr algn="ctr" indent="0" marL="0">
+              <a:buNone/>
+            </a:pPr>
+            <a:r>
+              <a:rPr lang="en-US" sz="2600" b="1" dirty="0">
                 <a:solidFill>
                   <a:schemeClr val="bg1"/>
                 </a:solidFill>
               </a:rPr>
-              <a:t>bedre turer</a:t>
-            </a:r>
-            <a:endParaRPr lang="en-US" sz="4400" dirty="0"/>
-          </a:p>
-        </p:txBody>
-      </p:sp>
-      <p:sp>
-        <p:nvSpPr>
-          <p:cNvPr id="25003" name="Text 0"/>
+              <a:t>2</a:t>
+            </a:r>
+            <a:endParaRPr lang="en-US" sz="2600" dirty="0"/>
+          </a:p>
+        </p:txBody>
+      </p:sp>
+      <p:sp>
+        <p:nvSpPr>
+          <p:cNvPr id="25008" name="Text 6"/>
+          <p:cNvSpPr txBox="1"/>
+          <p:nvPr/>
+        </p:nvSpPr>
+        <p:spPr>
+          <a:xfrm>
+            <a:off x="4353458" y="2377440"/>
+            <a:ext cx="3301898" cy="1463040"/>
+          </a:xfrm>
+          <a:prstGeom prst="rect">
+            <a:avLst/>
+          </a:prstGeom>
+          <a:noFill/>
+          <a:ln/>
+        </p:spPr>
+        <p:txBody>
+          <a:bodyPr wrap="square" lIns="0" tIns="0" rIns="0" bIns="0" rtlCol="0" anchor="t"/>
+          <a:lstStyle/>
+          <a:p>
+            <a:pPr indent="0" marL="0">
+              <a:spcAft>
+                <a:spcPts val="400"/>
+              </a:spcAft>
+              <a:buNone/>
+            </a:pPr>
+            <a:r>
+              <a:rPr lang="en-US" sz="1900" b="1" dirty="0">
+                <a:solidFill>
+                  <a:schemeClr val="tx1"/>
+                </a:solidFill>
+              </a:rPr>
+              <a:t>Legg til skriptet</a:t>
+            </a:r>
+            <a:endParaRPr lang="en-US" sz="1900" dirty="0"/>
+          </a:p>
+          <a:p>
+            <a:pPr indent="0" marL="0">
+              <a:spcAft>
+                <a:spcPts val="400"/>
+              </a:spcAft>
+              <a:buNone/>
+            </a:pPr>
+            <a:r>
+              <a:rPr lang="en-US" sz="1400" dirty="0">
+                <a:solidFill>
+                  <a:schemeClr val="accent4"/>
+                </a:solidFill>
+              </a:rPr>
+              <a:t>Åpne geocaching-custom-tiles.user.js og lagre det i behandleren</a:t>
+            </a:r>
+            <a:endParaRPr lang="en-US" sz="1900" dirty="0"/>
+          </a:p>
+        </p:txBody>
+      </p:sp>
+      <p:sp>
+        <p:nvSpPr>
+          <p:cNvPr id="25009" name="Steg 3"/>
           <p:cNvSpPr/>
-          <p:nvPr>
-            <p:ph idx="101" type="body" hasCustomPrompt="1"/>
-          </p:nvPr>
-        </p:nvSpPr>
-        <p:spPr>
-          <a:xfrm>
-            <a:off x="548640" y="3703320"/>
-            <a:ext cx="5852160" cy="1188720"/>
+          <p:nvPr/>
+        </p:nvSpPr>
+        <p:spPr>
+          <a:xfrm>
+            <a:off x="8158277" y="1463040"/>
+            <a:ext cx="731520" cy="731520"/>
+          </a:xfrm>
+          <a:prstGeom prst="ellipse">
+            <a:avLst/>
+          </a:prstGeom>
+          <a:solidFill>
+            <a:schemeClr val="accent1"/>
+          </a:solidFill>
+          <a:ln/>
+        </p:spPr>
+      </p:sp>
+      <p:sp>
+        <p:nvSpPr>
+          <p:cNvPr id="25010" name="Text 8"/>
+          <p:cNvSpPr txBox="1"/>
+          <p:nvPr/>
+        </p:nvSpPr>
+        <p:spPr>
+          <a:xfrm>
+            <a:off x="8158277" y="1463040"/>
+            <a:ext cx="731520" cy="731520"/>
           </a:xfrm>
           <a:prstGeom prst="rect">
             <a:avLst/>
@@ -6672,27 +6978,125 @@
           <a:ln/>
         </p:spPr>
         <p:txBody>
+          <a:bodyPr wrap="square" lIns="0" tIns="0" rIns="0" bIns="0" rtlCol="0" anchor="ctr"/>
+          <a:lstStyle/>
+          <a:p>
+            <a:pPr algn="ctr" indent="0" marL="0">
+              <a:buNone/>
+            </a:pPr>
+            <a:r>
+              <a:rPr lang="en-US" sz="2600" b="1" dirty="0">
+                <a:solidFill>
+                  <a:schemeClr val="bg1"/>
+                </a:solidFill>
+              </a:rPr>
+              <a:t>3</a:t>
+            </a:r>
+            <a:endParaRPr lang="en-US" sz="2600" dirty="0"/>
+          </a:p>
+        </p:txBody>
+      </p:sp>
+      <p:sp>
+        <p:nvSpPr>
+          <p:cNvPr id="25011" name="Text 9"/>
+          <p:cNvSpPr txBox="1"/>
+          <p:nvPr/>
+        </p:nvSpPr>
+        <p:spPr>
+          <a:xfrm>
+            <a:off x="8158277" y="2377440"/>
+            <a:ext cx="3301898" cy="1463040"/>
+          </a:xfrm>
+          <a:prstGeom prst="rect">
+            <a:avLst/>
+          </a:prstGeom>
+          <a:noFill/>
+          <a:ln/>
+        </p:spPr>
+        <p:txBody>
           <a:bodyPr wrap="square" lIns="0" tIns="0" rIns="0" bIns="0" rtlCol="0" anchor="t"/>
           <a:lstStyle/>
           <a:p>
-            <a:pPr algn="l" indent="0" marL="0">
-              <a:buNone/>
-            </a:pPr>
-            <a:r>
-              <a:rPr lang="en-US" sz="1800" dirty="0">
-                <a:solidFill>
-                  <a:schemeClr val="accent5"/>
-                </a:solidFill>
-              </a:rPr>
-              <a:t>Brukerveiledning på norsk og engelsk følger med. Bruk gcctReport() i nettleserkonsollen hvis noe ikke virker.</a:t>
-            </a:r>
-            <a:endParaRPr lang="en-US" sz="1800" dirty="0"/>
-          </a:p>
-        </p:txBody>
+            <a:pPr indent="0" marL="0">
+              <a:spcAft>
+                <a:spcPts val="400"/>
+              </a:spcAft>
+              <a:buNone/>
+            </a:pPr>
+            <a:r>
+              <a:rPr lang="en-US" sz="1900" b="1" dirty="0">
+                <a:solidFill>
+                  <a:schemeClr val="tx1"/>
+                </a:solidFill>
+              </a:rPr>
+              <a:t>Åpne et kart</a:t>
+            </a:r>
+            <a:endParaRPr lang="en-US" sz="1900" dirty="0"/>
+          </a:p>
+          <a:p>
+            <a:pPr indent="0" marL="0">
+              <a:spcAft>
+                <a:spcPts val="400"/>
+              </a:spcAft>
+              <a:buNone/>
+            </a:pPr>
+            <a:r>
+              <a:rPr lang="en-US" sz="1400" dirty="0">
+                <a:solidFill>
+                  <a:schemeClr val="accent4"/>
+                </a:solidFill>
+              </a:rPr>
+              <a:t>geocaching.com/map eller /play/map – verktøylinjen dukker opp til høyre</a:t>
+            </a:r>
+            <a:endParaRPr lang="en-US" sz="1900" dirty="0"/>
+          </a:p>
+        </p:txBody>
+      </p:sp>
+      <p:sp>
+        <p:nvSpPr>
+          <p:cNvPr id="25012" name="Personvern"/>
+          <p:cNvSpPr/>
+          <p:nvPr/>
+        </p:nvSpPr>
+        <p:spPr>
+          <a:xfrm>
+            <a:off x="548640" y="3977640"/>
+            <a:ext cx="11094415" cy="1783080"/>
+          </a:xfrm>
+          <a:prstGeom prst="roundRect">
+            <a:avLst>
+              <a:gd name="adj" fmla="val 6154"/>
+            </a:avLst>
+          </a:prstGeom>
+          <a:solidFill>
+            <a:schemeClr val="bg2"/>
+          </a:solidFill>
+          <a:ln/>
+        </p:spPr>
+      </p:sp>
+      <p:sp>
+        <p:nvSpPr>
+          <p:cNvPr id="25013" name="Ikon check sirkel"/>
+          <p:cNvSpPr/>
+          <p:nvPr/>
+        </p:nvSpPr>
+        <p:spPr>
+          <a:xfrm>
+            <a:off x="868680" y="4251960"/>
+            <a:ext cx="640080" cy="640080"/>
+          </a:xfrm>
+          <a:prstGeom prst="ellipse">
+            <a:avLst/>
+          </a:prstGeom>
+          <a:solidFill>
+            <a:schemeClr val="accent1"/>
+          </a:solidFill>
+          <a:ln/>
+        </p:spPr>
       </p:sp>
       <p:pic>
         <p:nvPicPr>
-          <p:cNvPr id="25004" name="Høyreklikkboblen" descr="Høyreklikkboblen">    </p:cNvPr>
+          <p:cNvPr id="25014" name="Ikon check" descr="check">    </p:cNvPr>
           <p:cNvPicPr>
             <a:picLocks noChangeAspect="1"/>
           </p:cNvPicPr>
@@ -6706,6 +7110,246 @@
         </p:blipFill>
         <p:spPr>
           <a:xfrm>
+            <a:off x="1009498" y="4392778"/>
+            <a:ext cx="358445" cy="358445"/>
+          </a:xfrm>
+          <a:prstGeom prst="rect">
+            <a:avLst/>
+          </a:prstGeom>
+        </p:spPr>
+      </p:pic>
+      <p:sp>
+        <p:nvSpPr>
+          <p:cNvPr id="25015" name="Text 12"/>
+          <p:cNvSpPr txBox="1"/>
+          <p:nvPr/>
+        </p:nvSpPr>
+        <p:spPr>
+          <a:xfrm>
+            <a:off x="1737360" y="4206240"/>
+            <a:ext cx="9585655" cy="1417320"/>
+          </a:xfrm>
+          <a:prstGeom prst="rect">
+            <a:avLst/>
+          </a:prstGeom>
+          <a:noFill/>
+          <a:ln/>
+        </p:spPr>
+        <p:txBody>
+          <a:bodyPr wrap="square" lIns="0" tIns="0" rIns="0" bIns="0" rtlCol="0" anchor="t"/>
+          <a:lstStyle/>
+          <a:p>
+            <a:pPr indent="0" marL="0">
+              <a:spcAft>
+                <a:spcPts val="400"/>
+              </a:spcAft>
+              <a:buNone/>
+            </a:pPr>
+            <a:r>
+              <a:rPr lang="en-US" sz="1900" b="1" dirty="0">
+                <a:solidFill>
+                  <a:schemeClr val="tx1"/>
+                </a:solidFill>
+              </a:rPr>
+              <a:t>Personvern</a:t>
+            </a:r>
+            <a:endParaRPr lang="en-US" sz="1900" dirty="0"/>
+          </a:p>
+          <a:p>
+            <a:pPr indent="0" marL="0">
+              <a:spcAft>
+                <a:spcPts val="400"/>
+              </a:spcAft>
+              <a:buNone/>
+            </a:pPr>
+            <a:r>
+              <a:rPr lang="en-US" sz="1500" dirty="0">
+                <a:solidFill>
+                  <a:schemeClr val="tx1"/>
+                </a:solidFill>
+              </a:rPr>
+              <a:t>Skriptet samler ikke inn eller sender personopplysninger og har ingen egen server. Det kontakter bare kartserverne du slår på, Kartverket og Photon når du søker, og geocaching.coms eget cachesøk og cachesider når 161 m-sirklene er på. Posisjonen din hentes bare når du ber om den. Alle innstillinger lagres i nettleseren.</a:t>
+            </a:r>
+            <a:endParaRPr lang="en-US" sz="1900" dirty="0"/>
+          </a:p>
+        </p:txBody>
+      </p:sp>
+      <p:sp>
+        <p:nvSpPr>
+          <p:cNvPr id="25016" name="Slide Number Placeholder 0"/>
+          <p:cNvSpPr>
+            <a:spLocks noGrp="1"/>
+          </p:cNvSpPr>
+          <p:nvPr>
+            <p:ph type="sldNum" sz="quarter" idx="4294967295"/>
+          </p:nvPr>
+        </p:nvSpPr>
+        <p:spPr>
+          <a:xfrm>
+            <a:off x="11094415" y="6446520"/>
+            <a:ext cx="548640" cy="274320"/>
+          </a:xfrm>
+          <a:prstGeom prst="rect">
+            <a:avLst/>
+          </a:prstGeom>
+          <a:extLst>
+            <a:ext uri="{C572A759-6A51-4108-AA02-DFA0A04FC94B}">
+              <ma14:wrappingTextBoxFlag xmlns:ma14="http://schemas.microsoft.com/office/mac/drawingml/2011/main" val="0"/>
+            </a:ext>
+          </a:extLst>
+        </p:spPr>
+        <p:txBody>
+          <a:bodyPr/>
+          <a:lstStyle>
+            <a:lvl1pPr>
+              <a:defRPr sz="1000">
+                <a:solidFill>
+                  <a:srgbClr val="6B7F75"/>
+                </a:solidFill>
+              </a:defRPr>
+            </a:lvl1pPr>
+          </a:lstStyle>
+          <a:p>
+            <a:pPr algn="r"/>
+            <a:fld id="{F7021451-1387-4CA6-816F-3879F97B5CBC}" type="slidenum">
+              <a:rPr b="0" lang="en-US"/>
+              <a:t>15</a:t>
+            </a:fld>
+            <a:endParaRPr lang="en-US"/>
+          </a:p>
+        </p:txBody>
+      </p:sp>
+    </p:spTree>
+  </p:cSld>
+  <p:clrMapOvr>
+    <a:masterClrMapping/>
+  </p:clrMapOvr>
+</p:sld>
+</file>
+
+<file path=ppt/slides/slide16.xml><?xml version="1.0" encoding="utf-8"?>
+<p:sld xmlns:a="http://schemas.openxmlformats.org/drawingml/2006/main" xmlns:r="http://schemas.openxmlformats.org/officeDocument/2006/relationships" xmlns:p="http://schemas.openxmlformats.org/presentationml/2006/main">
+  <p:cSld name="Slide 16">
+    <p:spTree>
+      <p:nvGrpSpPr>
+        <p:cNvPr id="26001" name=""/>
+        <p:cNvGrpSpPr/>
+        <p:nvPr/>
+      </p:nvGrpSpPr>
+      <p:grpSpPr>
+        <a:xfrm>
+          <a:off x="0" y="0"/>
+          <a:ext cx="0" cy="0"/>
+          <a:chOff x="0" y="0"/>
+          <a:chExt cx="0" cy="0"/>
+        </a:xfrm>
+      </p:grpSpPr>
+      <p:sp>
+        <p:nvSpPr>
+          <p:cNvPr id="26002" name="Text 0"/>
+          <p:cNvSpPr/>
+          <p:nvPr>
+            <p:ph idx="100" type="title" hasCustomPrompt="1"/>
+          </p:nvPr>
+        </p:nvSpPr>
+        <p:spPr>
+          <a:xfrm>
+            <a:off x="548640" y="1828800"/>
+            <a:ext cx="6035040" cy="1737360"/>
+          </a:xfrm>
+          <a:prstGeom prst="rect">
+            <a:avLst/>
+          </a:prstGeom>
+          <a:noFill/>
+          <a:ln/>
+        </p:spPr>
+        <p:txBody>
+          <a:bodyPr wrap="square" lIns="0" tIns="0" rIns="0" bIns="0" rtlCol="0" anchor="b"/>
+          <a:lstStyle/>
+          <a:p>
+            <a:pPr algn="l" indent="0" marL="0">
+              <a:buNone/>
+            </a:pPr>
+            <a:r>
+              <a:rPr lang="en-US" sz="4400" b="1" dirty="0">
+                <a:solidFill>
+                  <a:schemeClr val="bg1"/>
+                </a:solidFill>
+              </a:rPr>
+              <a:t>Bedre kart for</a:t>
+            </a:r>
+            <a:endParaRPr lang="en-US" sz="4400" dirty="0"/>
+          </a:p>
+          <a:p>
+            <a:pPr algn="l" indent="0" marL="0">
+              <a:buNone/>
+            </a:pPr>
+            <a:r>
+              <a:rPr lang="en-US" sz="4400" b="1" dirty="0">
+                <a:solidFill>
+                  <a:schemeClr val="bg1"/>
+                </a:solidFill>
+              </a:rPr>
+              <a:t>bedre turer</a:t>
+            </a:r>
+            <a:endParaRPr lang="en-US" sz="4400" dirty="0"/>
+          </a:p>
+        </p:txBody>
+      </p:sp>
+      <p:sp>
+        <p:nvSpPr>
+          <p:cNvPr id="26003" name="Text 0"/>
+          <p:cNvSpPr/>
+          <p:nvPr>
+            <p:ph idx="101" type="body" hasCustomPrompt="1"/>
+          </p:nvPr>
+        </p:nvSpPr>
+        <p:spPr>
+          <a:xfrm>
+            <a:off x="548640" y="3703320"/>
+            <a:ext cx="5852160" cy="1188720"/>
+          </a:xfrm>
+          <a:prstGeom prst="rect">
+            <a:avLst/>
+          </a:prstGeom>
+          <a:noFill/>
+          <a:ln/>
+        </p:spPr>
+        <p:txBody>
+          <a:bodyPr wrap="square" lIns="0" tIns="0" rIns="0" bIns="0" rtlCol="0" anchor="t"/>
+          <a:lstStyle/>
+          <a:p>
+            <a:pPr algn="l" indent="0" marL="0">
+              <a:buNone/>
+            </a:pPr>
+            <a:r>
+              <a:rPr lang="en-US" sz="1800" dirty="0">
+                <a:solidFill>
+                  <a:schemeClr val="accent5"/>
+                </a:solidFill>
+              </a:rPr>
+              <a:t>Brukerveiledning på norsk og engelsk følger med. Bruk gcctReport() i nettleserkonsollen hvis noe ikke virker.</a:t>
+            </a:r>
+            <a:endParaRPr lang="en-US" sz="1800" dirty="0"/>
+          </a:p>
+        </p:txBody>
+      </p:sp>
+      <p:pic>
+        <p:nvPicPr>
+          <p:cNvPr id="26004" name="Høyreklikkboblen" descr="Høyreklikkboblen">    </p:cNvPr>
+          <p:cNvPicPr>
+            <a:picLocks noChangeAspect="1"/>
+          </p:cNvPicPr>
+          <p:nvPr/>
+        </p:nvPicPr>
+        <p:blipFill>
+          <a:blip r:embed="rId1"/>
+          <a:stretch>
+            <a:fillRect/>
+          </a:stretch>
+        </p:blipFill>
+        <p:spPr>
+          <a:xfrm>
             <a:off x="6705295" y="1371600"/>
             <a:ext cx="4754880" cy="2300748"/>
           </a:xfrm>
@@ -6723,7 +7367,7 @@
       </p:pic>
       <p:pic>
         <p:nvPicPr>
-          <p:cNvPr id="25005" name="Bekreftelsesdialog" descr="Bekreftelsesdialog">    </p:cNvPr>
+          <p:cNvPr id="26005" name="Bekreftelsesdialog" descr="Bekreftelsesdialog">    </p:cNvPr>
           <p:cNvPicPr>
             <a:picLocks noChangeAspect="1"/>
           </p:cNvPicPr>
@@ -7427,7 +8071,7 @@
       </p:sp>
       <p:sp>
         <p:nvSpPr>
-          <p:cNvPr id="12023" name="Kort Rent kart og cachesider"/>
+          <p:cNvPr id="12023" name="Kort Nyhet: ruter til GPS-en"/>
           <p:cNvSpPr/>
           <p:nvPr/>
         </p:nvSpPr>
@@ -7449,7 +8093,7 @@
       </p:sp>
       <p:sp>
         <p:nvSpPr>
-          <p:cNvPr id="12024" name="Ikon eyeoff sirkel"/>
+          <p:cNvPr id="12024" name="Ikon route sirkel"/>
           <p:cNvSpPr/>
           <p:nvPr/>
         </p:nvSpPr>
@@ -7469,7 +8113,7 @@
       </p:sp>
       <p:pic>
         <p:nvPicPr>
-          <p:cNvPr id="12025" name="Ikon eyeoff" descr="eyeoff">    </p:cNvPr>
+          <p:cNvPr id="12025" name="Ikon route" descr="route">    </p:cNvPr>
           <p:cNvPicPr>
             <a:picLocks noChangeAspect="1"/>
           </p:cNvPicPr>
@@ -7524,7 +8168,7 @@
                   <a:schemeClr val="tx1"/>
                 </a:solidFill>
               </a:rPr>
-              <a:t>Rent kart og cachesider</a:t>
+              <a:t>Nyhet: ruter til GPS-en</a:t>
             </a:r>
             <a:endParaRPr lang="en-US" sz="1900" dirty="0"/>
           </a:p>
@@ -7541,7 +8185,7 @@
                   <a:schemeClr val="accent4"/>
                 </a:solidFill>
               </a:rPr>
-              <a:t>Skjul alle geocacher med ett klikk. Valgt kart vises også på cachesidene</a:t>
+              <a:t>Velg cacher og merkenåler i en liste eller på kartet, forhåndsvis og last ned som GPX-rute</a:t>
             </a:r>
             <a:endParaRPr lang="en-US" sz="1900" dirty="0"/>
           </a:p>
@@ -7693,8 +8337,8 @@
         </p:blipFill>
         <p:spPr>
           <a:xfrm>
-            <a:off x="1095260" y="1572768"/>
-            <a:ext cx="369801" cy="4443984"/>
+            <a:off x="1106004" y="1572768"/>
+            <a:ext cx="348312" cy="4443984"/>
           </a:xfrm>
           <a:prstGeom prst="rect">
             <a:avLst/>
@@ -9147,8 +9791,8 @@
         </p:blipFill>
         <p:spPr>
           <a:xfrm>
-            <a:off x="8583966" y="1527048"/>
-            <a:ext cx="2094818" cy="4581144"/>
+            <a:off x="8599496" y="1527048"/>
+            <a:ext cx="2063758" cy="4581144"/>
           </a:xfrm>
           <a:prstGeom prst="rect">
             <a:avLst/>

--- a/docs/Geocaching-Map-Custom-Tile-Layers-Presentasjon.pptx
+++ b/docs/Geocaching-Map-Custom-Tile-Layers-Presentasjon.pptx
@@ -122,13 +122,13 @@
   <p:extLst>
     <p:ext uri="{521415D9-36F7-43E2-AB2F-B90AF26B5E84}">
       <p14:sectionLst xmlns:p14="http://schemas.microsoft.com/office/powerpoint/2010/main">
-        <p14:section name="Innledning" id="{a5924676-3a88-0d70-55ff-b93cc8efc77a}">
+        <p14:section name="Innledning" id="{2e92f183-11ed-6aab-9b99-3266eb022818}">
           <p14:sldIdLst>
             <p14:sldId id="256"/>
             <p14:sldId id="257"/>
           </p14:sldIdLst>
         </p14:section>
-        <p14:section name="Funksjoner" id="{a09d9748-e601-ec2d-3570-349268443044}">
+        <p14:section name="Funksjoner" id="{b3207941-13f0-67e9-bfca-204c7b27678a}">
           <p14:sldIdLst>
             <p14:sldId id="258"/>
             <p14:sldId id="259"/>
@@ -142,14 +142,14 @@
             <p14:sldId id="267"/>
           </p14:sldIdLst>
         </p14:section>
-        <p14:section name="Teknikk" id="{982a2cdd-a62d-36fb-cc1c-4f8def81119f}">
+        <p14:section name="Teknikk" id="{39a5630b-3ebb-b7c3-fcd0-2f372f0d3de3}">
           <p14:sldIdLst>
             <p14:sldId id="268"/>
             <p14:sldId id="269"/>
             <p14:sldId id="270"/>
           </p14:sldIdLst>
         </p14:section>
-        <p14:section name="Avslutning" id="{0e19c752-6e78-fad7-b1ef-50a56f81216a}">
+        <p14:section name="Avslutning" id="{273ff730-7987-d31d-3495-08d8b9be8c5a}">
           <p14:sldIdLst>
             <p14:sldId id="271"/>
           </p14:sldIdLst>

--- a/docs/Geocaching-Map-Custom-Tile-Layers-Presentasjon.pptx
+++ b/docs/Geocaching-Map-Custom-Tile-Layers-Presentasjon.pptx
@@ -122,13 +122,13 @@
   <p:extLst>
     <p:ext uri="{521415D9-36F7-43E2-AB2F-B90AF26B5E84}">
       <p14:sectionLst xmlns:p14="http://schemas.microsoft.com/office/powerpoint/2010/main">
-        <p14:section name="Innledning" id="{2e92f183-11ed-6aab-9b99-3266eb022818}">
+        <p14:section name="Innledning" id="{bb18d423-6fd4-9c86-5a15-9e6b482442c6}">
           <p14:sldIdLst>
             <p14:sldId id="256"/>
             <p14:sldId id="257"/>
           </p14:sldIdLst>
         </p14:section>
-        <p14:section name="Funksjoner" id="{b3207941-13f0-67e9-bfca-204c7b27678a}">
+        <p14:section name="Funksjoner" id="{8eef0a39-63a1-b1ec-9954-3e75f5ccb53d}">
           <p14:sldIdLst>
             <p14:sldId id="258"/>
             <p14:sldId id="259"/>
@@ -142,14 +142,14 @@
             <p14:sldId id="267"/>
           </p14:sldIdLst>
         </p14:section>
-        <p14:section name="Teknikk" id="{39a5630b-3ebb-b7c3-fcd0-2f372f0d3de3}">
+        <p14:section name="Teknikk" id="{e0b8d13a-33d4-216c-5651-0dfe631a0a0b}">
           <p14:sldIdLst>
             <p14:sldId id="268"/>
             <p14:sldId id="269"/>
             <p14:sldId id="270"/>
           </p14:sldIdLst>
         </p14:section>
-        <p14:section name="Avslutning" id="{273ff730-7987-d31d-3495-08d8b9be8c5a}">
+        <p14:section name="Avslutning" id="{dd808892-1122-1d84-a8d2-1a25b676ff56}">
           <p14:sldIdLst>
             <p14:sldId id="271"/>
           </p14:sldIdLst>
@@ -2153,7 +2153,7 @@
                   <a:schemeClr val="accent4"/>
                 </a:solidFill>
               </a:rPr>
-              <a:t>Geocaching Map – Custom Tile Layers · v1.50.0</a:t>
+              <a:t>Geocaching Map – Custom Tile Layers · v1.50.2</a:t>
             </a:r>
             <a:endParaRPr lang="en-US" sz="1000" dirty="0"/>
           </a:p>
@@ -2673,7 +2673,7 @@
                   <a:schemeClr val="accent5"/>
                 </a:solidFill>
               </a:rPr>
-              <a:t>Brukerskript · versjon 1.50.0 · norsk og engelsk</a:t>
+              <a:t>Brukerskript · versjon 1.50.2 · norsk og engelsk</a:t>
             </a:r>
             <a:endParaRPr lang="en-US" sz="1400" dirty="0"/>
           </a:p>

--- a/docs/Geocaching-Map-Custom-Tile-Layers-Presentasjon.pptx
+++ b/docs/Geocaching-Map-Custom-Tile-Layers-Presentasjon.pptx
@@ -122,13 +122,13 @@
   <p:extLst>
     <p:ext uri="{521415D9-36F7-43E2-AB2F-B90AF26B5E84}">
       <p14:sectionLst xmlns:p14="http://schemas.microsoft.com/office/powerpoint/2010/main">
-        <p14:section name="Innledning" id="{bb18d423-6fd4-9c86-5a15-9e6b482442c6}">
+        <p14:section name="Innledning" id="{8172edfc-d2a0-349e-b602-c131f866fa5a}">
           <p14:sldIdLst>
             <p14:sldId id="256"/>
             <p14:sldId id="257"/>
           </p14:sldIdLst>
         </p14:section>
-        <p14:section name="Funksjoner" id="{8eef0a39-63a1-b1ec-9954-3e75f5ccb53d}">
+        <p14:section name="Funksjoner" id="{73d5cdbb-ea82-8ea5-5d1a-ce9f59f42087}">
           <p14:sldIdLst>
             <p14:sldId id="258"/>
             <p14:sldId id="259"/>
@@ -142,14 +142,14 @@
             <p14:sldId id="267"/>
           </p14:sldIdLst>
         </p14:section>
-        <p14:section name="Teknikk" id="{e0b8d13a-33d4-216c-5651-0dfe631a0a0b}">
+        <p14:section name="Teknikk" id="{3a83fa52-4186-c47b-0ac8-32467ddba295}">
           <p14:sldIdLst>
             <p14:sldId id="268"/>
             <p14:sldId id="269"/>
             <p14:sldId id="270"/>
           </p14:sldIdLst>
         </p14:section>
-        <p14:section name="Avslutning" id="{dd808892-1122-1d84-a8d2-1a25b676ff56}">
+        <p14:section name="Avslutning" id="{60a31e91-a676-955b-937d-408c0474ba13}">
           <p14:sldIdLst>
             <p14:sldId id="271"/>
           </p14:sldIdLst>
@@ -2153,7 +2153,7 @@
                   <a:schemeClr val="accent4"/>
                 </a:solidFill>
               </a:rPr>
-              <a:t>Geocaching Map – Custom Tile Layers · v1.50.2</a:t>
+              <a:t>Geocaching Map – Custom Tile Layers · v1.51.0</a:t>
             </a:r>
             <a:endParaRPr lang="en-US" sz="1000" dirty="0"/>
           </a:p>
@@ -2673,7 +2673,7 @@
                   <a:schemeClr val="accent5"/>
                 </a:solidFill>
               </a:rPr>
-              <a:t>Brukerskript · versjon 1.50.2 · norsk og engelsk</a:t>
+              <a:t>Brukerskript · versjon 1.51.0 · norsk og engelsk</a:t>
             </a:r>
             <a:endParaRPr lang="en-US" sz="1400" dirty="0"/>
           </a:p>
@@ -3096,7 +3096,7 @@
                   <a:schemeClr val="tx1"/>
                 </a:solidFill>
               </a:rPr>
-              <a:t>Rekkefølge og etapper</a:t>
+              <a:t>Rekkefølge og rundtur</a:t>
             </a:r>
             <a:endParaRPr lang="en-US" sz="1700" dirty="0"/>
           </a:p>
@@ -3113,7 +3113,7 @@
                   <a:schemeClr val="accent4"/>
                 </a:solidFill>
               </a:rPr>
-              <a:t>Flytt stopp, sorter etter nærmeste og se avstand og retning for hver etappe</a:t>
+              <a:t>Flytt stopp, sorter etter nærmeste, se hver etappe – og avslutt ved start</a:t>
             </a:r>
             <a:endParaRPr lang="en-US" sz="1700" dirty="0"/>
           </a:p>
@@ -3213,7 +3213,7 @@
                   <a:schemeClr val="accent4"/>
                 </a:solidFill>
               </a:rPr>
-              <a:t>Se hele ruten på kartet og i en tabell – last ned som GPX med Garmin-symboler</a:t>
+              <a:t>GPX med Garmin-symboler – eventuelt med fulle cachedata (papirløse cacher)</a:t>
             </a:r>
             <a:endParaRPr lang="en-US" sz="1700" dirty="0"/>
           </a:p>

--- a/docs/Geocaching-Map-Custom-Tile-Layers-Presentasjon.pptx
+++ b/docs/Geocaching-Map-Custom-Tile-Layers-Presentasjon.pptx
@@ -122,13 +122,13 @@
   <p:extLst>
     <p:ext uri="{521415D9-36F7-43E2-AB2F-B90AF26B5E84}">
       <p14:sectionLst xmlns:p14="http://schemas.microsoft.com/office/powerpoint/2010/main">
-        <p14:section name="Innledning" id="{8172edfc-d2a0-349e-b602-c131f866fa5a}">
+        <p14:section name="Innledning" id="{17b299b5-6ea9-31f7-e55f-d396b35258ec}">
           <p14:sldIdLst>
             <p14:sldId id="256"/>
             <p14:sldId id="257"/>
           </p14:sldIdLst>
         </p14:section>
-        <p14:section name="Funksjoner" id="{73d5cdbb-ea82-8ea5-5d1a-ce9f59f42087}">
+        <p14:section name="Funksjoner" id="{fa5e3aee-92e2-3ea9-4c28-30cee02b0046}">
           <p14:sldIdLst>
             <p14:sldId id="258"/>
             <p14:sldId id="259"/>
@@ -142,14 +142,14 @@
             <p14:sldId id="267"/>
           </p14:sldIdLst>
         </p14:section>
-        <p14:section name="Teknikk" id="{3a83fa52-4186-c47b-0ac8-32467ddba295}">
+        <p14:section name="Teknikk" id="{da83a7c1-664f-7b22-b16b-015c62b8d46c}">
           <p14:sldIdLst>
             <p14:sldId id="268"/>
             <p14:sldId id="269"/>
             <p14:sldId id="270"/>
           </p14:sldIdLst>
         </p14:section>
-        <p14:section name="Avslutning" id="{60a31e91-a676-955b-937d-408c0474ba13}">
+        <p14:section name="Avslutning" id="{ec24358b-905f-f65b-5e29-50144f20cc94}">
           <p14:sldIdLst>
             <p14:sldId id="271"/>
           </p14:sldIdLst>

--- a/docs/Geocaching-Map-Custom-Tile-Layers-Presentasjon.pptx
+++ b/docs/Geocaching-Map-Custom-Tile-Layers-Presentasjon.pptx
@@ -122,13 +122,13 @@
   <p:extLst>
     <p:ext uri="{521415D9-36F7-43E2-AB2F-B90AF26B5E84}">
       <p14:sectionLst xmlns:p14="http://schemas.microsoft.com/office/powerpoint/2010/main">
-        <p14:section name="Innledning" id="{17b299b5-6ea9-31f7-e55f-d396b35258ec}">
+        <p14:section name="Innledning" id="{0df88a2c-a635-6252-68f4-73e9527f5163}">
           <p14:sldIdLst>
             <p14:sldId id="256"/>
             <p14:sldId id="257"/>
           </p14:sldIdLst>
         </p14:section>
-        <p14:section name="Funksjoner" id="{fa5e3aee-92e2-3ea9-4c28-30cee02b0046}">
+        <p14:section name="Funksjoner" id="{3e2f9805-4cee-b674-e259-cd3ad659f74d}">
           <p14:sldIdLst>
             <p14:sldId id="258"/>
             <p14:sldId id="259"/>
@@ -142,14 +142,14 @@
             <p14:sldId id="267"/>
           </p14:sldIdLst>
         </p14:section>
-        <p14:section name="Teknikk" id="{da83a7c1-664f-7b22-b16b-015c62b8d46c}">
+        <p14:section name="Teknikk" id="{e8db0675-c049-c607-cb28-dd3ae8f1dc8f}">
           <p14:sldIdLst>
             <p14:sldId id="268"/>
             <p14:sldId id="269"/>
             <p14:sldId id="270"/>
           </p14:sldIdLst>
         </p14:section>
-        <p14:section name="Avslutning" id="{ec24358b-905f-f65b-5e29-50144f20cc94}">
+        <p14:section name="Avslutning" id="{8329e224-9124-077b-9931-6ff385905fd9}">
           <p14:sldIdLst>
             <p14:sldId id="271"/>
           </p14:sldIdLst>
@@ -646,7 +646,7 @@
           <a:p>
             <a:r>
               <a:rPr lang="en-US" dirty="0"/>
-              <a:t>Rutevinduet åpnes med rute-knappen i verktøylinjen. Forhåndsvisningen viser nøyaktig hva GPX-filen inneholder: navn i GPS-en, beskrivelse, koordinater og etapper. Cacher får Garmins Geocache-symbol (Geocache Found når de er funnet), merkenåler den blå nålen.</a:t>
+              <a:t>Rutevinduet åpnes med rute-knappen i verktøylinjen. Forhåndsvisningen viser nøyaktig hva GPX-filen inneholder: navn i GPS'en, beskrivelse, koordinater og etapper. Cacher får Garmins Geocache-symbol (Geocache Found når de er funnet), merkenåler den blå nålen.</a:t>
             </a:r>
             <a:endParaRPr lang="en-US" dirty="0"/>
           </a:p>
@@ -2767,7 +2767,7 @@
                   <a:schemeClr val="tx2"/>
                 </a:solidFill>
               </a:rPr>
-              <a:t>Nyhet: sett sammen en rute og ta den med på GPS-en</a:t>
+              <a:t>Nyhet: sett sammen en rute og ta den med på GPS'en</a:t>
             </a:r>
             <a:endParaRPr lang="en-US" sz="3600" dirty="0"/>
           </a:p>
@@ -8071,7 +8071,7 @@
       </p:sp>
       <p:sp>
         <p:nvSpPr>
-          <p:cNvPr id="12023" name="Kort Nyhet: ruter til GPS-en"/>
+          <p:cNvPr id="12023" name="Kort Nyhet: ruter til GPS'en"/>
           <p:cNvSpPr/>
           <p:nvPr/>
         </p:nvSpPr>
@@ -8168,7 +8168,7 @@
                   <a:schemeClr val="tx1"/>
                 </a:solidFill>
               </a:rPr>
-              <a:t>Nyhet: ruter til GPS-en</a:t>
+              <a:t>Nyhet: ruter til GPS'en</a:t>
             </a:r>
             <a:endParaRPr lang="en-US" sz="1900" dirty="0"/>
           </a:p>

--- a/docs/Geocaching-Map-Custom-Tile-Layers-Presentasjon.pptx
+++ b/docs/Geocaching-Map-Custom-Tile-Layers-Presentasjon.pptx
@@ -122,13 +122,13 @@
   <p:extLst>
     <p:ext uri="{521415D9-36F7-43E2-AB2F-B90AF26B5E84}">
       <p14:sectionLst xmlns:p14="http://schemas.microsoft.com/office/powerpoint/2010/main">
-        <p14:section name="Innledning" id="{0df88a2c-a635-6252-68f4-73e9527f5163}">
+        <p14:section name="Innledning" id="{a063d472-58a3-3fc2-c0c0-428a547ed99c}">
           <p14:sldIdLst>
             <p14:sldId id="256"/>
             <p14:sldId id="257"/>
           </p14:sldIdLst>
         </p14:section>
-        <p14:section name="Funksjoner" id="{3e2f9805-4cee-b674-e259-cd3ad659f74d}">
+        <p14:section name="Funksjoner" id="{29fb335e-37ee-4225-3624-ff70d7fd4fb5}">
           <p14:sldIdLst>
             <p14:sldId id="258"/>
             <p14:sldId id="259"/>
@@ -142,14 +142,14 @@
             <p14:sldId id="267"/>
           </p14:sldIdLst>
         </p14:section>
-        <p14:section name="Teknikk" id="{e8db0675-c049-c607-cb28-dd3ae8f1dc8f}">
+        <p14:section name="Teknikk" id="{da43ab48-99aa-6505-abde-06e5e488389e}">
           <p14:sldIdLst>
             <p14:sldId id="268"/>
             <p14:sldId id="269"/>
             <p14:sldId id="270"/>
           </p14:sldIdLst>
         </p14:section>
-        <p14:section name="Avslutning" id="{8329e224-9124-077b-9931-6ff385905fd9}">
+        <p14:section name="Avslutning" id="{6557597e-57b9-18bc-836a-4cf9ed9b0136}">
           <p14:sldIdLst>
             <p14:sldId id="271"/>
           </p14:sldIdLst>
@@ -2153,7 +2153,7 @@
                   <a:schemeClr val="accent4"/>
                 </a:solidFill>
               </a:rPr>
-              <a:t>Geocaching Map – Custom Tile Layers · v1.51.0</a:t>
+              <a:t>Geocaching Map – Custom Tile Layers · v1.51.9</a:t>
             </a:r>
             <a:endParaRPr lang="en-US" sz="1000" dirty="0"/>
           </a:p>
@@ -2673,7 +2673,7 @@
                   <a:schemeClr val="accent5"/>
                 </a:solidFill>
               </a:rPr>
-              <a:t>Brukerskript · versjon 1.51.0 · norsk og engelsk</a:t>
+              <a:t>Brukerskript · versjon 1.51.9 · norsk og engelsk</a:t>
             </a:r>
             <a:endParaRPr lang="en-US" sz="1400" dirty="0"/>
           </a:p>
@@ -8647,7 +8647,7 @@
       </p:sp>
       <p:sp>
         <p:nvSpPr>
-          <p:cNvPr id="13014" name="Ikon circles sirkel"/>
+          <p:cNvPr id="13014" name="Ikon route sirkel"/>
           <p:cNvSpPr/>
           <p:nvPr/>
         </p:nvSpPr>
@@ -8667,7 +8667,7 @@
       </p:sp>
       <p:pic>
         <p:nvPicPr>
-          <p:cNvPr id="13015" name="Ikon circles" descr="circles">    </p:cNvPr>
+          <p:cNvPr id="13015" name="Ikon route" descr="route">    </p:cNvPr>
           <p:cNvPicPr>
             <a:picLocks noChangeAspect="1"/>
           </p:cNvPicPr>
@@ -8722,7 +8722,7 @@
                   <a:schemeClr val="tx1"/>
                 </a:solidFill>
               </a:rPr>
-              <a:t>161 m-sirkler</a:t>
+              <a:t>Rute</a:t>
             </a:r>
             <a:endParaRPr lang="en-US" sz="1700" dirty="0"/>
           </a:p>
@@ -8739,7 +8739,7 @@
                   <a:schemeClr val="accent4"/>
                 </a:solidFill>
               </a:rPr>
-              <a:t>Der noe er utplassert – fra zoom 15</a:t>
+              <a:t>Sett sammen en rute og last den ned som GPX</a:t>
             </a:r>
             <a:endParaRPr lang="en-US" sz="1700" dirty="0"/>
           </a:p>
@@ -8747,7 +8747,7 @@
       </p:sp>
       <p:sp>
         <p:nvSpPr>
-          <p:cNvPr id="13017" name="Ikon solved sirkel"/>
+          <p:cNvPr id="13017" name="Ikon circles sirkel"/>
           <p:cNvSpPr/>
           <p:nvPr/>
         </p:nvSpPr>
@@ -8767,7 +8767,7 @@
       </p:sp>
       <p:pic>
         <p:nvPicPr>
-          <p:cNvPr id="13018" name="Ikon solved" descr="solved">    </p:cNvPr>
+          <p:cNvPr id="13018" name="Ikon circles" descr="circles">    </p:cNvPr>
           <p:cNvPicPr>
             <a:picLocks noChangeAspect="1"/>
           </p:cNvPicPr>
@@ -8822,7 +8822,7 @@
                   <a:schemeClr val="tx1"/>
                 </a:solidFill>
               </a:rPr>
-              <a:t>Merker</a:t>
+              <a:t>161 m-sirkler</a:t>
             </a:r>
             <a:endParaRPr lang="en-US" sz="1700" dirty="0"/>
           </a:p>
@@ -8839,7 +8839,7 @@
                   <a:schemeClr val="accent4"/>
                 </a:solidFill>
               </a:rPr>
-              <a:t>Løste cacher, også uten sirkler</a:t>
+              <a:t>Der noe er utplassert – fra zoom 15</a:t>
             </a:r>
             <a:endParaRPr lang="en-US" sz="1700" dirty="0"/>
           </a:p>
@@ -8847,7 +8847,7 @@
       </p:sp>
       <p:sp>
         <p:nvSpPr>
-          <p:cNvPr id="13020" name="Ikon dt sirkel"/>
+          <p:cNvPr id="13020" name="Ikon solved sirkel"/>
           <p:cNvSpPr/>
           <p:nvPr/>
         </p:nvSpPr>
@@ -8867,7 +8867,7 @@
       </p:sp>
       <p:pic>
         <p:nvPicPr>
-          <p:cNvPr id="13021" name="Ikon dt" descr="dt">    </p:cNvPr>
+          <p:cNvPr id="13021" name="Ikon solved" descr="solved">    </p:cNvPr>
           <p:cNvPicPr>
             <a:picLocks noChangeAspect="1"/>
           </p:cNvPicPr>
@@ -8922,7 +8922,7 @@
                   <a:schemeClr val="tx1"/>
                 </a:solidFill>
               </a:rPr>
-              <a:t>D/T</a:t>
+              <a:t>Merker</a:t>
             </a:r>
             <a:endParaRPr lang="en-US" sz="1700" dirty="0"/>
           </a:p>
@@ -8939,7 +8939,7 @@
                   <a:schemeClr val="accent4"/>
                 </a:solidFill>
               </a:rPr>
-              <a:t>Vanskelighet/terreng under cachene – av/på</a:t>
+              <a:t>Løste cacher, også uten sirkler</a:t>
             </a:r>
             <a:endParaRPr lang="en-US" sz="1700" dirty="0"/>
           </a:p>
@@ -8947,7 +8947,7 @@
       </p:sp>
       <p:sp>
         <p:nvSpPr>
-          <p:cNvPr id="13023" name="Ikon locate sirkel"/>
+          <p:cNvPr id="13023" name="Ikon heart sirkel"/>
           <p:cNvSpPr/>
           <p:nvPr/>
         </p:nvSpPr>
@@ -8967,7 +8967,7 @@
       </p:sp>
       <p:pic>
         <p:nvPicPr>
-          <p:cNvPr id="13024" name="Ikon locate" descr="locate">    </p:cNvPr>
+          <p:cNvPr id="13024" name="Ikon heart" descr="heart">    </p:cNvPr>
           <p:cNvPicPr>
             <a:picLocks noChangeAspect="1"/>
           </p:cNvPicPr>
@@ -9022,7 +9022,7 @@
                   <a:schemeClr val="tx1"/>
                 </a:solidFill>
               </a:rPr>
-              <a:t>Min posisjon</a:t>
+              <a:t>Favorittpoeng</a:t>
             </a:r>
             <a:endParaRPr lang="en-US" sz="1700" dirty="0"/>
           </a:p>
@@ -9039,7 +9039,7 @@
                   <a:schemeClr val="accent4"/>
                 </a:solidFill>
               </a:rPr>
-              <a:t>Med sirkel for nøyaktighet</a:t>
+              <a:t>♥ og antallet over cachene – av/på</a:t>
             </a:r>
             <a:endParaRPr lang="en-US" sz="1700" dirty="0"/>
           </a:p>
@@ -9047,7 +9047,7 @@
       </p:sp>
       <p:sp>
         <p:nvSpPr>
-          <p:cNvPr id="13026" name="Ikon home sirkel"/>
+          <p:cNvPr id="13026" name="Ikon dt sirkel"/>
           <p:cNvSpPr/>
           <p:nvPr/>
         </p:nvSpPr>
@@ -9067,7 +9067,7 @@
       </p:sp>
       <p:pic>
         <p:nvPicPr>
-          <p:cNvPr id="13027" name="Ikon home" descr="home">    </p:cNvPr>
+          <p:cNvPr id="13027" name="Ikon dt" descr="dt">    </p:cNvPr>
           <p:cNvPicPr>
             <a:picLocks noChangeAspect="1"/>
           </p:cNvPicPr>
@@ -9122,7 +9122,7 @@
                   <a:schemeClr val="tx1"/>
                 </a:solidFill>
               </a:rPr>
-              <a:t>Hjem</a:t>
+              <a:t>D/T</a:t>
             </a:r>
             <a:endParaRPr lang="en-US" sz="1700" dirty="0"/>
           </a:p>
@@ -9139,7 +9139,7 @@
                   <a:schemeClr val="accent4"/>
                 </a:solidFill>
               </a:rPr>
-              <a:t>Høyreklikk for å endre adressen</a:t>
+              <a:t>Vanskelighet/terreng under cachene – av/på</a:t>
             </a:r>
             <a:endParaRPr lang="en-US" sz="1700" dirty="0"/>
           </a:p>
@@ -9147,7 +9147,7 @@
       </p:sp>
       <p:sp>
         <p:nvSpPr>
-          <p:cNvPr id="13029" name="Ikon expand sirkel"/>
+          <p:cNvPr id="13029" name="Ikon eyeoff sirkel"/>
           <p:cNvSpPr/>
           <p:nvPr/>
         </p:nvSpPr>
@@ -9167,7 +9167,7 @@
       </p:sp>
       <p:pic>
         <p:nvPicPr>
-          <p:cNvPr id="13030" name="Ikon expand" descr="expand">    </p:cNvPr>
+          <p:cNvPr id="13030" name="Ikon eyeoff" descr="eyeoff">    </p:cNvPr>
           <p:cNvPicPr>
             <a:picLocks noChangeAspect="1"/>
           </p:cNvPicPr>
@@ -9222,7 +9222,7 @@
                   <a:schemeClr val="tx1"/>
                 </a:solidFill>
               </a:rPr>
-              <a:t>Fullskjerm</a:t>
+              <a:t>Skjul geocacher</a:t>
             </a:r>
             <a:endParaRPr lang="en-US" sz="1700" dirty="0"/>
           </a:p>
@@ -9239,7 +9239,7 @@
                   <a:schemeClr val="accent4"/>
                 </a:solidFill>
               </a:rPr>
-              <a:t>Kartet fyller hele skjermen</a:t>
+              <a:t>Rent kart – klikk igjen for å vise dem</a:t>
             </a:r>
             <a:endParaRPr lang="en-US" sz="1700" dirty="0"/>
           </a:p>
@@ -9247,7 +9247,7 @@
       </p:sp>
       <p:sp>
         <p:nvSpPr>
-          <p:cNvPr id="13032" name="Ikon eraser sirkel"/>
+          <p:cNvPr id="13032" name="Ikon locate sirkel"/>
           <p:cNvSpPr/>
           <p:nvPr/>
         </p:nvSpPr>
@@ -9267,7 +9267,7 @@
       </p:sp>
       <p:pic>
         <p:nvPicPr>
-          <p:cNvPr id="13033" name="Ikon eraser" descr="eraser">    </p:cNvPr>
+          <p:cNvPr id="13033" name="Ikon locate" descr="locate">    </p:cNvPr>
           <p:cNvPicPr>
             <a:picLocks noChangeAspect="1"/>
           </p:cNvPicPr>
@@ -9322,7 +9322,7 @@
                   <a:schemeClr val="tx1"/>
                 </a:solidFill>
               </a:rPr>
-              <a:t>Fjern tegninger</a:t>
+              <a:t>Min posisjon</a:t>
             </a:r>
             <a:endParaRPr lang="en-US" sz="1700" dirty="0"/>
           </a:p>
@@ -9339,7 +9339,7 @@
                   <a:schemeClr val="accent4"/>
                 </a:solidFill>
               </a:rPr>
-              <a:t>Merker, målinger og sirkler</a:t>
+              <a:t>Med sirkel for nøyaktighet</a:t>
             </a:r>
             <a:endParaRPr lang="en-US" sz="1700" dirty="0"/>
           </a:p>
@@ -9347,7 +9347,7 @@
       </p:sp>
       <p:sp>
         <p:nvSpPr>
-          <p:cNvPr id="13035" name="Ikon eyeoff sirkel"/>
+          <p:cNvPr id="13035" name="Ikon home sirkel"/>
           <p:cNvSpPr/>
           <p:nvPr/>
         </p:nvSpPr>
@@ -9367,7 +9367,7 @@
       </p:sp>
       <p:pic>
         <p:nvPicPr>
-          <p:cNvPr id="13036" name="Ikon eyeoff" descr="eyeoff">    </p:cNvPr>
+          <p:cNvPr id="13036" name="Ikon home" descr="home">    </p:cNvPr>
           <p:cNvPicPr>
             <a:picLocks noChangeAspect="1"/>
           </p:cNvPicPr>
@@ -9422,7 +9422,7 @@
                   <a:schemeClr val="tx1"/>
                 </a:solidFill>
               </a:rPr>
-              <a:t>Skjul geocacher</a:t>
+              <a:t>Hjem</a:t>
             </a:r>
             <a:endParaRPr lang="en-US" sz="1700" dirty="0"/>
           </a:p>
@@ -9439,7 +9439,7 @@
                   <a:schemeClr val="accent4"/>
                 </a:solidFill>
               </a:rPr>
-              <a:t>Rent kart – klikk igjen for å vise dem</a:t>
+              <a:t>Høyreklikk for å endre adressen</a:t>
             </a:r>
             <a:endParaRPr lang="en-US" sz="1700" dirty="0"/>
           </a:p>
@@ -9447,7 +9447,7 @@
       </p:sp>
       <p:sp>
         <p:nvSpPr>
-          <p:cNvPr id="13038" name="Ikon heart sirkel"/>
+          <p:cNvPr id="13038" name="Ikon expand sirkel"/>
           <p:cNvSpPr/>
           <p:nvPr/>
         </p:nvSpPr>
@@ -9467,7 +9467,7 @@
       </p:sp>
       <p:pic>
         <p:nvPicPr>
-          <p:cNvPr id="13039" name="Ikon heart" descr="heart">    </p:cNvPr>
+          <p:cNvPr id="13039" name="Ikon expand" descr="expand">    </p:cNvPr>
           <p:cNvPicPr>
             <a:picLocks noChangeAspect="1"/>
           </p:cNvPicPr>
@@ -9522,7 +9522,7 @@
                   <a:schemeClr val="tx1"/>
                 </a:solidFill>
               </a:rPr>
-              <a:t>Favorittpoeng</a:t>
+              <a:t>Fullskjerm</a:t>
             </a:r>
             <a:endParaRPr lang="en-US" sz="1700" dirty="0"/>
           </a:p>
@@ -9539,7 +9539,7 @@
                   <a:schemeClr val="accent4"/>
                 </a:solidFill>
               </a:rPr>
-              <a:t>♥ og antallet over cachene – av/på</a:t>
+              <a:t>Kartet fyller hele skjermen</a:t>
             </a:r>
             <a:endParaRPr lang="en-US" sz="1700" dirty="0"/>
           </a:p>
@@ -9547,7 +9547,7 @@
       </p:sp>
       <p:sp>
         <p:nvSpPr>
-          <p:cNvPr id="13041" name="Ikon gear sirkel"/>
+          <p:cNvPr id="13041" name="Ikon eraser sirkel"/>
           <p:cNvSpPr/>
           <p:nvPr/>
         </p:nvSpPr>
@@ -9567,7 +9567,7 @@
       </p:sp>
       <p:pic>
         <p:nvPicPr>
-          <p:cNvPr id="13042" name="Ikon gear" descr="gear">    </p:cNvPr>
+          <p:cNvPr id="13042" name="Ikon eraser" descr="eraser">    </p:cNvPr>
           <p:cNvPicPr>
             <a:picLocks noChangeAspect="1"/>
           </p:cNvPicPr>
@@ -9622,7 +9622,7 @@
                   <a:schemeClr val="tx1"/>
                 </a:solidFill>
               </a:rPr>
-              <a:t>Innstillinger</a:t>
+              <a:t>Fjern tegninger</a:t>
             </a:r>
             <a:endParaRPr lang="en-US" sz="1700" dirty="0"/>
           </a:p>
@@ -9639,6 +9639,106 @@
                   <a:schemeClr val="accent4"/>
                 </a:solidFill>
               </a:rPr>
+              <a:t>Merker, målinger og sirkler</a:t>
+            </a:r>
+            <a:endParaRPr lang="en-US" sz="1700" dirty="0"/>
+          </a:p>
+        </p:txBody>
+      </p:sp>
+      <p:sp>
+        <p:nvSpPr>
+          <p:cNvPr id="13044" name="Ikon gear sirkel"/>
+          <p:cNvSpPr/>
+          <p:nvPr/>
+        </p:nvSpPr>
+        <p:spPr>
+          <a:xfrm>
+            <a:off x="7086600" y="5733288"/>
+            <a:ext cx="512064" cy="512064"/>
+          </a:xfrm>
+          <a:prstGeom prst="ellipse">
+            <a:avLst/>
+          </a:prstGeom>
+          <a:solidFill>
+            <a:schemeClr val="accent1"/>
+          </a:solidFill>
+          <a:ln/>
+        </p:spPr>
+      </p:sp>
+      <p:pic>
+        <p:nvPicPr>
+          <p:cNvPr id="13045" name="Ikon gear" descr="gear">    </p:cNvPr>
+          <p:cNvPicPr>
+            <a:picLocks noChangeAspect="1"/>
+          </p:cNvPicPr>
+          <p:nvPr/>
+        </p:nvPicPr>
+        <p:blipFill>
+          <a:blip r:embed="rId15"/>
+          <a:stretch>
+            <a:fillRect/>
+          </a:stretch>
+        </p:blipFill>
+        <p:spPr>
+          <a:xfrm>
+            <a:off x="7199254" y="5845942"/>
+            <a:ext cx="286756" cy="286756"/>
+          </a:xfrm>
+          <a:prstGeom prst="rect">
+            <a:avLst/>
+          </a:prstGeom>
+        </p:spPr>
+      </p:pic>
+      <p:sp>
+        <p:nvSpPr>
+          <p:cNvPr id="13046" name="Text 29"/>
+          <p:cNvSpPr txBox="1"/>
+          <p:nvPr/>
+        </p:nvSpPr>
+        <p:spPr>
+          <a:xfrm>
+            <a:off x="7799832" y="5660136"/>
+            <a:ext cx="3767328" cy="667512"/>
+          </a:xfrm>
+          <a:prstGeom prst="rect">
+            <a:avLst/>
+          </a:prstGeom>
+          <a:noFill/>
+          <a:ln/>
+        </p:spPr>
+        <p:txBody>
+          <a:bodyPr wrap="square" lIns="0" tIns="0" rIns="0" bIns="0" rtlCol="0" anchor="t"/>
+          <a:lstStyle/>
+          <a:p>
+            <a:pPr indent="0" marL="0">
+              <a:spcAft>
+                <a:spcPts val="200"/>
+              </a:spcAft>
+              <a:buNone/>
+            </a:pPr>
+            <a:r>
+              <a:rPr lang="en-US" sz="1700" b="1" dirty="0">
+                <a:solidFill>
+                  <a:schemeClr val="tx1"/>
+                </a:solidFill>
+              </a:rPr>
+              <a:t>Innstillinger</a:t>
+            </a:r>
+            <a:endParaRPr lang="en-US" sz="1700" dirty="0"/>
+          </a:p>
+          <a:p>
+            <a:pPr indent="0" marL="0">
+              <a:spcAft>
+                <a:spcPts val="200"/>
+              </a:spcAft>
+              <a:buNone/>
+            </a:pPr>
+            <a:r>
+              <a:rPr lang="en-US" sz="1400" dirty="0">
+                <a:solidFill>
+                  <a:schemeClr val="accent4"/>
+                </a:solidFill>
+              </a:rPr>
               <a:t>Plassering, språk og nettstedets knapper</a:t>
             </a:r>
             <a:endParaRPr lang="en-US" sz="1700" dirty="0"/>
@@ -9647,7 +9747,7 @@
       </p:sp>
       <p:sp>
         <p:nvSpPr>
-          <p:cNvPr id="13044" name="Slide Number Placeholder 0"/>
+          <p:cNvPr id="13047" name="Slide Number Placeholder 0"/>
           <p:cNvSpPr>
             <a:spLocks noGrp="1"/>
           </p:cNvSpPr>

--- a/docs/Geocaching-Map-Custom-Tile-Layers-Presentasjon.pptx
+++ b/docs/Geocaching-Map-Custom-Tile-Layers-Presentasjon.pptx
@@ -21,9 +21,10 @@
     <p:sldId id="269" r:id="rId15"/>
     <p:sldId id="270" r:id="rId16"/>
     <p:sldId id="271" r:id="rId17"/>
+    <p:sldId id="272" r:id="rId18"/>
   </p:sldIdLst>
   <p:notesMasterIdLst>
-    <p:notesMasterId r:id="rId18"/>
+    <p:notesMasterId r:id="rId19"/>
   </p:notesMasterIdLst>
   <p:sldSz cx="12192000" cy="6858000"/>
   <p:notesSz cx="6858000" cy="12192000"/>
@@ -122,13 +123,13 @@
   <p:extLst>
     <p:ext uri="{521415D9-36F7-43E2-AB2F-B90AF26B5E84}">
       <p14:sectionLst xmlns:p14="http://schemas.microsoft.com/office/powerpoint/2010/main">
-        <p14:section name="Innledning" id="{a063d472-58a3-3fc2-c0c0-428a547ed99c}">
+        <p14:section name="Innledning" id="{9f0d9170-f495-affd-6275-9c7137eac8cc}">
           <p14:sldIdLst>
             <p14:sldId id="256"/>
             <p14:sldId id="257"/>
           </p14:sldIdLst>
         </p14:section>
-        <p14:section name="Funksjoner" id="{29fb335e-37ee-4225-3624-ff70d7fd4fb5}">
+        <p14:section name="Funksjoner" id="{2558ab7a-2606-8852-512d-25a9654f1490}">
           <p14:sldIdLst>
             <p14:sldId id="258"/>
             <p14:sldId id="259"/>
@@ -140,18 +141,19 @@
             <p14:sldId id="265"/>
             <p14:sldId id="266"/>
             <p14:sldId id="267"/>
+            <p14:sldId id="268"/>
           </p14:sldIdLst>
         </p14:section>
-        <p14:section name="Teknikk" id="{da43ab48-99aa-6505-abde-06e5e488389e}">
+        <p14:section name="Teknikk" id="{2be404a8-cfcf-feae-a3e1-54f9df28b320}">
           <p14:sldIdLst>
-            <p14:sldId id="268"/>
             <p14:sldId id="269"/>
             <p14:sldId id="270"/>
+            <p14:sldId id="271"/>
           </p14:sldIdLst>
         </p14:section>
-        <p14:section name="Avslutning" id="{6557597e-57b9-18bc-836a-4cf9ed9b0136}">
+        <p14:section name="Avslutning" id="{09f9528f-5bf8-fad3-52da-f1685ae43be5}">
           <p14:sldIdLst>
-            <p14:sldId id="271"/>
+            <p14:sldId id="272"/>
           </p14:sldIdLst>
         </p14:section>
       </p14:sectionLst>
@@ -734,7 +736,7 @@
           <a:p>
             <a:r>
               <a:rPr lang="en-US" dirty="0"/>
-              <a:t>Sirklene vises fra zoomnivå 15. Cachetypene, de nøyaktige koordinatene og dine løste koordinater kommer fra geocaching.coms eget cachesøk. Fysiske steg leses fra listen over tilleggsveipunkter på cachesiden – bare de eieren har gjort synlige. Blått merke med spørsmålstegn og grønn hake: en løst cache du har funnet. Liten blå prikk: fysisk steg. Liten grønn prikk: endelig plassering. Dine egne cacher, som cachesøket utelater, leses fra cachesidene; der beholdes nettstedets ikon og boble, men teksten ved musepekeren blir «Endelig plassering».</a:t>
+              <a:t>Cachelisten finnes på det gamle kartet (/map); det nye kartet har sin egen liste. Listen og rutevinduet står øverst til høyre eller venstre på kartet (Innstillinger), unna nettstedets sidepanel, og de to knappene bytter mellom dem.</a:t>
             </a:r>
             <a:endParaRPr lang="en-US" dirty="0"/>
           </a:p>
@@ -822,7 +824,7 @@
           <a:p>
             <a:r>
               <a:rPr lang="en-US" dirty="0"/>
-              <a:t>161 m er minsteavstanden mellom cacher i retningslinjene. På det gamle kartet finner skriptet posisjonene fra et skjult rutenett nettstedet laster; på de nye kartene brukes de nøyaktige posisjonene.</a:t>
+              <a:t>Sirklene vises fra zoomnivå 15. Cachetypene, de nøyaktige koordinatene og dine løste koordinater kommer fra geocaching.coms eget cachesøk. Fysiske steg leses fra listen over tilleggsveipunkter på cachesiden – bare de eieren har gjort synlige. Blått merke med spørsmålstegn og grønn hake: en løst cache du har funnet. Liten blå prikk: fysisk steg. Liten grønn prikk: endelig plassering. Dine egne cacher, som cachesøket utelater, leses fra cachesidene; der beholdes nettstedets ikon og boble, men teksten ved musepekeren blir «Endelig plassering».</a:t>
             </a:r>
             <a:endParaRPr lang="en-US" dirty="0"/>
           </a:p>
@@ -910,7 +912,7 @@
           <a:p>
             <a:r>
               <a:rPr lang="en-US" dirty="0"/>
-              <a:t>Nettleseren tegner Leaflets kontroller øverst, deretter boblene, markørene og tegningene, og nederst kartflisene. Blant flisene sorterer skriptet etter z-indeks: nettstedets bakgrunn nederst, så ditt bakgrunnskart, overleggene og forhåndsvisningen, og øverst nettstedets øvrige fliser – på det gamle kartet er det cacheikonene. Nettstedets bakgrunn finnes fra nettstedets lagvelger, ellers som det laveste fliselaget. Dialogene ligger utenfor kartet, festet til siden, så sidepanelet ikke dekker dem.</a:t>
+              <a:t>161 m er minsteavstanden mellom cacher i retningslinjene. På det gamle kartet finner skriptet posisjonene fra et skjult rutenett nettstedet laster; på de nye kartene brukes de nøyaktige posisjonene.</a:t>
             </a:r>
             <a:endParaRPr lang="en-US" dirty="0"/>
           </a:p>
@@ -998,7 +1000,7 @@
           <a:p>
             <a:r>
               <a:rPr lang="en-US" dirty="0"/>
-              <a:t>Skriptet starter før siden og fanger opp Leaflet i det øyeblikket siden definerer det. Egne feil når aldri nettstedets kode.</a:t>
+              <a:t>Nettleseren tegner Leaflets kontroller øverst, deretter boblene, markørene og tegningene, og nederst kartflisene. Blant flisene sorterer skriptet etter z-indeks: nettstedets bakgrunn nederst, så ditt bakgrunnskart, overleggene og forhåndsvisningen, og øverst nettstedets øvrige fliser – på det gamle kartet er det cacheikonene. Nettstedets bakgrunn finnes fra nettstedets lagvelger, ellers som det laveste fliselaget. Dialogene ligger utenfor kartet, festet til siden, så sidepanelet ikke dekker dem.</a:t>
             </a:r>
             <a:endParaRPr lang="en-US" dirty="0"/>
           </a:p>
@@ -1086,7 +1088,7 @@
           <a:p>
             <a:r>
               <a:rPr lang="en-US" dirty="0"/>
-              <a:t>Skriptet trenger ingen spesielle tillatelser (@grant none). Innstillingene deles mellom kartsidene og cachesidene.</a:t>
+              <a:t>Skriptet starter før siden og fanger opp Leaflet i det øyeblikket siden definerer det. Egne feil når aldri nettstedets kode.</a:t>
             </a:r>
             <a:endParaRPr lang="en-US" dirty="0"/>
           </a:p>
@@ -1174,7 +1176,7 @@
           <a:p>
             <a:r>
               <a:rPr lang="en-US" dirty="0"/>
-              <a:t>Takk for oppmerksomheten. Spørsmål?</a:t>
+              <a:t>Skriptet trenger ingen spesielle tillatelser (@grant none). Innstillingene deles mellom kartsidene og cachesidene.</a:t>
             </a:r>
             <a:endParaRPr lang="en-US" dirty="0"/>
           </a:p>
@@ -1198,6 +1200,94 @@
             <a:fld id="{F7021451-1387-4CA6-816F-3879F97B5CBC}" type="slidenum">
               <a:rPr lang="en-US"/>
               <a:t>16</a:t>
+            </a:fld>
+            <a:endParaRPr lang="en-US"/>
+          </a:p>
+        </p:txBody>
+      </p:sp>
+    </p:spTree>
+    <p:extLst>
+      <p:ext uri="{BB962C8B-B14F-4D97-AF65-F5344CB8AC3E}">
+        <p14:creationId xmlns:p14="http://schemas.microsoft.com/office/powerpoint/2010/main" val="1024086991"/>
+      </p:ext>
+    </p:extLst>
+  </p:cSld>
+  <p:clrMapOvr>
+    <a:masterClrMapping/>
+  </p:clrMapOvr>
+</p:notes>
+</file>
+
+<file path=ppt/notesSlides/notesSlide17.xml><?xml version="1.0" encoding="utf-8"?>
+<p:notes xmlns:a="http://schemas.openxmlformats.org/drawingml/2006/main" xmlns:r="http://schemas.openxmlformats.org/officeDocument/2006/relationships" xmlns:p="http://schemas.openxmlformats.org/presentationml/2006/main">
+  <p:cSld>
+    <p:spTree>
+      <p:nvGrpSpPr>
+        <p:cNvPr id="417001" name=""/>
+        <p:cNvGrpSpPr/>
+        <p:nvPr/>
+      </p:nvGrpSpPr>
+      <p:grpSpPr>
+        <a:xfrm>
+          <a:off x="0" y="0"/>
+          <a:ext cx="0" cy="0"/>
+          <a:chOff x="0" y="0"/>
+          <a:chExt cx="0" cy="0"/>
+        </a:xfrm>
+      </p:grpSpPr>
+      <p:sp>
+        <p:nvSpPr>
+          <p:cNvPr id="417002" name="Slide Image Placeholder 1"/>
+          <p:cNvSpPr>
+            <a:spLocks noGrp="1" noRot="1" noChangeAspect="1"/>
+          </p:cNvSpPr>
+          <p:nvPr>
+            <p:ph type="sldImg"/>
+          </p:nvPr>
+        </p:nvSpPr>
+        <p:spPr/>
+      </p:sp>
+      <p:sp>
+        <p:nvSpPr>
+          <p:cNvPr id="417003" name="Notes Placeholder 2"/>
+          <p:cNvSpPr>
+            <a:spLocks noGrp="1"/>
+          </p:cNvSpPr>
+          <p:nvPr>
+            <p:ph type="body" idx="1"/>
+          </p:nvPr>
+        </p:nvSpPr>
+        <p:spPr/>
+        <p:txBody>
+          <a:bodyPr/>
+          <a:lstStyle/>
+          <a:p>
+            <a:r>
+              <a:rPr lang="en-US" dirty="0"/>
+              <a:t>Takk for oppmerksomheten. Spørsmål?</a:t>
+            </a:r>
+            <a:endParaRPr lang="en-US" dirty="0"/>
+          </a:p>
+        </p:txBody>
+      </p:sp>
+      <p:sp>
+        <p:nvSpPr>
+          <p:cNvPr id="417004" name="Slide Number Placeholder 3"/>
+          <p:cNvSpPr>
+            <a:spLocks noGrp="1"/>
+          </p:cNvSpPr>
+          <p:nvPr>
+            <p:ph type="sldNum" sz="quarter" idx="10"/>
+          </p:nvPr>
+        </p:nvSpPr>
+        <p:spPr/>
+        <p:txBody>
+          <a:bodyPr/>
+          <a:lstStyle/>
+          <a:p>
+            <a:fld id="{F7021451-1387-4CA6-816F-3879F97B5CBC}" type="slidenum">
+              <a:rPr lang="en-US"/>
+              <a:t>17</a:t>
             </a:fld>
             <a:endParaRPr lang="en-US"/>
           </a:p>
@@ -2153,7 +2243,7 @@
                   <a:schemeClr val="accent4"/>
                 </a:solidFill>
               </a:rPr>
-              <a:t>Geocaching Map – Custom Tile Layers · v1.51.9</a:t>
+              <a:t>Geocaching Map – Custom Tile Layers · v1.53.0</a:t>
             </a:r>
             <a:endParaRPr lang="en-US" sz="1000" dirty="0"/>
           </a:p>
@@ -2673,7 +2763,7 @@
                   <a:schemeClr val="accent5"/>
                 </a:solidFill>
               </a:rPr>
-              <a:t>Brukerskript · versjon 1.51.9 · norsk og engelsk</a:t>
+              <a:t>Brukerskript · versjon 1.53.0 · norsk og engelsk</a:t>
             </a:r>
             <a:endParaRPr lang="en-US" sz="1400" dirty="0"/>
           </a:p>
@@ -2695,8 +2785,8 @@
         </p:blipFill>
         <p:spPr>
           <a:xfrm>
-            <a:off x="8682150" y="548640"/>
-            <a:ext cx="2595145" cy="5760720"/>
+            <a:off x="8742823" y="548640"/>
+            <a:ext cx="2534472" cy="5760720"/>
           </a:xfrm>
           <a:prstGeom prst="rect">
             <a:avLst/>
@@ -2811,8 +2901,8 @@
         </p:blipFill>
         <p:spPr>
           <a:xfrm>
-            <a:off x="7448245" y="1527048"/>
-            <a:ext cx="3817620" cy="4581144"/>
+            <a:off x="8084515" y="1527048"/>
+            <a:ext cx="2545080" cy="4581144"/>
           </a:xfrm>
           <a:prstGeom prst="rect">
             <a:avLst/>
@@ -3321,7 +3411,7 @@
                   <a:schemeClr val="tx2"/>
                 </a:solidFill>
               </a:rPr>
-              <a:t>161 m-sirkler der noe er utplassert</a:t>
+              <a:t>Nyhet: geocachene på kartet i en liste</a:t>
             </a:r>
             <a:endParaRPr lang="en-US" sz="3600" dirty="0"/>
           </a:p>
@@ -3329,27 +3419,29 @@
       </p:sp>
       <p:sp>
         <p:nvSpPr>
-          <p:cNvPr id="21003" name="Ikon circles sirkel"/>
+          <p:cNvPr id="21003" name="Cachelisten bakgrunn"/>
           <p:cNvSpPr/>
           <p:nvPr/>
         </p:nvSpPr>
         <p:spPr>
           <a:xfrm>
-            <a:off x="548640" y="1499616"/>
-            <a:ext cx="512064" cy="512064"/>
-          </a:xfrm>
-          <a:prstGeom prst="ellipse">
-            <a:avLst/>
+            <a:off x="7619695" y="1325880"/>
+            <a:ext cx="4023360" cy="4983480"/>
+          </a:xfrm>
+          <a:prstGeom prst="roundRect">
+            <a:avLst>
+              <a:gd name="adj" fmla="val 2727"/>
+            </a:avLst>
           </a:prstGeom>
           <a:solidFill>
-            <a:schemeClr val="accent1"/>
+            <a:schemeClr val="bg2"/>
           </a:solidFill>
           <a:ln/>
         </p:spPr>
       </p:sp>
       <p:pic>
         <p:nvPicPr>
-          <p:cNvPr id="21004" name="Ikon circles" descr="circles">    </p:cNvPr>
+          <p:cNvPr id="21004" name="Cachelisten" descr="Cachelisten">    </p:cNvPr>
           <p:cNvPicPr>
             <a:picLocks noChangeAspect="1"/>
           </p:cNvPicPr>
@@ -3363,8 +3455,8 @@
         </p:blipFill>
         <p:spPr>
           <a:xfrm>
-            <a:off x="661294" y="1612270"/>
-            <a:ext cx="286756" cy="286756"/>
+            <a:off x="7934655" y="1527048"/>
+            <a:ext cx="3393440" cy="4581144"/>
           </a:xfrm>
           <a:prstGeom prst="rect">
             <a:avLst/>
@@ -3373,69 +3465,13 @@
       </p:pic>
       <p:sp>
         <p:nvSpPr>
-          <p:cNvPr id="21005" name="Text 2"/>
-          <p:cNvSpPr txBox="1"/>
-          <p:nvPr/>
-        </p:nvSpPr>
-        <p:spPr>
-          <a:xfrm>
-            <a:off x="1261872" y="1426464"/>
-            <a:ext cx="6053328" cy="1097280"/>
-          </a:xfrm>
-          <a:prstGeom prst="rect">
-            <a:avLst/>
-          </a:prstGeom>
-          <a:noFill/>
-          <a:ln/>
-        </p:spPr>
-        <p:txBody>
-          <a:bodyPr wrap="square" lIns="0" tIns="0" rIns="0" bIns="0" rtlCol="0" anchor="t"/>
-          <a:lstStyle/>
-          <a:p>
-            <a:pPr indent="0" marL="0">
-              <a:spcAft>
-                <a:spcPts val="200"/>
-              </a:spcAft>
-              <a:buNone/>
-            </a:pPr>
-            <a:r>
-              <a:rPr lang="en-US" sz="1700" b="1" dirty="0">
-                <a:solidFill>
-                  <a:schemeClr val="tx1"/>
-                </a:solidFill>
-              </a:rPr>
-              <a:t>Tradisjonelle cacher</a:t>
-            </a:r>
-            <a:endParaRPr lang="en-US" sz="1700" dirty="0"/>
-          </a:p>
-          <a:p>
-            <a:pPr indent="0" marL="0">
-              <a:spcAft>
-                <a:spcPts val="200"/>
-              </a:spcAft>
-              <a:buNone/>
-            </a:pPr>
-            <a:r>
-              <a:rPr lang="en-US" sz="1400" dirty="0">
-                <a:solidFill>
-                  <a:schemeClr val="accent4"/>
-                </a:solidFill>
-              </a:rPr>
-              <a:t>På de nøyaktige publiserte koordinatene</a:t>
-            </a:r>
-            <a:endParaRPr lang="en-US" sz="1700" dirty="0"/>
-          </a:p>
-        </p:txBody>
-      </p:sp>
-      <p:sp>
-        <p:nvSpPr>
-          <p:cNvPr id="21006" name="Ikon check sirkel"/>
+          <p:cNvPr id="21005" name="Ikon list sirkel"/>
           <p:cNvSpPr/>
           <p:nvPr/>
         </p:nvSpPr>
         <p:spPr>
           <a:xfrm>
-            <a:off x="548640" y="2642616"/>
+            <a:off x="548640" y="1499616"/>
             <a:ext cx="512064" cy="512064"/>
           </a:xfrm>
           <a:prstGeom prst="ellipse">
@@ -3449,7 +3485,7 @@
       </p:sp>
       <p:pic>
         <p:nvPicPr>
-          <p:cNvPr id="21007" name="Ikon check" descr="check">    </p:cNvPr>
+          <p:cNvPr id="21006" name="Ikon list" descr="list">    </p:cNvPr>
           <p:cNvPicPr>
             <a:picLocks noChangeAspect="1"/>
           </p:cNvPicPr>
@@ -3463,7 +3499,7 @@
         </p:blipFill>
         <p:spPr>
           <a:xfrm>
-            <a:off x="661294" y="2755270"/>
+            <a:off x="661294" y="1612270"/>
             <a:ext cx="286756" cy="286756"/>
           </a:xfrm>
           <a:prstGeom prst="rect">
@@ -3473,14 +3509,14 @@
       </p:pic>
       <p:sp>
         <p:nvSpPr>
-          <p:cNvPr id="21008" name="Text 4"/>
+          <p:cNvPr id="21007" name="Text 3"/>
           <p:cNvSpPr txBox="1"/>
           <p:nvPr/>
         </p:nvSpPr>
         <p:spPr>
           <a:xfrm>
-            <a:off x="1261872" y="2569464"/>
-            <a:ext cx="6053328" cy="1097280"/>
+            <a:off x="1261872" y="1426464"/>
+            <a:ext cx="6053328" cy="1143000"/>
           </a:xfrm>
           <a:prstGeom prst="rect">
             <a:avLst/>
@@ -3504,7 +3540,7 @@
                   <a:schemeClr val="tx1"/>
                 </a:solidFill>
               </a:rPr>
-              <a:t>Løste cacher</a:t>
+              <a:t>Følger kartet</a:t>
             </a:r>
             <a:endParaRPr lang="en-US" sz="1700" dirty="0"/>
           </a:p>
@@ -3521,7 +3557,7 @@
                   <a:schemeClr val="accent4"/>
                 </a:solidFill>
               </a:rPr>
-              <a:t>På dine korrigerte koordinater – også når ikonet er flyttet tilbake etter funn</a:t>
+              <a:t>Geocachene i kartutsnittet, nærmest midten først – med Løst, Funnet, Eiet, D/T og ♥</a:t>
             </a:r>
             <a:endParaRPr lang="en-US" sz="1700" dirty="0"/>
           </a:p>
@@ -3529,13 +3565,13 @@
       </p:sp>
       <p:sp>
         <p:nvSpPr>
-          <p:cNvPr id="21009" name="Ikon pin sirkel"/>
+          <p:cNvPr id="21008" name="Ikon search sirkel"/>
           <p:cNvSpPr/>
           <p:nvPr/>
         </p:nvSpPr>
         <p:spPr>
           <a:xfrm>
-            <a:off x="548640" y="3785616"/>
+            <a:off x="548640" y="2688336"/>
             <a:ext cx="512064" cy="512064"/>
           </a:xfrm>
           <a:prstGeom prst="ellipse">
@@ -3549,7 +3585,7 @@
       </p:sp>
       <p:pic>
         <p:nvPicPr>
-          <p:cNvPr id="21010" name="Ikon pin" descr="pin">    </p:cNvPr>
+          <p:cNvPr id="21009" name="Ikon search" descr="search">    </p:cNvPr>
           <p:cNvPicPr>
             <a:picLocks noChangeAspect="1"/>
           </p:cNvPicPr>
@@ -3563,7 +3599,7 @@
         </p:blipFill>
         <p:spPr>
           <a:xfrm>
-            <a:off x="661294" y="3898270"/>
+            <a:off x="661294" y="2800990"/>
             <a:ext cx="286756" cy="286756"/>
           </a:xfrm>
           <a:prstGeom prst="rect">
@@ -3573,14 +3609,14 @@
       </p:pic>
       <p:sp>
         <p:nvSpPr>
-          <p:cNvPr id="21011" name="Text 6"/>
+          <p:cNvPr id="21010" name="Text 5"/>
           <p:cNvSpPr txBox="1"/>
           <p:nvPr/>
         </p:nvSpPr>
         <p:spPr>
           <a:xfrm>
-            <a:off x="1261872" y="3712464"/>
-            <a:ext cx="6053328" cy="1097280"/>
+            <a:off x="1261872" y="2615184"/>
+            <a:ext cx="6053328" cy="1143000"/>
           </a:xfrm>
           <a:prstGeom prst="rect">
             <a:avLst/>
@@ -3604,7 +3640,7 @@
                   <a:schemeClr val="tx1"/>
                 </a:solidFill>
               </a:rPr>
-              <a:t>Fysiske steg og final</a:t>
+              <a:t>Pek og finn</a:t>
             </a:r>
             <a:endParaRPr lang="en-US" sz="1700" dirty="0"/>
           </a:p>
@@ -3621,7 +3657,7 @@
                   <a:schemeClr val="accent4"/>
                 </a:solidFill>
               </a:rPr>
-              <a:t>Synlige steg i multier, mysterier, Wherigoer og letterboxer, lest fra cachesiden</a:t>
+              <a:t>Pek på en cache i kartet, så markeres den i listen. Filtrer på kode eller navn</a:t>
             </a:r>
             <a:endParaRPr lang="en-US" sz="1700" dirty="0"/>
           </a:p>
@@ -3629,13 +3665,13 @@
       </p:sp>
       <p:sp>
         <p:nvSpPr>
-          <p:cNvPr id="21012" name="Ikon ring sirkel"/>
+          <p:cNvPr id="21011" name="Ikon locate sirkel"/>
           <p:cNvSpPr/>
           <p:nvPr/>
         </p:nvSpPr>
         <p:spPr>
           <a:xfrm>
-            <a:off x="548640" y="4928616"/>
+            <a:off x="548640" y="3877056"/>
             <a:ext cx="512064" cy="512064"/>
           </a:xfrm>
           <a:prstGeom prst="ellipse">
@@ -3649,7 +3685,7 @@
       </p:sp>
       <p:pic>
         <p:nvPicPr>
-          <p:cNvPr id="21013" name="Ikon ring" descr="ring">    </p:cNvPr>
+          <p:cNvPr id="21012" name="Ikon locate" descr="locate">    </p:cNvPr>
           <p:cNvPicPr>
             <a:picLocks noChangeAspect="1"/>
           </p:cNvPicPr>
@@ -3663,7 +3699,7 @@
         </p:blipFill>
         <p:spPr>
           <a:xfrm>
-            <a:off x="661294" y="5041270"/>
+            <a:off x="661294" y="3989710"/>
             <a:ext cx="286756" cy="286756"/>
           </a:xfrm>
           <a:prstGeom prst="rect">
@@ -3673,14 +3709,14 @@
       </p:pic>
       <p:sp>
         <p:nvSpPr>
-          <p:cNvPr id="21014" name="Text 8"/>
+          <p:cNvPr id="21013" name="Text 7"/>
           <p:cNvSpPr txBox="1"/>
           <p:nvPr/>
         </p:nvSpPr>
         <p:spPr>
           <a:xfrm>
-            <a:off x="1261872" y="4855464"/>
-            <a:ext cx="6053328" cy="1097280"/>
+            <a:off x="1261872" y="3803904"/>
+            <a:ext cx="6053328" cy="1143000"/>
           </a:xfrm>
           <a:prstGeom prst="rect">
             <a:avLst/>
@@ -3704,7 +3740,7 @@
                   <a:schemeClr val="tx1"/>
                 </a:solidFill>
               </a:rPr>
-              <a:t>Enkeltsirkel</a:t>
+              <a:t>Zoom med glød</a:t>
             </a:r>
             <a:endParaRPr lang="en-US" sz="1700" dirty="0"/>
           </a:p>
@@ -3721,7 +3757,7 @@
                   <a:schemeClr val="accent4"/>
                 </a:solidFill>
               </a:rPr>
-              <a:t>Høyreklikk hvor som helst og velg 161 m-sirkel</a:t>
+              <a:t>Klikk for å zoome helt inn – cachen gløder i kartet. Klikk igjen for å gå tilbake</a:t>
             </a:r>
             <a:endParaRPr lang="en-US" sz="1700" dirty="0"/>
           </a:p>
@@ -3729,29 +3765,27 @@
       </p:sp>
       <p:sp>
         <p:nvSpPr>
-          <p:cNvPr id="21015" name="Merke ved en løst cache bakgrunn"/>
+          <p:cNvPr id="21014" name="Ikon external sirkel"/>
           <p:cNvSpPr/>
           <p:nvPr/>
         </p:nvSpPr>
         <p:spPr>
           <a:xfrm>
-            <a:off x="7802575" y="1463040"/>
-            <a:ext cx="3840480" cy="2834640"/>
-          </a:xfrm>
-          <a:prstGeom prst="roundRect">
-            <a:avLst>
-              <a:gd name="adj" fmla="val 3871"/>
-            </a:avLst>
+            <a:off x="548640" y="5065776"/>
+            <a:ext cx="512064" cy="512064"/>
+          </a:xfrm>
+          <a:prstGeom prst="ellipse">
+            <a:avLst/>
           </a:prstGeom>
           <a:solidFill>
-            <a:schemeClr val="bg2"/>
+            <a:schemeClr val="accent1"/>
           </a:solidFill>
           <a:ln/>
         </p:spPr>
       </p:sp>
       <p:pic>
         <p:nvPicPr>
-          <p:cNvPr id="21016" name="Merke ved en løst cache" descr="Merke ved en løst cache">    </p:cNvPr>
+          <p:cNvPr id="21015" name="Ikon external" descr="external">    </p:cNvPr>
           <p:cNvPicPr>
             <a:picLocks noChangeAspect="1"/>
           </p:cNvPicPr>
@@ -3765,8 +3799,8 @@
         </p:blipFill>
         <p:spPr>
           <a:xfrm>
-            <a:off x="8058607" y="1664208"/>
-            <a:ext cx="3328416" cy="2432304"/>
+            <a:off x="661294" y="5178430"/>
+            <a:ext cx="286756" cy="286756"/>
           </a:xfrm>
           <a:prstGeom prst="rect">
             <a:avLst/>
@@ -3775,14 +3809,14 @@
       </p:pic>
       <p:sp>
         <p:nvSpPr>
-          <p:cNvPr id="21017" name="Text 10"/>
+          <p:cNvPr id="21016" name="Text 9"/>
           <p:cNvSpPr txBox="1"/>
           <p:nvPr/>
         </p:nvSpPr>
         <p:spPr>
           <a:xfrm>
-            <a:off x="7802575" y="4526280"/>
-            <a:ext cx="3840480" cy="1280160"/>
+            <a:off x="1261872" y="4992624"/>
+            <a:ext cx="6053328" cy="1143000"/>
           </a:xfrm>
           <a:prstGeom prst="rect">
             <a:avLst/>
@@ -3795,23 +3829,43 @@
           <a:lstStyle/>
           <a:p>
             <a:pPr indent="0" marL="0">
-              <a:buNone/>
-            </a:pPr>
-            <a:r>
-              <a:rPr lang="en-US" sz="1500" dirty="0">
+              <a:spcAft>
+                <a:spcPts val="200"/>
+              </a:spcAft>
+              <a:buNone/>
+            </a:pPr>
+            <a:r>
+              <a:rPr lang="en-US" sz="1700" b="1" dirty="0">
+                <a:solidFill>
+                  <a:schemeClr val="tx1"/>
+                </a:solidFill>
+              </a:rPr>
+              <a:t>Cachesiden</a:t>
+            </a:r>
+            <a:endParaRPr lang="en-US" sz="1700" dirty="0"/>
+          </a:p>
+          <a:p>
+            <a:pPr indent="0" marL="0">
+              <a:spcAft>
+                <a:spcPts val="200"/>
+              </a:spcAft>
+              <a:buNone/>
+            </a:pPr>
+            <a:r>
+              <a:rPr lang="en-US" sz="1400" dirty="0">
                 <a:solidFill>
                   <a:schemeClr val="accent4"/>
                 </a:solidFill>
               </a:rPr>
-              <a:t>Der ikke noe cacheikon viser stedet, står et klikkbart merke midt i sirkelen. Musepekeren over en løst cache viser «Endelig plassering»; høyreklikk gir nøyaktige koordinater.</a:t>
-            </a:r>
-            <a:endParaRPr lang="en-US" sz="1500" dirty="0"/>
-          </a:p>
-        </p:txBody>
-      </p:sp>
-      <p:sp>
-        <p:nvSpPr>
-          <p:cNvPr id="21018" name="Slide Number Placeholder 0"/>
+              <a:t>Knappen på linjen åpner cachesiden i en ny fane</a:t>
+            </a:r>
+            <a:endParaRPr lang="en-US" sz="1700" dirty="0"/>
+          </a:p>
+        </p:txBody>
+      </p:sp>
+      <p:sp>
+        <p:nvSpPr>
+          <p:cNvPr id="21017" name="Slide Number Placeholder 0"/>
           <p:cNvSpPr>
             <a:spLocks noGrp="1"/>
           </p:cNvSpPr>
@@ -3911,7 +3965,7 @@
                   <a:schemeClr val="tx2"/>
                 </a:solidFill>
               </a:rPr>
-              <a:t>161 m-sirkler, cachesider og hjem</a:t>
+              <a:t>161 m-sirkler der noe er utplassert</a:t>
             </a:r>
             <a:endParaRPr lang="en-US" sz="3600" dirty="0"/>
           </a:p>
@@ -3919,36 +3973,14 @@
       </p:sp>
       <p:sp>
         <p:nvSpPr>
-          <p:cNvPr id="22003" name="Kort 161 m-sirkler"/>
+          <p:cNvPr id="22003" name="Ikon circles sirkel"/>
           <p:cNvSpPr/>
           <p:nvPr/>
         </p:nvSpPr>
         <p:spPr>
           <a:xfrm>
-            <a:off x="548640" y="1508760"/>
-            <a:ext cx="3484778" cy="4206240"/>
-          </a:xfrm>
-          <a:prstGeom prst="roundRect">
-            <a:avLst>
-              <a:gd name="adj" fmla="val 3149"/>
-            </a:avLst>
-          </a:prstGeom>
-          <a:solidFill>
-            <a:schemeClr val="bg2"/>
-          </a:solidFill>
-          <a:ln/>
-        </p:spPr>
-      </p:sp>
-      <p:sp>
-        <p:nvSpPr>
-          <p:cNvPr id="22004" name="Ikon circles sirkel"/>
-          <p:cNvSpPr/>
-          <p:nvPr/>
-        </p:nvSpPr>
-        <p:spPr>
-          <a:xfrm>
-            <a:off x="914400" y="1920240"/>
-            <a:ext cx="822960" cy="822960"/>
+            <a:off x="548640" y="1499616"/>
+            <a:ext cx="512064" cy="512064"/>
           </a:xfrm>
           <a:prstGeom prst="ellipse">
             <a:avLst/>
@@ -3961,7 +3993,7 @@
       </p:sp>
       <p:pic>
         <p:nvPicPr>
-          <p:cNvPr id="22005" name="Ikon circles" descr="circles">    </p:cNvPr>
+          <p:cNvPr id="22004" name="Ikon circles" descr="circles">    </p:cNvPr>
           <p:cNvPicPr>
             <a:picLocks noChangeAspect="1"/>
           </p:cNvPicPr>
@@ -3975,8 +4007,8 @@
         </p:blipFill>
         <p:spPr>
           <a:xfrm>
-            <a:off x="1095451" y="2101291"/>
-            <a:ext cx="460858" cy="460858"/>
+            <a:off x="661294" y="1612270"/>
+            <a:ext cx="286756" cy="286756"/>
           </a:xfrm>
           <a:prstGeom prst="rect">
             <a:avLst/>
@@ -3985,14 +4017,14 @@
       </p:pic>
       <p:sp>
         <p:nvSpPr>
-          <p:cNvPr id="22006" name="Text 3"/>
+          <p:cNvPr id="22005" name="Text 2"/>
           <p:cNvSpPr txBox="1"/>
           <p:nvPr/>
         </p:nvSpPr>
         <p:spPr>
           <a:xfrm>
-            <a:off x="914400" y="2971800"/>
-            <a:ext cx="2753258" cy="502920"/>
+            <a:off x="1261872" y="1426464"/>
+            <a:ext cx="6053328" cy="1097280"/>
           </a:xfrm>
           <a:prstGeom prst="rect">
             <a:avLst/>
@@ -4001,150 +4033,54 @@
           <a:ln/>
         </p:spPr>
         <p:txBody>
-          <a:bodyPr wrap="square" lIns="0" tIns="0" rIns="0" bIns="0" rtlCol="0" anchor="ctr"/>
-          <a:lstStyle/>
-          <a:p>
-            <a:pPr indent="0" marL="0">
-              <a:buNone/>
-            </a:pPr>
-            <a:r>
-              <a:rPr lang="en-US" sz="2200" b="1" dirty="0">
+          <a:bodyPr wrap="square" lIns="0" tIns="0" rIns="0" bIns="0" rtlCol="0" anchor="t"/>
+          <a:lstStyle/>
+          <a:p>
+            <a:pPr indent="0" marL="0">
+              <a:spcAft>
+                <a:spcPts val="200"/>
+              </a:spcAft>
+              <a:buNone/>
+            </a:pPr>
+            <a:r>
+              <a:rPr lang="en-US" sz="1700" b="1" dirty="0">
                 <a:solidFill>
                   <a:schemeClr val="tx1"/>
                 </a:solidFill>
               </a:rPr>
-              <a:t>161 m-sirkler</a:t>
-            </a:r>
-            <a:endParaRPr lang="en-US" sz="2200" dirty="0"/>
-          </a:p>
-        </p:txBody>
-      </p:sp>
-      <p:sp>
-        <p:nvSpPr>
-          <p:cNvPr id="22007" name="Text 4"/>
-          <p:cNvSpPr txBox="1"/>
-          <p:nvPr/>
-        </p:nvSpPr>
-        <p:spPr>
-          <a:xfrm>
-            <a:off x="914400" y="3611880"/>
-            <a:ext cx="2753258" cy="1828800"/>
-          </a:xfrm>
-          <a:prstGeom prst="rect">
-            <a:avLst/>
-          </a:prstGeom>
-          <a:noFill/>
-          <a:ln/>
-        </p:spPr>
-        <p:txBody>
-          <a:bodyPr wrap="square" lIns="0" tIns="0" rIns="0" bIns="0" rtlCol="0" anchor="t"/>
-          <a:lstStyle/>
-          <a:p>
-            <a:pPr marL="228600" indent="-228600">
+              <a:t>Tradisjonelle cacher</a:t>
+            </a:r>
+            <a:endParaRPr lang="en-US" sz="1700" dirty="0"/>
+          </a:p>
+          <a:p>
+            <a:pPr indent="0" marL="0">
               <a:spcAft>
-                <a:spcPts val="800"/>
+                <a:spcPts val="200"/>
               </a:spcAft>
-              <a:buSzPct val="100000"/>
-              <a:buChar char="•"/>
-            </a:pPr>
-            <a:r>
-              <a:rPr lang="en-US" sz="1700" dirty="0">
-                <a:solidFill>
-                  <a:schemeClr val="tx1"/>
-                </a:solidFill>
-              </a:rPr>
-              <a:t>Der noe er utplassert – se forrige lysbilde</a:t>
+              <a:buNone/>
+            </a:pPr>
+            <a:r>
+              <a:rPr lang="en-US" sz="1400" dirty="0">
+                <a:solidFill>
+                  <a:schemeClr val="accent4"/>
+                </a:solidFill>
+              </a:rPr>
+              <a:t>På de nøyaktige publiserte koordinatene</a:t>
             </a:r>
             <a:endParaRPr lang="en-US" sz="1700" dirty="0"/>
           </a:p>
-          <a:p>
-            <a:pPr marL="228600" indent="-228600">
-              <a:spcAft>
-                <a:spcPts val="800"/>
-              </a:spcAft>
-              <a:buSzPct val="100000"/>
-              <a:buChar char="•"/>
-            </a:pPr>
-            <a:r>
-              <a:rPr lang="en-US" sz="1700" dirty="0">
-                <a:solidFill>
-                  <a:schemeClr val="tx1"/>
-                </a:solidFill>
-              </a:rPr>
-              <a:t>Vises fra zoomnivå 15</a:t>
-            </a:r>
-            <a:endParaRPr lang="en-US" sz="1700" dirty="0"/>
-          </a:p>
-          <a:p>
-            <a:pPr marL="228600" indent="-228600">
-              <a:spcAft>
-                <a:spcPts val="800"/>
-              </a:spcAft>
-              <a:buSzPct val="100000"/>
-              <a:buChar char="•"/>
-            </a:pPr>
-            <a:r>
-              <a:rPr lang="en-US" sz="1700" dirty="0">
-                <a:solidFill>
-                  <a:schemeClr val="tx1"/>
-                </a:solidFill>
-              </a:rPr>
-              <a:t>Følger kartet og hindrer aldri klikk</a:t>
-            </a:r>
-            <a:endParaRPr lang="en-US" sz="1700" dirty="0"/>
-          </a:p>
-          <a:p>
-            <a:pPr marL="228600" indent="-228600">
-              <a:spcAft>
-                <a:spcPts val="800"/>
-              </a:spcAft>
-              <a:buSzPct val="100000"/>
-              <a:buChar char="•"/>
-            </a:pPr>
-            <a:r>
-              <a:rPr lang="en-US" sz="1700" dirty="0">
-                <a:solidFill>
-                  <a:schemeClr val="tx1"/>
-                </a:solidFill>
-              </a:rPr>
-              <a:t>Enkeltsirkel: høyreklikk</a:t>
-            </a:r>
-            <a:endParaRPr lang="en-US" sz="1700" dirty="0"/>
-          </a:p>
-        </p:txBody>
-      </p:sp>
-      <p:sp>
-        <p:nvSpPr>
-          <p:cNvPr id="22008" name="Kort Cachesider"/>
+        </p:txBody>
+      </p:sp>
+      <p:sp>
+        <p:nvSpPr>
+          <p:cNvPr id="22006" name="Ikon check sirkel"/>
           <p:cNvSpPr/>
           <p:nvPr/>
         </p:nvSpPr>
         <p:spPr>
           <a:xfrm>
-            <a:off x="4353458" y="1508760"/>
-            <a:ext cx="3484778" cy="4206240"/>
-          </a:xfrm>
-          <a:prstGeom prst="roundRect">
-            <a:avLst>
-              <a:gd name="adj" fmla="val 3149"/>
-            </a:avLst>
-          </a:prstGeom>
-          <a:solidFill>
-            <a:schemeClr val="bg2"/>
-          </a:solidFill>
-          <a:ln/>
-        </p:spPr>
-      </p:sp>
-      <p:sp>
-        <p:nvSpPr>
-          <p:cNvPr id="22009" name="Ikon layers sirkel"/>
-          <p:cNvSpPr/>
-          <p:nvPr/>
-        </p:nvSpPr>
-        <p:spPr>
-          <a:xfrm>
-            <a:off x="4719218" y="1920240"/>
-            <a:ext cx="822960" cy="822960"/>
+            <a:off x="548640" y="2642616"/>
+            <a:ext cx="512064" cy="512064"/>
           </a:xfrm>
           <a:prstGeom prst="ellipse">
             <a:avLst/>
@@ -4157,7 +4093,7 @@
       </p:sp>
       <p:pic>
         <p:nvPicPr>
-          <p:cNvPr id="22010" name="Ikon layers" descr="layers">    </p:cNvPr>
+          <p:cNvPr id="22007" name="Ikon check" descr="check">    </p:cNvPr>
           <p:cNvPicPr>
             <a:picLocks noChangeAspect="1"/>
           </p:cNvPicPr>
@@ -4171,8 +4107,8 @@
         </p:blipFill>
         <p:spPr>
           <a:xfrm>
-            <a:off x="4900270" y="2101291"/>
-            <a:ext cx="460858" cy="460858"/>
+            <a:off x="661294" y="2755270"/>
+            <a:ext cx="286756" cy="286756"/>
           </a:xfrm>
           <a:prstGeom prst="rect">
             <a:avLst/>
@@ -4181,14 +4117,14 @@
       </p:pic>
       <p:sp>
         <p:nvSpPr>
-          <p:cNvPr id="22011" name="Text 7"/>
+          <p:cNvPr id="22008" name="Text 4"/>
           <p:cNvSpPr txBox="1"/>
           <p:nvPr/>
         </p:nvSpPr>
         <p:spPr>
           <a:xfrm>
-            <a:off x="4719218" y="2971800"/>
-            <a:ext cx="2753258" cy="502920"/>
+            <a:off x="1261872" y="2569464"/>
+            <a:ext cx="6053328" cy="1097280"/>
           </a:xfrm>
           <a:prstGeom prst="rect">
             <a:avLst/>
@@ -4197,150 +4133,54 @@
           <a:ln/>
         </p:spPr>
         <p:txBody>
-          <a:bodyPr wrap="square" lIns="0" tIns="0" rIns="0" bIns="0" rtlCol="0" anchor="ctr"/>
-          <a:lstStyle/>
-          <a:p>
-            <a:pPr indent="0" marL="0">
-              <a:buNone/>
-            </a:pPr>
-            <a:r>
-              <a:rPr lang="en-US" sz="2200" b="1" dirty="0">
+          <a:bodyPr wrap="square" lIns="0" tIns="0" rIns="0" bIns="0" rtlCol="0" anchor="t"/>
+          <a:lstStyle/>
+          <a:p>
+            <a:pPr indent="0" marL="0">
+              <a:spcAft>
+                <a:spcPts val="200"/>
+              </a:spcAft>
+              <a:buNone/>
+            </a:pPr>
+            <a:r>
+              <a:rPr lang="en-US" sz="1700" b="1" dirty="0">
                 <a:solidFill>
                   <a:schemeClr val="tx1"/>
                 </a:solidFill>
               </a:rPr>
-              <a:t>Cachesider</a:t>
-            </a:r>
-            <a:endParaRPr lang="en-US" sz="2200" dirty="0"/>
-          </a:p>
-        </p:txBody>
-      </p:sp>
-      <p:sp>
-        <p:nvSpPr>
-          <p:cNvPr id="22012" name="Text 8"/>
-          <p:cNvSpPr txBox="1"/>
-          <p:nvPr/>
-        </p:nvSpPr>
-        <p:spPr>
-          <a:xfrm>
-            <a:off x="4719218" y="3611880"/>
-            <a:ext cx="2753258" cy="1828800"/>
-          </a:xfrm>
-          <a:prstGeom prst="rect">
-            <a:avLst/>
-          </a:prstGeom>
-          <a:noFill/>
-          <a:ln/>
-        </p:spPr>
-        <p:txBody>
-          <a:bodyPr wrap="square" lIns="0" tIns="0" rIns="0" bIns="0" rtlCol="0" anchor="t"/>
-          <a:lstStyle/>
-          <a:p>
-            <a:pPr marL="228600" indent="-228600">
+              <a:t>Løste cacher</a:t>
+            </a:r>
+            <a:endParaRPr lang="en-US" sz="1700" dirty="0"/>
+          </a:p>
+          <a:p>
+            <a:pPr indent="0" marL="0">
               <a:spcAft>
-                <a:spcPts val="800"/>
+                <a:spcPts val="200"/>
               </a:spcAft>
-              <a:buSzPct val="100000"/>
-              <a:buChar char="•"/>
-            </a:pPr>
-            <a:r>
-              <a:rPr lang="en-US" sz="1700" dirty="0">
-                <a:solidFill>
-                  <a:schemeClr val="tx1"/>
-                </a:solidFill>
-              </a:rPr>
-              <a:t>Det lille kartet viser ditt valgte kart</a:t>
+              <a:buNone/>
+            </a:pPr>
+            <a:r>
+              <a:rPr lang="en-US" sz="1400" dirty="0">
+                <a:solidFill>
+                  <a:schemeClr val="accent4"/>
+                </a:solidFill>
+              </a:rPr>
+              <a:t>På dine korrigerte koordinater – også når ikonet er flyttet tilbake etter funn</a:t>
             </a:r>
             <a:endParaRPr lang="en-US" sz="1700" dirty="0"/>
           </a:p>
-          <a:p>
-            <a:pPr marL="228600" indent="-228600">
-              <a:spcAft>
-                <a:spcPts val="800"/>
-              </a:spcAft>
-              <a:buSzPct val="100000"/>
-              <a:buChar char="•"/>
-            </a:pPr>
-            <a:r>
-              <a:rPr lang="en-US" sz="1700" dirty="0">
-                <a:solidFill>
-                  <a:schemeClr val="tx1"/>
-                </a:solidFill>
-              </a:rPr>
-              <a:t>Samme demping og overlegg</a:t>
-            </a:r>
-            <a:endParaRPr lang="en-US" sz="1700" dirty="0"/>
-          </a:p>
-          <a:p>
-            <a:pPr marL="228600" indent="-228600">
-              <a:spcAft>
-                <a:spcPts val="800"/>
-              </a:spcAft>
-              <a:buSzPct val="100000"/>
-              <a:buChar char="•"/>
-            </a:pPr>
-            <a:r>
-              <a:rPr lang="en-US" sz="1700" dirty="0">
-                <a:solidFill>
-                  <a:schemeClr val="tx1"/>
-                </a:solidFill>
-              </a:rPr>
-              <a:t>Beholder nettstedets utsnitt</a:t>
-            </a:r>
-            <a:endParaRPr lang="en-US" sz="1700" dirty="0"/>
-          </a:p>
-          <a:p>
-            <a:pPr marL="228600" indent="-228600">
-              <a:spcAft>
-                <a:spcPts val="800"/>
-              </a:spcAft>
-              <a:buSzPct val="100000"/>
-              <a:buChar char="•"/>
-            </a:pPr>
-            <a:r>
-              <a:rPr lang="en-US" sz="1700" dirty="0">
-                <a:solidFill>
-                  <a:schemeClr val="tx1"/>
-                </a:solidFill>
-              </a:rPr>
-              <a:t>Endrer aldri valget ditt</a:t>
-            </a:r>
-            <a:endParaRPr lang="en-US" sz="1700" dirty="0"/>
-          </a:p>
-        </p:txBody>
-      </p:sp>
-      <p:sp>
-        <p:nvSpPr>
-          <p:cNvPr id="22013" name="Kort Hjem"/>
+        </p:txBody>
+      </p:sp>
+      <p:sp>
+        <p:nvSpPr>
+          <p:cNvPr id="22009" name="Ikon pin sirkel"/>
           <p:cNvSpPr/>
           <p:nvPr/>
         </p:nvSpPr>
         <p:spPr>
           <a:xfrm>
-            <a:off x="8158277" y="1508760"/>
-            <a:ext cx="3484778" cy="4206240"/>
-          </a:xfrm>
-          <a:prstGeom prst="roundRect">
-            <a:avLst>
-              <a:gd name="adj" fmla="val 3149"/>
-            </a:avLst>
-          </a:prstGeom>
-          <a:solidFill>
-            <a:schemeClr val="bg2"/>
-          </a:solidFill>
-          <a:ln/>
-        </p:spPr>
-      </p:sp>
-      <p:sp>
-        <p:nvSpPr>
-          <p:cNvPr id="22014" name="Ikon home sirkel"/>
-          <p:cNvSpPr/>
-          <p:nvPr/>
-        </p:nvSpPr>
-        <p:spPr>
-          <a:xfrm>
-            <a:off x="8524037" y="1920240"/>
-            <a:ext cx="822960" cy="822960"/>
+            <a:off x="548640" y="3785616"/>
+            <a:ext cx="512064" cy="512064"/>
           </a:xfrm>
           <a:prstGeom prst="ellipse">
             <a:avLst/>
@@ -4353,7 +4193,7 @@
       </p:sp>
       <p:pic>
         <p:nvPicPr>
-          <p:cNvPr id="22015" name="Ikon home" descr="home">    </p:cNvPr>
+          <p:cNvPr id="22010" name="Ikon pin" descr="pin">    </p:cNvPr>
           <p:cNvPicPr>
             <a:picLocks noChangeAspect="1"/>
           </p:cNvPicPr>
@@ -4367,8 +4207,8 @@
         </p:blipFill>
         <p:spPr>
           <a:xfrm>
-            <a:off x="8705088" y="2101291"/>
-            <a:ext cx="460858" cy="460858"/>
+            <a:off x="661294" y="3898270"/>
+            <a:ext cx="286756" cy="286756"/>
           </a:xfrm>
           <a:prstGeom prst="rect">
             <a:avLst/>
@@ -4377,14 +4217,14 @@
       </p:pic>
       <p:sp>
         <p:nvSpPr>
-          <p:cNvPr id="22016" name="Text 11"/>
+          <p:cNvPr id="22011" name="Text 6"/>
           <p:cNvSpPr txBox="1"/>
           <p:nvPr/>
         </p:nvSpPr>
         <p:spPr>
           <a:xfrm>
-            <a:off x="8524037" y="2971800"/>
-            <a:ext cx="2753258" cy="502920"/>
+            <a:off x="1261872" y="3712464"/>
+            <a:ext cx="6053328" cy="1097280"/>
           </a:xfrm>
           <a:prstGeom prst="rect">
             <a:avLst/>
@@ -4393,34 +4233,98 @@
           <a:ln/>
         </p:spPr>
         <p:txBody>
-          <a:bodyPr wrap="square" lIns="0" tIns="0" rIns="0" bIns="0" rtlCol="0" anchor="ctr"/>
-          <a:lstStyle/>
-          <a:p>
-            <a:pPr indent="0" marL="0">
-              <a:buNone/>
-            </a:pPr>
-            <a:r>
-              <a:rPr lang="en-US" sz="2200" b="1" dirty="0">
+          <a:bodyPr wrap="square" lIns="0" tIns="0" rIns="0" bIns="0" rtlCol="0" anchor="t"/>
+          <a:lstStyle/>
+          <a:p>
+            <a:pPr indent="0" marL="0">
+              <a:spcAft>
+                <a:spcPts val="200"/>
+              </a:spcAft>
+              <a:buNone/>
+            </a:pPr>
+            <a:r>
+              <a:rPr lang="en-US" sz="1700" b="1" dirty="0">
                 <a:solidFill>
                   <a:schemeClr val="tx1"/>
                 </a:solidFill>
               </a:rPr>
-              <a:t>Hjem</a:t>
-            </a:r>
-            <a:endParaRPr lang="en-US" sz="2200" dirty="0"/>
-          </a:p>
-        </p:txBody>
-      </p:sp>
-      <p:sp>
-        <p:nvSpPr>
-          <p:cNvPr id="22017" name="Text 12"/>
+              <a:t>Fysiske steg og final</a:t>
+            </a:r>
+            <a:endParaRPr lang="en-US" sz="1700" dirty="0"/>
+          </a:p>
+          <a:p>
+            <a:pPr indent="0" marL="0">
+              <a:spcAft>
+                <a:spcPts val="200"/>
+              </a:spcAft>
+              <a:buNone/>
+            </a:pPr>
+            <a:r>
+              <a:rPr lang="en-US" sz="1400" dirty="0">
+                <a:solidFill>
+                  <a:schemeClr val="accent4"/>
+                </a:solidFill>
+              </a:rPr>
+              <a:t>Synlige steg i multier, mysterier, Wherigoer og letterboxer, lest fra cachesiden</a:t>
+            </a:r>
+            <a:endParaRPr lang="en-US" sz="1700" dirty="0"/>
+          </a:p>
+        </p:txBody>
+      </p:sp>
+      <p:sp>
+        <p:nvSpPr>
+          <p:cNvPr id="22012" name="Ikon ring sirkel"/>
+          <p:cNvSpPr/>
+          <p:nvPr/>
+        </p:nvSpPr>
+        <p:spPr>
+          <a:xfrm>
+            <a:off x="548640" y="4928616"/>
+            <a:ext cx="512064" cy="512064"/>
+          </a:xfrm>
+          <a:prstGeom prst="ellipse">
+            <a:avLst/>
+          </a:prstGeom>
+          <a:solidFill>
+            <a:schemeClr val="accent1"/>
+          </a:solidFill>
+          <a:ln/>
+        </p:spPr>
+      </p:sp>
+      <p:pic>
+        <p:nvPicPr>
+          <p:cNvPr id="22013" name="Ikon ring" descr="ring">    </p:cNvPr>
+          <p:cNvPicPr>
+            <a:picLocks noChangeAspect="1"/>
+          </p:cNvPicPr>
+          <p:nvPr/>
+        </p:nvPicPr>
+        <p:blipFill>
+          <a:blip r:embed="rId4"/>
+          <a:stretch>
+            <a:fillRect/>
+          </a:stretch>
+        </p:blipFill>
+        <p:spPr>
+          <a:xfrm>
+            <a:off x="661294" y="5041270"/>
+            <a:ext cx="286756" cy="286756"/>
+          </a:xfrm>
+          <a:prstGeom prst="rect">
+            <a:avLst/>
+          </a:prstGeom>
+        </p:spPr>
+      </p:pic>
+      <p:sp>
+        <p:nvSpPr>
+          <p:cNvPr id="22014" name="Text 8"/>
           <p:cNvSpPr txBox="1"/>
           <p:nvPr/>
         </p:nvSpPr>
         <p:spPr>
           <a:xfrm>
-            <a:off x="8524037" y="3611880"/>
-            <a:ext cx="2753258" cy="1828800"/>
+            <a:off x="1261872" y="4855464"/>
+            <a:ext cx="6053328" cy="1097280"/>
           </a:xfrm>
           <a:prstGeom prst="rect">
             <a:avLst/>
@@ -4432,58 +4336,120 @@
           <a:bodyPr wrap="square" lIns="0" tIns="0" rIns="0" bIns="0" rtlCol="0" anchor="t"/>
           <a:lstStyle/>
           <a:p>
-            <a:pPr marL="228600" indent="-228600">
+            <a:pPr indent="0" marL="0">
               <a:spcAft>
-                <a:spcPts val="800"/>
+                <a:spcPts val="200"/>
               </a:spcAft>
-              <a:buSzPct val="100000"/>
-              <a:buChar char="•"/>
-            </a:pPr>
-            <a:r>
-              <a:rPr lang="en-US" sz="1700" dirty="0">
+              <a:buNone/>
+            </a:pPr>
+            <a:r>
+              <a:rPr lang="en-US" sz="1700" b="1" dirty="0">
                 <a:solidFill>
                   <a:schemeClr val="tx1"/>
                 </a:solidFill>
               </a:rPr>
-              <a:t>Ett klikk tar deg hjem</a:t>
+              <a:t>Enkeltsirkel</a:t>
             </a:r>
             <a:endParaRPr lang="en-US" sz="1700" dirty="0"/>
           </a:p>
           <a:p>
-            <a:pPr marL="228600" indent="-228600">
+            <a:pPr indent="0" marL="0">
               <a:spcAft>
-                <a:spcPts val="800"/>
+                <a:spcPts val="200"/>
               </a:spcAft>
-              <a:buSzPct val="100000"/>
-              <a:buChar char="•"/>
-            </a:pPr>
-            <a:r>
-              <a:rPr lang="en-US" sz="1700" dirty="0">
-                <a:solidFill>
-                  <a:schemeClr val="tx1"/>
-                </a:solidFill>
-              </a:rPr>
-              <a:t>Første gang søker du opp adressen</a:t>
+              <a:buNone/>
+            </a:pPr>
+            <a:r>
+              <a:rPr lang="en-US" sz="1400" dirty="0">
+                <a:solidFill>
+                  <a:schemeClr val="accent4"/>
+                </a:solidFill>
+              </a:rPr>
+              <a:t>Høyreklikk hvor som helst og velg 161 m-sirkel</a:t>
             </a:r>
             <a:endParaRPr lang="en-US" sz="1700" dirty="0"/>
           </a:p>
-          <a:p>
-            <a:pPr marL="228600" indent="-228600">
-              <a:spcAft>
-                <a:spcPts val="800"/>
-              </a:spcAft>
-              <a:buSzPct val="100000"/>
-              <a:buChar char="•"/>
-            </a:pPr>
-            <a:r>
-              <a:rPr lang="en-US" sz="1700" dirty="0">
-                <a:solidFill>
-                  <a:schemeClr val="tx1"/>
-                </a:solidFill>
-              </a:rPr>
-              <a:t>Lagres bare i nettleseren din</a:t>
-            </a:r>
-            <a:endParaRPr lang="en-US" sz="1700" dirty="0"/>
+        </p:txBody>
+      </p:sp>
+      <p:sp>
+        <p:nvSpPr>
+          <p:cNvPr id="22015" name="Merke ved en løst cache bakgrunn"/>
+          <p:cNvSpPr/>
+          <p:nvPr/>
+        </p:nvSpPr>
+        <p:spPr>
+          <a:xfrm>
+            <a:off x="7802575" y="1463040"/>
+            <a:ext cx="3840480" cy="2834640"/>
+          </a:xfrm>
+          <a:prstGeom prst="roundRect">
+            <a:avLst>
+              <a:gd name="adj" fmla="val 3871"/>
+            </a:avLst>
+          </a:prstGeom>
+          <a:solidFill>
+            <a:schemeClr val="bg2"/>
+          </a:solidFill>
+          <a:ln/>
+        </p:spPr>
+      </p:sp>
+      <p:pic>
+        <p:nvPicPr>
+          <p:cNvPr id="22016" name="Merke ved en løst cache" descr="Merke ved en løst cache">    </p:cNvPr>
+          <p:cNvPicPr>
+            <a:picLocks noChangeAspect="1"/>
+          </p:cNvPicPr>
+          <p:nvPr/>
+        </p:nvPicPr>
+        <p:blipFill>
+          <a:blip r:embed="rId5"/>
+          <a:stretch>
+            <a:fillRect/>
+          </a:stretch>
+        </p:blipFill>
+        <p:spPr>
+          <a:xfrm>
+            <a:off x="8058607" y="1664208"/>
+            <a:ext cx="3328416" cy="2432304"/>
+          </a:xfrm>
+          <a:prstGeom prst="rect">
+            <a:avLst/>
+          </a:prstGeom>
+        </p:spPr>
+      </p:pic>
+      <p:sp>
+        <p:nvSpPr>
+          <p:cNvPr id="22017" name="Text 10"/>
+          <p:cNvSpPr txBox="1"/>
+          <p:nvPr/>
+        </p:nvSpPr>
+        <p:spPr>
+          <a:xfrm>
+            <a:off x="7802575" y="4526280"/>
+            <a:ext cx="3840480" cy="1280160"/>
+          </a:xfrm>
+          <a:prstGeom prst="rect">
+            <a:avLst/>
+          </a:prstGeom>
+          <a:noFill/>
+          <a:ln/>
+        </p:spPr>
+        <p:txBody>
+          <a:bodyPr wrap="square" lIns="0" tIns="0" rIns="0" bIns="0" rtlCol="0" anchor="t"/>
+          <a:lstStyle/>
+          <a:p>
+            <a:pPr indent="0" marL="0">
+              <a:buNone/>
+            </a:pPr>
+            <a:r>
+              <a:rPr lang="en-US" sz="1500" dirty="0">
+                <a:solidFill>
+                  <a:schemeClr val="accent4"/>
+                </a:solidFill>
+              </a:rPr>
+              <a:t>Der ikke noe cacheikon viser stedet, står et klikkbart merke midt i sirkelen. Musepekeren over en løst cache viser «Endelig plassering»; høyreklikk gir nøyaktige koordinater.</a:t>
+            </a:r>
+            <a:endParaRPr lang="en-US" sz="1500" dirty="0"/>
           </a:p>
         </p:txBody>
       </p:sp>
@@ -4589,7 +4555,7 @@
                   <a:schemeClr val="tx2"/>
                 </a:solidFill>
               </a:rPr>
-              <a:t>Slik ligger kartlagene</a:t>
+              <a:t>161 m-sirkler, cachesider og hjem</a:t>
             </a:r>
             <a:endParaRPr lang="en-US" sz="3600" dirty="0"/>
           </a:p>
@@ -4597,54 +4563,18 @@
       </p:sp>
       <p:sp>
         <p:nvSpPr>
-          <p:cNvPr id="23003" name="Text 1"/>
-          <p:cNvSpPr txBox="1"/>
-          <p:nvPr/>
-        </p:nvSpPr>
-        <p:spPr>
-          <a:xfrm>
-            <a:off x="548640" y="1207008"/>
-            <a:ext cx="11094415" cy="274320"/>
-          </a:xfrm>
-          <a:prstGeom prst="rect">
-            <a:avLst/>
-          </a:prstGeom>
-          <a:noFill/>
-          <a:ln/>
-        </p:spPr>
-        <p:txBody>
-          <a:bodyPr wrap="square" lIns="0" tIns="0" rIns="0" bIns="0" rtlCol="0" anchor="ctr"/>
-          <a:lstStyle/>
-          <a:p>
-            <a:pPr indent="0" marL="0">
-              <a:buNone/>
-            </a:pPr>
-            <a:r>
-              <a:rPr lang="en-US" sz="1100" b="1" spc="100" kern="0" dirty="0">
-                <a:solidFill>
-                  <a:schemeClr val="accent4"/>
-                </a:solidFill>
-              </a:rPr>
-              <a:t>OVER KARTFLISENE</a:t>
-            </a:r>
-            <a:endParaRPr lang="en-US" sz="1100" dirty="0"/>
-          </a:p>
-        </p:txBody>
-      </p:sp>
-      <p:sp>
-        <p:nvSpPr>
-          <p:cNvPr id="23004" name="Lag Kontroller"/>
+          <p:cNvPr id="23003" name="Kort 161 m-sirkler"/>
           <p:cNvSpPr/>
           <p:nvPr/>
         </p:nvSpPr>
         <p:spPr>
           <a:xfrm>
-            <a:off x="548640" y="1517904"/>
-            <a:ext cx="11094415" cy="384048"/>
+            <a:off x="548640" y="1508760"/>
+            <a:ext cx="3484778" cy="4206240"/>
           </a:xfrm>
           <a:prstGeom prst="roundRect">
             <a:avLst>
-              <a:gd name="adj" fmla="val 16667"/>
+              <a:gd name="adj" fmla="val 3149"/>
             </a:avLst>
           </a:prstGeom>
           <a:solidFill>
@@ -4655,14 +4585,58 @@
       </p:sp>
       <p:sp>
         <p:nvSpPr>
-          <p:cNvPr id="23005" name="Text 3"/>
+          <p:cNvPr id="23004" name="Ikon circles sirkel"/>
+          <p:cNvSpPr/>
+          <p:nvPr/>
+        </p:nvSpPr>
+        <p:spPr>
+          <a:xfrm>
+            <a:off x="914400" y="1920240"/>
+            <a:ext cx="822960" cy="822960"/>
+          </a:xfrm>
+          <a:prstGeom prst="ellipse">
+            <a:avLst/>
+          </a:prstGeom>
+          <a:solidFill>
+            <a:schemeClr val="accent1"/>
+          </a:solidFill>
+          <a:ln/>
+        </p:spPr>
+      </p:sp>
+      <p:pic>
+        <p:nvPicPr>
+          <p:cNvPr id="23005" name="Ikon circles" descr="circles">    </p:cNvPr>
+          <p:cNvPicPr>
+            <a:picLocks noChangeAspect="1"/>
+          </p:cNvPicPr>
+          <p:nvPr/>
+        </p:nvPicPr>
+        <p:blipFill>
+          <a:blip r:embed="rId1"/>
+          <a:stretch>
+            <a:fillRect/>
+          </a:stretch>
+        </p:blipFill>
+        <p:spPr>
+          <a:xfrm>
+            <a:off x="1095451" y="2101291"/>
+            <a:ext cx="460858" cy="460858"/>
+          </a:xfrm>
+          <a:prstGeom prst="rect">
+            <a:avLst/>
+          </a:prstGeom>
+        </p:spPr>
+      </p:pic>
+      <p:sp>
+        <p:nvSpPr>
+          <p:cNvPr id="23006" name="Text 3"/>
           <p:cNvSpPr txBox="1"/>
           <p:nvPr/>
         </p:nvSpPr>
         <p:spPr>
           <a:xfrm>
-            <a:off x="749808" y="1517904"/>
-            <a:ext cx="2240280" cy="384048"/>
+            <a:off x="914400" y="2971800"/>
+            <a:ext cx="2753258" cy="502920"/>
           </a:xfrm>
           <a:prstGeom prst="rect">
             <a:avLst/>
@@ -4678,27 +4652,27 @@
               <a:buNone/>
             </a:pPr>
             <a:r>
-              <a:rPr lang="en-US" sz="1400" b="1" dirty="0">
+              <a:rPr lang="en-US" sz="2200" b="1" dirty="0">
                 <a:solidFill>
                   <a:schemeClr val="tx1"/>
                 </a:solidFill>
               </a:rPr>
-              <a:t>Kontroller</a:t>
-            </a:r>
-            <a:endParaRPr lang="en-US" sz="1400" dirty="0"/>
-          </a:p>
-        </p:txBody>
-      </p:sp>
-      <p:sp>
-        <p:nvSpPr>
-          <p:cNvPr id="23006" name="Text 4"/>
+              <a:t>161 m-sirkler</a:t>
+            </a:r>
+            <a:endParaRPr lang="en-US" sz="2200" dirty="0"/>
+          </a:p>
+        </p:txBody>
+      </p:sp>
+      <p:sp>
+        <p:nvSpPr>
+          <p:cNvPr id="23007" name="Text 4"/>
           <p:cNvSpPr txBox="1"/>
           <p:nvPr/>
         </p:nvSpPr>
         <p:spPr>
           <a:xfrm>
-            <a:off x="3264408" y="1517904"/>
-            <a:ext cx="1783080" cy="384048"/>
+            <a:off x="914400" y="3611880"/>
+            <a:ext cx="2753258" cy="1828800"/>
           </a:xfrm>
           <a:prstGeom prst="rect">
             <a:avLst/>
@@ -4707,77 +4681,96 @@
           <a:ln/>
         </p:spPr>
         <p:txBody>
-          <a:bodyPr wrap="square" lIns="0" tIns="0" rIns="0" bIns="0" rtlCol="0" anchor="ctr"/>
-          <a:lstStyle/>
-          <a:p>
-            <a:pPr indent="0" marL="0">
-              <a:buNone/>
-            </a:pPr>
-            <a:r>
-              <a:rPr lang="en-US" sz="1200" dirty="0">
+          <a:bodyPr wrap="square" lIns="0" tIns="0" rIns="0" bIns="0" rtlCol="0" anchor="t"/>
+          <a:lstStyle/>
+          <a:p>
+            <a:pPr marL="228600" indent="-228600">
+              <a:spcAft>
+                <a:spcPts val="800"/>
+              </a:spcAft>
+              <a:buSzPct val="100000"/>
+              <a:buChar char="•"/>
+            </a:pPr>
+            <a:r>
+              <a:rPr lang="en-US" sz="1700" dirty="0">
                 <a:solidFill>
                   <a:schemeClr val="tx1"/>
                 </a:solidFill>
-                <a:latin typeface="Courier New" pitchFamily="34" charset="0"/>
-                <a:ea typeface="Courier New" pitchFamily="34" charset="-122"/>
-                <a:cs typeface="Courier New" pitchFamily="34" charset="-120"/>
-              </a:rPr>
-              <a:t>kontroller · 1000</a:t>
-            </a:r>
-            <a:endParaRPr lang="en-US" sz="1200" dirty="0"/>
-          </a:p>
-        </p:txBody>
-      </p:sp>
-      <p:sp>
-        <p:nvSpPr>
-          <p:cNvPr id="23007" name="Text 5"/>
-          <p:cNvSpPr txBox="1"/>
-          <p:nvPr/>
-        </p:nvSpPr>
-        <p:spPr>
-          <a:xfrm>
-            <a:off x="5138928" y="1517904"/>
-            <a:ext cx="6302959" cy="384048"/>
-          </a:xfrm>
-          <a:prstGeom prst="rect">
-            <a:avLst/>
-          </a:prstGeom>
-          <a:noFill/>
-          <a:ln/>
-        </p:spPr>
-        <p:txBody>
-          <a:bodyPr wrap="square" lIns="0" tIns="0" rIns="0" bIns="0" rtlCol="0" anchor="ctr"/>
-          <a:lstStyle/>
-          <a:p>
-            <a:pPr indent="0" marL="0">
-              <a:buNone/>
-            </a:pPr>
-            <a:r>
-              <a:rPr lang="en-US" sz="1300" dirty="0">
+              </a:rPr>
+              <a:t>Der noe er utplassert – se forrige lysbilde</a:t>
+            </a:r>
+            <a:endParaRPr lang="en-US" sz="1700" dirty="0"/>
+          </a:p>
+          <a:p>
+            <a:pPr marL="228600" indent="-228600">
+              <a:spcAft>
+                <a:spcPts val="800"/>
+              </a:spcAft>
+              <a:buSzPct val="100000"/>
+              <a:buChar char="•"/>
+            </a:pPr>
+            <a:r>
+              <a:rPr lang="en-US" sz="1700" dirty="0">
                 <a:solidFill>
                   <a:schemeClr val="tx1"/>
                 </a:solidFill>
               </a:rPr>
-              <a:t>verktøylinjen, kartlagpanelet, koordinatvisningen og kreditteringen</a:t>
-            </a:r>
-            <a:endParaRPr lang="en-US" sz="1300" dirty="0"/>
-          </a:p>
-        </p:txBody>
-      </p:sp>
-      <p:sp>
-        <p:nvSpPr>
-          <p:cNvPr id="23008" name="Lag Bobler"/>
+              <a:t>Vises fra zoomnivå 15</a:t>
+            </a:r>
+            <a:endParaRPr lang="en-US" sz="1700" dirty="0"/>
+          </a:p>
+          <a:p>
+            <a:pPr marL="228600" indent="-228600">
+              <a:spcAft>
+                <a:spcPts val="800"/>
+              </a:spcAft>
+              <a:buSzPct val="100000"/>
+              <a:buChar char="•"/>
+            </a:pPr>
+            <a:r>
+              <a:rPr lang="en-US" sz="1700" dirty="0">
+                <a:solidFill>
+                  <a:schemeClr val="tx1"/>
+                </a:solidFill>
+              </a:rPr>
+              <a:t>Følger kartet og hindrer aldri klikk</a:t>
+            </a:r>
+            <a:endParaRPr lang="en-US" sz="1700" dirty="0"/>
+          </a:p>
+          <a:p>
+            <a:pPr marL="228600" indent="-228600">
+              <a:spcAft>
+                <a:spcPts val="800"/>
+              </a:spcAft>
+              <a:buSzPct val="100000"/>
+              <a:buChar char="•"/>
+            </a:pPr>
+            <a:r>
+              <a:rPr lang="en-US" sz="1700" dirty="0">
+                <a:solidFill>
+                  <a:schemeClr val="tx1"/>
+                </a:solidFill>
+              </a:rPr>
+              <a:t>Enkeltsirkel: høyreklikk</a:t>
+            </a:r>
+            <a:endParaRPr lang="en-US" sz="1700" dirty="0"/>
+          </a:p>
+        </p:txBody>
+      </p:sp>
+      <p:sp>
+        <p:nvSpPr>
+          <p:cNvPr id="23008" name="Kort Cachesider"/>
           <p:cNvSpPr/>
           <p:nvPr/>
         </p:nvSpPr>
         <p:spPr>
           <a:xfrm>
-            <a:off x="548640" y="1947672"/>
-            <a:ext cx="11094415" cy="384048"/>
+            <a:off x="4353458" y="1508760"/>
+            <a:ext cx="3484778" cy="4206240"/>
           </a:xfrm>
           <a:prstGeom prst="roundRect">
             <a:avLst>
-              <a:gd name="adj" fmla="val 16667"/>
+              <a:gd name="adj" fmla="val 3149"/>
             </a:avLst>
           </a:prstGeom>
           <a:solidFill>
@@ -4788,14 +4781,58 @@
       </p:sp>
       <p:sp>
         <p:nvSpPr>
-          <p:cNvPr id="23009" name="Text 7"/>
+          <p:cNvPr id="23009" name="Ikon layers sirkel"/>
+          <p:cNvSpPr/>
+          <p:nvPr/>
+        </p:nvSpPr>
+        <p:spPr>
+          <a:xfrm>
+            <a:off x="4719218" y="1920240"/>
+            <a:ext cx="822960" cy="822960"/>
+          </a:xfrm>
+          <a:prstGeom prst="ellipse">
+            <a:avLst/>
+          </a:prstGeom>
+          <a:solidFill>
+            <a:schemeClr val="accent1"/>
+          </a:solidFill>
+          <a:ln/>
+        </p:spPr>
+      </p:sp>
+      <p:pic>
+        <p:nvPicPr>
+          <p:cNvPr id="23010" name="Ikon layers" descr="layers">    </p:cNvPr>
+          <p:cNvPicPr>
+            <a:picLocks noChangeAspect="1"/>
+          </p:cNvPicPr>
+          <p:nvPr/>
+        </p:nvPicPr>
+        <p:blipFill>
+          <a:blip r:embed="rId2"/>
+          <a:stretch>
+            <a:fillRect/>
+          </a:stretch>
+        </p:blipFill>
+        <p:spPr>
+          <a:xfrm>
+            <a:off x="4900270" y="2101291"/>
+            <a:ext cx="460858" cy="460858"/>
+          </a:xfrm>
+          <a:prstGeom prst="rect">
+            <a:avLst/>
+          </a:prstGeom>
+        </p:spPr>
+      </p:pic>
+      <p:sp>
+        <p:nvSpPr>
+          <p:cNvPr id="23011" name="Text 7"/>
           <p:cNvSpPr txBox="1"/>
           <p:nvPr/>
         </p:nvSpPr>
         <p:spPr>
           <a:xfrm>
-            <a:off x="749808" y="1947672"/>
-            <a:ext cx="2240280" cy="384048"/>
+            <a:off x="4719218" y="2971800"/>
+            <a:ext cx="2753258" cy="502920"/>
           </a:xfrm>
           <a:prstGeom prst="rect">
             <a:avLst/>
@@ -4811,27 +4848,27 @@
               <a:buNone/>
             </a:pPr>
             <a:r>
-              <a:rPr lang="en-US" sz="1400" b="1" dirty="0">
+              <a:rPr lang="en-US" sz="2200" b="1" dirty="0">
                 <a:solidFill>
                   <a:schemeClr val="tx1"/>
                 </a:solidFill>
               </a:rPr>
-              <a:t>Bobler</a:t>
-            </a:r>
-            <a:endParaRPr lang="en-US" sz="1400" dirty="0"/>
-          </a:p>
-        </p:txBody>
-      </p:sp>
-      <p:sp>
-        <p:nvSpPr>
-          <p:cNvPr id="23010" name="Text 8"/>
+              <a:t>Cachesider</a:t>
+            </a:r>
+            <a:endParaRPr lang="en-US" sz="2200" dirty="0"/>
+          </a:p>
+        </p:txBody>
+      </p:sp>
+      <p:sp>
+        <p:nvSpPr>
+          <p:cNvPr id="23012" name="Text 8"/>
           <p:cNvSpPr txBox="1"/>
           <p:nvPr/>
         </p:nvSpPr>
         <p:spPr>
           <a:xfrm>
-            <a:off x="3264408" y="1947672"/>
-            <a:ext cx="1783080" cy="384048"/>
+            <a:off x="4719218" y="3611880"/>
+            <a:ext cx="2753258" cy="1828800"/>
           </a:xfrm>
           <a:prstGeom prst="rect">
             <a:avLst/>
@@ -4840,77 +4877,96 @@
           <a:ln/>
         </p:spPr>
         <p:txBody>
-          <a:bodyPr wrap="square" lIns="0" tIns="0" rIns="0" bIns="0" rtlCol="0" anchor="ctr"/>
-          <a:lstStyle/>
-          <a:p>
-            <a:pPr indent="0" marL="0">
-              <a:buNone/>
-            </a:pPr>
-            <a:r>
-              <a:rPr lang="en-US" sz="1200" dirty="0">
+          <a:bodyPr wrap="square" lIns="0" tIns="0" rIns="0" bIns="0" rtlCol="0" anchor="t"/>
+          <a:lstStyle/>
+          <a:p>
+            <a:pPr marL="228600" indent="-228600">
+              <a:spcAft>
+                <a:spcPts val="800"/>
+              </a:spcAft>
+              <a:buSzPct val="100000"/>
+              <a:buChar char="•"/>
+            </a:pPr>
+            <a:r>
+              <a:rPr lang="en-US" sz="1700" dirty="0">
                 <a:solidFill>
                   <a:schemeClr val="tx1"/>
                 </a:solidFill>
-                <a:latin typeface="Courier New" pitchFamily="34" charset="0"/>
-                <a:ea typeface="Courier New" pitchFamily="34" charset="-122"/>
-                <a:cs typeface="Courier New" pitchFamily="34" charset="-120"/>
-              </a:rPr>
-              <a:t>popupPane · 700</a:t>
-            </a:r>
-            <a:endParaRPr lang="en-US" sz="1200" dirty="0"/>
-          </a:p>
-        </p:txBody>
-      </p:sp>
-      <p:sp>
-        <p:nvSpPr>
-          <p:cNvPr id="23011" name="Text 9"/>
-          <p:cNvSpPr txBox="1"/>
-          <p:nvPr/>
-        </p:nvSpPr>
-        <p:spPr>
-          <a:xfrm>
-            <a:off x="5138928" y="1947672"/>
-            <a:ext cx="6302959" cy="384048"/>
-          </a:xfrm>
-          <a:prstGeom prst="rect">
-            <a:avLst/>
-          </a:prstGeom>
-          <a:noFill/>
-          <a:ln/>
-        </p:spPr>
-        <p:txBody>
-          <a:bodyPr wrap="square" lIns="0" tIns="0" rIns="0" bIns="0" rtlCol="0" anchor="ctr"/>
-          <a:lstStyle/>
-          <a:p>
-            <a:pPr indent="0" marL="0">
-              <a:buNone/>
-            </a:pPr>
-            <a:r>
-              <a:rPr lang="en-US" sz="1300" dirty="0">
+              </a:rPr>
+              <a:t>Det lille kartet viser ditt valgte kart</a:t>
+            </a:r>
+            <a:endParaRPr lang="en-US" sz="1700" dirty="0"/>
+          </a:p>
+          <a:p>
+            <a:pPr marL="228600" indent="-228600">
+              <a:spcAft>
+                <a:spcPts val="800"/>
+              </a:spcAft>
+              <a:buSzPct val="100000"/>
+              <a:buChar char="•"/>
+            </a:pPr>
+            <a:r>
+              <a:rPr lang="en-US" sz="1700" dirty="0">
                 <a:solidFill>
                   <a:schemeClr val="tx1"/>
                 </a:solidFill>
               </a:rPr>
-              <a:t>høyreklikkboblen og andre kartbobler</a:t>
-            </a:r>
-            <a:endParaRPr lang="en-US" sz="1300" dirty="0"/>
-          </a:p>
-        </p:txBody>
-      </p:sp>
-      <p:sp>
-        <p:nvSpPr>
-          <p:cNvPr id="23012" name="Lag Markører"/>
+              <a:t>Samme demping og overlegg</a:t>
+            </a:r>
+            <a:endParaRPr lang="en-US" sz="1700" dirty="0"/>
+          </a:p>
+          <a:p>
+            <a:pPr marL="228600" indent="-228600">
+              <a:spcAft>
+                <a:spcPts val="800"/>
+              </a:spcAft>
+              <a:buSzPct val="100000"/>
+              <a:buChar char="•"/>
+            </a:pPr>
+            <a:r>
+              <a:rPr lang="en-US" sz="1700" dirty="0">
+                <a:solidFill>
+                  <a:schemeClr val="tx1"/>
+                </a:solidFill>
+              </a:rPr>
+              <a:t>Beholder nettstedets utsnitt</a:t>
+            </a:r>
+            <a:endParaRPr lang="en-US" sz="1700" dirty="0"/>
+          </a:p>
+          <a:p>
+            <a:pPr marL="228600" indent="-228600">
+              <a:spcAft>
+                <a:spcPts val="800"/>
+              </a:spcAft>
+              <a:buSzPct val="100000"/>
+              <a:buChar char="•"/>
+            </a:pPr>
+            <a:r>
+              <a:rPr lang="en-US" sz="1700" dirty="0">
+                <a:solidFill>
+                  <a:schemeClr val="tx1"/>
+                </a:solidFill>
+              </a:rPr>
+              <a:t>Endrer aldri valget ditt</a:t>
+            </a:r>
+            <a:endParaRPr lang="en-US" sz="1700" dirty="0"/>
+          </a:p>
+        </p:txBody>
+      </p:sp>
+      <p:sp>
+        <p:nvSpPr>
+          <p:cNvPr id="23013" name="Kort Hjem"/>
           <p:cNvSpPr/>
           <p:nvPr/>
         </p:nvSpPr>
         <p:spPr>
           <a:xfrm>
-            <a:off x="548640" y="2377440"/>
-            <a:ext cx="11094415" cy="384048"/>
+            <a:off x="8158277" y="1508760"/>
+            <a:ext cx="3484778" cy="4206240"/>
           </a:xfrm>
           <a:prstGeom prst="roundRect">
             <a:avLst>
-              <a:gd name="adj" fmla="val 16667"/>
+              <a:gd name="adj" fmla="val 3149"/>
             </a:avLst>
           </a:prstGeom>
           <a:solidFill>
@@ -4921,565 +4977,17 @@
       </p:sp>
       <p:sp>
         <p:nvSpPr>
-          <p:cNvPr id="23013" name="Text 11"/>
-          <p:cNvSpPr txBox="1"/>
-          <p:nvPr/>
-        </p:nvSpPr>
-        <p:spPr>
-          <a:xfrm>
-            <a:off x="749808" y="2377440"/>
-            <a:ext cx="2240280" cy="384048"/>
-          </a:xfrm>
-          <a:prstGeom prst="rect">
-            <a:avLst/>
-          </a:prstGeom>
-          <a:noFill/>
-          <a:ln/>
-        </p:spPr>
-        <p:txBody>
-          <a:bodyPr wrap="square" lIns="0" tIns="0" rIns="0" bIns="0" rtlCol="0" anchor="ctr"/>
-          <a:lstStyle/>
-          <a:p>
-            <a:pPr indent="0" marL="0">
-              <a:buNone/>
-            </a:pPr>
-            <a:r>
-              <a:rPr lang="en-US" sz="1400" b="1" dirty="0">
-                <a:solidFill>
-                  <a:schemeClr val="tx1"/>
-                </a:solidFill>
-              </a:rPr>
-              <a:t>Markører</a:t>
-            </a:r>
-            <a:endParaRPr lang="en-US" sz="1400" dirty="0"/>
-          </a:p>
-        </p:txBody>
-      </p:sp>
-      <p:sp>
-        <p:nvSpPr>
-          <p:cNvPr id="23014" name="Text 12"/>
-          <p:cNvSpPr txBox="1"/>
-          <p:nvPr/>
-        </p:nvSpPr>
-        <p:spPr>
-          <a:xfrm>
-            <a:off x="3264408" y="2377440"/>
-            <a:ext cx="1783080" cy="384048"/>
-          </a:xfrm>
-          <a:prstGeom prst="rect">
-            <a:avLst/>
-          </a:prstGeom>
-          <a:noFill/>
-          <a:ln/>
-        </p:spPr>
-        <p:txBody>
-          <a:bodyPr wrap="square" lIns="0" tIns="0" rIns="0" bIns="0" rtlCol="0" anchor="ctr"/>
-          <a:lstStyle/>
-          <a:p>
-            <a:pPr indent="0" marL="0">
-              <a:buNone/>
-            </a:pPr>
-            <a:r>
-              <a:rPr lang="en-US" sz="1200" dirty="0">
-                <a:solidFill>
-                  <a:schemeClr val="tx1"/>
-                </a:solidFill>
-                <a:latin typeface="Courier New" pitchFamily="34" charset="0"/>
-                <a:ea typeface="Courier New" pitchFamily="34" charset="-122"/>
-                <a:cs typeface="Courier New" pitchFamily="34" charset="-120"/>
-              </a:rPr>
-              <a:t>markerPane · 600</a:t>
-            </a:r>
-            <a:endParaRPr lang="en-US" sz="1200" dirty="0"/>
-          </a:p>
-        </p:txBody>
-      </p:sp>
-      <p:sp>
-        <p:nvSpPr>
-          <p:cNvPr id="23015" name="Text 13"/>
-          <p:cNvSpPr txBox="1"/>
-          <p:nvPr/>
-        </p:nvSpPr>
-        <p:spPr>
-          <a:xfrm>
-            <a:off x="5138928" y="2377440"/>
-            <a:ext cx="6302959" cy="384048"/>
-          </a:xfrm>
-          <a:prstGeom prst="rect">
-            <a:avLst/>
-          </a:prstGeom>
-          <a:noFill/>
-          <a:ln/>
-        </p:spPr>
-        <p:txBody>
-          <a:bodyPr wrap="square" lIns="0" tIns="0" rIns="0" bIns="0" rtlCol="0" anchor="ctr"/>
-          <a:lstStyle/>
-          <a:p>
-            <a:pPr indent="0" marL="0">
-              <a:buNone/>
-            </a:pPr>
-            <a:r>
-              <a:rPr lang="en-US" sz="1300" dirty="0">
-                <a:solidFill>
-                  <a:schemeClr val="tx1"/>
-                </a:solidFill>
-              </a:rPr>
-              <a:t>cacheikonene på /play/map, merkenåler, etiketter og posisjonen din</a:t>
-            </a:r>
-            <a:endParaRPr lang="en-US" sz="1300" dirty="0"/>
-          </a:p>
-        </p:txBody>
-      </p:sp>
-      <p:sp>
-        <p:nvSpPr>
-          <p:cNvPr id="23016" name="Lag Tegninger"/>
+          <p:cNvPr id="23014" name="Ikon home sirkel"/>
           <p:cNvSpPr/>
           <p:nvPr/>
         </p:nvSpPr>
         <p:spPr>
           <a:xfrm>
-            <a:off x="548640" y="2807208"/>
-            <a:ext cx="11094415" cy="384048"/>
-          </a:xfrm>
-          <a:prstGeom prst="roundRect">
-            <a:avLst>
-              <a:gd name="adj" fmla="val 16667"/>
-            </a:avLst>
-          </a:prstGeom>
-          <a:solidFill>
-            <a:schemeClr val="bg2"/>
-          </a:solidFill>
-          <a:ln/>
-        </p:spPr>
-      </p:sp>
-      <p:sp>
-        <p:nvSpPr>
-          <p:cNvPr id="23017" name="Text 15"/>
-          <p:cNvSpPr txBox="1"/>
-          <p:nvPr/>
-        </p:nvSpPr>
-        <p:spPr>
-          <a:xfrm>
-            <a:off x="749808" y="2807208"/>
-            <a:ext cx="2240280" cy="384048"/>
-          </a:xfrm>
-          <a:prstGeom prst="rect">
-            <a:avLst/>
-          </a:prstGeom>
-          <a:noFill/>
-          <a:ln/>
-        </p:spPr>
-        <p:txBody>
-          <a:bodyPr wrap="square" lIns="0" tIns="0" rIns="0" bIns="0" rtlCol="0" anchor="ctr"/>
-          <a:lstStyle/>
-          <a:p>
-            <a:pPr indent="0" marL="0">
-              <a:buNone/>
-            </a:pPr>
-            <a:r>
-              <a:rPr lang="en-US" sz="1400" b="1" dirty="0">
-                <a:solidFill>
-                  <a:schemeClr val="tx1"/>
-                </a:solidFill>
-              </a:rPr>
-              <a:t>Tegninger</a:t>
-            </a:r>
-            <a:endParaRPr lang="en-US" sz="1400" dirty="0"/>
-          </a:p>
-        </p:txBody>
-      </p:sp>
-      <p:sp>
-        <p:nvSpPr>
-          <p:cNvPr id="23018" name="Text 16"/>
-          <p:cNvSpPr txBox="1"/>
-          <p:nvPr/>
-        </p:nvSpPr>
-        <p:spPr>
-          <a:xfrm>
-            <a:off x="3264408" y="2807208"/>
-            <a:ext cx="1783080" cy="384048"/>
-          </a:xfrm>
-          <a:prstGeom prst="rect">
-            <a:avLst/>
-          </a:prstGeom>
-          <a:noFill/>
-          <a:ln/>
-        </p:spPr>
-        <p:txBody>
-          <a:bodyPr wrap="square" lIns="0" tIns="0" rIns="0" bIns="0" rtlCol="0" anchor="ctr"/>
-          <a:lstStyle/>
-          <a:p>
-            <a:pPr indent="0" marL="0">
-              <a:buNone/>
-            </a:pPr>
-            <a:r>
-              <a:rPr lang="en-US" sz="1200" dirty="0">
-                <a:solidFill>
-                  <a:schemeClr val="tx1"/>
-                </a:solidFill>
-                <a:latin typeface="Courier New" pitchFamily="34" charset="0"/>
-                <a:ea typeface="Courier New" pitchFamily="34" charset="-122"/>
-                <a:cs typeface="Courier New" pitchFamily="34" charset="-120"/>
-              </a:rPr>
-              <a:t>overlayPane · 400</a:t>
-            </a:r>
-            <a:endParaRPr lang="en-US" sz="1200" dirty="0"/>
-          </a:p>
-        </p:txBody>
-      </p:sp>
-      <p:sp>
-        <p:nvSpPr>
-          <p:cNvPr id="23019" name="Text 17"/>
-          <p:cNvSpPr txBox="1"/>
-          <p:nvPr/>
-        </p:nvSpPr>
-        <p:spPr>
-          <a:xfrm>
-            <a:off x="5138928" y="2807208"/>
-            <a:ext cx="6302959" cy="384048"/>
-          </a:xfrm>
-          <a:prstGeom prst="rect">
-            <a:avLst/>
-          </a:prstGeom>
-          <a:noFill/>
-          <a:ln/>
-        </p:spPr>
-        <p:txBody>
-          <a:bodyPr wrap="square" lIns="0" tIns="0" rIns="0" bIns="0" rtlCol="0" anchor="ctr"/>
-          <a:lstStyle/>
-          <a:p>
-            <a:pPr indent="0" marL="0">
-              <a:buNone/>
-            </a:pPr>
-            <a:r>
-              <a:rPr lang="en-US" sz="1300" dirty="0">
-                <a:solidFill>
-                  <a:schemeClr val="tx1"/>
-                </a:solidFill>
-              </a:rPr>
-              <a:t>161 m-sirkler, målelinjer, projiseringslinjer og nøyaktighetssirkelen</a:t>
-            </a:r>
-            <a:endParaRPr lang="en-US" sz="1300" dirty="0"/>
-          </a:p>
-        </p:txBody>
-      </p:sp>
-      <p:sp>
-        <p:nvSpPr>
-          <p:cNvPr id="23020" name="Text 18"/>
-          <p:cNvSpPr txBox="1"/>
-          <p:nvPr/>
-        </p:nvSpPr>
-        <p:spPr>
-          <a:xfrm>
-            <a:off x="548640" y="3328416"/>
-            <a:ext cx="11094415" cy="274320"/>
-          </a:xfrm>
-          <a:prstGeom prst="rect">
-            <a:avLst/>
-          </a:prstGeom>
-          <a:noFill/>
-          <a:ln/>
-        </p:spPr>
-        <p:txBody>
-          <a:bodyPr wrap="square" lIns="0" tIns="0" rIns="0" bIns="0" rtlCol="0" anchor="ctr"/>
-          <a:lstStyle/>
-          <a:p>
-            <a:pPr indent="0" marL="0">
-              <a:buNone/>
-            </a:pPr>
-            <a:r>
-              <a:rPr lang="en-US" sz="1100" b="1" spc="100" kern="0" dirty="0">
-                <a:solidFill>
-                  <a:schemeClr val="accent4"/>
-                </a:solidFill>
-              </a:rPr>
-              <a:t>KARTFLISENE (TILEPANE · 200) – SORTERT ETTER Z-INDEKS</a:t>
-            </a:r>
-            <a:endParaRPr lang="en-US" sz="1100" dirty="0"/>
-          </a:p>
-        </p:txBody>
-      </p:sp>
-      <p:sp>
-        <p:nvSpPr>
-          <p:cNvPr id="23021" name="Lag Nettstedets øvrige fliser"/>
-          <p:cNvSpPr/>
-          <p:nvPr/>
-        </p:nvSpPr>
-        <p:spPr>
-          <a:xfrm>
-            <a:off x="548640" y="3639312"/>
-            <a:ext cx="11094415" cy="384048"/>
-          </a:xfrm>
-          <a:prstGeom prst="roundRect">
-            <a:avLst>
-              <a:gd name="adj" fmla="val 16667"/>
-            </a:avLst>
-          </a:prstGeom>
-          <a:solidFill>
-            <a:schemeClr val="accent2"/>
-          </a:solidFill>
-          <a:ln/>
-        </p:spPr>
-      </p:sp>
-      <p:sp>
-        <p:nvSpPr>
-          <p:cNvPr id="23022" name="Text 20"/>
-          <p:cNvSpPr txBox="1"/>
-          <p:nvPr/>
-        </p:nvSpPr>
-        <p:spPr>
-          <a:xfrm>
-            <a:off x="749808" y="3639312"/>
-            <a:ext cx="2240280" cy="384048"/>
-          </a:xfrm>
-          <a:prstGeom prst="rect">
-            <a:avLst/>
-          </a:prstGeom>
-          <a:noFill/>
-          <a:ln/>
-        </p:spPr>
-        <p:txBody>
-          <a:bodyPr wrap="square" lIns="0" tIns="0" rIns="0" bIns="0" rtlCol="0" anchor="ctr"/>
-          <a:lstStyle/>
-          <a:p>
-            <a:pPr indent="0" marL="0">
-              <a:buNone/>
-            </a:pPr>
-            <a:r>
-              <a:rPr lang="en-US" sz="1400" b="1" dirty="0">
-                <a:solidFill>
-                  <a:schemeClr val="bg1"/>
-                </a:solidFill>
-              </a:rPr>
-              <a:t>Nettstedets øvrige fliser</a:t>
-            </a:r>
-            <a:endParaRPr lang="en-US" sz="1400" dirty="0"/>
-          </a:p>
-        </p:txBody>
-      </p:sp>
-      <p:sp>
-        <p:nvSpPr>
-          <p:cNvPr id="23023" name="Text 21"/>
-          <p:cNvSpPr txBox="1"/>
-          <p:nvPr/>
-        </p:nvSpPr>
-        <p:spPr>
-          <a:xfrm>
-            <a:off x="3264408" y="3639312"/>
-            <a:ext cx="1783080" cy="384048"/>
-          </a:xfrm>
-          <a:prstGeom prst="rect">
-            <a:avLst/>
-          </a:prstGeom>
-          <a:noFill/>
-          <a:ln/>
-        </p:spPr>
-        <p:txBody>
-          <a:bodyPr wrap="square" lIns="0" tIns="0" rIns="0" bIns="0" rtlCol="0" anchor="ctr"/>
-          <a:lstStyle/>
-          <a:p>
-            <a:pPr indent="0" marL="0">
-              <a:buNone/>
-            </a:pPr>
-            <a:r>
-              <a:rPr lang="en-US" sz="1200" dirty="0">
-                <a:solidFill>
-                  <a:schemeClr val="bg1"/>
-                </a:solidFill>
-                <a:latin typeface="Courier New" pitchFamily="34" charset="0"/>
-                <a:ea typeface="Courier New" pitchFamily="34" charset="-122"/>
-                <a:cs typeface="Courier New" pitchFamily="34" charset="-120"/>
-              </a:rPr>
-              <a:t>z = bz + 10</a:t>
-            </a:r>
-            <a:endParaRPr lang="en-US" sz="1200" dirty="0"/>
-          </a:p>
-        </p:txBody>
-      </p:sp>
-      <p:sp>
-        <p:nvSpPr>
-          <p:cNvPr id="23024" name="Text 22"/>
-          <p:cNvSpPr txBox="1"/>
-          <p:nvPr/>
-        </p:nvSpPr>
-        <p:spPr>
-          <a:xfrm>
-            <a:off x="5138928" y="3639312"/>
-            <a:ext cx="6302959" cy="384048"/>
-          </a:xfrm>
-          <a:prstGeom prst="rect">
-            <a:avLst/>
-          </a:prstGeom>
-          <a:noFill/>
-          <a:ln/>
-        </p:spPr>
-        <p:txBody>
-          <a:bodyPr wrap="square" lIns="0" tIns="0" rIns="0" bIns="0" rtlCol="0" anchor="ctr"/>
-          <a:lstStyle/>
-          <a:p>
-            <a:pPr indent="0" marL="0">
-              <a:buNone/>
-            </a:pPr>
-            <a:r>
-              <a:rPr lang="en-US" sz="1300" dirty="0">
-                <a:solidFill>
-                  <a:schemeClr val="bg1"/>
-                </a:solidFill>
-              </a:rPr>
-              <a:t>cacheikonene på /map – løftes alltid over dine lag</a:t>
-            </a:r>
-            <a:endParaRPr lang="en-US" sz="1300" dirty="0"/>
-          </a:p>
-        </p:txBody>
-      </p:sp>
-      <p:sp>
-        <p:nvSpPr>
-          <p:cNvPr id="23025" name="Lag Forhåndsvisning"/>
-          <p:cNvSpPr/>
-          <p:nvPr/>
-        </p:nvSpPr>
-        <p:spPr>
-          <a:xfrm>
-            <a:off x="548640" y="4069080"/>
-            <a:ext cx="11094415" cy="384048"/>
-          </a:xfrm>
-          <a:prstGeom prst="roundRect">
-            <a:avLst>
-              <a:gd name="adj" fmla="val 16667"/>
-            </a:avLst>
-          </a:prstGeom>
-          <a:solidFill>
-            <a:schemeClr val="accent3"/>
-          </a:solidFill>
-          <a:ln/>
-        </p:spPr>
-      </p:sp>
-      <p:sp>
-        <p:nvSpPr>
-          <p:cNvPr id="23026" name="Text 24"/>
-          <p:cNvSpPr txBox="1"/>
-          <p:nvPr/>
-        </p:nvSpPr>
-        <p:spPr>
-          <a:xfrm>
-            <a:off x="749808" y="4069080"/>
-            <a:ext cx="2240280" cy="384048"/>
-          </a:xfrm>
-          <a:prstGeom prst="rect">
-            <a:avLst/>
-          </a:prstGeom>
-          <a:noFill/>
-          <a:ln/>
-        </p:spPr>
-        <p:txBody>
-          <a:bodyPr wrap="square" lIns="0" tIns="0" rIns="0" bIns="0" rtlCol="0" anchor="ctr"/>
-          <a:lstStyle/>
-          <a:p>
-            <a:pPr indent="0" marL="0">
-              <a:buNone/>
-            </a:pPr>
-            <a:r>
-              <a:rPr lang="en-US" sz="1400" b="1" dirty="0">
-                <a:solidFill>
-                  <a:schemeClr val="bg1"/>
-                </a:solidFill>
-              </a:rPr>
-              <a:t>Forhåndsvisning</a:t>
-            </a:r>
-            <a:endParaRPr lang="en-US" sz="1400" dirty="0"/>
-          </a:p>
-        </p:txBody>
-      </p:sp>
-      <p:sp>
-        <p:nvSpPr>
-          <p:cNvPr id="23027" name="Text 25"/>
-          <p:cNvSpPr txBox="1"/>
-          <p:nvPr/>
-        </p:nvSpPr>
-        <p:spPr>
-          <a:xfrm>
-            <a:off x="3264408" y="4069080"/>
-            <a:ext cx="1783080" cy="384048"/>
-          </a:xfrm>
-          <a:prstGeom prst="rect">
-            <a:avLst/>
-          </a:prstGeom>
-          <a:noFill/>
-          <a:ln/>
-        </p:spPr>
-        <p:txBody>
-          <a:bodyPr wrap="square" lIns="0" tIns="0" rIns="0" bIns="0" rtlCol="0" anchor="ctr"/>
-          <a:lstStyle/>
-          <a:p>
-            <a:pPr indent="0" marL="0">
-              <a:buNone/>
-            </a:pPr>
-            <a:r>
-              <a:rPr lang="en-US" sz="1200" dirty="0">
-                <a:solidFill>
-                  <a:schemeClr val="bg1"/>
-                </a:solidFill>
-                <a:latin typeface="Courier New" pitchFamily="34" charset="0"/>
-                <a:ea typeface="Courier New" pitchFamily="34" charset="-122"/>
-                <a:cs typeface="Courier New" pitchFamily="34" charset="-120"/>
-              </a:rPr>
-              <a:t>z = bz + 3</a:t>
-            </a:r>
-            <a:endParaRPr lang="en-US" sz="1200" dirty="0"/>
-          </a:p>
-        </p:txBody>
-      </p:sp>
-      <p:sp>
-        <p:nvSpPr>
-          <p:cNvPr id="23028" name="Text 26"/>
-          <p:cNvSpPr txBox="1"/>
-          <p:nvPr/>
-        </p:nvSpPr>
-        <p:spPr>
-          <a:xfrm>
-            <a:off x="5138928" y="4069080"/>
-            <a:ext cx="6302959" cy="384048"/>
-          </a:xfrm>
-          <a:prstGeom prst="rect">
-            <a:avLst/>
-          </a:prstGeom>
-          <a:noFill/>
-          <a:ln/>
-        </p:spPr>
-        <p:txBody>
-          <a:bodyPr wrap="square" lIns="0" tIns="0" rIns="0" bIns="0" rtlCol="0" anchor="ctr"/>
-          <a:lstStyle/>
-          <a:p>
-            <a:pPr indent="0" marL="0">
-              <a:buNone/>
-            </a:pPr>
-            <a:r>
-              <a:rPr lang="en-US" sz="1300" dirty="0">
-                <a:solidFill>
-                  <a:schemeClr val="bg1"/>
-                </a:solidFill>
-              </a:rPr>
-              <a:t>laget du prøver i redigeringsdialogen</a:t>
-            </a:r>
-            <a:endParaRPr lang="en-US" sz="1300" dirty="0"/>
-          </a:p>
-        </p:txBody>
-      </p:sp>
-      <p:sp>
-        <p:nvSpPr>
-          <p:cNvPr id="23029" name="Lag Dine overlegg"/>
-          <p:cNvSpPr/>
-          <p:nvPr/>
-        </p:nvSpPr>
-        <p:spPr>
-          <a:xfrm>
-            <a:off x="548640" y="4498848"/>
-            <a:ext cx="11094415" cy="384048"/>
-          </a:xfrm>
-          <a:prstGeom prst="roundRect">
-            <a:avLst>
-              <a:gd name="adj" fmla="val 16667"/>
-            </a:avLst>
+            <a:off x="8524037" y="1920240"/>
+            <a:ext cx="822960" cy="822960"/>
+          </a:xfrm>
+          <a:prstGeom prst="ellipse">
+            <a:avLst/>
           </a:prstGeom>
           <a:solidFill>
             <a:schemeClr val="accent1"/>
@@ -5487,16 +4995,40 @@
           <a:ln/>
         </p:spPr>
       </p:sp>
-      <p:sp>
-        <p:nvSpPr>
-          <p:cNvPr id="23030" name="Text 28"/>
+      <p:pic>
+        <p:nvPicPr>
+          <p:cNvPr id="23015" name="Ikon home" descr="home">    </p:cNvPr>
+          <p:cNvPicPr>
+            <a:picLocks noChangeAspect="1"/>
+          </p:cNvPicPr>
+          <p:nvPr/>
+        </p:nvPicPr>
+        <p:blipFill>
+          <a:blip r:embed="rId3"/>
+          <a:stretch>
+            <a:fillRect/>
+          </a:stretch>
+        </p:blipFill>
+        <p:spPr>
+          <a:xfrm>
+            <a:off x="8705088" y="2101291"/>
+            <a:ext cx="460858" cy="460858"/>
+          </a:xfrm>
+          <a:prstGeom prst="rect">
+            <a:avLst/>
+          </a:prstGeom>
+        </p:spPr>
+      </p:pic>
+      <p:sp>
+        <p:nvSpPr>
+          <p:cNvPr id="23016" name="Text 11"/>
           <p:cNvSpPr txBox="1"/>
           <p:nvPr/>
         </p:nvSpPr>
         <p:spPr>
           <a:xfrm>
-            <a:off x="749808" y="4498848"/>
-            <a:ext cx="2240280" cy="384048"/>
+            <a:off x="8524037" y="2971800"/>
+            <a:ext cx="2753258" cy="502920"/>
           </a:xfrm>
           <a:prstGeom prst="rect">
             <a:avLst/>
@@ -5512,27 +5044,27 @@
               <a:buNone/>
             </a:pPr>
             <a:r>
-              <a:rPr lang="en-US" sz="1400" b="1" dirty="0">
-                <a:solidFill>
-                  <a:schemeClr val="bg1"/>
-                </a:solidFill>
-              </a:rPr>
-              <a:t>Dine overlegg</a:t>
-            </a:r>
-            <a:endParaRPr lang="en-US" sz="1400" dirty="0"/>
-          </a:p>
-        </p:txBody>
-      </p:sp>
-      <p:sp>
-        <p:nvSpPr>
-          <p:cNvPr id="23031" name="Text 29"/>
+              <a:rPr lang="en-US" sz="2200" b="1" dirty="0">
+                <a:solidFill>
+                  <a:schemeClr val="tx1"/>
+                </a:solidFill>
+              </a:rPr>
+              <a:t>Hjem</a:t>
+            </a:r>
+            <a:endParaRPr lang="en-US" sz="2200" dirty="0"/>
+          </a:p>
+        </p:txBody>
+      </p:sp>
+      <p:sp>
+        <p:nvSpPr>
+          <p:cNvPr id="23017" name="Text 12"/>
           <p:cNvSpPr txBox="1"/>
           <p:nvPr/>
         </p:nvSpPr>
         <p:spPr>
           <a:xfrm>
-            <a:off x="3264408" y="4498848"/>
-            <a:ext cx="1783080" cy="384048"/>
+            <a:off x="8524037" y="3611880"/>
+            <a:ext cx="2753258" cy="1828800"/>
           </a:xfrm>
           <a:prstGeom prst="rect">
             <a:avLst/>
@@ -5541,368 +5073,67 @@
           <a:ln/>
         </p:spPr>
         <p:txBody>
-          <a:bodyPr wrap="square" lIns="0" tIns="0" rIns="0" bIns="0" rtlCol="0" anchor="ctr"/>
-          <a:lstStyle/>
-          <a:p>
-            <a:pPr indent="0" marL="0">
-              <a:buNone/>
-            </a:pPr>
-            <a:r>
-              <a:rPr lang="en-US" sz="1200" dirty="0">
-                <a:solidFill>
-                  <a:schemeClr val="bg1"/>
-                </a:solidFill>
-                <a:latin typeface="Courier New" pitchFamily="34" charset="0"/>
-                <a:ea typeface="Courier New" pitchFamily="34" charset="-122"/>
-                <a:cs typeface="Courier New" pitchFamily="34" charset="-120"/>
-              </a:rPr>
-              <a:t>z = bz + 2</a:t>
-            </a:r>
-            <a:endParaRPr lang="en-US" sz="1200" dirty="0"/>
-          </a:p>
-        </p:txBody>
-      </p:sp>
-      <p:sp>
-        <p:nvSpPr>
-          <p:cNvPr id="23032" name="Text 30"/>
-          <p:cNvSpPr txBox="1"/>
-          <p:nvPr/>
-        </p:nvSpPr>
-        <p:spPr>
-          <a:xfrm>
-            <a:off x="5138928" y="4498848"/>
-            <a:ext cx="6302959" cy="384048"/>
-          </a:xfrm>
-          <a:prstGeom prst="rect">
-            <a:avLst/>
-          </a:prstGeom>
-          <a:noFill/>
-          <a:ln/>
-        </p:spPr>
-        <p:txBody>
-          <a:bodyPr wrap="square" lIns="0" tIns="0" rIns="0" bIns="0" rtlCol="0" anchor="ctr"/>
-          <a:lstStyle/>
-          <a:p>
-            <a:pPr indent="0" marL="0">
-              <a:buNone/>
-            </a:pPr>
-            <a:r>
-              <a:rPr lang="en-US" sz="1300" dirty="0">
-                <a:solidFill>
-                  <a:schemeClr val="bg1"/>
-                </a:solidFill>
-              </a:rPr>
-              <a:t>turruter, eiendomsgrenser, terrengskygge – egen glidebryter for synlighet</a:t>
-            </a:r>
-            <a:endParaRPr lang="en-US" sz="1300" dirty="0"/>
-          </a:p>
-        </p:txBody>
-      </p:sp>
-      <p:sp>
-        <p:nvSpPr>
-          <p:cNvPr id="23033" name="Lag Ditt bakgrunnskart"/>
-          <p:cNvSpPr/>
-          <p:nvPr/>
-        </p:nvSpPr>
-        <p:spPr>
-          <a:xfrm>
-            <a:off x="548640" y="4928616"/>
-            <a:ext cx="11094415" cy="384048"/>
-          </a:xfrm>
-          <a:prstGeom prst="roundRect">
-            <a:avLst>
-              <a:gd name="adj" fmla="val 16667"/>
-            </a:avLst>
-          </a:prstGeom>
-          <a:solidFill>
-            <a:schemeClr val="tx2"/>
-          </a:solidFill>
-          <a:ln/>
-        </p:spPr>
-      </p:sp>
-      <p:sp>
-        <p:nvSpPr>
-          <p:cNvPr id="23034" name="Text 32"/>
-          <p:cNvSpPr txBox="1"/>
-          <p:nvPr/>
-        </p:nvSpPr>
-        <p:spPr>
-          <a:xfrm>
-            <a:off x="749808" y="4928616"/>
-            <a:ext cx="2240280" cy="384048"/>
-          </a:xfrm>
-          <a:prstGeom prst="rect">
-            <a:avLst/>
-          </a:prstGeom>
-          <a:noFill/>
-          <a:ln/>
-        </p:spPr>
-        <p:txBody>
-          <a:bodyPr wrap="square" lIns="0" tIns="0" rIns="0" bIns="0" rtlCol="0" anchor="ctr"/>
-          <a:lstStyle/>
-          <a:p>
-            <a:pPr indent="0" marL="0">
-              <a:buNone/>
-            </a:pPr>
-            <a:r>
-              <a:rPr lang="en-US" sz="1400" b="1" dirty="0">
-                <a:solidFill>
-                  <a:schemeClr val="bg1"/>
-                </a:solidFill>
-              </a:rPr>
-              <a:t>Ditt bakgrunnskart</a:t>
-            </a:r>
-            <a:endParaRPr lang="en-US" sz="1400" dirty="0"/>
-          </a:p>
-        </p:txBody>
-      </p:sp>
-      <p:sp>
-        <p:nvSpPr>
-          <p:cNvPr id="23035" name="Text 33"/>
-          <p:cNvSpPr txBox="1"/>
-          <p:nvPr/>
-        </p:nvSpPr>
-        <p:spPr>
-          <a:xfrm>
-            <a:off x="3264408" y="4928616"/>
-            <a:ext cx="1783080" cy="384048"/>
-          </a:xfrm>
-          <a:prstGeom prst="rect">
-            <a:avLst/>
-          </a:prstGeom>
-          <a:noFill/>
-          <a:ln/>
-        </p:spPr>
-        <p:txBody>
-          <a:bodyPr wrap="square" lIns="0" tIns="0" rIns="0" bIns="0" rtlCol="0" anchor="ctr"/>
-          <a:lstStyle/>
-          <a:p>
-            <a:pPr indent="0" marL="0">
-              <a:buNone/>
-            </a:pPr>
-            <a:r>
-              <a:rPr lang="en-US" sz="1200" dirty="0">
-                <a:solidFill>
-                  <a:schemeClr val="bg1"/>
-                </a:solidFill>
-                <a:latin typeface="Courier New" pitchFamily="34" charset="0"/>
-                <a:ea typeface="Courier New" pitchFamily="34" charset="-122"/>
-                <a:cs typeface="Courier New" pitchFamily="34" charset="-120"/>
-              </a:rPr>
-              <a:t>z = bz + 1</a:t>
-            </a:r>
-            <a:endParaRPr lang="en-US" sz="1200" dirty="0"/>
-          </a:p>
-        </p:txBody>
-      </p:sp>
-      <p:sp>
-        <p:nvSpPr>
-          <p:cNvPr id="23036" name="Text 34"/>
-          <p:cNvSpPr txBox="1"/>
-          <p:nvPr/>
-        </p:nvSpPr>
-        <p:spPr>
-          <a:xfrm>
-            <a:off x="5138928" y="4928616"/>
-            <a:ext cx="6302959" cy="384048"/>
-          </a:xfrm>
-          <a:prstGeom prst="rect">
-            <a:avLst/>
-          </a:prstGeom>
-          <a:noFill/>
-          <a:ln/>
-        </p:spPr>
-        <p:txBody>
-          <a:bodyPr wrap="square" lIns="0" tIns="0" rIns="0" bIns="0" rtlCol="0" anchor="ctr"/>
-          <a:lstStyle/>
-          <a:p>
-            <a:pPr indent="0" marL="0">
-              <a:buNone/>
-            </a:pPr>
-            <a:r>
-              <a:rPr lang="en-US" sz="1300" dirty="0">
-                <a:solidFill>
-                  <a:schemeClr val="bg1"/>
-                </a:solidFill>
-              </a:rPr>
-              <a:t>helt dekkende – dempes mot hvitt med fargefilter, høyst 50 %</a:t>
-            </a:r>
-            <a:endParaRPr lang="en-US" sz="1300" dirty="0"/>
-          </a:p>
-        </p:txBody>
-      </p:sp>
-      <p:sp>
-        <p:nvSpPr>
-          <p:cNvPr id="23037" name="Lag geocaching.com-kartet"/>
-          <p:cNvSpPr/>
-          <p:nvPr/>
-        </p:nvSpPr>
-        <p:spPr>
-          <a:xfrm>
-            <a:off x="548640" y="5358384"/>
-            <a:ext cx="11094415" cy="384048"/>
-          </a:xfrm>
-          <a:prstGeom prst="roundRect">
-            <a:avLst>
-              <a:gd name="adj" fmla="val 16667"/>
-            </a:avLst>
-          </a:prstGeom>
-          <a:solidFill>
-            <a:schemeClr val="accent5"/>
-          </a:solidFill>
-          <a:ln/>
-        </p:spPr>
-      </p:sp>
-      <p:sp>
-        <p:nvSpPr>
-          <p:cNvPr id="23038" name="Text 36"/>
-          <p:cNvSpPr txBox="1"/>
-          <p:nvPr/>
-        </p:nvSpPr>
-        <p:spPr>
-          <a:xfrm>
-            <a:off x="749808" y="5358384"/>
-            <a:ext cx="2240280" cy="384048"/>
-          </a:xfrm>
-          <a:prstGeom prst="rect">
-            <a:avLst/>
-          </a:prstGeom>
-          <a:noFill/>
-          <a:ln/>
-        </p:spPr>
-        <p:txBody>
-          <a:bodyPr wrap="square" lIns="0" tIns="0" rIns="0" bIns="0" rtlCol="0" anchor="ctr"/>
-          <a:lstStyle/>
-          <a:p>
-            <a:pPr indent="0" marL="0">
-              <a:buNone/>
-            </a:pPr>
-            <a:r>
-              <a:rPr lang="en-US" sz="1400" b="1" dirty="0">
+          <a:bodyPr wrap="square" lIns="0" tIns="0" rIns="0" bIns="0" rtlCol="0" anchor="t"/>
+          <a:lstStyle/>
+          <a:p>
+            <a:pPr marL="228600" indent="-228600">
+              <a:spcAft>
+                <a:spcPts val="800"/>
+              </a:spcAft>
+              <a:buSzPct val="100000"/>
+              <a:buChar char="•"/>
+            </a:pPr>
+            <a:r>
+              <a:rPr lang="en-US" sz="1700" dirty="0">
                 <a:solidFill>
                   <a:schemeClr val="tx1"/>
                 </a:solidFill>
               </a:rPr>
-              <a:t>geocaching.com-kartet</a:t>
-            </a:r>
-            <a:endParaRPr lang="en-US" sz="1400" dirty="0"/>
-          </a:p>
-        </p:txBody>
-      </p:sp>
-      <p:sp>
-        <p:nvSpPr>
-          <p:cNvPr id="23039" name="Text 37"/>
-          <p:cNvSpPr txBox="1"/>
-          <p:nvPr/>
-        </p:nvSpPr>
-        <p:spPr>
-          <a:xfrm>
-            <a:off x="3264408" y="5358384"/>
-            <a:ext cx="1783080" cy="384048"/>
-          </a:xfrm>
-          <a:prstGeom prst="rect">
-            <a:avLst/>
-          </a:prstGeom>
-          <a:noFill/>
-          <a:ln/>
-        </p:spPr>
-        <p:txBody>
-          <a:bodyPr wrap="square" lIns="0" tIns="0" rIns="0" bIns="0" rtlCol="0" anchor="ctr"/>
-          <a:lstStyle/>
-          <a:p>
-            <a:pPr indent="0" marL="0">
-              <a:buNone/>
-            </a:pPr>
-            <a:r>
-              <a:rPr lang="en-US" sz="1200" dirty="0">
+              <a:t>Ett klikk tar deg hjem</a:t>
+            </a:r>
+            <a:endParaRPr lang="en-US" sz="1700" dirty="0"/>
+          </a:p>
+          <a:p>
+            <a:pPr marL="228600" indent="-228600">
+              <a:spcAft>
+                <a:spcPts val="800"/>
+              </a:spcAft>
+              <a:buSzPct val="100000"/>
+              <a:buChar char="•"/>
+            </a:pPr>
+            <a:r>
+              <a:rPr lang="en-US" sz="1700" dirty="0">
                 <a:solidFill>
                   <a:schemeClr val="tx1"/>
                 </a:solidFill>
-                <a:latin typeface="Courier New" pitchFamily="34" charset="0"/>
-                <a:ea typeface="Courier New" pitchFamily="34" charset="-122"/>
-                <a:cs typeface="Courier New" pitchFamily="34" charset="-120"/>
-              </a:rPr>
-              <a:t>z = bz</a:t>
-            </a:r>
-            <a:endParaRPr lang="en-US" sz="1200" dirty="0"/>
-          </a:p>
-        </p:txBody>
-      </p:sp>
-      <p:sp>
-        <p:nvSpPr>
-          <p:cNvPr id="23040" name="Text 38"/>
-          <p:cNvSpPr txBox="1"/>
-          <p:nvPr/>
-        </p:nvSpPr>
-        <p:spPr>
-          <a:xfrm>
-            <a:off x="5138928" y="5358384"/>
-            <a:ext cx="6302959" cy="384048"/>
-          </a:xfrm>
-          <a:prstGeom prst="rect">
-            <a:avLst/>
-          </a:prstGeom>
-          <a:noFill/>
-          <a:ln/>
-        </p:spPr>
-        <p:txBody>
-          <a:bodyPr wrap="square" lIns="0" tIns="0" rIns="0" bIns="0" rtlCol="0" anchor="ctr"/>
-          <a:lstStyle/>
-          <a:p>
-            <a:pPr indent="0" marL="0">
-              <a:buNone/>
-            </a:pPr>
-            <a:r>
-              <a:rPr lang="en-US" sz="1300" dirty="0">
+              </a:rPr>
+              <a:t>Første gang søker du opp adressen</a:t>
+            </a:r>
+            <a:endParaRPr lang="en-US" sz="1700" dirty="0"/>
+          </a:p>
+          <a:p>
+            <a:pPr marL="228600" indent="-228600">
+              <a:spcAft>
+                <a:spcPts val="800"/>
+              </a:spcAft>
+              <a:buSzPct val="100000"/>
+              <a:buChar char="•"/>
+            </a:pPr>
+            <a:r>
+              <a:rPr lang="en-US" sz="1700" dirty="0">
                 <a:solidFill>
                   <a:schemeClr val="tx1"/>
                 </a:solidFill>
               </a:rPr>
-              <a:t>nettstedets bakgrunn – dekkes av ditt kart, dempes når det selv er valgt</a:t>
-            </a:r>
-            <a:endParaRPr lang="en-US" sz="1300" dirty="0"/>
-          </a:p>
-        </p:txBody>
-      </p:sp>
-      <p:sp>
-        <p:nvSpPr>
-          <p:cNvPr id="23041" name="Text 39"/>
-          <p:cNvSpPr txBox="1"/>
-          <p:nvPr/>
-        </p:nvSpPr>
-        <p:spPr>
-          <a:xfrm>
-            <a:off x="548640" y="5861304"/>
-            <a:ext cx="11094415" cy="457200"/>
-          </a:xfrm>
-          <a:prstGeom prst="rect">
-            <a:avLst/>
-          </a:prstGeom>
-          <a:noFill/>
-          <a:ln/>
-        </p:spPr>
-        <p:txBody>
-          <a:bodyPr wrap="square" lIns="0" tIns="0" rIns="0" bIns="0" rtlCol="0" anchor="t"/>
-          <a:lstStyle/>
-          <a:p>
-            <a:pPr indent="0" marL="0">
-              <a:buNone/>
-            </a:pPr>
-            <a:r>
-              <a:rPr lang="en-US" sz="1150" dirty="0">
-                <a:solidFill>
-                  <a:schemeClr val="accent4"/>
-                </a:solidFill>
-              </a:rPr>
-              <a:t>bz = z-indeksen til nettstedets bakgrunn. På /play/map er nettstedets bakgrunn et vektorkart (WebGL). På /map lastes i tillegg et usynlig cacherutenett (UTFGrid) som brukes til 161 m-sirklene og til å feste høyreklikkboblen til cacher.</a:t>
-            </a:r>
-            <a:endParaRPr lang="en-US" sz="1150" dirty="0"/>
-          </a:p>
-        </p:txBody>
-      </p:sp>
-      <p:sp>
-        <p:nvSpPr>
-          <p:cNvPr id="23042" name="Slide Number Placeholder 0"/>
+              <a:t>Lagres bare i nettleseren din</a:t>
+            </a:r>
+            <a:endParaRPr lang="en-US" sz="1700" dirty="0"/>
+          </a:p>
+        </p:txBody>
+      </p:sp>
+      <p:sp>
+        <p:nvSpPr>
+          <p:cNvPr id="23018" name="Slide Number Placeholder 0"/>
           <p:cNvSpPr>
             <a:spLocks noGrp="1"/>
           </p:cNvSpPr>
@@ -6002,7 +5233,7 @@
                   <a:schemeClr val="tx2"/>
                 </a:solidFill>
               </a:rPr>
-              <a:t>Under panseret</a:t>
+              <a:t>Slik ligger kartlagene</a:t>
             </a:r>
             <a:endParaRPr lang="en-US" sz="3600" dirty="0"/>
           </a:p>
@@ -6010,17 +5241,889 @@
       </p:sp>
       <p:sp>
         <p:nvSpPr>
-          <p:cNvPr id="24003" name="Ikon layers sirkel"/>
+          <p:cNvPr id="24003" name="Text 1"/>
+          <p:cNvSpPr txBox="1"/>
+          <p:nvPr/>
+        </p:nvSpPr>
+        <p:spPr>
+          <a:xfrm>
+            <a:off x="548640" y="1207008"/>
+            <a:ext cx="11094415" cy="274320"/>
+          </a:xfrm>
+          <a:prstGeom prst="rect">
+            <a:avLst/>
+          </a:prstGeom>
+          <a:noFill/>
+          <a:ln/>
+        </p:spPr>
+        <p:txBody>
+          <a:bodyPr wrap="square" lIns="0" tIns="0" rIns="0" bIns="0" rtlCol="0" anchor="ctr"/>
+          <a:lstStyle/>
+          <a:p>
+            <a:pPr indent="0" marL="0">
+              <a:buNone/>
+            </a:pPr>
+            <a:r>
+              <a:rPr lang="en-US" sz="1100" b="1" spc="100" kern="0" dirty="0">
+                <a:solidFill>
+                  <a:schemeClr val="accent4"/>
+                </a:solidFill>
+              </a:rPr>
+              <a:t>OVER KARTFLISENE</a:t>
+            </a:r>
+            <a:endParaRPr lang="en-US" sz="1100" dirty="0"/>
+          </a:p>
+        </p:txBody>
+      </p:sp>
+      <p:sp>
+        <p:nvSpPr>
+          <p:cNvPr id="24004" name="Lag Kontroller"/>
           <p:cNvSpPr/>
           <p:nvPr/>
         </p:nvSpPr>
         <p:spPr>
           <a:xfrm>
-            <a:off x="548640" y="1591056"/>
-            <a:ext cx="512064" cy="512064"/>
-          </a:xfrm>
-          <a:prstGeom prst="ellipse">
-            <a:avLst/>
+            <a:off x="548640" y="1517904"/>
+            <a:ext cx="11094415" cy="384048"/>
+          </a:xfrm>
+          <a:prstGeom prst="roundRect">
+            <a:avLst>
+              <a:gd name="adj" fmla="val 16667"/>
+            </a:avLst>
+          </a:prstGeom>
+          <a:solidFill>
+            <a:schemeClr val="bg2"/>
+          </a:solidFill>
+          <a:ln/>
+        </p:spPr>
+      </p:sp>
+      <p:sp>
+        <p:nvSpPr>
+          <p:cNvPr id="24005" name="Text 3"/>
+          <p:cNvSpPr txBox="1"/>
+          <p:nvPr/>
+        </p:nvSpPr>
+        <p:spPr>
+          <a:xfrm>
+            <a:off x="749808" y="1517904"/>
+            <a:ext cx="2240280" cy="384048"/>
+          </a:xfrm>
+          <a:prstGeom prst="rect">
+            <a:avLst/>
+          </a:prstGeom>
+          <a:noFill/>
+          <a:ln/>
+        </p:spPr>
+        <p:txBody>
+          <a:bodyPr wrap="square" lIns="0" tIns="0" rIns="0" bIns="0" rtlCol="0" anchor="ctr"/>
+          <a:lstStyle/>
+          <a:p>
+            <a:pPr indent="0" marL="0">
+              <a:buNone/>
+            </a:pPr>
+            <a:r>
+              <a:rPr lang="en-US" sz="1400" b="1" dirty="0">
+                <a:solidFill>
+                  <a:schemeClr val="tx1"/>
+                </a:solidFill>
+              </a:rPr>
+              <a:t>Kontroller</a:t>
+            </a:r>
+            <a:endParaRPr lang="en-US" sz="1400" dirty="0"/>
+          </a:p>
+        </p:txBody>
+      </p:sp>
+      <p:sp>
+        <p:nvSpPr>
+          <p:cNvPr id="24006" name="Text 4"/>
+          <p:cNvSpPr txBox="1"/>
+          <p:nvPr/>
+        </p:nvSpPr>
+        <p:spPr>
+          <a:xfrm>
+            <a:off x="3264408" y="1517904"/>
+            <a:ext cx="1783080" cy="384048"/>
+          </a:xfrm>
+          <a:prstGeom prst="rect">
+            <a:avLst/>
+          </a:prstGeom>
+          <a:noFill/>
+          <a:ln/>
+        </p:spPr>
+        <p:txBody>
+          <a:bodyPr wrap="square" lIns="0" tIns="0" rIns="0" bIns="0" rtlCol="0" anchor="ctr"/>
+          <a:lstStyle/>
+          <a:p>
+            <a:pPr indent="0" marL="0">
+              <a:buNone/>
+            </a:pPr>
+            <a:r>
+              <a:rPr lang="en-US" sz="1200" dirty="0">
+                <a:solidFill>
+                  <a:schemeClr val="tx1"/>
+                </a:solidFill>
+                <a:latin typeface="Courier New" pitchFamily="34" charset="0"/>
+                <a:ea typeface="Courier New" pitchFamily="34" charset="-122"/>
+                <a:cs typeface="Courier New" pitchFamily="34" charset="-120"/>
+              </a:rPr>
+              <a:t>kontroller · 1000</a:t>
+            </a:r>
+            <a:endParaRPr lang="en-US" sz="1200" dirty="0"/>
+          </a:p>
+        </p:txBody>
+      </p:sp>
+      <p:sp>
+        <p:nvSpPr>
+          <p:cNvPr id="24007" name="Text 5"/>
+          <p:cNvSpPr txBox="1"/>
+          <p:nvPr/>
+        </p:nvSpPr>
+        <p:spPr>
+          <a:xfrm>
+            <a:off x="5138928" y="1517904"/>
+            <a:ext cx="6302959" cy="384048"/>
+          </a:xfrm>
+          <a:prstGeom prst="rect">
+            <a:avLst/>
+          </a:prstGeom>
+          <a:noFill/>
+          <a:ln/>
+        </p:spPr>
+        <p:txBody>
+          <a:bodyPr wrap="square" lIns="0" tIns="0" rIns="0" bIns="0" rtlCol="0" anchor="ctr"/>
+          <a:lstStyle/>
+          <a:p>
+            <a:pPr indent="0" marL="0">
+              <a:buNone/>
+            </a:pPr>
+            <a:r>
+              <a:rPr lang="en-US" sz="1300" dirty="0">
+                <a:solidFill>
+                  <a:schemeClr val="tx1"/>
+                </a:solidFill>
+              </a:rPr>
+              <a:t>verktøylinjen, kartlagpanelet, koordinatvisningen og kreditteringen</a:t>
+            </a:r>
+            <a:endParaRPr lang="en-US" sz="1300" dirty="0"/>
+          </a:p>
+        </p:txBody>
+      </p:sp>
+      <p:sp>
+        <p:nvSpPr>
+          <p:cNvPr id="24008" name="Lag Bobler"/>
+          <p:cNvSpPr/>
+          <p:nvPr/>
+        </p:nvSpPr>
+        <p:spPr>
+          <a:xfrm>
+            <a:off x="548640" y="1947672"/>
+            <a:ext cx="11094415" cy="384048"/>
+          </a:xfrm>
+          <a:prstGeom prst="roundRect">
+            <a:avLst>
+              <a:gd name="adj" fmla="val 16667"/>
+            </a:avLst>
+          </a:prstGeom>
+          <a:solidFill>
+            <a:schemeClr val="bg2"/>
+          </a:solidFill>
+          <a:ln/>
+        </p:spPr>
+      </p:sp>
+      <p:sp>
+        <p:nvSpPr>
+          <p:cNvPr id="24009" name="Text 7"/>
+          <p:cNvSpPr txBox="1"/>
+          <p:nvPr/>
+        </p:nvSpPr>
+        <p:spPr>
+          <a:xfrm>
+            <a:off x="749808" y="1947672"/>
+            <a:ext cx="2240280" cy="384048"/>
+          </a:xfrm>
+          <a:prstGeom prst="rect">
+            <a:avLst/>
+          </a:prstGeom>
+          <a:noFill/>
+          <a:ln/>
+        </p:spPr>
+        <p:txBody>
+          <a:bodyPr wrap="square" lIns="0" tIns="0" rIns="0" bIns="0" rtlCol="0" anchor="ctr"/>
+          <a:lstStyle/>
+          <a:p>
+            <a:pPr indent="0" marL="0">
+              <a:buNone/>
+            </a:pPr>
+            <a:r>
+              <a:rPr lang="en-US" sz="1400" b="1" dirty="0">
+                <a:solidFill>
+                  <a:schemeClr val="tx1"/>
+                </a:solidFill>
+              </a:rPr>
+              <a:t>Bobler</a:t>
+            </a:r>
+            <a:endParaRPr lang="en-US" sz="1400" dirty="0"/>
+          </a:p>
+        </p:txBody>
+      </p:sp>
+      <p:sp>
+        <p:nvSpPr>
+          <p:cNvPr id="24010" name="Text 8"/>
+          <p:cNvSpPr txBox="1"/>
+          <p:nvPr/>
+        </p:nvSpPr>
+        <p:spPr>
+          <a:xfrm>
+            <a:off x="3264408" y="1947672"/>
+            <a:ext cx="1783080" cy="384048"/>
+          </a:xfrm>
+          <a:prstGeom prst="rect">
+            <a:avLst/>
+          </a:prstGeom>
+          <a:noFill/>
+          <a:ln/>
+        </p:spPr>
+        <p:txBody>
+          <a:bodyPr wrap="square" lIns="0" tIns="0" rIns="0" bIns="0" rtlCol="0" anchor="ctr"/>
+          <a:lstStyle/>
+          <a:p>
+            <a:pPr indent="0" marL="0">
+              <a:buNone/>
+            </a:pPr>
+            <a:r>
+              <a:rPr lang="en-US" sz="1200" dirty="0">
+                <a:solidFill>
+                  <a:schemeClr val="tx1"/>
+                </a:solidFill>
+                <a:latin typeface="Courier New" pitchFamily="34" charset="0"/>
+                <a:ea typeface="Courier New" pitchFamily="34" charset="-122"/>
+                <a:cs typeface="Courier New" pitchFamily="34" charset="-120"/>
+              </a:rPr>
+              <a:t>popupPane · 700</a:t>
+            </a:r>
+            <a:endParaRPr lang="en-US" sz="1200" dirty="0"/>
+          </a:p>
+        </p:txBody>
+      </p:sp>
+      <p:sp>
+        <p:nvSpPr>
+          <p:cNvPr id="24011" name="Text 9"/>
+          <p:cNvSpPr txBox="1"/>
+          <p:nvPr/>
+        </p:nvSpPr>
+        <p:spPr>
+          <a:xfrm>
+            <a:off x="5138928" y="1947672"/>
+            <a:ext cx="6302959" cy="384048"/>
+          </a:xfrm>
+          <a:prstGeom prst="rect">
+            <a:avLst/>
+          </a:prstGeom>
+          <a:noFill/>
+          <a:ln/>
+        </p:spPr>
+        <p:txBody>
+          <a:bodyPr wrap="square" lIns="0" tIns="0" rIns="0" bIns="0" rtlCol="0" anchor="ctr"/>
+          <a:lstStyle/>
+          <a:p>
+            <a:pPr indent="0" marL="0">
+              <a:buNone/>
+            </a:pPr>
+            <a:r>
+              <a:rPr lang="en-US" sz="1300" dirty="0">
+                <a:solidFill>
+                  <a:schemeClr val="tx1"/>
+                </a:solidFill>
+              </a:rPr>
+              <a:t>høyreklikkboblen og andre kartbobler</a:t>
+            </a:r>
+            <a:endParaRPr lang="en-US" sz="1300" dirty="0"/>
+          </a:p>
+        </p:txBody>
+      </p:sp>
+      <p:sp>
+        <p:nvSpPr>
+          <p:cNvPr id="24012" name="Lag Markører"/>
+          <p:cNvSpPr/>
+          <p:nvPr/>
+        </p:nvSpPr>
+        <p:spPr>
+          <a:xfrm>
+            <a:off x="548640" y="2377440"/>
+            <a:ext cx="11094415" cy="384048"/>
+          </a:xfrm>
+          <a:prstGeom prst="roundRect">
+            <a:avLst>
+              <a:gd name="adj" fmla="val 16667"/>
+            </a:avLst>
+          </a:prstGeom>
+          <a:solidFill>
+            <a:schemeClr val="bg2"/>
+          </a:solidFill>
+          <a:ln/>
+        </p:spPr>
+      </p:sp>
+      <p:sp>
+        <p:nvSpPr>
+          <p:cNvPr id="24013" name="Text 11"/>
+          <p:cNvSpPr txBox="1"/>
+          <p:nvPr/>
+        </p:nvSpPr>
+        <p:spPr>
+          <a:xfrm>
+            <a:off x="749808" y="2377440"/>
+            <a:ext cx="2240280" cy="384048"/>
+          </a:xfrm>
+          <a:prstGeom prst="rect">
+            <a:avLst/>
+          </a:prstGeom>
+          <a:noFill/>
+          <a:ln/>
+        </p:spPr>
+        <p:txBody>
+          <a:bodyPr wrap="square" lIns="0" tIns="0" rIns="0" bIns="0" rtlCol="0" anchor="ctr"/>
+          <a:lstStyle/>
+          <a:p>
+            <a:pPr indent="0" marL="0">
+              <a:buNone/>
+            </a:pPr>
+            <a:r>
+              <a:rPr lang="en-US" sz="1400" b="1" dirty="0">
+                <a:solidFill>
+                  <a:schemeClr val="tx1"/>
+                </a:solidFill>
+              </a:rPr>
+              <a:t>Markører</a:t>
+            </a:r>
+            <a:endParaRPr lang="en-US" sz="1400" dirty="0"/>
+          </a:p>
+        </p:txBody>
+      </p:sp>
+      <p:sp>
+        <p:nvSpPr>
+          <p:cNvPr id="24014" name="Text 12"/>
+          <p:cNvSpPr txBox="1"/>
+          <p:nvPr/>
+        </p:nvSpPr>
+        <p:spPr>
+          <a:xfrm>
+            <a:off x="3264408" y="2377440"/>
+            <a:ext cx="1783080" cy="384048"/>
+          </a:xfrm>
+          <a:prstGeom prst="rect">
+            <a:avLst/>
+          </a:prstGeom>
+          <a:noFill/>
+          <a:ln/>
+        </p:spPr>
+        <p:txBody>
+          <a:bodyPr wrap="square" lIns="0" tIns="0" rIns="0" bIns="0" rtlCol="0" anchor="ctr"/>
+          <a:lstStyle/>
+          <a:p>
+            <a:pPr indent="0" marL="0">
+              <a:buNone/>
+            </a:pPr>
+            <a:r>
+              <a:rPr lang="en-US" sz="1200" dirty="0">
+                <a:solidFill>
+                  <a:schemeClr val="tx1"/>
+                </a:solidFill>
+                <a:latin typeface="Courier New" pitchFamily="34" charset="0"/>
+                <a:ea typeface="Courier New" pitchFamily="34" charset="-122"/>
+                <a:cs typeface="Courier New" pitchFamily="34" charset="-120"/>
+              </a:rPr>
+              <a:t>markerPane · 600</a:t>
+            </a:r>
+            <a:endParaRPr lang="en-US" sz="1200" dirty="0"/>
+          </a:p>
+        </p:txBody>
+      </p:sp>
+      <p:sp>
+        <p:nvSpPr>
+          <p:cNvPr id="24015" name="Text 13"/>
+          <p:cNvSpPr txBox="1"/>
+          <p:nvPr/>
+        </p:nvSpPr>
+        <p:spPr>
+          <a:xfrm>
+            <a:off x="5138928" y="2377440"/>
+            <a:ext cx="6302959" cy="384048"/>
+          </a:xfrm>
+          <a:prstGeom prst="rect">
+            <a:avLst/>
+          </a:prstGeom>
+          <a:noFill/>
+          <a:ln/>
+        </p:spPr>
+        <p:txBody>
+          <a:bodyPr wrap="square" lIns="0" tIns="0" rIns="0" bIns="0" rtlCol="0" anchor="ctr"/>
+          <a:lstStyle/>
+          <a:p>
+            <a:pPr indent="0" marL="0">
+              <a:buNone/>
+            </a:pPr>
+            <a:r>
+              <a:rPr lang="en-US" sz="1300" dirty="0">
+                <a:solidFill>
+                  <a:schemeClr val="tx1"/>
+                </a:solidFill>
+              </a:rPr>
+              <a:t>cacheikonene på /play/map, merkenåler, etiketter og posisjonen din</a:t>
+            </a:r>
+            <a:endParaRPr lang="en-US" sz="1300" dirty="0"/>
+          </a:p>
+        </p:txBody>
+      </p:sp>
+      <p:sp>
+        <p:nvSpPr>
+          <p:cNvPr id="24016" name="Lag Tegninger"/>
+          <p:cNvSpPr/>
+          <p:nvPr/>
+        </p:nvSpPr>
+        <p:spPr>
+          <a:xfrm>
+            <a:off x="548640" y="2807208"/>
+            <a:ext cx="11094415" cy="384048"/>
+          </a:xfrm>
+          <a:prstGeom prst="roundRect">
+            <a:avLst>
+              <a:gd name="adj" fmla="val 16667"/>
+            </a:avLst>
+          </a:prstGeom>
+          <a:solidFill>
+            <a:schemeClr val="bg2"/>
+          </a:solidFill>
+          <a:ln/>
+        </p:spPr>
+      </p:sp>
+      <p:sp>
+        <p:nvSpPr>
+          <p:cNvPr id="24017" name="Text 15"/>
+          <p:cNvSpPr txBox="1"/>
+          <p:nvPr/>
+        </p:nvSpPr>
+        <p:spPr>
+          <a:xfrm>
+            <a:off x="749808" y="2807208"/>
+            <a:ext cx="2240280" cy="384048"/>
+          </a:xfrm>
+          <a:prstGeom prst="rect">
+            <a:avLst/>
+          </a:prstGeom>
+          <a:noFill/>
+          <a:ln/>
+        </p:spPr>
+        <p:txBody>
+          <a:bodyPr wrap="square" lIns="0" tIns="0" rIns="0" bIns="0" rtlCol="0" anchor="ctr"/>
+          <a:lstStyle/>
+          <a:p>
+            <a:pPr indent="0" marL="0">
+              <a:buNone/>
+            </a:pPr>
+            <a:r>
+              <a:rPr lang="en-US" sz="1400" b="1" dirty="0">
+                <a:solidFill>
+                  <a:schemeClr val="tx1"/>
+                </a:solidFill>
+              </a:rPr>
+              <a:t>Tegninger</a:t>
+            </a:r>
+            <a:endParaRPr lang="en-US" sz="1400" dirty="0"/>
+          </a:p>
+        </p:txBody>
+      </p:sp>
+      <p:sp>
+        <p:nvSpPr>
+          <p:cNvPr id="24018" name="Text 16"/>
+          <p:cNvSpPr txBox="1"/>
+          <p:nvPr/>
+        </p:nvSpPr>
+        <p:spPr>
+          <a:xfrm>
+            <a:off x="3264408" y="2807208"/>
+            <a:ext cx="1783080" cy="384048"/>
+          </a:xfrm>
+          <a:prstGeom prst="rect">
+            <a:avLst/>
+          </a:prstGeom>
+          <a:noFill/>
+          <a:ln/>
+        </p:spPr>
+        <p:txBody>
+          <a:bodyPr wrap="square" lIns="0" tIns="0" rIns="0" bIns="0" rtlCol="0" anchor="ctr"/>
+          <a:lstStyle/>
+          <a:p>
+            <a:pPr indent="0" marL="0">
+              <a:buNone/>
+            </a:pPr>
+            <a:r>
+              <a:rPr lang="en-US" sz="1200" dirty="0">
+                <a:solidFill>
+                  <a:schemeClr val="tx1"/>
+                </a:solidFill>
+                <a:latin typeface="Courier New" pitchFamily="34" charset="0"/>
+                <a:ea typeface="Courier New" pitchFamily="34" charset="-122"/>
+                <a:cs typeface="Courier New" pitchFamily="34" charset="-120"/>
+              </a:rPr>
+              <a:t>overlayPane · 400</a:t>
+            </a:r>
+            <a:endParaRPr lang="en-US" sz="1200" dirty="0"/>
+          </a:p>
+        </p:txBody>
+      </p:sp>
+      <p:sp>
+        <p:nvSpPr>
+          <p:cNvPr id="24019" name="Text 17"/>
+          <p:cNvSpPr txBox="1"/>
+          <p:nvPr/>
+        </p:nvSpPr>
+        <p:spPr>
+          <a:xfrm>
+            <a:off x="5138928" y="2807208"/>
+            <a:ext cx="6302959" cy="384048"/>
+          </a:xfrm>
+          <a:prstGeom prst="rect">
+            <a:avLst/>
+          </a:prstGeom>
+          <a:noFill/>
+          <a:ln/>
+        </p:spPr>
+        <p:txBody>
+          <a:bodyPr wrap="square" lIns="0" tIns="0" rIns="0" bIns="0" rtlCol="0" anchor="ctr"/>
+          <a:lstStyle/>
+          <a:p>
+            <a:pPr indent="0" marL="0">
+              <a:buNone/>
+            </a:pPr>
+            <a:r>
+              <a:rPr lang="en-US" sz="1300" dirty="0">
+                <a:solidFill>
+                  <a:schemeClr val="tx1"/>
+                </a:solidFill>
+              </a:rPr>
+              <a:t>161 m-sirkler, målelinjer, projiseringslinjer og nøyaktighetssirkelen</a:t>
+            </a:r>
+            <a:endParaRPr lang="en-US" sz="1300" dirty="0"/>
+          </a:p>
+        </p:txBody>
+      </p:sp>
+      <p:sp>
+        <p:nvSpPr>
+          <p:cNvPr id="24020" name="Text 18"/>
+          <p:cNvSpPr txBox="1"/>
+          <p:nvPr/>
+        </p:nvSpPr>
+        <p:spPr>
+          <a:xfrm>
+            <a:off x="548640" y="3328416"/>
+            <a:ext cx="11094415" cy="274320"/>
+          </a:xfrm>
+          <a:prstGeom prst="rect">
+            <a:avLst/>
+          </a:prstGeom>
+          <a:noFill/>
+          <a:ln/>
+        </p:spPr>
+        <p:txBody>
+          <a:bodyPr wrap="square" lIns="0" tIns="0" rIns="0" bIns="0" rtlCol="0" anchor="ctr"/>
+          <a:lstStyle/>
+          <a:p>
+            <a:pPr indent="0" marL="0">
+              <a:buNone/>
+            </a:pPr>
+            <a:r>
+              <a:rPr lang="en-US" sz="1100" b="1" spc="100" kern="0" dirty="0">
+                <a:solidFill>
+                  <a:schemeClr val="accent4"/>
+                </a:solidFill>
+              </a:rPr>
+              <a:t>KARTFLISENE (TILEPANE · 200) – SORTERT ETTER Z-INDEKS</a:t>
+            </a:r>
+            <a:endParaRPr lang="en-US" sz="1100" dirty="0"/>
+          </a:p>
+        </p:txBody>
+      </p:sp>
+      <p:sp>
+        <p:nvSpPr>
+          <p:cNvPr id="24021" name="Lag Nettstedets øvrige fliser"/>
+          <p:cNvSpPr/>
+          <p:nvPr/>
+        </p:nvSpPr>
+        <p:spPr>
+          <a:xfrm>
+            <a:off x="548640" y="3639312"/>
+            <a:ext cx="11094415" cy="384048"/>
+          </a:xfrm>
+          <a:prstGeom prst="roundRect">
+            <a:avLst>
+              <a:gd name="adj" fmla="val 16667"/>
+            </a:avLst>
+          </a:prstGeom>
+          <a:solidFill>
+            <a:schemeClr val="accent2"/>
+          </a:solidFill>
+          <a:ln/>
+        </p:spPr>
+      </p:sp>
+      <p:sp>
+        <p:nvSpPr>
+          <p:cNvPr id="24022" name="Text 20"/>
+          <p:cNvSpPr txBox="1"/>
+          <p:nvPr/>
+        </p:nvSpPr>
+        <p:spPr>
+          <a:xfrm>
+            <a:off x="749808" y="3639312"/>
+            <a:ext cx="2240280" cy="384048"/>
+          </a:xfrm>
+          <a:prstGeom prst="rect">
+            <a:avLst/>
+          </a:prstGeom>
+          <a:noFill/>
+          <a:ln/>
+        </p:spPr>
+        <p:txBody>
+          <a:bodyPr wrap="square" lIns="0" tIns="0" rIns="0" bIns="0" rtlCol="0" anchor="ctr"/>
+          <a:lstStyle/>
+          <a:p>
+            <a:pPr indent="0" marL="0">
+              <a:buNone/>
+            </a:pPr>
+            <a:r>
+              <a:rPr lang="en-US" sz="1400" b="1" dirty="0">
+                <a:solidFill>
+                  <a:schemeClr val="bg1"/>
+                </a:solidFill>
+              </a:rPr>
+              <a:t>Nettstedets øvrige fliser</a:t>
+            </a:r>
+            <a:endParaRPr lang="en-US" sz="1400" dirty="0"/>
+          </a:p>
+        </p:txBody>
+      </p:sp>
+      <p:sp>
+        <p:nvSpPr>
+          <p:cNvPr id="24023" name="Text 21"/>
+          <p:cNvSpPr txBox="1"/>
+          <p:nvPr/>
+        </p:nvSpPr>
+        <p:spPr>
+          <a:xfrm>
+            <a:off x="3264408" y="3639312"/>
+            <a:ext cx="1783080" cy="384048"/>
+          </a:xfrm>
+          <a:prstGeom prst="rect">
+            <a:avLst/>
+          </a:prstGeom>
+          <a:noFill/>
+          <a:ln/>
+        </p:spPr>
+        <p:txBody>
+          <a:bodyPr wrap="square" lIns="0" tIns="0" rIns="0" bIns="0" rtlCol="0" anchor="ctr"/>
+          <a:lstStyle/>
+          <a:p>
+            <a:pPr indent="0" marL="0">
+              <a:buNone/>
+            </a:pPr>
+            <a:r>
+              <a:rPr lang="en-US" sz="1200" dirty="0">
+                <a:solidFill>
+                  <a:schemeClr val="bg1"/>
+                </a:solidFill>
+                <a:latin typeface="Courier New" pitchFamily="34" charset="0"/>
+                <a:ea typeface="Courier New" pitchFamily="34" charset="-122"/>
+                <a:cs typeface="Courier New" pitchFamily="34" charset="-120"/>
+              </a:rPr>
+              <a:t>z = bz + 10</a:t>
+            </a:r>
+            <a:endParaRPr lang="en-US" sz="1200" dirty="0"/>
+          </a:p>
+        </p:txBody>
+      </p:sp>
+      <p:sp>
+        <p:nvSpPr>
+          <p:cNvPr id="24024" name="Text 22"/>
+          <p:cNvSpPr txBox="1"/>
+          <p:nvPr/>
+        </p:nvSpPr>
+        <p:spPr>
+          <a:xfrm>
+            <a:off x="5138928" y="3639312"/>
+            <a:ext cx="6302959" cy="384048"/>
+          </a:xfrm>
+          <a:prstGeom prst="rect">
+            <a:avLst/>
+          </a:prstGeom>
+          <a:noFill/>
+          <a:ln/>
+        </p:spPr>
+        <p:txBody>
+          <a:bodyPr wrap="square" lIns="0" tIns="0" rIns="0" bIns="0" rtlCol="0" anchor="ctr"/>
+          <a:lstStyle/>
+          <a:p>
+            <a:pPr indent="0" marL="0">
+              <a:buNone/>
+            </a:pPr>
+            <a:r>
+              <a:rPr lang="en-US" sz="1300" dirty="0">
+                <a:solidFill>
+                  <a:schemeClr val="bg1"/>
+                </a:solidFill>
+              </a:rPr>
+              <a:t>cacheikonene på /map – løftes alltid over dine lag</a:t>
+            </a:r>
+            <a:endParaRPr lang="en-US" sz="1300" dirty="0"/>
+          </a:p>
+        </p:txBody>
+      </p:sp>
+      <p:sp>
+        <p:nvSpPr>
+          <p:cNvPr id="24025" name="Lag Forhåndsvisning"/>
+          <p:cNvSpPr/>
+          <p:nvPr/>
+        </p:nvSpPr>
+        <p:spPr>
+          <a:xfrm>
+            <a:off x="548640" y="4069080"/>
+            <a:ext cx="11094415" cy="384048"/>
+          </a:xfrm>
+          <a:prstGeom prst="roundRect">
+            <a:avLst>
+              <a:gd name="adj" fmla="val 16667"/>
+            </a:avLst>
+          </a:prstGeom>
+          <a:solidFill>
+            <a:schemeClr val="accent3"/>
+          </a:solidFill>
+          <a:ln/>
+        </p:spPr>
+      </p:sp>
+      <p:sp>
+        <p:nvSpPr>
+          <p:cNvPr id="24026" name="Text 24"/>
+          <p:cNvSpPr txBox="1"/>
+          <p:nvPr/>
+        </p:nvSpPr>
+        <p:spPr>
+          <a:xfrm>
+            <a:off x="749808" y="4069080"/>
+            <a:ext cx="2240280" cy="384048"/>
+          </a:xfrm>
+          <a:prstGeom prst="rect">
+            <a:avLst/>
+          </a:prstGeom>
+          <a:noFill/>
+          <a:ln/>
+        </p:spPr>
+        <p:txBody>
+          <a:bodyPr wrap="square" lIns="0" tIns="0" rIns="0" bIns="0" rtlCol="0" anchor="ctr"/>
+          <a:lstStyle/>
+          <a:p>
+            <a:pPr indent="0" marL="0">
+              <a:buNone/>
+            </a:pPr>
+            <a:r>
+              <a:rPr lang="en-US" sz="1400" b="1" dirty="0">
+                <a:solidFill>
+                  <a:schemeClr val="bg1"/>
+                </a:solidFill>
+              </a:rPr>
+              <a:t>Forhåndsvisning</a:t>
+            </a:r>
+            <a:endParaRPr lang="en-US" sz="1400" dirty="0"/>
+          </a:p>
+        </p:txBody>
+      </p:sp>
+      <p:sp>
+        <p:nvSpPr>
+          <p:cNvPr id="24027" name="Text 25"/>
+          <p:cNvSpPr txBox="1"/>
+          <p:nvPr/>
+        </p:nvSpPr>
+        <p:spPr>
+          <a:xfrm>
+            <a:off x="3264408" y="4069080"/>
+            <a:ext cx="1783080" cy="384048"/>
+          </a:xfrm>
+          <a:prstGeom prst="rect">
+            <a:avLst/>
+          </a:prstGeom>
+          <a:noFill/>
+          <a:ln/>
+        </p:spPr>
+        <p:txBody>
+          <a:bodyPr wrap="square" lIns="0" tIns="0" rIns="0" bIns="0" rtlCol="0" anchor="ctr"/>
+          <a:lstStyle/>
+          <a:p>
+            <a:pPr indent="0" marL="0">
+              <a:buNone/>
+            </a:pPr>
+            <a:r>
+              <a:rPr lang="en-US" sz="1200" dirty="0">
+                <a:solidFill>
+                  <a:schemeClr val="bg1"/>
+                </a:solidFill>
+                <a:latin typeface="Courier New" pitchFamily="34" charset="0"/>
+                <a:ea typeface="Courier New" pitchFamily="34" charset="-122"/>
+                <a:cs typeface="Courier New" pitchFamily="34" charset="-120"/>
+              </a:rPr>
+              <a:t>z = bz + 3</a:t>
+            </a:r>
+            <a:endParaRPr lang="en-US" sz="1200" dirty="0"/>
+          </a:p>
+        </p:txBody>
+      </p:sp>
+      <p:sp>
+        <p:nvSpPr>
+          <p:cNvPr id="24028" name="Text 26"/>
+          <p:cNvSpPr txBox="1"/>
+          <p:nvPr/>
+        </p:nvSpPr>
+        <p:spPr>
+          <a:xfrm>
+            <a:off x="5138928" y="4069080"/>
+            <a:ext cx="6302959" cy="384048"/>
+          </a:xfrm>
+          <a:prstGeom prst="rect">
+            <a:avLst/>
+          </a:prstGeom>
+          <a:noFill/>
+          <a:ln/>
+        </p:spPr>
+        <p:txBody>
+          <a:bodyPr wrap="square" lIns="0" tIns="0" rIns="0" bIns="0" rtlCol="0" anchor="ctr"/>
+          <a:lstStyle/>
+          <a:p>
+            <a:pPr indent="0" marL="0">
+              <a:buNone/>
+            </a:pPr>
+            <a:r>
+              <a:rPr lang="en-US" sz="1300" dirty="0">
+                <a:solidFill>
+                  <a:schemeClr val="bg1"/>
+                </a:solidFill>
+              </a:rPr>
+              <a:t>laget du prøver i redigeringsdialogen</a:t>
+            </a:r>
+            <a:endParaRPr lang="en-US" sz="1300" dirty="0"/>
+          </a:p>
+        </p:txBody>
+      </p:sp>
+      <p:sp>
+        <p:nvSpPr>
+          <p:cNvPr id="24029" name="Lag Dine overlegg"/>
+          <p:cNvSpPr/>
+          <p:nvPr/>
+        </p:nvSpPr>
+        <p:spPr>
+          <a:xfrm>
+            <a:off x="548640" y="4498848"/>
+            <a:ext cx="11094415" cy="384048"/>
+          </a:xfrm>
+          <a:prstGeom prst="roundRect">
+            <a:avLst>
+              <a:gd name="adj" fmla="val 16667"/>
+            </a:avLst>
           </a:prstGeom>
           <a:solidFill>
             <a:schemeClr val="accent1"/>
@@ -6028,40 +6131,16 @@
           <a:ln/>
         </p:spPr>
       </p:sp>
-      <p:pic>
-        <p:nvPicPr>
-          <p:cNvPr id="24004" name="Ikon layers" descr="layers">    </p:cNvPr>
-          <p:cNvPicPr>
-            <a:picLocks noChangeAspect="1"/>
-          </p:cNvPicPr>
-          <p:nvPr/>
-        </p:nvPicPr>
-        <p:blipFill>
-          <a:blip r:embed="rId1"/>
-          <a:stretch>
-            <a:fillRect/>
-          </a:stretch>
-        </p:blipFill>
-        <p:spPr>
-          <a:xfrm>
-            <a:off x="661294" y="1703710"/>
-            <a:ext cx="286756" cy="286756"/>
-          </a:xfrm>
-          <a:prstGeom prst="rect">
-            <a:avLst/>
-          </a:prstGeom>
-        </p:spPr>
-      </p:pic>
-      <p:sp>
-        <p:nvSpPr>
-          <p:cNvPr id="24005" name="Text 2"/>
+      <p:sp>
+        <p:nvSpPr>
+          <p:cNvPr id="24030" name="Text 28"/>
           <p:cNvSpPr txBox="1"/>
           <p:nvPr/>
         </p:nvSpPr>
         <p:spPr>
           <a:xfrm>
-            <a:off x="1261872" y="1517904"/>
-            <a:ext cx="4590288" cy="1280160"/>
+            <a:off x="749808" y="4498848"/>
+            <a:ext cx="2240280" cy="384048"/>
           </a:xfrm>
           <a:prstGeom prst="rect">
             <a:avLst/>
@@ -6070,547 +6149,404 @@
           <a:ln/>
         </p:spPr>
         <p:txBody>
+          <a:bodyPr wrap="square" lIns="0" tIns="0" rIns="0" bIns="0" rtlCol="0" anchor="ctr"/>
+          <a:lstStyle/>
+          <a:p>
+            <a:pPr indent="0" marL="0">
+              <a:buNone/>
+            </a:pPr>
+            <a:r>
+              <a:rPr lang="en-US" sz="1400" b="1" dirty="0">
+                <a:solidFill>
+                  <a:schemeClr val="bg1"/>
+                </a:solidFill>
+              </a:rPr>
+              <a:t>Dine overlegg</a:t>
+            </a:r>
+            <a:endParaRPr lang="en-US" sz="1400" dirty="0"/>
+          </a:p>
+        </p:txBody>
+      </p:sp>
+      <p:sp>
+        <p:nvSpPr>
+          <p:cNvPr id="24031" name="Text 29"/>
+          <p:cNvSpPr txBox="1"/>
+          <p:nvPr/>
+        </p:nvSpPr>
+        <p:spPr>
+          <a:xfrm>
+            <a:off x="3264408" y="4498848"/>
+            <a:ext cx="1783080" cy="384048"/>
+          </a:xfrm>
+          <a:prstGeom prst="rect">
+            <a:avLst/>
+          </a:prstGeom>
+          <a:noFill/>
+          <a:ln/>
+        </p:spPr>
+        <p:txBody>
+          <a:bodyPr wrap="square" lIns="0" tIns="0" rIns="0" bIns="0" rtlCol="0" anchor="ctr"/>
+          <a:lstStyle/>
+          <a:p>
+            <a:pPr indent="0" marL="0">
+              <a:buNone/>
+            </a:pPr>
+            <a:r>
+              <a:rPr lang="en-US" sz="1200" dirty="0">
+                <a:solidFill>
+                  <a:schemeClr val="bg1"/>
+                </a:solidFill>
+                <a:latin typeface="Courier New" pitchFamily="34" charset="0"/>
+                <a:ea typeface="Courier New" pitchFamily="34" charset="-122"/>
+                <a:cs typeface="Courier New" pitchFamily="34" charset="-120"/>
+              </a:rPr>
+              <a:t>z = bz + 2</a:t>
+            </a:r>
+            <a:endParaRPr lang="en-US" sz="1200" dirty="0"/>
+          </a:p>
+        </p:txBody>
+      </p:sp>
+      <p:sp>
+        <p:nvSpPr>
+          <p:cNvPr id="24032" name="Text 30"/>
+          <p:cNvSpPr txBox="1"/>
+          <p:nvPr/>
+        </p:nvSpPr>
+        <p:spPr>
+          <a:xfrm>
+            <a:off x="5138928" y="4498848"/>
+            <a:ext cx="6302959" cy="384048"/>
+          </a:xfrm>
+          <a:prstGeom prst="rect">
+            <a:avLst/>
+          </a:prstGeom>
+          <a:noFill/>
+          <a:ln/>
+        </p:spPr>
+        <p:txBody>
+          <a:bodyPr wrap="square" lIns="0" tIns="0" rIns="0" bIns="0" rtlCol="0" anchor="ctr"/>
+          <a:lstStyle/>
+          <a:p>
+            <a:pPr indent="0" marL="0">
+              <a:buNone/>
+            </a:pPr>
+            <a:r>
+              <a:rPr lang="en-US" sz="1300" dirty="0">
+                <a:solidFill>
+                  <a:schemeClr val="bg1"/>
+                </a:solidFill>
+              </a:rPr>
+              <a:t>turruter, eiendomsgrenser, terrengskygge – egen glidebryter for synlighet</a:t>
+            </a:r>
+            <a:endParaRPr lang="en-US" sz="1300" dirty="0"/>
+          </a:p>
+        </p:txBody>
+      </p:sp>
+      <p:sp>
+        <p:nvSpPr>
+          <p:cNvPr id="24033" name="Lag Ditt bakgrunnskart"/>
+          <p:cNvSpPr/>
+          <p:nvPr/>
+        </p:nvSpPr>
+        <p:spPr>
+          <a:xfrm>
+            <a:off x="548640" y="4928616"/>
+            <a:ext cx="11094415" cy="384048"/>
+          </a:xfrm>
+          <a:prstGeom prst="roundRect">
+            <a:avLst>
+              <a:gd name="adj" fmla="val 16667"/>
+            </a:avLst>
+          </a:prstGeom>
+          <a:solidFill>
+            <a:schemeClr val="tx2"/>
+          </a:solidFill>
+          <a:ln/>
+        </p:spPr>
+      </p:sp>
+      <p:sp>
+        <p:nvSpPr>
+          <p:cNvPr id="24034" name="Text 32"/>
+          <p:cNvSpPr txBox="1"/>
+          <p:nvPr/>
+        </p:nvSpPr>
+        <p:spPr>
+          <a:xfrm>
+            <a:off x="749808" y="4928616"/>
+            <a:ext cx="2240280" cy="384048"/>
+          </a:xfrm>
+          <a:prstGeom prst="rect">
+            <a:avLst/>
+          </a:prstGeom>
+          <a:noFill/>
+          <a:ln/>
+        </p:spPr>
+        <p:txBody>
+          <a:bodyPr wrap="square" lIns="0" tIns="0" rIns="0" bIns="0" rtlCol="0" anchor="ctr"/>
+          <a:lstStyle/>
+          <a:p>
+            <a:pPr indent="0" marL="0">
+              <a:buNone/>
+            </a:pPr>
+            <a:r>
+              <a:rPr lang="en-US" sz="1400" b="1" dirty="0">
+                <a:solidFill>
+                  <a:schemeClr val="bg1"/>
+                </a:solidFill>
+              </a:rPr>
+              <a:t>Ditt bakgrunnskart</a:t>
+            </a:r>
+            <a:endParaRPr lang="en-US" sz="1400" dirty="0"/>
+          </a:p>
+        </p:txBody>
+      </p:sp>
+      <p:sp>
+        <p:nvSpPr>
+          <p:cNvPr id="24035" name="Text 33"/>
+          <p:cNvSpPr txBox="1"/>
+          <p:nvPr/>
+        </p:nvSpPr>
+        <p:spPr>
+          <a:xfrm>
+            <a:off x="3264408" y="4928616"/>
+            <a:ext cx="1783080" cy="384048"/>
+          </a:xfrm>
+          <a:prstGeom prst="rect">
+            <a:avLst/>
+          </a:prstGeom>
+          <a:noFill/>
+          <a:ln/>
+        </p:spPr>
+        <p:txBody>
+          <a:bodyPr wrap="square" lIns="0" tIns="0" rIns="0" bIns="0" rtlCol="0" anchor="ctr"/>
+          <a:lstStyle/>
+          <a:p>
+            <a:pPr indent="0" marL="0">
+              <a:buNone/>
+            </a:pPr>
+            <a:r>
+              <a:rPr lang="en-US" sz="1200" dirty="0">
+                <a:solidFill>
+                  <a:schemeClr val="bg1"/>
+                </a:solidFill>
+                <a:latin typeface="Courier New" pitchFamily="34" charset="0"/>
+                <a:ea typeface="Courier New" pitchFamily="34" charset="-122"/>
+                <a:cs typeface="Courier New" pitchFamily="34" charset="-120"/>
+              </a:rPr>
+              <a:t>z = bz + 1</a:t>
+            </a:r>
+            <a:endParaRPr lang="en-US" sz="1200" dirty="0"/>
+          </a:p>
+        </p:txBody>
+      </p:sp>
+      <p:sp>
+        <p:nvSpPr>
+          <p:cNvPr id="24036" name="Text 34"/>
+          <p:cNvSpPr txBox="1"/>
+          <p:nvPr/>
+        </p:nvSpPr>
+        <p:spPr>
+          <a:xfrm>
+            <a:off x="5138928" y="4928616"/>
+            <a:ext cx="6302959" cy="384048"/>
+          </a:xfrm>
+          <a:prstGeom prst="rect">
+            <a:avLst/>
+          </a:prstGeom>
+          <a:noFill/>
+          <a:ln/>
+        </p:spPr>
+        <p:txBody>
+          <a:bodyPr wrap="square" lIns="0" tIns="0" rIns="0" bIns="0" rtlCol="0" anchor="ctr"/>
+          <a:lstStyle/>
+          <a:p>
+            <a:pPr indent="0" marL="0">
+              <a:buNone/>
+            </a:pPr>
+            <a:r>
+              <a:rPr lang="en-US" sz="1300" dirty="0">
+                <a:solidFill>
+                  <a:schemeClr val="bg1"/>
+                </a:solidFill>
+              </a:rPr>
+              <a:t>helt dekkende – dempes mot hvitt med fargefilter, høyst 50 %</a:t>
+            </a:r>
+            <a:endParaRPr lang="en-US" sz="1300" dirty="0"/>
+          </a:p>
+        </p:txBody>
+      </p:sp>
+      <p:sp>
+        <p:nvSpPr>
+          <p:cNvPr id="24037" name="Lag geocaching.com-kartet"/>
+          <p:cNvSpPr/>
+          <p:nvPr/>
+        </p:nvSpPr>
+        <p:spPr>
+          <a:xfrm>
+            <a:off x="548640" y="5358384"/>
+            <a:ext cx="11094415" cy="384048"/>
+          </a:xfrm>
+          <a:prstGeom prst="roundRect">
+            <a:avLst>
+              <a:gd name="adj" fmla="val 16667"/>
+            </a:avLst>
+          </a:prstGeom>
+          <a:solidFill>
+            <a:schemeClr val="accent5"/>
+          </a:solidFill>
+          <a:ln/>
+        </p:spPr>
+      </p:sp>
+      <p:sp>
+        <p:nvSpPr>
+          <p:cNvPr id="24038" name="Text 36"/>
+          <p:cNvSpPr txBox="1"/>
+          <p:nvPr/>
+        </p:nvSpPr>
+        <p:spPr>
+          <a:xfrm>
+            <a:off x="749808" y="5358384"/>
+            <a:ext cx="2240280" cy="384048"/>
+          </a:xfrm>
+          <a:prstGeom prst="rect">
+            <a:avLst/>
+          </a:prstGeom>
+          <a:noFill/>
+          <a:ln/>
+        </p:spPr>
+        <p:txBody>
+          <a:bodyPr wrap="square" lIns="0" tIns="0" rIns="0" bIns="0" rtlCol="0" anchor="ctr"/>
+          <a:lstStyle/>
+          <a:p>
+            <a:pPr indent="0" marL="0">
+              <a:buNone/>
+            </a:pPr>
+            <a:r>
+              <a:rPr lang="en-US" sz="1400" b="1" dirty="0">
+                <a:solidFill>
+                  <a:schemeClr val="tx1"/>
+                </a:solidFill>
+              </a:rPr>
+              <a:t>geocaching.com-kartet</a:t>
+            </a:r>
+            <a:endParaRPr lang="en-US" sz="1400" dirty="0"/>
+          </a:p>
+        </p:txBody>
+      </p:sp>
+      <p:sp>
+        <p:nvSpPr>
+          <p:cNvPr id="24039" name="Text 37"/>
+          <p:cNvSpPr txBox="1"/>
+          <p:nvPr/>
+        </p:nvSpPr>
+        <p:spPr>
+          <a:xfrm>
+            <a:off x="3264408" y="5358384"/>
+            <a:ext cx="1783080" cy="384048"/>
+          </a:xfrm>
+          <a:prstGeom prst="rect">
+            <a:avLst/>
+          </a:prstGeom>
+          <a:noFill/>
+          <a:ln/>
+        </p:spPr>
+        <p:txBody>
+          <a:bodyPr wrap="square" lIns="0" tIns="0" rIns="0" bIns="0" rtlCol="0" anchor="ctr"/>
+          <a:lstStyle/>
+          <a:p>
+            <a:pPr indent="0" marL="0">
+              <a:buNone/>
+            </a:pPr>
+            <a:r>
+              <a:rPr lang="en-US" sz="1200" dirty="0">
+                <a:solidFill>
+                  <a:schemeClr val="tx1"/>
+                </a:solidFill>
+                <a:latin typeface="Courier New" pitchFamily="34" charset="0"/>
+                <a:ea typeface="Courier New" pitchFamily="34" charset="-122"/>
+                <a:cs typeface="Courier New" pitchFamily="34" charset="-120"/>
+              </a:rPr>
+              <a:t>z = bz</a:t>
+            </a:r>
+            <a:endParaRPr lang="en-US" sz="1200" dirty="0"/>
+          </a:p>
+        </p:txBody>
+      </p:sp>
+      <p:sp>
+        <p:nvSpPr>
+          <p:cNvPr id="24040" name="Text 38"/>
+          <p:cNvSpPr txBox="1"/>
+          <p:nvPr/>
+        </p:nvSpPr>
+        <p:spPr>
+          <a:xfrm>
+            <a:off x="5138928" y="5358384"/>
+            <a:ext cx="6302959" cy="384048"/>
+          </a:xfrm>
+          <a:prstGeom prst="rect">
+            <a:avLst/>
+          </a:prstGeom>
+          <a:noFill/>
+          <a:ln/>
+        </p:spPr>
+        <p:txBody>
+          <a:bodyPr wrap="square" lIns="0" tIns="0" rIns="0" bIns="0" rtlCol="0" anchor="ctr"/>
+          <a:lstStyle/>
+          <a:p>
+            <a:pPr indent="0" marL="0">
+              <a:buNone/>
+            </a:pPr>
+            <a:r>
+              <a:rPr lang="en-US" sz="1300" dirty="0">
+                <a:solidFill>
+                  <a:schemeClr val="tx1"/>
+                </a:solidFill>
+              </a:rPr>
+              <a:t>nettstedets bakgrunn – dekkes av ditt kart, dempes når det selv er valgt</a:t>
+            </a:r>
+            <a:endParaRPr lang="en-US" sz="1300" dirty="0"/>
+          </a:p>
+        </p:txBody>
+      </p:sp>
+      <p:sp>
+        <p:nvSpPr>
+          <p:cNvPr id="24041" name="Text 39"/>
+          <p:cNvSpPr txBox="1"/>
+          <p:nvPr/>
+        </p:nvSpPr>
+        <p:spPr>
+          <a:xfrm>
+            <a:off x="548640" y="5861304"/>
+            <a:ext cx="11094415" cy="457200"/>
+          </a:xfrm>
+          <a:prstGeom prst="rect">
+            <a:avLst/>
+          </a:prstGeom>
+          <a:noFill/>
+          <a:ln/>
+        </p:spPr>
+        <p:txBody>
           <a:bodyPr wrap="square" lIns="0" tIns="0" rIns="0" bIns="0" rtlCol="0" anchor="t"/>
           <a:lstStyle/>
           <a:p>
             <a:pPr indent="0" marL="0">
-              <a:spcAft>
-                <a:spcPts val="200"/>
-              </a:spcAft>
-              <a:buNone/>
-            </a:pPr>
-            <a:r>
-              <a:rPr lang="en-US" sz="1700" b="1" dirty="0">
-                <a:solidFill>
-                  <a:schemeClr val="tx1"/>
-                </a:solidFill>
-              </a:rPr>
-              <a:t>Fjerner aldri nettstedets lag</a:t>
-            </a:r>
-            <a:endParaRPr lang="en-US" sz="1700" dirty="0"/>
-          </a:p>
-          <a:p>
-            <a:pPr indent="0" marL="0">
-              <a:spcAft>
-                <a:spcPts val="200"/>
-              </a:spcAft>
-              <a:buNone/>
-            </a:pPr>
-            <a:r>
-              <a:rPr lang="en-US" sz="1400" dirty="0">
+              <a:buNone/>
+            </a:pPr>
+            <a:r>
+              <a:rPr lang="en-US" sz="1150" dirty="0">
                 <a:solidFill>
                   <a:schemeClr val="accent4"/>
                 </a:solidFill>
               </a:rPr>
-              <a:t>Skriptet legger sine egne lag inn mellom, sortert etter z-indeks</a:t>
-            </a:r>
-            <a:endParaRPr lang="en-US" sz="1700" dirty="0"/>
-          </a:p>
-        </p:txBody>
-      </p:sp>
-      <p:sp>
-        <p:nvSpPr>
-          <p:cNvPr id="24006" name="Ikon eraser sirkel"/>
-          <p:cNvSpPr/>
-          <p:nvPr/>
-        </p:nvSpPr>
-        <p:spPr>
-          <a:xfrm>
-            <a:off x="548640" y="2916936"/>
-            <a:ext cx="512064" cy="512064"/>
-          </a:xfrm>
-          <a:prstGeom prst="ellipse">
-            <a:avLst/>
-          </a:prstGeom>
-          <a:solidFill>
-            <a:schemeClr val="accent1"/>
-          </a:solidFill>
-          <a:ln/>
-        </p:spPr>
-      </p:sp>
-      <p:pic>
-        <p:nvPicPr>
-          <p:cNvPr id="24007" name="Ikon eraser" descr="eraser">    </p:cNvPr>
-          <p:cNvPicPr>
-            <a:picLocks noChangeAspect="1"/>
-          </p:cNvPicPr>
-          <p:nvPr/>
-        </p:nvPicPr>
-        <p:blipFill>
-          <a:blip r:embed="rId2"/>
-          <a:stretch>
-            <a:fillRect/>
-          </a:stretch>
-        </p:blipFill>
-        <p:spPr>
-          <a:xfrm>
-            <a:off x="661294" y="3029590"/>
-            <a:ext cx="286756" cy="286756"/>
-          </a:xfrm>
-          <a:prstGeom prst="rect">
-            <a:avLst/>
-          </a:prstGeom>
-        </p:spPr>
-      </p:pic>
-      <p:sp>
-        <p:nvSpPr>
-          <p:cNvPr id="24008" name="Text 4"/>
-          <p:cNvSpPr txBox="1"/>
-          <p:nvPr/>
-        </p:nvSpPr>
-        <p:spPr>
-          <a:xfrm>
-            <a:off x="1261872" y="2843784"/>
-            <a:ext cx="4590288" cy="1280160"/>
-          </a:xfrm>
-          <a:prstGeom prst="rect">
-            <a:avLst/>
-          </a:prstGeom>
-          <a:noFill/>
-          <a:ln/>
-        </p:spPr>
-        <p:txBody>
-          <a:bodyPr wrap="square" lIns="0" tIns="0" rIns="0" bIns="0" rtlCol="0" anchor="t"/>
-          <a:lstStyle/>
-          <a:p>
-            <a:pPr indent="0" marL="0">
-              <a:spcAft>
-                <a:spcPts val="200"/>
-              </a:spcAft>
-              <a:buNone/>
-            </a:pPr>
-            <a:r>
-              <a:rPr lang="en-US" sz="1700" b="1" dirty="0">
-                <a:solidFill>
-                  <a:schemeClr val="tx1"/>
-                </a:solidFill>
-              </a:rPr>
-              <a:t>Ingen skjøter mellom flisene</a:t>
-            </a:r>
-            <a:endParaRPr lang="en-US" sz="1700" dirty="0"/>
-          </a:p>
-          <a:p>
-            <a:pPr indent="0" marL="0">
-              <a:spcAft>
-                <a:spcPts val="200"/>
-              </a:spcAft>
-              <a:buNone/>
-            </a:pPr>
-            <a:r>
-              <a:rPr lang="en-US" sz="1400" dirty="0">
-                <a:solidFill>
-                  <a:schemeClr val="accent4"/>
-                </a:solidFill>
-              </a:rPr>
-              <a:t>Flisene tegnes 1 piksel større, også ved 110 og 125 % skjermskalering</a:t>
-            </a:r>
-            <a:endParaRPr lang="en-US" sz="1700" dirty="0"/>
-          </a:p>
-        </p:txBody>
-      </p:sp>
-      <p:sp>
-        <p:nvSpPr>
-          <p:cNvPr id="24009" name="Ikon ring sirkel"/>
-          <p:cNvSpPr/>
-          <p:nvPr/>
-        </p:nvSpPr>
-        <p:spPr>
-          <a:xfrm>
-            <a:off x="548640" y="4242816"/>
-            <a:ext cx="512064" cy="512064"/>
-          </a:xfrm>
-          <a:prstGeom prst="ellipse">
-            <a:avLst/>
-          </a:prstGeom>
-          <a:solidFill>
-            <a:schemeClr val="accent1"/>
-          </a:solidFill>
-          <a:ln/>
-        </p:spPr>
-      </p:sp>
-      <p:pic>
-        <p:nvPicPr>
-          <p:cNvPr id="24010" name="Ikon ring" descr="ring">    </p:cNvPr>
-          <p:cNvPicPr>
-            <a:picLocks noChangeAspect="1"/>
-          </p:cNvPicPr>
-          <p:nvPr/>
-        </p:nvPicPr>
-        <p:blipFill>
-          <a:blip r:embed="rId3"/>
-          <a:stretch>
-            <a:fillRect/>
-          </a:stretch>
-        </p:blipFill>
-        <p:spPr>
-          <a:xfrm>
-            <a:off x="661294" y="4355470"/>
-            <a:ext cx="286756" cy="286756"/>
-          </a:xfrm>
-          <a:prstGeom prst="rect">
-            <a:avLst/>
-          </a:prstGeom>
-        </p:spPr>
-      </p:pic>
-      <p:sp>
-        <p:nvSpPr>
-          <p:cNvPr id="24011" name="Text 6"/>
-          <p:cNvSpPr txBox="1"/>
-          <p:nvPr/>
-        </p:nvSpPr>
-        <p:spPr>
-          <a:xfrm>
-            <a:off x="1261872" y="4169664"/>
-            <a:ext cx="4590288" cy="1280160"/>
-          </a:xfrm>
-          <a:prstGeom prst="rect">
-            <a:avLst/>
-          </a:prstGeom>
-          <a:noFill/>
-          <a:ln/>
-        </p:spPr>
-        <p:txBody>
-          <a:bodyPr wrap="square" lIns="0" tIns="0" rIns="0" bIns="0" rtlCol="0" anchor="t"/>
-          <a:lstStyle/>
-          <a:p>
-            <a:pPr indent="0" marL="0">
-              <a:spcAft>
-                <a:spcPts val="200"/>
-              </a:spcAft>
-              <a:buNone/>
-            </a:pPr>
-            <a:r>
-              <a:rPr lang="en-US" sz="1700" b="1" dirty="0">
-                <a:solidFill>
-                  <a:schemeClr val="tx1"/>
-                </a:solidFill>
-              </a:rPr>
-              <a:t>Demping uten gjennomskinn</a:t>
-            </a:r>
-            <a:endParaRPr lang="en-US" sz="1700" dirty="0"/>
-          </a:p>
-          <a:p>
-            <a:pPr indent="0" marL="0">
-              <a:spcAft>
-                <a:spcPts val="200"/>
-              </a:spcAft>
-              <a:buNone/>
-            </a:pPr>
-            <a:r>
-              <a:rPr lang="en-US" sz="1400" dirty="0">
-                <a:solidFill>
-                  <a:schemeClr val="accent4"/>
-                </a:solidFill>
-              </a:rPr>
-              <a:t>Et fargefilter bleker kartet mot hvitt – nettstedets kart skinner aldri gjennom</a:t>
-            </a:r>
-            <a:endParaRPr lang="en-US" sz="1700" dirty="0"/>
-          </a:p>
-        </p:txBody>
-      </p:sp>
-      <p:sp>
-        <p:nvSpPr>
-          <p:cNvPr id="24012" name="Ikon locate sirkel"/>
-          <p:cNvSpPr/>
-          <p:nvPr/>
-        </p:nvSpPr>
-        <p:spPr>
-          <a:xfrm>
-            <a:off x="6355080" y="1591056"/>
-            <a:ext cx="512064" cy="512064"/>
-          </a:xfrm>
-          <a:prstGeom prst="ellipse">
-            <a:avLst/>
-          </a:prstGeom>
-          <a:solidFill>
-            <a:schemeClr val="accent1"/>
-          </a:solidFill>
-          <a:ln/>
-        </p:spPr>
-      </p:sp>
-      <p:pic>
-        <p:nvPicPr>
-          <p:cNvPr id="24013" name="Ikon locate" descr="locate">    </p:cNvPr>
-          <p:cNvPicPr>
-            <a:picLocks noChangeAspect="1"/>
-          </p:cNvPicPr>
-          <p:nvPr/>
-        </p:nvPicPr>
-        <p:blipFill>
-          <a:blip r:embed="rId4"/>
-          <a:stretch>
-            <a:fillRect/>
-          </a:stretch>
-        </p:blipFill>
-        <p:spPr>
-          <a:xfrm>
-            <a:off x="6467734" y="1703710"/>
-            <a:ext cx="286756" cy="286756"/>
-          </a:xfrm>
-          <a:prstGeom prst="rect">
-            <a:avLst/>
-          </a:prstGeom>
-        </p:spPr>
-      </p:pic>
-      <p:sp>
-        <p:nvSpPr>
-          <p:cNvPr id="24014" name="Text 8"/>
-          <p:cNvSpPr txBox="1"/>
-          <p:nvPr/>
-        </p:nvSpPr>
-        <p:spPr>
-          <a:xfrm>
-            <a:off x="7068312" y="1517904"/>
-            <a:ext cx="4590288" cy="1280160"/>
-          </a:xfrm>
-          <a:prstGeom prst="rect">
-            <a:avLst/>
-          </a:prstGeom>
-          <a:noFill/>
-          <a:ln/>
-        </p:spPr>
-        <p:txBody>
-          <a:bodyPr wrap="square" lIns="0" tIns="0" rIns="0" bIns="0" rtlCol="0" anchor="t"/>
-          <a:lstStyle/>
-          <a:p>
-            <a:pPr indent="0" marL="0">
-              <a:spcAft>
-                <a:spcPts val="200"/>
-              </a:spcAft>
-              <a:buNone/>
-            </a:pPr>
-            <a:r>
-              <a:rPr lang="en-US" sz="1700" b="1" dirty="0">
-                <a:solidFill>
-                  <a:schemeClr val="tx1"/>
-                </a:solidFill>
-              </a:rPr>
-              <a:t>Finner kartet selv</a:t>
-            </a:r>
-            <a:endParaRPr lang="en-US" sz="1700" dirty="0"/>
-          </a:p>
-          <a:p>
-            <a:pPr indent="0" marL="0">
-              <a:spcAft>
-                <a:spcPts val="200"/>
-              </a:spcAft>
-              <a:buNone/>
-            </a:pPr>
-            <a:r>
-              <a:rPr lang="en-US" sz="1400" dirty="0">
-                <a:solidFill>
-                  <a:schemeClr val="accent4"/>
-                </a:solidFill>
-              </a:rPr>
-              <a:t>Fanger opp Leaflet når siden laster, også på /play/map og cachesidene</a:t>
-            </a:r>
-            <a:endParaRPr lang="en-US" sz="1700" dirty="0"/>
-          </a:p>
-        </p:txBody>
-      </p:sp>
-      <p:sp>
-        <p:nvSpPr>
-          <p:cNvPr id="24015" name="Ikon check sirkel"/>
-          <p:cNvSpPr/>
-          <p:nvPr/>
-        </p:nvSpPr>
-        <p:spPr>
-          <a:xfrm>
-            <a:off x="6355080" y="2916936"/>
-            <a:ext cx="512064" cy="512064"/>
-          </a:xfrm>
-          <a:prstGeom prst="ellipse">
-            <a:avLst/>
-          </a:prstGeom>
-          <a:solidFill>
-            <a:schemeClr val="accent1"/>
-          </a:solidFill>
-          <a:ln/>
-        </p:spPr>
-      </p:sp>
-      <p:pic>
-        <p:nvPicPr>
-          <p:cNvPr id="24016" name="Ikon check" descr="check">    </p:cNvPr>
-          <p:cNvPicPr>
-            <a:picLocks noChangeAspect="1"/>
-          </p:cNvPicPr>
-          <p:nvPr/>
-        </p:nvPicPr>
-        <p:blipFill>
-          <a:blip r:embed="rId5"/>
-          <a:stretch>
-            <a:fillRect/>
-          </a:stretch>
-        </p:blipFill>
-        <p:spPr>
-          <a:xfrm>
-            <a:off x="6467734" y="3029590"/>
-            <a:ext cx="286756" cy="286756"/>
-          </a:xfrm>
-          <a:prstGeom prst="rect">
-            <a:avLst/>
-          </a:prstGeom>
-        </p:spPr>
-      </p:pic>
-      <p:sp>
-        <p:nvSpPr>
-          <p:cNvPr id="24017" name="Text 10"/>
-          <p:cNvSpPr txBox="1"/>
-          <p:nvPr/>
-        </p:nvSpPr>
-        <p:spPr>
-          <a:xfrm>
-            <a:off x="7068312" y="2843784"/>
-            <a:ext cx="4590288" cy="1280160"/>
-          </a:xfrm>
-          <a:prstGeom prst="rect">
-            <a:avLst/>
-          </a:prstGeom>
-          <a:noFill/>
-          <a:ln/>
-        </p:spPr>
-        <p:txBody>
-          <a:bodyPr wrap="square" lIns="0" tIns="0" rIns="0" bIns="0" rtlCol="0" anchor="t"/>
-          <a:lstStyle/>
-          <a:p>
-            <a:pPr indent="0" marL="0">
-              <a:spcAft>
-                <a:spcPts val="200"/>
-              </a:spcAft>
-              <a:buNone/>
-            </a:pPr>
-            <a:r>
-              <a:rPr lang="en-US" sz="1700" b="1" dirty="0">
-                <a:solidFill>
-                  <a:schemeClr val="tx1"/>
-                </a:solidFill>
-              </a:rPr>
-              <a:t>Rører ikke skjemaet</a:t>
-            </a:r>
-            <a:endParaRPr lang="en-US" sz="1700" dirty="0"/>
-          </a:p>
-          <a:p>
-            <a:pPr indent="0" marL="0">
-              <a:spcAft>
-                <a:spcPts val="200"/>
-              </a:spcAft>
-              <a:buNone/>
-            </a:pPr>
-            <a:r>
-              <a:rPr lang="en-US" sz="1400" dirty="0">
-                <a:solidFill>
-                  <a:schemeClr val="accent4"/>
-                </a:solidFill>
-              </a:rPr>
-              <a:t>Ingen knapp kan sende inn sidens ASP.NET-skjema, så siden lastes aldri på nytt</a:t>
-            </a:r>
-            <a:endParaRPr lang="en-US" sz="1700" dirty="0"/>
-          </a:p>
-        </p:txBody>
-      </p:sp>
-      <p:sp>
-        <p:nvSpPr>
-          <p:cNvPr id="24018" name="Ikon search sirkel"/>
-          <p:cNvSpPr/>
-          <p:nvPr/>
-        </p:nvSpPr>
-        <p:spPr>
-          <a:xfrm>
-            <a:off x="6355080" y="4242816"/>
-            <a:ext cx="512064" cy="512064"/>
-          </a:xfrm>
-          <a:prstGeom prst="ellipse">
-            <a:avLst/>
-          </a:prstGeom>
-          <a:solidFill>
-            <a:schemeClr val="accent1"/>
-          </a:solidFill>
-          <a:ln/>
-        </p:spPr>
-      </p:sp>
-      <p:pic>
-        <p:nvPicPr>
-          <p:cNvPr id="24019" name="Ikon search" descr="search">    </p:cNvPr>
-          <p:cNvPicPr>
-            <a:picLocks noChangeAspect="1"/>
-          </p:cNvPicPr>
-          <p:nvPr/>
-        </p:nvPicPr>
-        <p:blipFill>
-          <a:blip r:embed="rId6"/>
-          <a:stretch>
-            <a:fillRect/>
-          </a:stretch>
-        </p:blipFill>
-        <p:spPr>
-          <a:xfrm>
-            <a:off x="6467734" y="4355470"/>
-            <a:ext cx="286756" cy="286756"/>
-          </a:xfrm>
-          <a:prstGeom prst="rect">
-            <a:avLst/>
-          </a:prstGeom>
-        </p:spPr>
-      </p:pic>
-      <p:sp>
-        <p:nvSpPr>
-          <p:cNvPr id="24020" name="Text 12"/>
-          <p:cNvSpPr txBox="1"/>
-          <p:nvPr/>
-        </p:nvSpPr>
-        <p:spPr>
-          <a:xfrm>
-            <a:off x="7068312" y="4169664"/>
-            <a:ext cx="4590288" cy="1280160"/>
-          </a:xfrm>
-          <a:prstGeom prst="rect">
-            <a:avLst/>
-          </a:prstGeom>
-          <a:noFill/>
-          <a:ln/>
-        </p:spPr>
-        <p:txBody>
-          <a:bodyPr wrap="square" lIns="0" tIns="0" rIns="0" bIns="0" rtlCol="0" anchor="t"/>
-          <a:lstStyle/>
-          <a:p>
-            <a:pPr indent="0" marL="0">
-              <a:spcAft>
-                <a:spcPts val="200"/>
-              </a:spcAft>
-              <a:buNone/>
-            </a:pPr>
-            <a:r>
-              <a:rPr lang="en-US" sz="1700" b="1" dirty="0">
-                <a:solidFill>
-                  <a:schemeClr val="tx1"/>
-                </a:solidFill>
-              </a:rPr>
-              <a:t>Feilsøking innebygd</a:t>
-            </a:r>
-            <a:endParaRPr lang="en-US" sz="1700" dirty="0"/>
-          </a:p>
-          <a:p>
-            <a:pPr indent="0" marL="0">
-              <a:spcAft>
-                <a:spcPts val="200"/>
-              </a:spcAft>
-              <a:buNone/>
-            </a:pPr>
-            <a:r>
-              <a:rPr lang="en-US" sz="1400" dirty="0">
-                <a:solidFill>
-                  <a:schemeClr val="accent4"/>
-                </a:solidFill>
-              </a:rPr>
-              <a:t>gcctReport(), gcctCacheDebug(), gcctStageTest() og gcctSnapTest() i konsollen gir korte rapporter uten personopplysninger</a:t>
-            </a:r>
-            <a:endParaRPr lang="en-US" sz="1700" dirty="0"/>
-          </a:p>
-        </p:txBody>
-      </p:sp>
-      <p:sp>
-        <p:nvSpPr>
-          <p:cNvPr id="24021" name="Slide Number Placeholder 0"/>
+              <a:t>bz = z-indeksen til nettstedets bakgrunn. På /play/map er nettstedets bakgrunn et vektorkart (WebGL). På /map lastes i tillegg et usynlig cacherutenett (UTFGrid) som brukes til 161 m-sirklene og til å feste høyreklikkboblen til cacher.</a:t>
+            </a:r>
+            <a:endParaRPr lang="en-US" sz="1150" dirty="0"/>
+          </a:p>
+        </p:txBody>
+      </p:sp>
+      <p:sp>
+        <p:nvSpPr>
+          <p:cNvPr id="24042" name="Slide Number Placeholder 0"/>
           <p:cNvSpPr>
             <a:spLocks noGrp="1"/>
           </p:cNvSpPr>
@@ -6710,7 +6646,7 @@
                   <a:schemeClr val="tx2"/>
                 </a:solidFill>
               </a:rPr>
-              <a:t>Kom i gang på tre minutter</a:t>
+              <a:t>Under panseret</a:t>
             </a:r>
             <a:endParaRPr lang="en-US" sz="3600" dirty="0"/>
           </a:p>
@@ -6718,14 +6654,14 @@
       </p:sp>
       <p:sp>
         <p:nvSpPr>
-          <p:cNvPr id="25003" name="Steg 1"/>
+          <p:cNvPr id="25003" name="Ikon layers sirkel"/>
           <p:cNvSpPr/>
           <p:nvPr/>
         </p:nvSpPr>
         <p:spPr>
           <a:xfrm>
-            <a:off x="548640" y="1463040"/>
-            <a:ext cx="731520" cy="731520"/>
+            <a:off x="548640" y="1591056"/>
+            <a:ext cx="512064" cy="512064"/>
           </a:xfrm>
           <a:prstGeom prst="ellipse">
             <a:avLst/>
@@ -6736,367 +6672,9 @@
           <a:ln/>
         </p:spPr>
       </p:sp>
-      <p:sp>
-        <p:nvSpPr>
-          <p:cNvPr id="25004" name="Text 2"/>
-          <p:cNvSpPr txBox="1"/>
-          <p:nvPr/>
-        </p:nvSpPr>
-        <p:spPr>
-          <a:xfrm>
-            <a:off x="548640" y="1463040"/>
-            <a:ext cx="731520" cy="731520"/>
-          </a:xfrm>
-          <a:prstGeom prst="rect">
-            <a:avLst/>
-          </a:prstGeom>
-          <a:noFill/>
-          <a:ln/>
-        </p:spPr>
-        <p:txBody>
-          <a:bodyPr wrap="square" lIns="0" tIns="0" rIns="0" bIns="0" rtlCol="0" anchor="ctr"/>
-          <a:lstStyle/>
-          <a:p>
-            <a:pPr algn="ctr" indent="0" marL="0">
-              <a:buNone/>
-            </a:pPr>
-            <a:r>
-              <a:rPr lang="en-US" sz="2600" b="1" dirty="0">
-                <a:solidFill>
-                  <a:schemeClr val="bg1"/>
-                </a:solidFill>
-              </a:rPr>
-              <a:t>1</a:t>
-            </a:r>
-            <a:endParaRPr lang="en-US" sz="2600" dirty="0"/>
-          </a:p>
-        </p:txBody>
-      </p:sp>
-      <p:sp>
-        <p:nvSpPr>
-          <p:cNvPr id="25005" name="Text 3"/>
-          <p:cNvSpPr txBox="1"/>
-          <p:nvPr/>
-        </p:nvSpPr>
-        <p:spPr>
-          <a:xfrm>
-            <a:off x="548640" y="2377440"/>
-            <a:ext cx="3301898" cy="1463040"/>
-          </a:xfrm>
-          <a:prstGeom prst="rect">
-            <a:avLst/>
-          </a:prstGeom>
-          <a:noFill/>
-          <a:ln/>
-        </p:spPr>
-        <p:txBody>
-          <a:bodyPr wrap="square" lIns="0" tIns="0" rIns="0" bIns="0" rtlCol="0" anchor="t"/>
-          <a:lstStyle/>
-          <a:p>
-            <a:pPr indent="0" marL="0">
-              <a:spcAft>
-                <a:spcPts val="400"/>
-              </a:spcAft>
-              <a:buNone/>
-            </a:pPr>
-            <a:r>
-              <a:rPr lang="en-US" sz="1900" b="1" dirty="0">
-                <a:solidFill>
-                  <a:schemeClr val="tx1"/>
-                </a:solidFill>
-              </a:rPr>
-              <a:t>Installer en skriptbehandler</a:t>
-            </a:r>
-            <a:endParaRPr lang="en-US" sz="1900" dirty="0"/>
-          </a:p>
-          <a:p>
-            <a:pPr indent="0" marL="0">
-              <a:spcAft>
-                <a:spcPts val="400"/>
-              </a:spcAft>
-              <a:buNone/>
-            </a:pPr>
-            <a:r>
-              <a:rPr lang="en-US" sz="1400" dirty="0">
-                <a:solidFill>
-                  <a:schemeClr val="accent4"/>
-                </a:solidFill>
-              </a:rPr>
-              <a:t>Tampermonkey eller Violentmonkey i Chrome, Edge, Firefox eller Safari</a:t>
-            </a:r>
-            <a:endParaRPr lang="en-US" sz="1900" dirty="0"/>
-          </a:p>
-        </p:txBody>
-      </p:sp>
-      <p:sp>
-        <p:nvSpPr>
-          <p:cNvPr id="25006" name="Steg 2"/>
-          <p:cNvSpPr/>
-          <p:nvPr/>
-        </p:nvSpPr>
-        <p:spPr>
-          <a:xfrm>
-            <a:off x="4353458" y="1463040"/>
-            <a:ext cx="731520" cy="731520"/>
-          </a:xfrm>
-          <a:prstGeom prst="ellipse">
-            <a:avLst/>
-          </a:prstGeom>
-          <a:solidFill>
-            <a:schemeClr val="accent1"/>
-          </a:solidFill>
-          <a:ln/>
-        </p:spPr>
-      </p:sp>
-      <p:sp>
-        <p:nvSpPr>
-          <p:cNvPr id="25007" name="Text 5"/>
-          <p:cNvSpPr txBox="1"/>
-          <p:nvPr/>
-        </p:nvSpPr>
-        <p:spPr>
-          <a:xfrm>
-            <a:off x="4353458" y="1463040"/>
-            <a:ext cx="731520" cy="731520"/>
-          </a:xfrm>
-          <a:prstGeom prst="rect">
-            <a:avLst/>
-          </a:prstGeom>
-          <a:noFill/>
-          <a:ln/>
-        </p:spPr>
-        <p:txBody>
-          <a:bodyPr wrap="square" lIns="0" tIns="0" rIns="0" bIns="0" rtlCol="0" anchor="ctr"/>
-          <a:lstStyle/>
-          <a:p>
-            <a:pPr algn="ctr" indent="0" marL="0">
-              <a:buNone/>
-            </a:pPr>
-            <a:r>
-              <a:rPr lang="en-US" sz="2600" b="1" dirty="0">
-                <a:solidFill>
-                  <a:schemeClr val="bg1"/>
-                </a:solidFill>
-              </a:rPr>
-              <a:t>2</a:t>
-            </a:r>
-            <a:endParaRPr lang="en-US" sz="2600" dirty="0"/>
-          </a:p>
-        </p:txBody>
-      </p:sp>
-      <p:sp>
-        <p:nvSpPr>
-          <p:cNvPr id="25008" name="Text 6"/>
-          <p:cNvSpPr txBox="1"/>
-          <p:nvPr/>
-        </p:nvSpPr>
-        <p:spPr>
-          <a:xfrm>
-            <a:off x="4353458" y="2377440"/>
-            <a:ext cx="3301898" cy="1463040"/>
-          </a:xfrm>
-          <a:prstGeom prst="rect">
-            <a:avLst/>
-          </a:prstGeom>
-          <a:noFill/>
-          <a:ln/>
-        </p:spPr>
-        <p:txBody>
-          <a:bodyPr wrap="square" lIns="0" tIns="0" rIns="0" bIns="0" rtlCol="0" anchor="t"/>
-          <a:lstStyle/>
-          <a:p>
-            <a:pPr indent="0" marL="0">
-              <a:spcAft>
-                <a:spcPts val="400"/>
-              </a:spcAft>
-              <a:buNone/>
-            </a:pPr>
-            <a:r>
-              <a:rPr lang="en-US" sz="1900" b="1" dirty="0">
-                <a:solidFill>
-                  <a:schemeClr val="tx1"/>
-                </a:solidFill>
-              </a:rPr>
-              <a:t>Legg til skriptet</a:t>
-            </a:r>
-            <a:endParaRPr lang="en-US" sz="1900" dirty="0"/>
-          </a:p>
-          <a:p>
-            <a:pPr indent="0" marL="0">
-              <a:spcAft>
-                <a:spcPts val="400"/>
-              </a:spcAft>
-              <a:buNone/>
-            </a:pPr>
-            <a:r>
-              <a:rPr lang="en-US" sz="1400" dirty="0">
-                <a:solidFill>
-                  <a:schemeClr val="accent4"/>
-                </a:solidFill>
-              </a:rPr>
-              <a:t>Åpne geocaching-custom-tiles.user.js og lagre det i behandleren</a:t>
-            </a:r>
-            <a:endParaRPr lang="en-US" sz="1900" dirty="0"/>
-          </a:p>
-        </p:txBody>
-      </p:sp>
-      <p:sp>
-        <p:nvSpPr>
-          <p:cNvPr id="25009" name="Steg 3"/>
-          <p:cNvSpPr/>
-          <p:nvPr/>
-        </p:nvSpPr>
-        <p:spPr>
-          <a:xfrm>
-            <a:off x="8158277" y="1463040"/>
-            <a:ext cx="731520" cy="731520"/>
-          </a:xfrm>
-          <a:prstGeom prst="ellipse">
-            <a:avLst/>
-          </a:prstGeom>
-          <a:solidFill>
-            <a:schemeClr val="accent1"/>
-          </a:solidFill>
-          <a:ln/>
-        </p:spPr>
-      </p:sp>
-      <p:sp>
-        <p:nvSpPr>
-          <p:cNvPr id="25010" name="Text 8"/>
-          <p:cNvSpPr txBox="1"/>
-          <p:nvPr/>
-        </p:nvSpPr>
-        <p:spPr>
-          <a:xfrm>
-            <a:off x="8158277" y="1463040"/>
-            <a:ext cx="731520" cy="731520"/>
-          </a:xfrm>
-          <a:prstGeom prst="rect">
-            <a:avLst/>
-          </a:prstGeom>
-          <a:noFill/>
-          <a:ln/>
-        </p:spPr>
-        <p:txBody>
-          <a:bodyPr wrap="square" lIns="0" tIns="0" rIns="0" bIns="0" rtlCol="0" anchor="ctr"/>
-          <a:lstStyle/>
-          <a:p>
-            <a:pPr algn="ctr" indent="0" marL="0">
-              <a:buNone/>
-            </a:pPr>
-            <a:r>
-              <a:rPr lang="en-US" sz="2600" b="1" dirty="0">
-                <a:solidFill>
-                  <a:schemeClr val="bg1"/>
-                </a:solidFill>
-              </a:rPr>
-              <a:t>3</a:t>
-            </a:r>
-            <a:endParaRPr lang="en-US" sz="2600" dirty="0"/>
-          </a:p>
-        </p:txBody>
-      </p:sp>
-      <p:sp>
-        <p:nvSpPr>
-          <p:cNvPr id="25011" name="Text 9"/>
-          <p:cNvSpPr txBox="1"/>
-          <p:nvPr/>
-        </p:nvSpPr>
-        <p:spPr>
-          <a:xfrm>
-            <a:off x="8158277" y="2377440"/>
-            <a:ext cx="3301898" cy="1463040"/>
-          </a:xfrm>
-          <a:prstGeom prst="rect">
-            <a:avLst/>
-          </a:prstGeom>
-          <a:noFill/>
-          <a:ln/>
-        </p:spPr>
-        <p:txBody>
-          <a:bodyPr wrap="square" lIns="0" tIns="0" rIns="0" bIns="0" rtlCol="0" anchor="t"/>
-          <a:lstStyle/>
-          <a:p>
-            <a:pPr indent="0" marL="0">
-              <a:spcAft>
-                <a:spcPts val="400"/>
-              </a:spcAft>
-              <a:buNone/>
-            </a:pPr>
-            <a:r>
-              <a:rPr lang="en-US" sz="1900" b="1" dirty="0">
-                <a:solidFill>
-                  <a:schemeClr val="tx1"/>
-                </a:solidFill>
-              </a:rPr>
-              <a:t>Åpne et kart</a:t>
-            </a:r>
-            <a:endParaRPr lang="en-US" sz="1900" dirty="0"/>
-          </a:p>
-          <a:p>
-            <a:pPr indent="0" marL="0">
-              <a:spcAft>
-                <a:spcPts val="400"/>
-              </a:spcAft>
-              <a:buNone/>
-            </a:pPr>
-            <a:r>
-              <a:rPr lang="en-US" sz="1400" dirty="0">
-                <a:solidFill>
-                  <a:schemeClr val="accent4"/>
-                </a:solidFill>
-              </a:rPr>
-              <a:t>geocaching.com/map eller /play/map – verktøylinjen dukker opp til høyre</a:t>
-            </a:r>
-            <a:endParaRPr lang="en-US" sz="1900" dirty="0"/>
-          </a:p>
-        </p:txBody>
-      </p:sp>
-      <p:sp>
-        <p:nvSpPr>
-          <p:cNvPr id="25012" name="Personvern"/>
-          <p:cNvSpPr/>
-          <p:nvPr/>
-        </p:nvSpPr>
-        <p:spPr>
-          <a:xfrm>
-            <a:off x="548640" y="3977640"/>
-            <a:ext cx="11094415" cy="1783080"/>
-          </a:xfrm>
-          <a:prstGeom prst="roundRect">
-            <a:avLst>
-              <a:gd name="adj" fmla="val 6154"/>
-            </a:avLst>
-          </a:prstGeom>
-          <a:solidFill>
-            <a:schemeClr val="bg2"/>
-          </a:solidFill>
-          <a:ln/>
-        </p:spPr>
-      </p:sp>
-      <p:sp>
-        <p:nvSpPr>
-          <p:cNvPr id="25013" name="Ikon check sirkel"/>
-          <p:cNvSpPr/>
-          <p:nvPr/>
-        </p:nvSpPr>
-        <p:spPr>
-          <a:xfrm>
-            <a:off x="868680" y="4251960"/>
-            <a:ext cx="640080" cy="640080"/>
-          </a:xfrm>
-          <a:prstGeom prst="ellipse">
-            <a:avLst/>
-          </a:prstGeom>
-          <a:solidFill>
-            <a:schemeClr val="accent1"/>
-          </a:solidFill>
-          <a:ln/>
-        </p:spPr>
-      </p:sp>
       <p:pic>
         <p:nvPicPr>
-          <p:cNvPr id="25014" name="Ikon check" descr="check">    </p:cNvPr>
+          <p:cNvPr id="25004" name="Ikon layers" descr="layers">    </p:cNvPr>
           <p:cNvPicPr>
             <a:picLocks noChangeAspect="1"/>
           </p:cNvPicPr>
@@ -7110,8 +6688,8 @@
         </p:blipFill>
         <p:spPr>
           <a:xfrm>
-            <a:off x="1009498" y="4392778"/>
-            <a:ext cx="358445" cy="358445"/>
+            <a:off x="661294" y="1703710"/>
+            <a:ext cx="286756" cy="286756"/>
           </a:xfrm>
           <a:prstGeom prst="rect">
             <a:avLst/>
@@ -7120,14 +6698,14 @@
       </p:pic>
       <p:sp>
         <p:nvSpPr>
-          <p:cNvPr id="25015" name="Text 12"/>
+          <p:cNvPr id="25005" name="Text 2"/>
           <p:cNvSpPr txBox="1"/>
           <p:nvPr/>
         </p:nvSpPr>
         <p:spPr>
           <a:xfrm>
-            <a:off x="1737360" y="4206240"/>
-            <a:ext cx="9585655" cy="1417320"/>
+            <a:off x="1261872" y="1517904"/>
+            <a:ext cx="4590288" cy="1280160"/>
           </a:xfrm>
           <a:prstGeom prst="rect">
             <a:avLst/>
@@ -7141,42 +6719,542 @@
           <a:p>
             <a:pPr indent="0" marL="0">
               <a:spcAft>
-                <a:spcPts val="400"/>
+                <a:spcPts val="200"/>
               </a:spcAft>
               <a:buNone/>
             </a:pPr>
             <a:r>
-              <a:rPr lang="en-US" sz="1900" b="1" dirty="0">
+              <a:rPr lang="en-US" sz="1700" b="1" dirty="0">
                 <a:solidFill>
                   <a:schemeClr val="tx1"/>
                 </a:solidFill>
               </a:rPr>
-              <a:t>Personvern</a:t>
-            </a:r>
-            <a:endParaRPr lang="en-US" sz="1900" dirty="0"/>
+              <a:t>Fjerner aldri nettstedets lag</a:t>
+            </a:r>
+            <a:endParaRPr lang="en-US" sz="1700" dirty="0"/>
           </a:p>
           <a:p>
             <a:pPr indent="0" marL="0">
               <a:spcAft>
-                <a:spcPts val="400"/>
+                <a:spcPts val="200"/>
               </a:spcAft>
               <a:buNone/>
             </a:pPr>
             <a:r>
-              <a:rPr lang="en-US" sz="1500" dirty="0">
+              <a:rPr lang="en-US" sz="1400" dirty="0">
+                <a:solidFill>
+                  <a:schemeClr val="accent4"/>
+                </a:solidFill>
+              </a:rPr>
+              <a:t>Skriptet legger sine egne lag inn mellom, sortert etter z-indeks</a:t>
+            </a:r>
+            <a:endParaRPr lang="en-US" sz="1700" dirty="0"/>
+          </a:p>
+        </p:txBody>
+      </p:sp>
+      <p:sp>
+        <p:nvSpPr>
+          <p:cNvPr id="25006" name="Ikon eraser sirkel"/>
+          <p:cNvSpPr/>
+          <p:nvPr/>
+        </p:nvSpPr>
+        <p:spPr>
+          <a:xfrm>
+            <a:off x="548640" y="2916936"/>
+            <a:ext cx="512064" cy="512064"/>
+          </a:xfrm>
+          <a:prstGeom prst="ellipse">
+            <a:avLst/>
+          </a:prstGeom>
+          <a:solidFill>
+            <a:schemeClr val="accent1"/>
+          </a:solidFill>
+          <a:ln/>
+        </p:spPr>
+      </p:sp>
+      <p:pic>
+        <p:nvPicPr>
+          <p:cNvPr id="25007" name="Ikon eraser" descr="eraser">    </p:cNvPr>
+          <p:cNvPicPr>
+            <a:picLocks noChangeAspect="1"/>
+          </p:cNvPicPr>
+          <p:nvPr/>
+        </p:nvPicPr>
+        <p:blipFill>
+          <a:blip r:embed="rId2"/>
+          <a:stretch>
+            <a:fillRect/>
+          </a:stretch>
+        </p:blipFill>
+        <p:spPr>
+          <a:xfrm>
+            <a:off x="661294" y="3029590"/>
+            <a:ext cx="286756" cy="286756"/>
+          </a:xfrm>
+          <a:prstGeom prst="rect">
+            <a:avLst/>
+          </a:prstGeom>
+        </p:spPr>
+      </p:pic>
+      <p:sp>
+        <p:nvSpPr>
+          <p:cNvPr id="25008" name="Text 4"/>
+          <p:cNvSpPr txBox="1"/>
+          <p:nvPr/>
+        </p:nvSpPr>
+        <p:spPr>
+          <a:xfrm>
+            <a:off x="1261872" y="2843784"/>
+            <a:ext cx="4590288" cy="1280160"/>
+          </a:xfrm>
+          <a:prstGeom prst="rect">
+            <a:avLst/>
+          </a:prstGeom>
+          <a:noFill/>
+          <a:ln/>
+        </p:spPr>
+        <p:txBody>
+          <a:bodyPr wrap="square" lIns="0" tIns="0" rIns="0" bIns="0" rtlCol="0" anchor="t"/>
+          <a:lstStyle/>
+          <a:p>
+            <a:pPr indent="0" marL="0">
+              <a:spcAft>
+                <a:spcPts val="200"/>
+              </a:spcAft>
+              <a:buNone/>
+            </a:pPr>
+            <a:r>
+              <a:rPr lang="en-US" sz="1700" b="1" dirty="0">
                 <a:solidFill>
                   <a:schemeClr val="tx1"/>
                 </a:solidFill>
               </a:rPr>
-              <a:t>Skriptet samler ikke inn eller sender personopplysninger og har ingen egen server. Det kontakter bare kartserverne du slår på, Kartverket og Photon når du søker, og geocaching.coms eget cachesøk og cachesider når 161 m-sirklene er på. Posisjonen din hentes bare når du ber om den. Alle innstillinger lagres i nettleseren.</a:t>
-            </a:r>
-            <a:endParaRPr lang="en-US" sz="1900" dirty="0"/>
-          </a:p>
-        </p:txBody>
-      </p:sp>
-      <p:sp>
-        <p:nvSpPr>
-          <p:cNvPr id="25016" name="Slide Number Placeholder 0"/>
+              <a:t>Ingen skjøter mellom flisene</a:t>
+            </a:r>
+            <a:endParaRPr lang="en-US" sz="1700" dirty="0"/>
+          </a:p>
+          <a:p>
+            <a:pPr indent="0" marL="0">
+              <a:spcAft>
+                <a:spcPts val="200"/>
+              </a:spcAft>
+              <a:buNone/>
+            </a:pPr>
+            <a:r>
+              <a:rPr lang="en-US" sz="1400" dirty="0">
+                <a:solidFill>
+                  <a:schemeClr val="accent4"/>
+                </a:solidFill>
+              </a:rPr>
+              <a:t>Flisene tegnes 1 piksel større, også ved 110 og 125 % skjermskalering</a:t>
+            </a:r>
+            <a:endParaRPr lang="en-US" sz="1700" dirty="0"/>
+          </a:p>
+        </p:txBody>
+      </p:sp>
+      <p:sp>
+        <p:nvSpPr>
+          <p:cNvPr id="25009" name="Ikon ring sirkel"/>
+          <p:cNvSpPr/>
+          <p:nvPr/>
+        </p:nvSpPr>
+        <p:spPr>
+          <a:xfrm>
+            <a:off x="548640" y="4242816"/>
+            <a:ext cx="512064" cy="512064"/>
+          </a:xfrm>
+          <a:prstGeom prst="ellipse">
+            <a:avLst/>
+          </a:prstGeom>
+          <a:solidFill>
+            <a:schemeClr val="accent1"/>
+          </a:solidFill>
+          <a:ln/>
+        </p:spPr>
+      </p:sp>
+      <p:pic>
+        <p:nvPicPr>
+          <p:cNvPr id="25010" name="Ikon ring" descr="ring">    </p:cNvPr>
+          <p:cNvPicPr>
+            <a:picLocks noChangeAspect="1"/>
+          </p:cNvPicPr>
+          <p:nvPr/>
+        </p:nvPicPr>
+        <p:blipFill>
+          <a:blip r:embed="rId3"/>
+          <a:stretch>
+            <a:fillRect/>
+          </a:stretch>
+        </p:blipFill>
+        <p:spPr>
+          <a:xfrm>
+            <a:off x="661294" y="4355470"/>
+            <a:ext cx="286756" cy="286756"/>
+          </a:xfrm>
+          <a:prstGeom prst="rect">
+            <a:avLst/>
+          </a:prstGeom>
+        </p:spPr>
+      </p:pic>
+      <p:sp>
+        <p:nvSpPr>
+          <p:cNvPr id="25011" name="Text 6"/>
+          <p:cNvSpPr txBox="1"/>
+          <p:nvPr/>
+        </p:nvSpPr>
+        <p:spPr>
+          <a:xfrm>
+            <a:off x="1261872" y="4169664"/>
+            <a:ext cx="4590288" cy="1280160"/>
+          </a:xfrm>
+          <a:prstGeom prst="rect">
+            <a:avLst/>
+          </a:prstGeom>
+          <a:noFill/>
+          <a:ln/>
+        </p:spPr>
+        <p:txBody>
+          <a:bodyPr wrap="square" lIns="0" tIns="0" rIns="0" bIns="0" rtlCol="0" anchor="t"/>
+          <a:lstStyle/>
+          <a:p>
+            <a:pPr indent="0" marL="0">
+              <a:spcAft>
+                <a:spcPts val="200"/>
+              </a:spcAft>
+              <a:buNone/>
+            </a:pPr>
+            <a:r>
+              <a:rPr lang="en-US" sz="1700" b="1" dirty="0">
+                <a:solidFill>
+                  <a:schemeClr val="tx1"/>
+                </a:solidFill>
+              </a:rPr>
+              <a:t>Demping uten gjennomskinn</a:t>
+            </a:r>
+            <a:endParaRPr lang="en-US" sz="1700" dirty="0"/>
+          </a:p>
+          <a:p>
+            <a:pPr indent="0" marL="0">
+              <a:spcAft>
+                <a:spcPts val="200"/>
+              </a:spcAft>
+              <a:buNone/>
+            </a:pPr>
+            <a:r>
+              <a:rPr lang="en-US" sz="1400" dirty="0">
+                <a:solidFill>
+                  <a:schemeClr val="accent4"/>
+                </a:solidFill>
+              </a:rPr>
+              <a:t>Et fargefilter bleker kartet mot hvitt – nettstedets kart skinner aldri gjennom</a:t>
+            </a:r>
+            <a:endParaRPr lang="en-US" sz="1700" dirty="0"/>
+          </a:p>
+        </p:txBody>
+      </p:sp>
+      <p:sp>
+        <p:nvSpPr>
+          <p:cNvPr id="25012" name="Ikon locate sirkel"/>
+          <p:cNvSpPr/>
+          <p:nvPr/>
+        </p:nvSpPr>
+        <p:spPr>
+          <a:xfrm>
+            <a:off x="6355080" y="1591056"/>
+            <a:ext cx="512064" cy="512064"/>
+          </a:xfrm>
+          <a:prstGeom prst="ellipse">
+            <a:avLst/>
+          </a:prstGeom>
+          <a:solidFill>
+            <a:schemeClr val="accent1"/>
+          </a:solidFill>
+          <a:ln/>
+        </p:spPr>
+      </p:sp>
+      <p:pic>
+        <p:nvPicPr>
+          <p:cNvPr id="25013" name="Ikon locate" descr="locate">    </p:cNvPr>
+          <p:cNvPicPr>
+            <a:picLocks noChangeAspect="1"/>
+          </p:cNvPicPr>
+          <p:nvPr/>
+        </p:nvPicPr>
+        <p:blipFill>
+          <a:blip r:embed="rId4"/>
+          <a:stretch>
+            <a:fillRect/>
+          </a:stretch>
+        </p:blipFill>
+        <p:spPr>
+          <a:xfrm>
+            <a:off x="6467734" y="1703710"/>
+            <a:ext cx="286756" cy="286756"/>
+          </a:xfrm>
+          <a:prstGeom prst="rect">
+            <a:avLst/>
+          </a:prstGeom>
+        </p:spPr>
+      </p:pic>
+      <p:sp>
+        <p:nvSpPr>
+          <p:cNvPr id="25014" name="Text 8"/>
+          <p:cNvSpPr txBox="1"/>
+          <p:nvPr/>
+        </p:nvSpPr>
+        <p:spPr>
+          <a:xfrm>
+            <a:off x="7068312" y="1517904"/>
+            <a:ext cx="4590288" cy="1280160"/>
+          </a:xfrm>
+          <a:prstGeom prst="rect">
+            <a:avLst/>
+          </a:prstGeom>
+          <a:noFill/>
+          <a:ln/>
+        </p:spPr>
+        <p:txBody>
+          <a:bodyPr wrap="square" lIns="0" tIns="0" rIns="0" bIns="0" rtlCol="0" anchor="t"/>
+          <a:lstStyle/>
+          <a:p>
+            <a:pPr indent="0" marL="0">
+              <a:spcAft>
+                <a:spcPts val="200"/>
+              </a:spcAft>
+              <a:buNone/>
+            </a:pPr>
+            <a:r>
+              <a:rPr lang="en-US" sz="1700" b="1" dirty="0">
+                <a:solidFill>
+                  <a:schemeClr val="tx1"/>
+                </a:solidFill>
+              </a:rPr>
+              <a:t>Finner kartet selv</a:t>
+            </a:r>
+            <a:endParaRPr lang="en-US" sz="1700" dirty="0"/>
+          </a:p>
+          <a:p>
+            <a:pPr indent="0" marL="0">
+              <a:spcAft>
+                <a:spcPts val="200"/>
+              </a:spcAft>
+              <a:buNone/>
+            </a:pPr>
+            <a:r>
+              <a:rPr lang="en-US" sz="1400" dirty="0">
+                <a:solidFill>
+                  <a:schemeClr val="accent4"/>
+                </a:solidFill>
+              </a:rPr>
+              <a:t>Fanger opp Leaflet når siden laster, også på /play/map og cachesidene</a:t>
+            </a:r>
+            <a:endParaRPr lang="en-US" sz="1700" dirty="0"/>
+          </a:p>
+        </p:txBody>
+      </p:sp>
+      <p:sp>
+        <p:nvSpPr>
+          <p:cNvPr id="25015" name="Ikon check sirkel"/>
+          <p:cNvSpPr/>
+          <p:nvPr/>
+        </p:nvSpPr>
+        <p:spPr>
+          <a:xfrm>
+            <a:off x="6355080" y="2916936"/>
+            <a:ext cx="512064" cy="512064"/>
+          </a:xfrm>
+          <a:prstGeom prst="ellipse">
+            <a:avLst/>
+          </a:prstGeom>
+          <a:solidFill>
+            <a:schemeClr val="accent1"/>
+          </a:solidFill>
+          <a:ln/>
+        </p:spPr>
+      </p:sp>
+      <p:pic>
+        <p:nvPicPr>
+          <p:cNvPr id="25016" name="Ikon check" descr="check">    </p:cNvPr>
+          <p:cNvPicPr>
+            <a:picLocks noChangeAspect="1"/>
+          </p:cNvPicPr>
+          <p:nvPr/>
+        </p:nvPicPr>
+        <p:blipFill>
+          <a:blip r:embed="rId5"/>
+          <a:stretch>
+            <a:fillRect/>
+          </a:stretch>
+        </p:blipFill>
+        <p:spPr>
+          <a:xfrm>
+            <a:off x="6467734" y="3029590"/>
+            <a:ext cx="286756" cy="286756"/>
+          </a:xfrm>
+          <a:prstGeom prst="rect">
+            <a:avLst/>
+          </a:prstGeom>
+        </p:spPr>
+      </p:pic>
+      <p:sp>
+        <p:nvSpPr>
+          <p:cNvPr id="25017" name="Text 10"/>
+          <p:cNvSpPr txBox="1"/>
+          <p:nvPr/>
+        </p:nvSpPr>
+        <p:spPr>
+          <a:xfrm>
+            <a:off x="7068312" y="2843784"/>
+            <a:ext cx="4590288" cy="1280160"/>
+          </a:xfrm>
+          <a:prstGeom prst="rect">
+            <a:avLst/>
+          </a:prstGeom>
+          <a:noFill/>
+          <a:ln/>
+        </p:spPr>
+        <p:txBody>
+          <a:bodyPr wrap="square" lIns="0" tIns="0" rIns="0" bIns="0" rtlCol="0" anchor="t"/>
+          <a:lstStyle/>
+          <a:p>
+            <a:pPr indent="0" marL="0">
+              <a:spcAft>
+                <a:spcPts val="200"/>
+              </a:spcAft>
+              <a:buNone/>
+            </a:pPr>
+            <a:r>
+              <a:rPr lang="en-US" sz="1700" b="1" dirty="0">
+                <a:solidFill>
+                  <a:schemeClr val="tx1"/>
+                </a:solidFill>
+              </a:rPr>
+              <a:t>Rører ikke skjemaet</a:t>
+            </a:r>
+            <a:endParaRPr lang="en-US" sz="1700" dirty="0"/>
+          </a:p>
+          <a:p>
+            <a:pPr indent="0" marL="0">
+              <a:spcAft>
+                <a:spcPts val="200"/>
+              </a:spcAft>
+              <a:buNone/>
+            </a:pPr>
+            <a:r>
+              <a:rPr lang="en-US" sz="1400" dirty="0">
+                <a:solidFill>
+                  <a:schemeClr val="accent4"/>
+                </a:solidFill>
+              </a:rPr>
+              <a:t>Ingen knapp kan sende inn sidens ASP.NET-skjema, så siden lastes aldri på nytt</a:t>
+            </a:r>
+            <a:endParaRPr lang="en-US" sz="1700" dirty="0"/>
+          </a:p>
+        </p:txBody>
+      </p:sp>
+      <p:sp>
+        <p:nvSpPr>
+          <p:cNvPr id="25018" name="Ikon search sirkel"/>
+          <p:cNvSpPr/>
+          <p:nvPr/>
+        </p:nvSpPr>
+        <p:spPr>
+          <a:xfrm>
+            <a:off x="6355080" y="4242816"/>
+            <a:ext cx="512064" cy="512064"/>
+          </a:xfrm>
+          <a:prstGeom prst="ellipse">
+            <a:avLst/>
+          </a:prstGeom>
+          <a:solidFill>
+            <a:schemeClr val="accent1"/>
+          </a:solidFill>
+          <a:ln/>
+        </p:spPr>
+      </p:sp>
+      <p:pic>
+        <p:nvPicPr>
+          <p:cNvPr id="25019" name="Ikon search" descr="search">    </p:cNvPr>
+          <p:cNvPicPr>
+            <a:picLocks noChangeAspect="1"/>
+          </p:cNvPicPr>
+          <p:nvPr/>
+        </p:nvPicPr>
+        <p:blipFill>
+          <a:blip r:embed="rId6"/>
+          <a:stretch>
+            <a:fillRect/>
+          </a:stretch>
+        </p:blipFill>
+        <p:spPr>
+          <a:xfrm>
+            <a:off x="6467734" y="4355470"/>
+            <a:ext cx="286756" cy="286756"/>
+          </a:xfrm>
+          <a:prstGeom prst="rect">
+            <a:avLst/>
+          </a:prstGeom>
+        </p:spPr>
+      </p:pic>
+      <p:sp>
+        <p:nvSpPr>
+          <p:cNvPr id="25020" name="Text 12"/>
+          <p:cNvSpPr txBox="1"/>
+          <p:nvPr/>
+        </p:nvSpPr>
+        <p:spPr>
+          <a:xfrm>
+            <a:off x="7068312" y="4169664"/>
+            <a:ext cx="4590288" cy="1280160"/>
+          </a:xfrm>
+          <a:prstGeom prst="rect">
+            <a:avLst/>
+          </a:prstGeom>
+          <a:noFill/>
+          <a:ln/>
+        </p:spPr>
+        <p:txBody>
+          <a:bodyPr wrap="square" lIns="0" tIns="0" rIns="0" bIns="0" rtlCol="0" anchor="t"/>
+          <a:lstStyle/>
+          <a:p>
+            <a:pPr indent="0" marL="0">
+              <a:spcAft>
+                <a:spcPts val="200"/>
+              </a:spcAft>
+              <a:buNone/>
+            </a:pPr>
+            <a:r>
+              <a:rPr lang="en-US" sz="1700" b="1" dirty="0">
+                <a:solidFill>
+                  <a:schemeClr val="tx1"/>
+                </a:solidFill>
+              </a:rPr>
+              <a:t>Feilsøking innebygd</a:t>
+            </a:r>
+            <a:endParaRPr lang="en-US" sz="1700" dirty="0"/>
+          </a:p>
+          <a:p>
+            <a:pPr indent="0" marL="0">
+              <a:spcAft>
+                <a:spcPts val="200"/>
+              </a:spcAft>
+              <a:buNone/>
+            </a:pPr>
+            <a:r>
+              <a:rPr lang="en-US" sz="1400" dirty="0">
+                <a:solidFill>
+                  <a:schemeClr val="accent4"/>
+                </a:solidFill>
+              </a:rPr>
+              <a:t>gcctReport(), gcctCacheDebug(), gcctStageTest() og gcctSnapTest() i konsollen gir korte rapporter uten personopplysninger</a:t>
+            </a:r>
+            <a:endParaRPr lang="en-US" sz="1700" dirty="0"/>
+          </a:p>
+        </p:txBody>
+      </p:sp>
+      <p:sp>
+        <p:nvSpPr>
+          <p:cNvPr id="25021" name="Slide Number Placeholder 0"/>
           <p:cNvSpPr>
             <a:spLocks noGrp="1"/>
           </p:cNvSpPr>
@@ -7254,8 +7332,8 @@
         </p:nvSpPr>
         <p:spPr>
           <a:xfrm>
-            <a:off x="548640" y="1828800"/>
-            <a:ext cx="6035040" cy="1737360"/>
+            <a:off x="548640" y="384048"/>
+            <a:ext cx="11094415" cy="777240"/>
           </a:xfrm>
           <a:prstGeom prst="rect">
             <a:avLst/>
@@ -7264,50 +7342,278 @@
           <a:ln/>
         </p:spPr>
         <p:txBody>
-          <a:bodyPr wrap="square" lIns="0" tIns="0" rIns="0" bIns="0" rtlCol="0" anchor="b"/>
+          <a:bodyPr wrap="square" lIns="0" tIns="0" rIns="0" bIns="0" rtlCol="0" anchor="ctr"/>
           <a:lstStyle/>
           <a:p>
             <a:pPr algn="l" indent="0" marL="0">
               <a:buNone/>
             </a:pPr>
             <a:r>
-              <a:rPr lang="en-US" sz="4400" b="1" dirty="0">
+              <a:rPr lang="en-US" sz="3600" b="1" dirty="0">
+                <a:solidFill>
+                  <a:schemeClr val="tx2"/>
+                </a:solidFill>
+              </a:rPr>
+              <a:t>Kom i gang på tre minutter</a:t>
+            </a:r>
+            <a:endParaRPr lang="en-US" sz="3600" dirty="0"/>
+          </a:p>
+        </p:txBody>
+      </p:sp>
+      <p:sp>
+        <p:nvSpPr>
+          <p:cNvPr id="26003" name="Steg 1"/>
+          <p:cNvSpPr/>
+          <p:nvPr/>
+        </p:nvSpPr>
+        <p:spPr>
+          <a:xfrm>
+            <a:off x="548640" y="1463040"/>
+            <a:ext cx="731520" cy="731520"/>
+          </a:xfrm>
+          <a:prstGeom prst="ellipse">
+            <a:avLst/>
+          </a:prstGeom>
+          <a:solidFill>
+            <a:schemeClr val="accent1"/>
+          </a:solidFill>
+          <a:ln/>
+        </p:spPr>
+      </p:sp>
+      <p:sp>
+        <p:nvSpPr>
+          <p:cNvPr id="26004" name="Text 2"/>
+          <p:cNvSpPr txBox="1"/>
+          <p:nvPr/>
+        </p:nvSpPr>
+        <p:spPr>
+          <a:xfrm>
+            <a:off x="548640" y="1463040"/>
+            <a:ext cx="731520" cy="731520"/>
+          </a:xfrm>
+          <a:prstGeom prst="rect">
+            <a:avLst/>
+          </a:prstGeom>
+          <a:noFill/>
+          <a:ln/>
+        </p:spPr>
+        <p:txBody>
+          <a:bodyPr wrap="square" lIns="0" tIns="0" rIns="0" bIns="0" rtlCol="0" anchor="ctr"/>
+          <a:lstStyle/>
+          <a:p>
+            <a:pPr algn="ctr" indent="0" marL="0">
+              <a:buNone/>
+            </a:pPr>
+            <a:r>
+              <a:rPr lang="en-US" sz="2600" b="1" dirty="0">
                 <a:solidFill>
                   <a:schemeClr val="bg1"/>
                 </a:solidFill>
               </a:rPr>
-              <a:t>Bedre kart for</a:t>
-            </a:r>
-            <a:endParaRPr lang="en-US" sz="4400" dirty="0"/>
-          </a:p>
-          <a:p>
-            <a:pPr algn="l" indent="0" marL="0">
-              <a:buNone/>
-            </a:pPr>
-            <a:r>
-              <a:rPr lang="en-US" sz="4400" b="1" dirty="0">
+              <a:t>1</a:t>
+            </a:r>
+            <a:endParaRPr lang="en-US" sz="2600" dirty="0"/>
+          </a:p>
+        </p:txBody>
+      </p:sp>
+      <p:sp>
+        <p:nvSpPr>
+          <p:cNvPr id="26005" name="Text 3"/>
+          <p:cNvSpPr txBox="1"/>
+          <p:nvPr/>
+        </p:nvSpPr>
+        <p:spPr>
+          <a:xfrm>
+            <a:off x="548640" y="2377440"/>
+            <a:ext cx="3301898" cy="1463040"/>
+          </a:xfrm>
+          <a:prstGeom prst="rect">
+            <a:avLst/>
+          </a:prstGeom>
+          <a:noFill/>
+          <a:ln/>
+        </p:spPr>
+        <p:txBody>
+          <a:bodyPr wrap="square" lIns="0" tIns="0" rIns="0" bIns="0" rtlCol="0" anchor="t"/>
+          <a:lstStyle/>
+          <a:p>
+            <a:pPr indent="0" marL="0">
+              <a:spcAft>
+                <a:spcPts val="400"/>
+              </a:spcAft>
+              <a:buNone/>
+            </a:pPr>
+            <a:r>
+              <a:rPr lang="en-US" sz="1900" b="1" dirty="0">
+                <a:solidFill>
+                  <a:schemeClr val="tx1"/>
+                </a:solidFill>
+              </a:rPr>
+              <a:t>Installer en skriptbehandler</a:t>
+            </a:r>
+            <a:endParaRPr lang="en-US" sz="1900" dirty="0"/>
+          </a:p>
+          <a:p>
+            <a:pPr indent="0" marL="0">
+              <a:spcAft>
+                <a:spcPts val="400"/>
+              </a:spcAft>
+              <a:buNone/>
+            </a:pPr>
+            <a:r>
+              <a:rPr lang="en-US" sz="1400" dirty="0">
+                <a:solidFill>
+                  <a:schemeClr val="accent4"/>
+                </a:solidFill>
+              </a:rPr>
+              <a:t>Tampermonkey eller Violentmonkey i Chrome, Edge, Firefox eller Safari</a:t>
+            </a:r>
+            <a:endParaRPr lang="en-US" sz="1900" dirty="0"/>
+          </a:p>
+        </p:txBody>
+      </p:sp>
+      <p:sp>
+        <p:nvSpPr>
+          <p:cNvPr id="26006" name="Steg 2"/>
+          <p:cNvSpPr/>
+          <p:nvPr/>
+        </p:nvSpPr>
+        <p:spPr>
+          <a:xfrm>
+            <a:off x="4353458" y="1463040"/>
+            <a:ext cx="731520" cy="731520"/>
+          </a:xfrm>
+          <a:prstGeom prst="ellipse">
+            <a:avLst/>
+          </a:prstGeom>
+          <a:solidFill>
+            <a:schemeClr val="accent1"/>
+          </a:solidFill>
+          <a:ln/>
+        </p:spPr>
+      </p:sp>
+      <p:sp>
+        <p:nvSpPr>
+          <p:cNvPr id="26007" name="Text 5"/>
+          <p:cNvSpPr txBox="1"/>
+          <p:nvPr/>
+        </p:nvSpPr>
+        <p:spPr>
+          <a:xfrm>
+            <a:off x="4353458" y="1463040"/>
+            <a:ext cx="731520" cy="731520"/>
+          </a:xfrm>
+          <a:prstGeom prst="rect">
+            <a:avLst/>
+          </a:prstGeom>
+          <a:noFill/>
+          <a:ln/>
+        </p:spPr>
+        <p:txBody>
+          <a:bodyPr wrap="square" lIns="0" tIns="0" rIns="0" bIns="0" rtlCol="0" anchor="ctr"/>
+          <a:lstStyle/>
+          <a:p>
+            <a:pPr algn="ctr" indent="0" marL="0">
+              <a:buNone/>
+            </a:pPr>
+            <a:r>
+              <a:rPr lang="en-US" sz="2600" b="1" dirty="0">
                 <a:solidFill>
                   <a:schemeClr val="bg1"/>
                 </a:solidFill>
               </a:rPr>
-              <a:t>bedre turer</a:t>
-            </a:r>
-            <a:endParaRPr lang="en-US" sz="4400" dirty="0"/>
-          </a:p>
-        </p:txBody>
-      </p:sp>
-      <p:sp>
-        <p:nvSpPr>
-          <p:cNvPr id="26003" name="Text 0"/>
+              <a:t>2</a:t>
+            </a:r>
+            <a:endParaRPr lang="en-US" sz="2600" dirty="0"/>
+          </a:p>
+        </p:txBody>
+      </p:sp>
+      <p:sp>
+        <p:nvSpPr>
+          <p:cNvPr id="26008" name="Text 6"/>
+          <p:cNvSpPr txBox="1"/>
+          <p:nvPr/>
+        </p:nvSpPr>
+        <p:spPr>
+          <a:xfrm>
+            <a:off x="4353458" y="2377440"/>
+            <a:ext cx="3301898" cy="1463040"/>
+          </a:xfrm>
+          <a:prstGeom prst="rect">
+            <a:avLst/>
+          </a:prstGeom>
+          <a:noFill/>
+          <a:ln/>
+        </p:spPr>
+        <p:txBody>
+          <a:bodyPr wrap="square" lIns="0" tIns="0" rIns="0" bIns="0" rtlCol="0" anchor="t"/>
+          <a:lstStyle/>
+          <a:p>
+            <a:pPr indent="0" marL="0">
+              <a:spcAft>
+                <a:spcPts val="400"/>
+              </a:spcAft>
+              <a:buNone/>
+            </a:pPr>
+            <a:r>
+              <a:rPr lang="en-US" sz="1900" b="1" dirty="0">
+                <a:solidFill>
+                  <a:schemeClr val="tx1"/>
+                </a:solidFill>
+              </a:rPr>
+              <a:t>Legg til skriptet</a:t>
+            </a:r>
+            <a:endParaRPr lang="en-US" sz="1900" dirty="0"/>
+          </a:p>
+          <a:p>
+            <a:pPr indent="0" marL="0">
+              <a:spcAft>
+                <a:spcPts val="400"/>
+              </a:spcAft>
+              <a:buNone/>
+            </a:pPr>
+            <a:r>
+              <a:rPr lang="en-US" sz="1400" dirty="0">
+                <a:solidFill>
+                  <a:schemeClr val="accent4"/>
+                </a:solidFill>
+              </a:rPr>
+              <a:t>Åpne geocaching-custom-tiles.user.js og lagre det i behandleren</a:t>
+            </a:r>
+            <a:endParaRPr lang="en-US" sz="1900" dirty="0"/>
+          </a:p>
+        </p:txBody>
+      </p:sp>
+      <p:sp>
+        <p:nvSpPr>
+          <p:cNvPr id="26009" name="Steg 3"/>
           <p:cNvSpPr/>
-          <p:nvPr>
-            <p:ph idx="101" type="body" hasCustomPrompt="1"/>
-          </p:nvPr>
-        </p:nvSpPr>
-        <p:spPr>
-          <a:xfrm>
-            <a:off x="548640" y="3703320"/>
-            <a:ext cx="5852160" cy="1188720"/>
+          <p:nvPr/>
+        </p:nvSpPr>
+        <p:spPr>
+          <a:xfrm>
+            <a:off x="8158277" y="1463040"/>
+            <a:ext cx="731520" cy="731520"/>
+          </a:xfrm>
+          <a:prstGeom prst="ellipse">
+            <a:avLst/>
+          </a:prstGeom>
+          <a:solidFill>
+            <a:schemeClr val="accent1"/>
+          </a:solidFill>
+          <a:ln/>
+        </p:spPr>
+      </p:sp>
+      <p:sp>
+        <p:nvSpPr>
+          <p:cNvPr id="26010" name="Text 8"/>
+          <p:cNvSpPr txBox="1"/>
+          <p:nvPr/>
+        </p:nvSpPr>
+        <p:spPr>
+          <a:xfrm>
+            <a:off x="8158277" y="1463040"/>
+            <a:ext cx="731520" cy="731520"/>
           </a:xfrm>
           <a:prstGeom prst="rect">
             <a:avLst/>
@@ -7316,27 +7622,125 @@
           <a:ln/>
         </p:spPr>
         <p:txBody>
+          <a:bodyPr wrap="square" lIns="0" tIns="0" rIns="0" bIns="0" rtlCol="0" anchor="ctr"/>
+          <a:lstStyle/>
+          <a:p>
+            <a:pPr algn="ctr" indent="0" marL="0">
+              <a:buNone/>
+            </a:pPr>
+            <a:r>
+              <a:rPr lang="en-US" sz="2600" b="1" dirty="0">
+                <a:solidFill>
+                  <a:schemeClr val="bg1"/>
+                </a:solidFill>
+              </a:rPr>
+              <a:t>3</a:t>
+            </a:r>
+            <a:endParaRPr lang="en-US" sz="2600" dirty="0"/>
+          </a:p>
+        </p:txBody>
+      </p:sp>
+      <p:sp>
+        <p:nvSpPr>
+          <p:cNvPr id="26011" name="Text 9"/>
+          <p:cNvSpPr txBox="1"/>
+          <p:nvPr/>
+        </p:nvSpPr>
+        <p:spPr>
+          <a:xfrm>
+            <a:off x="8158277" y="2377440"/>
+            <a:ext cx="3301898" cy="1463040"/>
+          </a:xfrm>
+          <a:prstGeom prst="rect">
+            <a:avLst/>
+          </a:prstGeom>
+          <a:noFill/>
+          <a:ln/>
+        </p:spPr>
+        <p:txBody>
           <a:bodyPr wrap="square" lIns="0" tIns="0" rIns="0" bIns="0" rtlCol="0" anchor="t"/>
           <a:lstStyle/>
           <a:p>
-            <a:pPr algn="l" indent="0" marL="0">
-              <a:buNone/>
-            </a:pPr>
-            <a:r>
-              <a:rPr lang="en-US" sz="1800" dirty="0">
-                <a:solidFill>
-                  <a:schemeClr val="accent5"/>
-                </a:solidFill>
-              </a:rPr>
-              <a:t>Brukerveiledning på norsk og engelsk følger med. Bruk gcctReport() i nettleserkonsollen hvis noe ikke virker.</a:t>
-            </a:r>
-            <a:endParaRPr lang="en-US" sz="1800" dirty="0"/>
-          </a:p>
-        </p:txBody>
+            <a:pPr indent="0" marL="0">
+              <a:spcAft>
+                <a:spcPts val="400"/>
+              </a:spcAft>
+              <a:buNone/>
+            </a:pPr>
+            <a:r>
+              <a:rPr lang="en-US" sz="1900" b="1" dirty="0">
+                <a:solidFill>
+                  <a:schemeClr val="tx1"/>
+                </a:solidFill>
+              </a:rPr>
+              <a:t>Åpne et kart</a:t>
+            </a:r>
+            <a:endParaRPr lang="en-US" sz="1900" dirty="0"/>
+          </a:p>
+          <a:p>
+            <a:pPr indent="0" marL="0">
+              <a:spcAft>
+                <a:spcPts val="400"/>
+              </a:spcAft>
+              <a:buNone/>
+            </a:pPr>
+            <a:r>
+              <a:rPr lang="en-US" sz="1400" dirty="0">
+                <a:solidFill>
+                  <a:schemeClr val="accent4"/>
+                </a:solidFill>
+              </a:rPr>
+              <a:t>geocaching.com/map eller /play/map – verktøylinjen dukker opp til høyre</a:t>
+            </a:r>
+            <a:endParaRPr lang="en-US" sz="1900" dirty="0"/>
+          </a:p>
+        </p:txBody>
+      </p:sp>
+      <p:sp>
+        <p:nvSpPr>
+          <p:cNvPr id="26012" name="Personvern"/>
+          <p:cNvSpPr/>
+          <p:nvPr/>
+        </p:nvSpPr>
+        <p:spPr>
+          <a:xfrm>
+            <a:off x="548640" y="3977640"/>
+            <a:ext cx="11094415" cy="1783080"/>
+          </a:xfrm>
+          <a:prstGeom prst="roundRect">
+            <a:avLst>
+              <a:gd name="adj" fmla="val 6154"/>
+            </a:avLst>
+          </a:prstGeom>
+          <a:solidFill>
+            <a:schemeClr val="bg2"/>
+          </a:solidFill>
+          <a:ln/>
+        </p:spPr>
+      </p:sp>
+      <p:sp>
+        <p:nvSpPr>
+          <p:cNvPr id="26013" name="Ikon check sirkel"/>
+          <p:cNvSpPr/>
+          <p:nvPr/>
+        </p:nvSpPr>
+        <p:spPr>
+          <a:xfrm>
+            <a:off x="868680" y="4251960"/>
+            <a:ext cx="640080" cy="640080"/>
+          </a:xfrm>
+          <a:prstGeom prst="ellipse">
+            <a:avLst/>
+          </a:prstGeom>
+          <a:solidFill>
+            <a:schemeClr val="accent1"/>
+          </a:solidFill>
+          <a:ln/>
+        </p:spPr>
       </p:sp>
       <p:pic>
         <p:nvPicPr>
-          <p:cNvPr id="26004" name="Høyreklikkboblen" descr="Høyreklikkboblen">    </p:cNvPr>
+          <p:cNvPr id="26014" name="Ikon check" descr="check">    </p:cNvPr>
           <p:cNvPicPr>
             <a:picLocks noChangeAspect="1"/>
           </p:cNvPicPr>
@@ -7350,6 +7754,246 @@
         </p:blipFill>
         <p:spPr>
           <a:xfrm>
+            <a:off x="1009498" y="4392778"/>
+            <a:ext cx="358445" cy="358445"/>
+          </a:xfrm>
+          <a:prstGeom prst="rect">
+            <a:avLst/>
+          </a:prstGeom>
+        </p:spPr>
+      </p:pic>
+      <p:sp>
+        <p:nvSpPr>
+          <p:cNvPr id="26015" name="Text 12"/>
+          <p:cNvSpPr txBox="1"/>
+          <p:nvPr/>
+        </p:nvSpPr>
+        <p:spPr>
+          <a:xfrm>
+            <a:off x="1737360" y="4206240"/>
+            <a:ext cx="9585655" cy="1417320"/>
+          </a:xfrm>
+          <a:prstGeom prst="rect">
+            <a:avLst/>
+          </a:prstGeom>
+          <a:noFill/>
+          <a:ln/>
+        </p:spPr>
+        <p:txBody>
+          <a:bodyPr wrap="square" lIns="0" tIns="0" rIns="0" bIns="0" rtlCol="0" anchor="t"/>
+          <a:lstStyle/>
+          <a:p>
+            <a:pPr indent="0" marL="0">
+              <a:spcAft>
+                <a:spcPts val="400"/>
+              </a:spcAft>
+              <a:buNone/>
+            </a:pPr>
+            <a:r>
+              <a:rPr lang="en-US" sz="1900" b="1" dirty="0">
+                <a:solidFill>
+                  <a:schemeClr val="tx1"/>
+                </a:solidFill>
+              </a:rPr>
+              <a:t>Personvern</a:t>
+            </a:r>
+            <a:endParaRPr lang="en-US" sz="1900" dirty="0"/>
+          </a:p>
+          <a:p>
+            <a:pPr indent="0" marL="0">
+              <a:spcAft>
+                <a:spcPts val="400"/>
+              </a:spcAft>
+              <a:buNone/>
+            </a:pPr>
+            <a:r>
+              <a:rPr lang="en-US" sz="1500" dirty="0">
+                <a:solidFill>
+                  <a:schemeClr val="tx1"/>
+                </a:solidFill>
+              </a:rPr>
+              <a:t>Skriptet samler ikke inn eller sender personopplysninger og har ingen egen server. Det kontakter bare kartserverne du slår på, Kartverket og Photon når du søker, og geocaching.coms eget cachesøk og cachesider når 161 m-sirklene er på. Posisjonen din hentes bare når du ber om den. Alle innstillinger lagres i nettleseren.</a:t>
+            </a:r>
+            <a:endParaRPr lang="en-US" sz="1900" dirty="0"/>
+          </a:p>
+        </p:txBody>
+      </p:sp>
+      <p:sp>
+        <p:nvSpPr>
+          <p:cNvPr id="26016" name="Slide Number Placeholder 0"/>
+          <p:cNvSpPr>
+            <a:spLocks noGrp="1"/>
+          </p:cNvSpPr>
+          <p:nvPr>
+            <p:ph type="sldNum" sz="quarter" idx="4294967295"/>
+          </p:nvPr>
+        </p:nvSpPr>
+        <p:spPr>
+          <a:xfrm>
+            <a:off x="11094415" y="6446520"/>
+            <a:ext cx="548640" cy="274320"/>
+          </a:xfrm>
+          <a:prstGeom prst="rect">
+            <a:avLst/>
+          </a:prstGeom>
+          <a:extLst>
+            <a:ext uri="{C572A759-6A51-4108-AA02-DFA0A04FC94B}">
+              <ma14:wrappingTextBoxFlag xmlns:ma14="http://schemas.microsoft.com/office/mac/drawingml/2011/main" val="0"/>
+            </a:ext>
+          </a:extLst>
+        </p:spPr>
+        <p:txBody>
+          <a:bodyPr/>
+          <a:lstStyle>
+            <a:lvl1pPr>
+              <a:defRPr sz="1000">
+                <a:solidFill>
+                  <a:srgbClr val="6B7F75"/>
+                </a:solidFill>
+              </a:defRPr>
+            </a:lvl1pPr>
+          </a:lstStyle>
+          <a:p>
+            <a:pPr algn="r"/>
+            <a:fld id="{F7021451-1387-4CA6-816F-3879F97B5CBC}" type="slidenum">
+              <a:rPr b="0" lang="en-US"/>
+              <a:t>16</a:t>
+            </a:fld>
+            <a:endParaRPr lang="en-US"/>
+          </a:p>
+        </p:txBody>
+      </p:sp>
+    </p:spTree>
+  </p:cSld>
+  <p:clrMapOvr>
+    <a:masterClrMapping/>
+  </p:clrMapOvr>
+</p:sld>
+</file>
+
+<file path=ppt/slides/slide17.xml><?xml version="1.0" encoding="utf-8"?>
+<p:sld xmlns:a="http://schemas.openxmlformats.org/drawingml/2006/main" xmlns:r="http://schemas.openxmlformats.org/officeDocument/2006/relationships" xmlns:p="http://schemas.openxmlformats.org/presentationml/2006/main">
+  <p:cSld name="Slide 17">
+    <p:spTree>
+      <p:nvGrpSpPr>
+        <p:cNvPr id="27001" name=""/>
+        <p:cNvGrpSpPr/>
+        <p:nvPr/>
+      </p:nvGrpSpPr>
+      <p:grpSpPr>
+        <a:xfrm>
+          <a:off x="0" y="0"/>
+          <a:ext cx="0" cy="0"/>
+          <a:chOff x="0" y="0"/>
+          <a:chExt cx="0" cy="0"/>
+        </a:xfrm>
+      </p:grpSpPr>
+      <p:sp>
+        <p:nvSpPr>
+          <p:cNvPr id="27002" name="Text 0"/>
+          <p:cNvSpPr/>
+          <p:nvPr>
+            <p:ph idx="100" type="title" hasCustomPrompt="1"/>
+          </p:nvPr>
+        </p:nvSpPr>
+        <p:spPr>
+          <a:xfrm>
+            <a:off x="548640" y="1828800"/>
+            <a:ext cx="6035040" cy="1737360"/>
+          </a:xfrm>
+          <a:prstGeom prst="rect">
+            <a:avLst/>
+          </a:prstGeom>
+          <a:noFill/>
+          <a:ln/>
+        </p:spPr>
+        <p:txBody>
+          <a:bodyPr wrap="square" lIns="0" tIns="0" rIns="0" bIns="0" rtlCol="0" anchor="b"/>
+          <a:lstStyle/>
+          <a:p>
+            <a:pPr algn="l" indent="0" marL="0">
+              <a:buNone/>
+            </a:pPr>
+            <a:r>
+              <a:rPr lang="en-US" sz="4400" b="1" dirty="0">
+                <a:solidFill>
+                  <a:schemeClr val="bg1"/>
+                </a:solidFill>
+              </a:rPr>
+              <a:t>Bedre kart for</a:t>
+            </a:r>
+            <a:endParaRPr lang="en-US" sz="4400" dirty="0"/>
+          </a:p>
+          <a:p>
+            <a:pPr algn="l" indent="0" marL="0">
+              <a:buNone/>
+            </a:pPr>
+            <a:r>
+              <a:rPr lang="en-US" sz="4400" b="1" dirty="0">
+                <a:solidFill>
+                  <a:schemeClr val="bg1"/>
+                </a:solidFill>
+              </a:rPr>
+              <a:t>bedre turer</a:t>
+            </a:r>
+            <a:endParaRPr lang="en-US" sz="4400" dirty="0"/>
+          </a:p>
+        </p:txBody>
+      </p:sp>
+      <p:sp>
+        <p:nvSpPr>
+          <p:cNvPr id="27003" name="Text 0"/>
+          <p:cNvSpPr/>
+          <p:nvPr>
+            <p:ph idx="101" type="body" hasCustomPrompt="1"/>
+          </p:nvPr>
+        </p:nvSpPr>
+        <p:spPr>
+          <a:xfrm>
+            <a:off x="548640" y="3703320"/>
+            <a:ext cx="5852160" cy="1188720"/>
+          </a:xfrm>
+          <a:prstGeom prst="rect">
+            <a:avLst/>
+          </a:prstGeom>
+          <a:noFill/>
+          <a:ln/>
+        </p:spPr>
+        <p:txBody>
+          <a:bodyPr wrap="square" lIns="0" tIns="0" rIns="0" bIns="0" rtlCol="0" anchor="t"/>
+          <a:lstStyle/>
+          <a:p>
+            <a:pPr algn="l" indent="0" marL="0">
+              <a:buNone/>
+            </a:pPr>
+            <a:r>
+              <a:rPr lang="en-US" sz="1800" dirty="0">
+                <a:solidFill>
+                  <a:schemeClr val="accent5"/>
+                </a:solidFill>
+              </a:rPr>
+              <a:t>Brukerveiledning på norsk og engelsk følger med. Bruk gcctReport() i nettleserkonsollen hvis noe ikke virker.</a:t>
+            </a:r>
+            <a:endParaRPr lang="en-US" sz="1800" dirty="0"/>
+          </a:p>
+        </p:txBody>
+      </p:sp>
+      <p:pic>
+        <p:nvPicPr>
+          <p:cNvPr id="27004" name="Høyreklikkboblen" descr="Høyreklikkboblen">    </p:cNvPr>
+          <p:cNvPicPr>
+            <a:picLocks noChangeAspect="1"/>
+          </p:cNvPicPr>
+          <p:nvPr/>
+        </p:nvPicPr>
+        <p:blipFill>
+          <a:blip r:embed="rId1"/>
+          <a:stretch>
+            <a:fillRect/>
+          </a:stretch>
+        </p:blipFill>
+        <p:spPr>
+          <a:xfrm>
             <a:off x="6705295" y="1371600"/>
             <a:ext cx="4754880" cy="2300748"/>
           </a:xfrm>
@@ -7367,7 +8011,7 @@
       </p:pic>
       <p:pic>
         <p:nvPicPr>
-          <p:cNvPr id="26005" name="Bekreftelsesdialog" descr="Bekreftelsesdialog">    </p:cNvPr>
+          <p:cNvPr id="27005" name="Bekreftelsesdialog" descr="Bekreftelsesdialog">    </p:cNvPr>
           <p:cNvPicPr>
             <a:picLocks noChangeAspect="1"/>
           </p:cNvPicPr>
@@ -8337,8 +8981,8 @@
         </p:blipFill>
         <p:spPr>
           <a:xfrm>
-            <a:off x="1106004" y="1572768"/>
-            <a:ext cx="348312" cy="4443984"/>
+            <a:off x="1115568" y="1572768"/>
+            <a:ext cx="329184" cy="4443984"/>
           </a:xfrm>
           <a:prstGeom prst="rect">
             <a:avLst/>
@@ -8353,7 +8997,7 @@
         </p:nvSpPr>
         <p:spPr>
           <a:xfrm>
-            <a:off x="2514600" y="1453896"/>
+            <a:off x="2514600" y="1408176"/>
             <a:ext cx="512064" cy="512064"/>
           </a:xfrm>
           <a:prstGeom prst="ellipse">
@@ -8381,7 +9025,7 @@
         </p:blipFill>
         <p:spPr>
           <a:xfrm>
-            <a:off x="2627254" y="1566550"/>
+            <a:off x="2627254" y="1520830"/>
             <a:ext cx="286756" cy="286756"/>
           </a:xfrm>
           <a:prstGeom prst="rect">
@@ -8397,8 +9041,8 @@
         </p:nvSpPr>
         <p:spPr>
           <a:xfrm>
-            <a:off x="3227832" y="1380744"/>
-            <a:ext cx="3493008" cy="667512"/>
+            <a:off x="3227832" y="1335024"/>
+            <a:ext cx="3493008" cy="576072"/>
           </a:xfrm>
           <a:prstGeom prst="rect">
             <a:avLst/>
@@ -8453,7 +9097,7 @@
         </p:nvSpPr>
         <p:spPr>
           <a:xfrm>
-            <a:off x="2514600" y="2167128"/>
+            <a:off x="2514600" y="2029968"/>
             <a:ext cx="512064" cy="512064"/>
           </a:xfrm>
           <a:prstGeom prst="ellipse">
@@ -8481,7 +9125,7 @@
         </p:blipFill>
         <p:spPr>
           <a:xfrm>
-            <a:off x="2627254" y="2279782"/>
+            <a:off x="2627254" y="2142622"/>
             <a:ext cx="286756" cy="286756"/>
           </a:xfrm>
           <a:prstGeom prst="rect">
@@ -8497,8 +9141,8 @@
         </p:nvSpPr>
         <p:spPr>
           <a:xfrm>
-            <a:off x="3227832" y="2093976"/>
-            <a:ext cx="3493008" cy="667512"/>
+            <a:off x="3227832" y="1956816"/>
+            <a:ext cx="3493008" cy="576072"/>
           </a:xfrm>
           <a:prstGeom prst="rect">
             <a:avLst/>
@@ -8553,7 +9197,7 @@
         </p:nvSpPr>
         <p:spPr>
           <a:xfrm>
-            <a:off x="2514600" y="2880360"/>
+            <a:off x="2514600" y="2651760"/>
             <a:ext cx="512064" cy="512064"/>
           </a:xfrm>
           <a:prstGeom prst="ellipse">
@@ -8581,7 +9225,7 @@
         </p:blipFill>
         <p:spPr>
           <a:xfrm>
-            <a:off x="2627254" y="2993014"/>
+            <a:off x="2627254" y="2764414"/>
             <a:ext cx="286756" cy="286756"/>
           </a:xfrm>
           <a:prstGeom prst="rect">
@@ -8597,8 +9241,8 @@
         </p:nvSpPr>
         <p:spPr>
           <a:xfrm>
-            <a:off x="3227832" y="2807208"/>
-            <a:ext cx="3493008" cy="667512"/>
+            <a:off x="3227832" y="2578608"/>
+            <a:ext cx="3493008" cy="576072"/>
           </a:xfrm>
           <a:prstGeom prst="rect">
             <a:avLst/>
@@ -8653,7 +9297,7 @@
         </p:nvSpPr>
         <p:spPr>
           <a:xfrm>
-            <a:off x="2514600" y="3593592"/>
+            <a:off x="2514600" y="3273552"/>
             <a:ext cx="512064" cy="512064"/>
           </a:xfrm>
           <a:prstGeom prst="ellipse">
@@ -8681,7 +9325,7 @@
         </p:blipFill>
         <p:spPr>
           <a:xfrm>
-            <a:off x="2627254" y="3706246"/>
+            <a:off x="2627254" y="3386206"/>
             <a:ext cx="286756" cy="286756"/>
           </a:xfrm>
           <a:prstGeom prst="rect">
@@ -8697,8 +9341,8 @@
         </p:nvSpPr>
         <p:spPr>
           <a:xfrm>
-            <a:off x="3227832" y="3520440"/>
-            <a:ext cx="3493008" cy="667512"/>
+            <a:off x="3227832" y="3200400"/>
+            <a:ext cx="3493008" cy="576072"/>
           </a:xfrm>
           <a:prstGeom prst="rect">
             <a:avLst/>
@@ -8747,13 +9391,13 @@
       </p:sp>
       <p:sp>
         <p:nvSpPr>
-          <p:cNvPr id="13017" name="Ikon circles sirkel"/>
+          <p:cNvPr id="13017" name="Ikon list sirkel"/>
           <p:cNvSpPr/>
           <p:nvPr/>
         </p:nvSpPr>
         <p:spPr>
           <a:xfrm>
-            <a:off x="2514600" y="4306824"/>
+            <a:off x="2514600" y="3895344"/>
             <a:ext cx="512064" cy="512064"/>
           </a:xfrm>
           <a:prstGeom prst="ellipse">
@@ -8767,7 +9411,7 @@
       </p:sp>
       <p:pic>
         <p:nvPicPr>
-          <p:cNvPr id="13018" name="Ikon circles" descr="circles">    </p:cNvPr>
+          <p:cNvPr id="13018" name="Ikon list" descr="list">    </p:cNvPr>
           <p:cNvPicPr>
             <a:picLocks noChangeAspect="1"/>
           </p:cNvPicPr>
@@ -8781,7 +9425,7 @@
         </p:blipFill>
         <p:spPr>
           <a:xfrm>
-            <a:off x="2627254" y="4419478"/>
+            <a:off x="2627254" y="4007998"/>
             <a:ext cx="286756" cy="286756"/>
           </a:xfrm>
           <a:prstGeom prst="rect">
@@ -8797,8 +9441,8 @@
         </p:nvSpPr>
         <p:spPr>
           <a:xfrm>
-            <a:off x="3227832" y="4233672"/>
-            <a:ext cx="3493008" cy="667512"/>
+            <a:off x="3227832" y="3822192"/>
+            <a:ext cx="3493008" cy="576072"/>
           </a:xfrm>
           <a:prstGeom prst="rect">
             <a:avLst/>
@@ -8822,7 +9466,7 @@
                   <a:schemeClr val="tx1"/>
                 </a:solidFill>
               </a:rPr>
-              <a:t>161 m-sirkler</a:t>
+              <a:t>Geocacher på kartet</a:t>
             </a:r>
             <a:endParaRPr lang="en-US" sz="1700" dirty="0"/>
           </a:p>
@@ -8839,7 +9483,7 @@
                   <a:schemeClr val="accent4"/>
                 </a:solidFill>
               </a:rPr>
-              <a:t>Der noe er utplassert – fra zoom 15</a:t>
+              <a:t>En liste som følger kartet (gamle kartet)</a:t>
             </a:r>
             <a:endParaRPr lang="en-US" sz="1700" dirty="0"/>
           </a:p>
@@ -8847,13 +9491,13 @@
       </p:sp>
       <p:sp>
         <p:nvSpPr>
-          <p:cNvPr id="13020" name="Ikon solved sirkel"/>
+          <p:cNvPr id="13020" name="Ikon circles sirkel"/>
           <p:cNvSpPr/>
           <p:nvPr/>
         </p:nvSpPr>
         <p:spPr>
           <a:xfrm>
-            <a:off x="2514600" y="5020056"/>
+            <a:off x="2514600" y="4517136"/>
             <a:ext cx="512064" cy="512064"/>
           </a:xfrm>
           <a:prstGeom prst="ellipse">
@@ -8867,7 +9511,7 @@
       </p:sp>
       <p:pic>
         <p:nvPicPr>
-          <p:cNvPr id="13021" name="Ikon solved" descr="solved">    </p:cNvPr>
+          <p:cNvPr id="13021" name="Ikon circles" descr="circles">    </p:cNvPr>
           <p:cNvPicPr>
             <a:picLocks noChangeAspect="1"/>
           </p:cNvPicPr>
@@ -8881,7 +9525,7 @@
         </p:blipFill>
         <p:spPr>
           <a:xfrm>
-            <a:off x="2627254" y="5132710"/>
+            <a:off x="2627254" y="4629790"/>
             <a:ext cx="286756" cy="286756"/>
           </a:xfrm>
           <a:prstGeom prst="rect">
@@ -8897,8 +9541,8 @@
         </p:nvSpPr>
         <p:spPr>
           <a:xfrm>
-            <a:off x="3227832" y="4946904"/>
-            <a:ext cx="3493008" cy="667512"/>
+            <a:off x="3227832" y="4443984"/>
+            <a:ext cx="3493008" cy="576072"/>
           </a:xfrm>
           <a:prstGeom prst="rect">
             <a:avLst/>
@@ -8922,7 +9566,7 @@
                   <a:schemeClr val="tx1"/>
                 </a:solidFill>
               </a:rPr>
-              <a:t>Merker</a:t>
+              <a:t>161 m-sirkler</a:t>
             </a:r>
             <a:endParaRPr lang="en-US" sz="1700" dirty="0"/>
           </a:p>
@@ -8939,7 +9583,7 @@
                   <a:schemeClr val="accent4"/>
                 </a:solidFill>
               </a:rPr>
-              <a:t>Løste cacher, også uten sirkler</a:t>
+              <a:t>Der noe er utplassert – fra zoom 15</a:t>
             </a:r>
             <a:endParaRPr lang="en-US" sz="1700" dirty="0"/>
           </a:p>
@@ -8947,13 +9591,13 @@
       </p:sp>
       <p:sp>
         <p:nvSpPr>
-          <p:cNvPr id="13023" name="Ikon heart sirkel"/>
+          <p:cNvPr id="13023" name="Ikon solved sirkel"/>
           <p:cNvSpPr/>
           <p:nvPr/>
         </p:nvSpPr>
         <p:spPr>
           <a:xfrm>
-            <a:off x="2514600" y="5733288"/>
+            <a:off x="2514600" y="5138928"/>
             <a:ext cx="512064" cy="512064"/>
           </a:xfrm>
           <a:prstGeom prst="ellipse">
@@ -8967,7 +9611,7 @@
       </p:sp>
       <p:pic>
         <p:nvPicPr>
-          <p:cNvPr id="13024" name="Ikon heart" descr="heart">    </p:cNvPr>
+          <p:cNvPr id="13024" name="Ikon solved" descr="solved">    </p:cNvPr>
           <p:cNvPicPr>
             <a:picLocks noChangeAspect="1"/>
           </p:cNvPicPr>
@@ -8981,7 +9625,7 @@
         </p:blipFill>
         <p:spPr>
           <a:xfrm>
-            <a:off x="2627254" y="5845942"/>
+            <a:off x="2627254" y="5251582"/>
             <a:ext cx="286756" cy="286756"/>
           </a:xfrm>
           <a:prstGeom prst="rect">
@@ -8997,8 +9641,8 @@
         </p:nvSpPr>
         <p:spPr>
           <a:xfrm>
-            <a:off x="3227832" y="5660136"/>
-            <a:ext cx="3493008" cy="667512"/>
+            <a:off x="3227832" y="5065776"/>
+            <a:ext cx="3493008" cy="576072"/>
           </a:xfrm>
           <a:prstGeom prst="rect">
             <a:avLst/>
@@ -9022,7 +9666,7 @@
                   <a:schemeClr val="tx1"/>
                 </a:solidFill>
               </a:rPr>
-              <a:t>Favorittpoeng</a:t>
+              <a:t>Merker</a:t>
             </a:r>
             <a:endParaRPr lang="en-US" sz="1700" dirty="0"/>
           </a:p>
@@ -9039,7 +9683,7 @@
                   <a:schemeClr val="accent4"/>
                 </a:solidFill>
               </a:rPr>
-              <a:t>♥ og antallet over cachene – av/på</a:t>
+              <a:t>Løste cacher, også uten sirkler</a:t>
             </a:r>
             <a:endParaRPr lang="en-US" sz="1700" dirty="0"/>
           </a:p>
@@ -9047,13 +9691,13 @@
       </p:sp>
       <p:sp>
         <p:nvSpPr>
-          <p:cNvPr id="13026" name="Ikon dt sirkel"/>
+          <p:cNvPr id="13026" name="Ikon heart sirkel"/>
           <p:cNvSpPr/>
           <p:nvPr/>
         </p:nvSpPr>
         <p:spPr>
           <a:xfrm>
-            <a:off x="7086600" y="1453896"/>
+            <a:off x="2514600" y="5760720"/>
             <a:ext cx="512064" cy="512064"/>
           </a:xfrm>
           <a:prstGeom prst="ellipse">
@@ -9067,7 +9711,7 @@
       </p:sp>
       <p:pic>
         <p:nvPicPr>
-          <p:cNvPr id="13027" name="Ikon dt" descr="dt">    </p:cNvPr>
+          <p:cNvPr id="13027" name="Ikon heart" descr="heart">    </p:cNvPr>
           <p:cNvPicPr>
             <a:picLocks noChangeAspect="1"/>
           </p:cNvPicPr>
@@ -9081,7 +9725,7 @@
         </p:blipFill>
         <p:spPr>
           <a:xfrm>
-            <a:off x="7199254" y="1566550"/>
+            <a:off x="2627254" y="5873374"/>
             <a:ext cx="286756" cy="286756"/>
           </a:xfrm>
           <a:prstGeom prst="rect">
@@ -9097,8 +9741,8 @@
         </p:nvSpPr>
         <p:spPr>
           <a:xfrm>
-            <a:off x="7799832" y="1380744"/>
-            <a:ext cx="3767328" cy="667512"/>
+            <a:off x="3227832" y="5687568"/>
+            <a:ext cx="3493008" cy="576072"/>
           </a:xfrm>
           <a:prstGeom prst="rect">
             <a:avLst/>
@@ -9122,7 +9766,7 @@
                   <a:schemeClr val="tx1"/>
                 </a:solidFill>
               </a:rPr>
-              <a:t>D/T</a:t>
+              <a:t>Favorittpoeng</a:t>
             </a:r>
             <a:endParaRPr lang="en-US" sz="1700" dirty="0"/>
           </a:p>
@@ -9139,7 +9783,7 @@
                   <a:schemeClr val="accent4"/>
                 </a:solidFill>
               </a:rPr>
-              <a:t>Vanskelighet/terreng under cachene – av/på</a:t>
+              <a:t>♥ og antallet over cachene – av/på</a:t>
             </a:r>
             <a:endParaRPr lang="en-US" sz="1700" dirty="0"/>
           </a:p>
@@ -9147,13 +9791,13 @@
       </p:sp>
       <p:sp>
         <p:nvSpPr>
-          <p:cNvPr id="13029" name="Ikon eyeoff sirkel"/>
+          <p:cNvPr id="13029" name="Ikon dt sirkel"/>
           <p:cNvSpPr/>
           <p:nvPr/>
         </p:nvSpPr>
         <p:spPr>
           <a:xfrm>
-            <a:off x="7086600" y="2167128"/>
+            <a:off x="7086600" y="1408176"/>
             <a:ext cx="512064" cy="512064"/>
           </a:xfrm>
           <a:prstGeom prst="ellipse">
@@ -9167,7 +9811,7 @@
       </p:sp>
       <p:pic>
         <p:nvPicPr>
-          <p:cNvPr id="13030" name="Ikon eyeoff" descr="eyeoff">    </p:cNvPr>
+          <p:cNvPr id="13030" name="Ikon dt" descr="dt">    </p:cNvPr>
           <p:cNvPicPr>
             <a:picLocks noChangeAspect="1"/>
           </p:cNvPicPr>
@@ -9181,7 +9825,7 @@
         </p:blipFill>
         <p:spPr>
           <a:xfrm>
-            <a:off x="7199254" y="2279782"/>
+            <a:off x="7199254" y="1520830"/>
             <a:ext cx="286756" cy="286756"/>
           </a:xfrm>
           <a:prstGeom prst="rect">
@@ -9197,8 +9841,8 @@
         </p:nvSpPr>
         <p:spPr>
           <a:xfrm>
-            <a:off x="7799832" y="2093976"/>
-            <a:ext cx="3767328" cy="667512"/>
+            <a:off x="7799832" y="1335024"/>
+            <a:ext cx="3767328" cy="576072"/>
           </a:xfrm>
           <a:prstGeom prst="rect">
             <a:avLst/>
@@ -9222,7 +9866,7 @@
                   <a:schemeClr val="tx1"/>
                 </a:solidFill>
               </a:rPr>
-              <a:t>Skjul geocacher</a:t>
+              <a:t>D/T</a:t>
             </a:r>
             <a:endParaRPr lang="en-US" sz="1700" dirty="0"/>
           </a:p>
@@ -9239,7 +9883,7 @@
                   <a:schemeClr val="accent4"/>
                 </a:solidFill>
               </a:rPr>
-              <a:t>Rent kart – klikk igjen for å vise dem</a:t>
+              <a:t>Vanskelighet/terreng under cachene – av/på</a:t>
             </a:r>
             <a:endParaRPr lang="en-US" sz="1700" dirty="0"/>
           </a:p>
@@ -9247,13 +9891,13 @@
       </p:sp>
       <p:sp>
         <p:nvSpPr>
-          <p:cNvPr id="13032" name="Ikon locate sirkel"/>
+          <p:cNvPr id="13032" name="Ikon eyeoff sirkel"/>
           <p:cNvSpPr/>
           <p:nvPr/>
         </p:nvSpPr>
         <p:spPr>
           <a:xfrm>
-            <a:off x="7086600" y="2880360"/>
+            <a:off x="7086600" y="2029968"/>
             <a:ext cx="512064" cy="512064"/>
           </a:xfrm>
           <a:prstGeom prst="ellipse">
@@ -9267,7 +9911,7 @@
       </p:sp>
       <p:pic>
         <p:nvPicPr>
-          <p:cNvPr id="13033" name="Ikon locate" descr="locate">    </p:cNvPr>
+          <p:cNvPr id="13033" name="Ikon eyeoff" descr="eyeoff">    </p:cNvPr>
           <p:cNvPicPr>
             <a:picLocks noChangeAspect="1"/>
           </p:cNvPicPr>
@@ -9281,7 +9925,7 @@
         </p:blipFill>
         <p:spPr>
           <a:xfrm>
-            <a:off x="7199254" y="2993014"/>
+            <a:off x="7199254" y="2142622"/>
             <a:ext cx="286756" cy="286756"/>
           </a:xfrm>
           <a:prstGeom prst="rect">
@@ -9297,8 +9941,8 @@
         </p:nvSpPr>
         <p:spPr>
           <a:xfrm>
-            <a:off x="7799832" y="2807208"/>
-            <a:ext cx="3767328" cy="667512"/>
+            <a:off x="7799832" y="1956816"/>
+            <a:ext cx="3767328" cy="576072"/>
           </a:xfrm>
           <a:prstGeom prst="rect">
             <a:avLst/>
@@ -9322,7 +9966,7 @@
                   <a:schemeClr val="tx1"/>
                 </a:solidFill>
               </a:rPr>
-              <a:t>Min posisjon</a:t>
+              <a:t>Skjul geocacher</a:t>
             </a:r>
             <a:endParaRPr lang="en-US" sz="1700" dirty="0"/>
           </a:p>
@@ -9339,7 +9983,7 @@
                   <a:schemeClr val="accent4"/>
                 </a:solidFill>
               </a:rPr>
-              <a:t>Med sirkel for nøyaktighet</a:t>
+              <a:t>Rent kart – klikk igjen for å vise dem</a:t>
             </a:r>
             <a:endParaRPr lang="en-US" sz="1700" dirty="0"/>
           </a:p>
@@ -9347,13 +9991,13 @@
       </p:sp>
       <p:sp>
         <p:nvSpPr>
-          <p:cNvPr id="13035" name="Ikon home sirkel"/>
+          <p:cNvPr id="13035" name="Ikon locate sirkel"/>
           <p:cNvSpPr/>
           <p:nvPr/>
         </p:nvSpPr>
         <p:spPr>
           <a:xfrm>
-            <a:off x="7086600" y="3593592"/>
+            <a:off x="7086600" y="2651760"/>
             <a:ext cx="512064" cy="512064"/>
           </a:xfrm>
           <a:prstGeom prst="ellipse">
@@ -9367,7 +10011,7 @@
       </p:sp>
       <p:pic>
         <p:nvPicPr>
-          <p:cNvPr id="13036" name="Ikon home" descr="home">    </p:cNvPr>
+          <p:cNvPr id="13036" name="Ikon locate" descr="locate">    </p:cNvPr>
           <p:cNvPicPr>
             <a:picLocks noChangeAspect="1"/>
           </p:cNvPicPr>
@@ -9381,7 +10025,7 @@
         </p:blipFill>
         <p:spPr>
           <a:xfrm>
-            <a:off x="7199254" y="3706246"/>
+            <a:off x="7199254" y="2764414"/>
             <a:ext cx="286756" cy="286756"/>
           </a:xfrm>
           <a:prstGeom prst="rect">
@@ -9397,8 +10041,8 @@
         </p:nvSpPr>
         <p:spPr>
           <a:xfrm>
-            <a:off x="7799832" y="3520440"/>
-            <a:ext cx="3767328" cy="667512"/>
+            <a:off x="7799832" y="2578608"/>
+            <a:ext cx="3767328" cy="576072"/>
           </a:xfrm>
           <a:prstGeom prst="rect">
             <a:avLst/>
@@ -9422,7 +10066,7 @@
                   <a:schemeClr val="tx1"/>
                 </a:solidFill>
               </a:rPr>
-              <a:t>Hjem</a:t>
+              <a:t>Min posisjon</a:t>
             </a:r>
             <a:endParaRPr lang="en-US" sz="1700" dirty="0"/>
           </a:p>
@@ -9439,7 +10083,7 @@
                   <a:schemeClr val="accent4"/>
                 </a:solidFill>
               </a:rPr>
-              <a:t>Høyreklikk for å endre adressen</a:t>
+              <a:t>Med sirkel for nøyaktighet</a:t>
             </a:r>
             <a:endParaRPr lang="en-US" sz="1700" dirty="0"/>
           </a:p>
@@ -9447,13 +10091,13 @@
       </p:sp>
       <p:sp>
         <p:nvSpPr>
-          <p:cNvPr id="13038" name="Ikon expand sirkel"/>
+          <p:cNvPr id="13038" name="Ikon home sirkel"/>
           <p:cNvSpPr/>
           <p:nvPr/>
         </p:nvSpPr>
         <p:spPr>
           <a:xfrm>
-            <a:off x="7086600" y="4306824"/>
+            <a:off x="7086600" y="3273552"/>
             <a:ext cx="512064" cy="512064"/>
           </a:xfrm>
           <a:prstGeom prst="ellipse">
@@ -9467,7 +10111,7 @@
       </p:sp>
       <p:pic>
         <p:nvPicPr>
-          <p:cNvPr id="13039" name="Ikon expand" descr="expand">    </p:cNvPr>
+          <p:cNvPr id="13039" name="Ikon home" descr="home">    </p:cNvPr>
           <p:cNvPicPr>
             <a:picLocks noChangeAspect="1"/>
           </p:cNvPicPr>
@@ -9481,7 +10125,7 @@
         </p:blipFill>
         <p:spPr>
           <a:xfrm>
-            <a:off x="7199254" y="4419478"/>
+            <a:off x="7199254" y="3386206"/>
             <a:ext cx="286756" cy="286756"/>
           </a:xfrm>
           <a:prstGeom prst="rect">
@@ -9497,8 +10141,8 @@
         </p:nvSpPr>
         <p:spPr>
           <a:xfrm>
-            <a:off x="7799832" y="4233672"/>
-            <a:ext cx="3767328" cy="667512"/>
+            <a:off x="7799832" y="3200400"/>
+            <a:ext cx="3767328" cy="576072"/>
           </a:xfrm>
           <a:prstGeom prst="rect">
             <a:avLst/>
@@ -9522,7 +10166,7 @@
                   <a:schemeClr val="tx1"/>
                 </a:solidFill>
               </a:rPr>
-              <a:t>Fullskjerm</a:t>
+              <a:t>Hjem</a:t>
             </a:r>
             <a:endParaRPr lang="en-US" sz="1700" dirty="0"/>
           </a:p>
@@ -9539,7 +10183,7 @@
                   <a:schemeClr val="accent4"/>
                 </a:solidFill>
               </a:rPr>
-              <a:t>Kartet fyller hele skjermen</a:t>
+              <a:t>Høyreklikk for å endre adressen</a:t>
             </a:r>
             <a:endParaRPr lang="en-US" sz="1700" dirty="0"/>
           </a:p>
@@ -9547,13 +10191,13 @@
       </p:sp>
       <p:sp>
         <p:nvSpPr>
-          <p:cNvPr id="13041" name="Ikon eraser sirkel"/>
+          <p:cNvPr id="13041" name="Ikon expand sirkel"/>
           <p:cNvSpPr/>
           <p:nvPr/>
         </p:nvSpPr>
         <p:spPr>
           <a:xfrm>
-            <a:off x="7086600" y="5020056"/>
+            <a:off x="7086600" y="3895344"/>
             <a:ext cx="512064" cy="512064"/>
           </a:xfrm>
           <a:prstGeom prst="ellipse">
@@ -9567,7 +10211,7 @@
       </p:sp>
       <p:pic>
         <p:nvPicPr>
-          <p:cNvPr id="13042" name="Ikon eraser" descr="eraser">    </p:cNvPr>
+          <p:cNvPr id="13042" name="Ikon expand" descr="expand">    </p:cNvPr>
           <p:cNvPicPr>
             <a:picLocks noChangeAspect="1"/>
           </p:cNvPicPr>
@@ -9581,7 +10225,7 @@
         </p:blipFill>
         <p:spPr>
           <a:xfrm>
-            <a:off x="7199254" y="5132710"/>
+            <a:off x="7199254" y="4007998"/>
             <a:ext cx="286756" cy="286756"/>
           </a:xfrm>
           <a:prstGeom prst="rect">
@@ -9597,8 +10241,8 @@
         </p:nvSpPr>
         <p:spPr>
           <a:xfrm>
-            <a:off x="7799832" y="4946904"/>
-            <a:ext cx="3767328" cy="667512"/>
+            <a:off x="7799832" y="3822192"/>
+            <a:ext cx="3767328" cy="576072"/>
           </a:xfrm>
           <a:prstGeom prst="rect">
             <a:avLst/>
@@ -9622,7 +10266,7 @@
                   <a:schemeClr val="tx1"/>
                 </a:solidFill>
               </a:rPr>
-              <a:t>Fjern tegninger</a:t>
+              <a:t>Fullskjerm</a:t>
             </a:r>
             <a:endParaRPr lang="en-US" sz="1700" dirty="0"/>
           </a:p>
@@ -9639,7 +10283,7 @@
                   <a:schemeClr val="accent4"/>
                 </a:solidFill>
               </a:rPr>
-              <a:t>Merker, målinger og sirkler</a:t>
+              <a:t>Kartet fyller hele skjermen</a:t>
             </a:r>
             <a:endParaRPr lang="en-US" sz="1700" dirty="0"/>
           </a:p>
@@ -9647,13 +10291,13 @@
       </p:sp>
       <p:sp>
         <p:nvSpPr>
-          <p:cNvPr id="13044" name="Ikon gear sirkel"/>
+          <p:cNvPr id="13044" name="Ikon eraser sirkel"/>
           <p:cNvSpPr/>
           <p:nvPr/>
         </p:nvSpPr>
         <p:spPr>
           <a:xfrm>
-            <a:off x="7086600" y="5733288"/>
+            <a:off x="7086600" y="4517136"/>
             <a:ext cx="512064" cy="512064"/>
           </a:xfrm>
           <a:prstGeom prst="ellipse">
@@ -9667,7 +10311,7 @@
       </p:sp>
       <p:pic>
         <p:nvPicPr>
-          <p:cNvPr id="13045" name="Ikon gear" descr="gear">    </p:cNvPr>
+          <p:cNvPr id="13045" name="Ikon eraser" descr="eraser">    </p:cNvPr>
           <p:cNvPicPr>
             <a:picLocks noChangeAspect="1"/>
           </p:cNvPicPr>
@@ -9681,7 +10325,7 @@
         </p:blipFill>
         <p:spPr>
           <a:xfrm>
-            <a:off x="7199254" y="5845942"/>
+            <a:off x="7199254" y="4629790"/>
             <a:ext cx="286756" cy="286756"/>
           </a:xfrm>
           <a:prstGeom prst="rect">
@@ -9697,8 +10341,8 @@
         </p:nvSpPr>
         <p:spPr>
           <a:xfrm>
-            <a:off x="7799832" y="5660136"/>
-            <a:ext cx="3767328" cy="667512"/>
+            <a:off x="7799832" y="4443984"/>
+            <a:ext cx="3767328" cy="576072"/>
           </a:xfrm>
           <a:prstGeom prst="rect">
             <a:avLst/>
@@ -9722,7 +10366,7 @@
                   <a:schemeClr val="tx1"/>
                 </a:solidFill>
               </a:rPr>
-              <a:t>Innstillinger</a:t>
+              <a:t>Fjern tegninger</a:t>
             </a:r>
             <a:endParaRPr lang="en-US" sz="1700" dirty="0"/>
           </a:p>
@@ -9739,6 +10383,106 @@
                   <a:schemeClr val="accent4"/>
                 </a:solidFill>
               </a:rPr>
+              <a:t>Merker, målinger og sirkler</a:t>
+            </a:r>
+            <a:endParaRPr lang="en-US" sz="1700" dirty="0"/>
+          </a:p>
+        </p:txBody>
+      </p:sp>
+      <p:sp>
+        <p:nvSpPr>
+          <p:cNvPr id="13047" name="Ikon gear sirkel"/>
+          <p:cNvSpPr/>
+          <p:nvPr/>
+        </p:nvSpPr>
+        <p:spPr>
+          <a:xfrm>
+            <a:off x="7086600" y="5138928"/>
+            <a:ext cx="512064" cy="512064"/>
+          </a:xfrm>
+          <a:prstGeom prst="ellipse">
+            <a:avLst/>
+          </a:prstGeom>
+          <a:solidFill>
+            <a:schemeClr val="accent1"/>
+          </a:solidFill>
+          <a:ln/>
+        </p:spPr>
+      </p:sp>
+      <p:pic>
+        <p:nvPicPr>
+          <p:cNvPr id="13048" name="Ikon gear" descr="gear">    </p:cNvPr>
+          <p:cNvPicPr>
+            <a:picLocks noChangeAspect="1"/>
+          </p:cNvPicPr>
+          <p:nvPr/>
+        </p:nvPicPr>
+        <p:blipFill>
+          <a:blip r:embed="rId16"/>
+          <a:stretch>
+            <a:fillRect/>
+          </a:stretch>
+        </p:blipFill>
+        <p:spPr>
+          <a:xfrm>
+            <a:off x="7199254" y="5251582"/>
+            <a:ext cx="286756" cy="286756"/>
+          </a:xfrm>
+          <a:prstGeom prst="rect">
+            <a:avLst/>
+          </a:prstGeom>
+        </p:spPr>
+      </p:pic>
+      <p:sp>
+        <p:nvSpPr>
+          <p:cNvPr id="13049" name="Text 31"/>
+          <p:cNvSpPr txBox="1"/>
+          <p:nvPr/>
+        </p:nvSpPr>
+        <p:spPr>
+          <a:xfrm>
+            <a:off x="7799832" y="5065776"/>
+            <a:ext cx="3767328" cy="576072"/>
+          </a:xfrm>
+          <a:prstGeom prst="rect">
+            <a:avLst/>
+          </a:prstGeom>
+          <a:noFill/>
+          <a:ln/>
+        </p:spPr>
+        <p:txBody>
+          <a:bodyPr wrap="square" lIns="0" tIns="0" rIns="0" bIns="0" rtlCol="0" anchor="t"/>
+          <a:lstStyle/>
+          <a:p>
+            <a:pPr indent="0" marL="0">
+              <a:spcAft>
+                <a:spcPts val="200"/>
+              </a:spcAft>
+              <a:buNone/>
+            </a:pPr>
+            <a:r>
+              <a:rPr lang="en-US" sz="1700" b="1" dirty="0">
+                <a:solidFill>
+                  <a:schemeClr val="tx1"/>
+                </a:solidFill>
+              </a:rPr>
+              <a:t>Innstillinger</a:t>
+            </a:r>
+            <a:endParaRPr lang="en-US" sz="1700" dirty="0"/>
+          </a:p>
+          <a:p>
+            <a:pPr indent="0" marL="0">
+              <a:spcAft>
+                <a:spcPts val="200"/>
+              </a:spcAft>
+              <a:buNone/>
+            </a:pPr>
+            <a:r>
+              <a:rPr lang="en-US" sz="1400" dirty="0">
+                <a:solidFill>
+                  <a:schemeClr val="accent4"/>
+                </a:solidFill>
+              </a:rPr>
               <a:t>Plassering, språk og nettstedets knapper</a:t>
             </a:r>
             <a:endParaRPr lang="en-US" sz="1700" dirty="0"/>
@@ -9747,7 +10491,7 @@
       </p:sp>
       <p:sp>
         <p:nvSpPr>
-          <p:cNvPr id="13047" name="Slide Number Placeholder 0"/>
+          <p:cNvPr id="13050" name="Slide Number Placeholder 0"/>
           <p:cNvSpPr>
             <a:spLocks noGrp="1"/>
           </p:cNvSpPr>
@@ -9891,8 +10635,8 @@
         </p:blipFill>
         <p:spPr>
           <a:xfrm>
-            <a:off x="8599496" y="1527048"/>
-            <a:ext cx="2063758" cy="4581144"/>
+            <a:off x="8623621" y="1527048"/>
+            <a:ext cx="2015509" cy="4581144"/>
           </a:xfrm>
           <a:prstGeom prst="rect">
             <a:avLst/>

--- a/docs/Geocaching-Map-Custom-Tile-Layers-Presentasjon.pptx
+++ b/docs/Geocaching-Map-Custom-Tile-Layers-Presentasjon.pptx
@@ -123,13 +123,13 @@
   <p:extLst>
     <p:ext uri="{521415D9-36F7-43E2-AB2F-B90AF26B5E84}">
       <p14:sectionLst xmlns:p14="http://schemas.microsoft.com/office/powerpoint/2010/main">
-        <p14:section name="Innledning" id="{9f0d9170-f495-affd-6275-9c7137eac8cc}">
+        <p14:section name="Innledning" id="{a94511b9-f84a-a609-2193-9f261441b6e9}">
           <p14:sldIdLst>
             <p14:sldId id="256"/>
             <p14:sldId id="257"/>
           </p14:sldIdLst>
         </p14:section>
-        <p14:section name="Funksjoner" id="{2558ab7a-2606-8852-512d-25a9654f1490}">
+        <p14:section name="Funksjoner" id="{61cc43ce-fe19-7bd5-1c1a-b64f58ea2679}">
           <p14:sldIdLst>
             <p14:sldId id="258"/>
             <p14:sldId id="259"/>
@@ -144,14 +144,14 @@
             <p14:sldId id="268"/>
           </p14:sldIdLst>
         </p14:section>
-        <p14:section name="Teknikk" id="{2be404a8-cfcf-feae-a3e1-54f9df28b320}">
+        <p14:section name="Teknikk" id="{fa8dfe76-ed76-36a5-8ef4-b7ab91e1cb00}">
           <p14:sldIdLst>
             <p14:sldId id="269"/>
             <p14:sldId id="270"/>
             <p14:sldId id="271"/>
           </p14:sldIdLst>
         </p14:section>
-        <p14:section name="Avslutning" id="{09f9528f-5bf8-fad3-52da-f1685ae43be5}">
+        <p14:section name="Avslutning" id="{7a81dff4-bf10-ec15-a5ca-80db46c14c2d}">
           <p14:sldIdLst>
             <p14:sldId id="272"/>
           </p14:sldIdLst>
@@ -736,7 +736,7 @@
           <a:p>
             <a:r>
               <a:rPr lang="en-US" dirty="0"/>
-              <a:t>Cachelisten finnes på det gamle kartet (/map); det nye kartet har sin egen liste. Listen og rutevinduet står øverst til høyre eller venstre på kartet (Innstillinger), unna nettstedets sidepanel, og de to knappene bytter mellom dem.</a:t>
+              <a:t>Cachelisten finnes på /map; /play/map har sin egen liste. Listen og rutevinduet står øverst til høyre eller venstre på kartet (Innstillinger), unna nettstedets sidepanel, og de to knappene bytter mellom dem.</a:t>
             </a:r>
             <a:endParaRPr lang="en-US" dirty="0"/>
           </a:p>
@@ -912,7 +912,7 @@
           <a:p>
             <a:r>
               <a:rPr lang="en-US" dirty="0"/>
-              <a:t>161 m er minsteavstanden mellom cacher i retningslinjene. På det gamle kartet finner skriptet posisjonene fra et skjult rutenett nettstedet laster; på de nye kartene brukes de nøyaktige posisjonene.</a:t>
+              <a:t>161 m er minsteavstanden mellom cacher i retningslinjene. På /map finner skriptet posisjonene fra et skjult rutenett nettstedet laster; på /play/map brukes de nøyaktige posisjonene.</a:t>
             </a:r>
             <a:endParaRPr lang="en-US" dirty="0"/>
           </a:p>
@@ -1000,7 +1000,7 @@
           <a:p>
             <a:r>
               <a:rPr lang="en-US" dirty="0"/>
-              <a:t>Nettleseren tegner Leaflets kontroller øverst, deretter boblene, markørene og tegningene, og nederst kartflisene. Blant flisene sorterer skriptet etter z-indeks: nettstedets bakgrunn nederst, så ditt bakgrunnskart, overleggene og forhåndsvisningen, og øverst nettstedets øvrige fliser – på det gamle kartet er det cacheikonene. Nettstedets bakgrunn finnes fra nettstedets lagvelger, ellers som det laveste fliselaget. Dialogene ligger utenfor kartet, festet til siden, så sidepanelet ikke dekker dem.</a:t>
+              <a:t>Nettleseren tegner Leaflets kontroller øverst, deretter boblene, markørene og tegningene, og nederst kartflisene. Blant flisene sorterer skriptet etter z-indeks: nettstedets bakgrunn nederst, så ditt bakgrunnskart, overleggene og forhåndsvisningen, og øverst nettstedets øvrige fliser – på /map er det cacheikonene. Nettstedets bakgrunn finnes fra nettstedets lagvelger, ellers som det laveste fliselaget. Dialogene ligger utenfor kartet, festet til siden, så sidepanelet ikke dekker dem.</a:t>
             </a:r>
             <a:endParaRPr lang="en-US" dirty="0"/>
           </a:p>
@@ -9483,7 +9483,7 @@
                   <a:schemeClr val="accent4"/>
                 </a:solidFill>
               </a:rPr>
-              <a:t>En liste som følger kartet (gamle kartet)</a:t>
+              <a:t>En liste som følger kartet (/map)</a:t>
             </a:r>
             <a:endParaRPr lang="en-US" sz="1700" dirty="0"/>
           </a:p>
@@ -13870,7 +13870,7 @@
                   <a:schemeClr val="accent4"/>
                 </a:solidFill>
               </a:rPr>
-              <a:t>Nøyaktige koordinater fra geocaching.coms cachesøk – også på det gamle kartet. Bare før søket har svart, beregnes posisjonen fra ikonet (≈).</a:t>
+              <a:t>Nøyaktige koordinater fra geocaching.coms cachesøk – også på /map. Bare før søket har svart, beregnes posisjonen fra ikonet (≈).</a:t>
             </a:r>
             <a:endParaRPr lang="en-US" sz="1500" dirty="0"/>
           </a:p>

--- a/docs/Geocaching-Map-Custom-Tile-Layers-Presentasjon.pptx
+++ b/docs/Geocaching-Map-Custom-Tile-Layers-Presentasjon.pptx
@@ -123,13 +123,13 @@
   <p:extLst>
     <p:ext uri="{521415D9-36F7-43E2-AB2F-B90AF26B5E84}">
       <p14:sectionLst xmlns:p14="http://schemas.microsoft.com/office/powerpoint/2010/main">
-        <p14:section name="Innledning" id="{a94511b9-f84a-a609-2193-9f261441b6e9}">
+        <p14:section name="Innledning" id="{2e185250-ec87-02a1-1578-54e8290563b0}">
           <p14:sldIdLst>
             <p14:sldId id="256"/>
             <p14:sldId id="257"/>
           </p14:sldIdLst>
         </p14:section>
-        <p14:section name="Funksjoner" id="{61cc43ce-fe19-7bd5-1c1a-b64f58ea2679}">
+        <p14:section name="Funksjoner" id="{6a120085-e199-8d24-7208-7e9b4abdffd6}">
           <p14:sldIdLst>
             <p14:sldId id="258"/>
             <p14:sldId id="259"/>
@@ -144,14 +144,14 @@
             <p14:sldId id="268"/>
           </p14:sldIdLst>
         </p14:section>
-        <p14:section name="Teknikk" id="{fa8dfe76-ed76-36a5-8ef4-b7ab91e1cb00}">
+        <p14:section name="Teknikk" id="{f48159cb-9c54-e5fe-03a5-1ef16e323775}">
           <p14:sldIdLst>
             <p14:sldId id="269"/>
             <p14:sldId id="270"/>
             <p14:sldId id="271"/>
           </p14:sldIdLst>
         </p14:section>
-        <p14:section name="Avslutning" id="{7a81dff4-bf10-ec15-a5ca-80db46c14c2d}">
+        <p14:section name="Avslutning" id="{7f863aaf-d2df-4158-e4c3-4bd798b2d36c}">
           <p14:sldIdLst>
             <p14:sldId id="272"/>
           </p14:sldIdLst>
@@ -2243,7 +2243,7 @@
                   <a:schemeClr val="accent4"/>
                 </a:solidFill>
               </a:rPr>
-              <a:t>Geocaching Map – Custom Tile Layers · v1.53.0</a:t>
+              <a:t>Geocaching Map – Custom Tile Layers · v1.53.11</a:t>
             </a:r>
             <a:endParaRPr lang="en-US" sz="1000" dirty="0"/>
           </a:p>
@@ -2763,7 +2763,7 @@
                   <a:schemeClr val="accent5"/>
                 </a:solidFill>
               </a:rPr>
-              <a:t>Brukerskript · versjon 1.53.0 · norsk og engelsk</a:t>
+              <a:t>Brukerskript · versjon 1.53.11 · norsk og engelsk</a:t>
             </a:r>
             <a:endParaRPr lang="en-US" sz="1400" dirty="0"/>
           </a:p>

--- a/docs/Geocaching-Map-Custom-Tile-Layers-Presentasjon.pptx
+++ b/docs/Geocaching-Map-Custom-Tile-Layers-Presentasjon.pptx
@@ -123,13 +123,13 @@
   <p:extLst>
     <p:ext uri="{521415D9-36F7-43E2-AB2F-B90AF26B5E84}">
       <p14:sectionLst xmlns:p14="http://schemas.microsoft.com/office/powerpoint/2010/main">
-        <p14:section name="Innledning" id="{2e185250-ec87-02a1-1578-54e8290563b0}">
+        <p14:section name="Innledning" id="{8d84b1b2-579a-dd3f-a692-d6e8fb5d9b26}">
           <p14:sldIdLst>
             <p14:sldId id="256"/>
             <p14:sldId id="257"/>
           </p14:sldIdLst>
         </p14:section>
-        <p14:section name="Funksjoner" id="{6a120085-e199-8d24-7208-7e9b4abdffd6}">
+        <p14:section name="Funksjoner" id="{c8c85b1b-18f5-b03a-42d1-6a7eecc5ee01}">
           <p14:sldIdLst>
             <p14:sldId id="258"/>
             <p14:sldId id="259"/>
@@ -144,14 +144,14 @@
             <p14:sldId id="268"/>
           </p14:sldIdLst>
         </p14:section>
-        <p14:section name="Teknikk" id="{f48159cb-9c54-e5fe-03a5-1ef16e323775}">
+        <p14:section name="Teknikk" id="{dee17361-4ac8-a9c5-2c28-99d354b178cc}">
           <p14:sldIdLst>
             <p14:sldId id="269"/>
             <p14:sldId id="270"/>
             <p14:sldId id="271"/>
           </p14:sldIdLst>
         </p14:section>
-        <p14:section name="Avslutning" id="{7f863aaf-d2df-4158-e4c3-4bd798b2d36c}">
+        <p14:section name="Avslutning" id="{694ebe2e-b3cc-6f3c-34e2-1a32f3eb3a3b}">
           <p14:sldIdLst>
             <p14:sldId id="272"/>
           </p14:sldIdLst>
@@ -2243,7 +2243,7 @@
                   <a:schemeClr val="accent4"/>
                 </a:solidFill>
               </a:rPr>
-              <a:t>Geocaching Map – Custom Tile Layers · v1.53.11</a:t>
+              <a:t>Geocaching Map – Custom Tile Layers · v1.54.19</a:t>
             </a:r>
             <a:endParaRPr lang="en-US" sz="1000" dirty="0"/>
           </a:p>
@@ -2763,7 +2763,7 @@
                   <a:schemeClr val="accent5"/>
                 </a:solidFill>
               </a:rPr>
-              <a:t>Brukerskript · versjon 1.53.11 · norsk og engelsk</a:t>
+              <a:t>Brukerskript · versjon 1.54.19 · norsk og engelsk</a:t>
             </a:r>
             <a:endParaRPr lang="en-US" sz="1400" dirty="0"/>
           </a:p>

--- a/docs/Geocaching-Map-Custom-Tile-Layers-Presentasjon.pptx
+++ b/docs/Geocaching-Map-Custom-Tile-Layers-Presentasjon.pptx
@@ -123,13 +123,13 @@
   <p:extLst>
     <p:ext uri="{521415D9-36F7-43E2-AB2F-B90AF26B5E84}">
       <p14:sectionLst xmlns:p14="http://schemas.microsoft.com/office/powerpoint/2010/main">
-        <p14:section name="Innledning" id="{8d84b1b2-579a-dd3f-a692-d6e8fb5d9b26}">
+        <p14:section name="Innledning" id="{afe012cc-5125-aa5a-d26e-e4d33cdad08c}">
           <p14:sldIdLst>
             <p14:sldId id="256"/>
             <p14:sldId id="257"/>
           </p14:sldIdLst>
         </p14:section>
-        <p14:section name="Funksjoner" id="{c8c85b1b-18f5-b03a-42d1-6a7eecc5ee01}">
+        <p14:section name="Funksjoner" id="{f5410c82-7361-9d41-d802-bb06702bd659}">
           <p14:sldIdLst>
             <p14:sldId id="258"/>
             <p14:sldId id="259"/>
@@ -144,14 +144,14 @@
             <p14:sldId id="268"/>
           </p14:sldIdLst>
         </p14:section>
-        <p14:section name="Teknikk" id="{dee17361-4ac8-a9c5-2c28-99d354b178cc}">
+        <p14:section name="Teknikk" id="{e4a7748f-beec-26bd-6657-9da07441a77f}">
           <p14:sldIdLst>
             <p14:sldId id="269"/>
             <p14:sldId id="270"/>
             <p14:sldId id="271"/>
           </p14:sldIdLst>
         </p14:section>
-        <p14:section name="Avslutning" id="{694ebe2e-b3cc-6f3c-34e2-1a32f3eb3a3b}">
+        <p14:section name="Avslutning" id="{26d81afa-8866-12e2-8814-9a78c45fba6b}">
           <p14:sldIdLst>
             <p14:sldId id="272"/>
           </p14:sldIdLst>
@@ -2243,7 +2243,7 @@
                   <a:schemeClr val="accent4"/>
                 </a:solidFill>
               </a:rPr>
-              <a:t>Geocaching Map – Custom Tile Layers · v1.54.19</a:t>
+              <a:t>Geocaching Map – Custom Tile Layers · v1.54.26</a:t>
             </a:r>
             <a:endParaRPr lang="en-US" sz="1000" dirty="0"/>
           </a:p>
@@ -2763,7 +2763,7 @@
                   <a:schemeClr val="accent5"/>
                 </a:solidFill>
               </a:rPr>
-              <a:t>Brukerskript · versjon 1.54.19 · norsk og engelsk</a:t>
+              <a:t>Brukerskript · versjon 1.54.26 · norsk og engelsk</a:t>
             </a:r>
             <a:endParaRPr lang="en-US" sz="1400" dirty="0"/>
           </a:p>

--- a/docs/Geocaching-Map-Custom-Tile-Layers-Presentasjon.pptx
+++ b/docs/Geocaching-Map-Custom-Tile-Layers-Presentasjon.pptx
@@ -123,13 +123,13 @@
   <p:extLst>
     <p:ext uri="{521415D9-36F7-43E2-AB2F-B90AF26B5E84}">
       <p14:sectionLst xmlns:p14="http://schemas.microsoft.com/office/powerpoint/2010/main">
-        <p14:section name="Innledning" id="{afe012cc-5125-aa5a-d26e-e4d33cdad08c}">
+        <p14:section name="Innledning" id="{a41f9666-53b0-45b7-9a1f-1330a12729f7}">
           <p14:sldIdLst>
             <p14:sldId id="256"/>
             <p14:sldId id="257"/>
           </p14:sldIdLst>
         </p14:section>
-        <p14:section name="Funksjoner" id="{f5410c82-7361-9d41-d802-bb06702bd659}">
+        <p14:section name="Funksjoner" id="{dddb27b0-7981-eec3-2c08-2df4894e6684}">
           <p14:sldIdLst>
             <p14:sldId id="258"/>
             <p14:sldId id="259"/>
@@ -144,14 +144,14 @@
             <p14:sldId id="268"/>
           </p14:sldIdLst>
         </p14:section>
-        <p14:section name="Teknikk" id="{e4a7748f-beec-26bd-6657-9da07441a77f}">
+        <p14:section name="Teknikk" id="{80f792c7-b381-1e5d-4cbc-b7437e7ff8c6}">
           <p14:sldIdLst>
             <p14:sldId id="269"/>
             <p14:sldId id="270"/>
             <p14:sldId id="271"/>
           </p14:sldIdLst>
         </p14:section>
-        <p14:section name="Avslutning" id="{26d81afa-8866-12e2-8814-9a78c45fba6b}">
+        <p14:section name="Avslutning" id="{c0e61634-44fa-6df7-32b7-70129fbb8479}">
           <p14:sldIdLst>
             <p14:sldId id="272"/>
           </p14:sldIdLst>
@@ -824,7 +824,7 @@
           <a:p>
             <a:r>
               <a:rPr lang="en-US" dirty="0"/>
-              <a:t>Sirklene vises fra zoomnivå 15. Cachetypene, de nøyaktige koordinatene og dine løste koordinater kommer fra geocaching.coms eget cachesøk. Fysiske steg leses fra listen over tilleggsveipunkter på cachesiden – bare de eieren har gjort synlige. Blått merke med spørsmålstegn og grønn hake: en løst cache du har funnet. Liten blå prikk: fysisk steg. Liten grønn prikk: endelig plassering. Dine egne cacher, som cachesøket utelater, leses fra cachesidene; der beholdes nettstedets ikon og boble, men teksten ved musepekeren blir «Endelig plassering».</a:t>
+              <a:t>Sirklene vises fra zoomnivå 15. Cachetypene, de nøyaktige koordinatene og dine løste koordinater kommer fra geocaching.coms eget cachesøk. Fysiske steg leses fra listen over tilleggsveipunkter på cachesiden – bare de eieren har gjort synlige. Blått merke med spørsmålstegn og grønn hake: en løst cache du har funnet. Liten blå prikk: fysisk steg. Liten grønn prikk: endelig plassering. Dine egne cacher, som cachesøket utelater, leses fra cachesidene; der beholdes nettstedets ikon og boble, men teksten ved musepekeren blir «Endelig plassering». Løste cacher du ikke har funnet får et lite typeikon nede til høyre på nettstedets «løst»-ikon, siden det ikke viser cachetypen. Kartlagpanelet, søket og innstillingene åpnes der du sist dro dem.</a:t>
             </a:r>
             <a:endParaRPr lang="en-US" dirty="0"/>
           </a:p>
@@ -2243,7 +2243,7 @@
                   <a:schemeClr val="accent4"/>
                 </a:solidFill>
               </a:rPr>
-              <a:t>Geocaching Map – Custom Tile Layers · v1.54.26</a:t>
+              <a:t>Geocaching Map – Custom Tile Layers · v1.54.47</a:t>
             </a:r>
             <a:endParaRPr lang="en-US" sz="1000" dirty="0"/>
           </a:p>
@@ -2763,7 +2763,7 @@
                   <a:schemeClr val="accent5"/>
                 </a:solidFill>
               </a:rPr>
-              <a:t>Brukerskript · versjon 1.54.26 · norsk og engelsk</a:t>
+              <a:t>Brukerskript · versjon 1.54.47 · norsk og engelsk</a:t>
             </a:r>
             <a:endParaRPr lang="en-US" sz="1400" dirty="0"/>
           </a:p>
@@ -2785,8 +2785,8 @@
         </p:blipFill>
         <p:spPr>
           <a:xfrm>
-            <a:off x="8742823" y="548640"/>
-            <a:ext cx="2534472" cy="5760720"/>
+            <a:off x="8763083" y="548640"/>
+            <a:ext cx="2514213" cy="5760720"/>
           </a:xfrm>
           <a:prstGeom prst="rect">
             <a:avLst/>
@@ -4165,7 +4165,7 @@
                   <a:schemeClr val="accent4"/>
                 </a:solidFill>
               </a:rPr>
-              <a:t>På dine korrigerte koordinater – også når ikonet er flyttet tilbake etter funn</a:t>
+              <a:t>På dine korrigerte koordinater – også når ikonet er flyttet tilbake etter funn; et lite typeikon viser cachetypen</a:t>
             </a:r>
             <a:endParaRPr lang="en-US" sz="1700" dirty="0"/>
           </a:p>
@@ -10635,8 +10635,8 @@
         </p:blipFill>
         <p:spPr>
           <a:xfrm>
-            <a:off x="8623621" y="1527048"/>
-            <a:ext cx="2015509" cy="4581144"/>
+            <a:off x="8631676" y="1527048"/>
+            <a:ext cx="1999398" cy="4581144"/>
           </a:xfrm>
           <a:prstGeom prst="rect">
             <a:avLst/>

--- a/docs/Geocaching-Map-Custom-Tile-Layers-Presentasjon.pptx
+++ b/docs/Geocaching-Map-Custom-Tile-Layers-Presentasjon.pptx
@@ -123,13 +123,13 @@
   <p:extLst>
     <p:ext uri="{521415D9-36F7-43E2-AB2F-B90AF26B5E84}">
       <p14:sectionLst xmlns:p14="http://schemas.microsoft.com/office/powerpoint/2010/main">
-        <p14:section name="Innledning" id="{a41f9666-53b0-45b7-9a1f-1330a12729f7}">
+        <p14:section name="Innledning" id="{998e2ce4-f795-310a-0ea3-60e9b422603c}">
           <p14:sldIdLst>
             <p14:sldId id="256"/>
             <p14:sldId id="257"/>
           </p14:sldIdLst>
         </p14:section>
-        <p14:section name="Funksjoner" id="{dddb27b0-7981-eec3-2c08-2df4894e6684}">
+        <p14:section name="Funksjoner" id="{5b88f283-1f68-0961-5b54-cf471a5e2568}">
           <p14:sldIdLst>
             <p14:sldId id="258"/>
             <p14:sldId id="259"/>
@@ -144,14 +144,14 @@
             <p14:sldId id="268"/>
           </p14:sldIdLst>
         </p14:section>
-        <p14:section name="Teknikk" id="{80f792c7-b381-1e5d-4cbc-b7437e7ff8c6}">
+        <p14:section name="Teknikk" id="{46e4f3be-e0b2-d555-7dd8-46582cf16c9d}">
           <p14:sldIdLst>
             <p14:sldId id="269"/>
             <p14:sldId id="270"/>
             <p14:sldId id="271"/>
           </p14:sldIdLst>
         </p14:section>
-        <p14:section name="Avslutning" id="{c0e61634-44fa-6df7-32b7-70129fbb8479}">
+        <p14:section name="Avslutning" id="{5abb8aaa-4d3a-cc56-a622-bd4266de66a6}">
           <p14:sldIdLst>
             <p14:sldId id="272"/>
           </p14:sldIdLst>
@@ -824,7 +824,7 @@
           <a:p>
             <a:r>
               <a:rPr lang="en-US" dirty="0"/>
-              <a:t>Sirklene vises fra zoomnivå 15. Cachetypene, de nøyaktige koordinatene og dine løste koordinater kommer fra geocaching.coms eget cachesøk. Fysiske steg leses fra listen over tilleggsveipunkter på cachesiden – bare de eieren har gjort synlige. Blått merke med spørsmålstegn og grønn hake: en løst cache du har funnet. Liten blå prikk: fysisk steg. Liten grønn prikk: endelig plassering. Dine egne cacher, som cachesøket utelater, leses fra cachesidene; der beholdes nettstedets ikon og boble, men teksten ved musepekeren blir «Endelig plassering». Løste cacher du ikke har funnet får et lite typeikon nede til høyre på nettstedets «løst»-ikon, siden det ikke viser cachetypen. Kartlagpanelet, søket og innstillingene åpnes der du sist dro dem.</a:t>
+              <a:t>Sirklene vises fra zoomnivå 15. Cachetypene, de nøyaktige koordinatene og dine løste koordinater kommer fra geocaching.coms eget cachesøk. Fysiske steg leses fra listen over tilleggsveipunkter på cachesiden – bare de eieren har gjort synlige. Blått merke med spørsmålstegn og grønn hake: en løst cache du har funnet. Liten blå prikk: fysisk steg. Liten grønn prikk: endelig plassering. Dine egne cacher, som cachesøket utelater, leses fra cachesidene; der beholdes nettstedets ikon og boble, men teksten ved musepekeren blir «Endelig plassering». Et lite typeikon kan vises nede til høyre på løste cacher – på nettstedets «løst»-ikon og på våre merker – siden «løst»-ikonet ikke viser cachetypen (Innstillinger, av som standard). Kartlagpanelet, søket og innstillingene åpnes der du sist dro dem.</a:t>
             </a:r>
             <a:endParaRPr lang="en-US" dirty="0"/>
           </a:p>
@@ -2243,7 +2243,7 @@
                   <a:schemeClr val="accent4"/>
                 </a:solidFill>
               </a:rPr>
-              <a:t>Geocaching Map – Custom Tile Layers · v1.54.47</a:t>
+              <a:t>Geocaching Map – Custom Tile Layers · v1.54.50</a:t>
             </a:r>
             <a:endParaRPr lang="en-US" sz="1000" dirty="0"/>
           </a:p>
@@ -2763,7 +2763,7 @@
                   <a:schemeClr val="accent5"/>
                 </a:solidFill>
               </a:rPr>
-              <a:t>Brukerskript · versjon 1.54.47 · norsk og engelsk</a:t>
+              <a:t>Brukerskript · versjon 1.54.50 · norsk og engelsk</a:t>
             </a:r>
             <a:endParaRPr lang="en-US" sz="1400" dirty="0"/>
           </a:p>
@@ -4165,7 +4165,7 @@
                   <a:schemeClr val="accent4"/>
                 </a:solidFill>
               </a:rPr>
-              <a:t>På dine korrigerte koordinater – også når ikonet er flyttet tilbake etter funn; et lite typeikon viser cachetypen</a:t>
+              <a:t>På dine korrigerte koordinater – også når ikonet er flyttet tilbake etter funn; et lite typeikon kan vise cachetypen</a:t>
             </a:r>
             <a:endParaRPr lang="en-US" sz="1700" dirty="0"/>
           </a:p>

--- a/docs/Geocaching-Map-Custom-Tile-Layers-Presentasjon.pptx
+++ b/docs/Geocaching-Map-Custom-Tile-Layers-Presentasjon.pptx
@@ -123,13 +123,13 @@
   <p:extLst>
     <p:ext uri="{521415D9-36F7-43E2-AB2F-B90AF26B5E84}">
       <p14:sectionLst xmlns:p14="http://schemas.microsoft.com/office/powerpoint/2010/main">
-        <p14:section name="Innledning" id="{998e2ce4-f795-310a-0ea3-60e9b422603c}">
+        <p14:section name="Innledning" id="{809bc68a-0bcd-47e5-8916-e9c8287e0ce0}">
           <p14:sldIdLst>
             <p14:sldId id="256"/>
             <p14:sldId id="257"/>
           </p14:sldIdLst>
         </p14:section>
-        <p14:section name="Funksjoner" id="{5b88f283-1f68-0961-5b54-cf471a5e2568}">
+        <p14:section name="Funksjoner" id="{11639fc2-d133-50f3-2f66-0719410ab1c6}">
           <p14:sldIdLst>
             <p14:sldId id="258"/>
             <p14:sldId id="259"/>
@@ -144,14 +144,14 @@
             <p14:sldId id="268"/>
           </p14:sldIdLst>
         </p14:section>
-        <p14:section name="Teknikk" id="{46e4f3be-e0b2-d555-7dd8-46582cf16c9d}">
+        <p14:section name="Teknikk" id="{2b0b941b-33d9-23b6-29ee-d21eb20c4d0e}">
           <p14:sldIdLst>
             <p14:sldId id="269"/>
             <p14:sldId id="270"/>
             <p14:sldId id="271"/>
           </p14:sldIdLst>
         </p14:section>
-        <p14:section name="Avslutning" id="{5abb8aaa-4d3a-cc56-a622-bd4266de66a6}">
+        <p14:section name="Avslutning" id="{91947fc6-0f9a-a242-39ca-2393307d21b2}">
           <p14:sldIdLst>
             <p14:sldId id="272"/>
           </p14:sldIdLst>
@@ -824,7 +824,7 @@
           <a:p>
             <a:r>
               <a:rPr lang="en-US" dirty="0"/>
-              <a:t>Sirklene vises fra zoomnivå 15. Cachetypene, de nøyaktige koordinatene og dine løste koordinater kommer fra geocaching.coms eget cachesøk. Fysiske steg leses fra listen over tilleggsveipunkter på cachesiden – bare de eieren har gjort synlige. Blått merke med spørsmålstegn og grønn hake: en løst cache du har funnet. Liten blå prikk: fysisk steg. Liten grønn prikk: endelig plassering. Dine egne cacher, som cachesøket utelater, leses fra cachesidene; der beholdes nettstedets ikon og boble, men teksten ved musepekeren blir «Endelig plassering». Et lite typeikon kan vises nede til høyre på løste cacher – på nettstedets «løst»-ikon og på våre merker – siden «løst»-ikonet ikke viser cachetypen (Innstillinger, av som standard). Kartlagpanelet, søket og innstillingene åpnes der du sist dro dem.</a:t>
+              <a:t>Sirklene vises fra zoomnivå 15. Cachetypene, de nøyaktige koordinatene og dine løste koordinater kommer fra geocaching.coms eget cachesøk. Fysiske steg leses fra listen over tilleggsveipunkter på cachesiden – bare de eieren har gjort synlige. Gult smilefjes med grønn hake: en løst cache du har funnet. Blått merke med spørsmålstegn: en løst cache der ikonet ikke er på kartet. Liten blå prikk: fysisk steg. Liten grønn prikk: endelig plassering. Dine egne cacher, som cachesøket utelater, leses fra cachesidene; der beholdes nettstedets ikon og boble, men teksten ved musepekeren blir «Endelig plassering». Et lite typeikon kan vises nede til høyre på løste cacher – på nettstedets «løst»-ikon og på våre merker – siden «løst»-ikonet ikke viser cachetypen (Innstillinger, av som standard). Kartlagpanelet, søket og innstillingene åpnes der du sist dro dem.</a:t>
             </a:r>
             <a:endParaRPr lang="en-US" dirty="0"/>
           </a:p>
@@ -2243,7 +2243,7 @@
                   <a:schemeClr val="accent4"/>
                 </a:solidFill>
               </a:rPr>
-              <a:t>Geocaching Map – Custom Tile Layers · v1.54.50</a:t>
+              <a:t>Geocaching Map – Custom Tile Layers · v1.54.53</a:t>
             </a:r>
             <a:endParaRPr lang="en-US" sz="1000" dirty="0"/>
           </a:p>
@@ -2763,7 +2763,7 @@
                   <a:schemeClr val="accent5"/>
                 </a:solidFill>
               </a:rPr>
-              <a:t>Brukerskript · versjon 1.54.50 · norsk og engelsk</a:t>
+              <a:t>Brukerskript · versjon 1.54.53 · norsk og engelsk</a:t>
             </a:r>
             <a:endParaRPr lang="en-US" sz="1400" dirty="0"/>
           </a:p>
